--- a/docs/instructor/lab-2b-guardrails.pptx
+++ b/docs/instructor/lab-2b-guardrails.pptx
@@ -1156,7 +1156,7 @@
           <a:lstStyle/>
           <a:p>
             <a:r>
-              <a:t>Three minutes, no hands-on. Why it is here: their real world is SQL Server and stored procedures, and the pattern they just built on a JSON file needs to visibly transfer. The false-positive row is the most valuable one — it is the PARTLY tag from the severity slide, in the wild. ~3 min.</a:t>
+              <a:t>Three minutes, no hands-on. Why it is here: their real world is SQL Server and stored procedures, and the pattern they just built on a JSON file needs to visibly transfer. The false-positive row is the most valuable one — it is the PARTLY tag from the severity slide, in the wild. The takeaway card now carries a SECOND worked example ("all backends must use SQLite" — ADR for the why, NFR for the must + CI dependency scan, deny rule on npm install pg*), whose org-wide reach also previews the hand-off two slides from now. Point at it; do not teach it. ~3 min.</a:t>
             </a:r>
           </a:p>
         </p:txBody>
@@ -1296,7 +1296,7 @@
           <a:lstStyle/>
           <a:p>
             <a:r>
-              <a:t>[CALIBRATED from Lab 1.b, 2026-08-12: agenda held · checkpoint gates worked · keep as built] The slack is real this time; protect it for verification, which is the step people skip. Prereq check right now, out loud: Lab 2.a done (ADR + NFR wired in), and the Hooks lesson done — anyone missing either pairs up for the build sections and catches up async per the handout. Assessment disclosure: same rubric, and today's hook or gate is also the Framework Practitioner artifact. ~2 min.</a:t>
+              <a:t>[CALIBRATED from Lab 1.b, 2026-08-12: agenda held · checkpoint gates worked · keep as built] The blocks sum to ~103 — the slack is deliberate; protect it for verification, which is the step people skip. Prereq check right now, out loud: Lab 2.a done (ADR + NFR wired in), and the Hooks lesson done — anyone missing either pairs up for the build sections and catches up async per the handout. Assessment disclosure: same rubric, and today's hook or gate is also the Framework Practitioner artifact. ~2 min.</a:t>
             </a:r>
           </a:p>
         </p:txBody>
@@ -13008,48 +13008,6 @@
                 <a:latin typeface="Arial"/>
               </a:rPr>
               <a:t>The sixth artifact; reflect; capture</a:t>
-            </a:r>
-          </a:p>
-        </p:txBody>
-      </p:sp>
-      <p:sp>
-        <p:nvSpPr>
-          <p:cNvPr id="36" name="TextBox 35"/>
-          <p:cNvSpPr txBox="1"/>
-          <p:nvPr/>
-        </p:nvSpPr>
-        <p:spPr>
-          <a:xfrm>
-            <a:off x="548640" y="4992624"/>
-            <a:ext cx="7863840" cy="365760"/>
-          </a:xfrm>
-          <a:prstGeom prst="rect">
-            <a:avLst/>
-          </a:prstGeom>
-          <a:noFill/>
-        </p:spPr>
-        <p:txBody>
-          <a:bodyPr wrap="square" anchor="t" lIns="0" rIns="0" tIns="0" bIns="0">
-            <a:spAutoFit/>
-          </a:bodyPr>
-          <a:lstStyle/>
-          <a:p>
-            <a:pPr algn="l">
-              <a:lnSpc>
-                <a:spcPct val="120000"/>
-              </a:lnSpc>
-              <a:spcAft>
-                <a:spcPts val="400"/>
-              </a:spcAft>
-            </a:pPr>
-            <a:r>
-              <a:rPr sz="1000" b="0">
-                <a:solidFill>
-                  <a:srgbClr val="999999"/>
-                </a:solidFill>
-                <a:latin typeface="Arial"/>
-              </a:rPr>
-              <a:t>Sums to ~103 — the slack is deliberate, and it gets spent on the verify steps.</a:t>
             </a:r>
           </a:p>
         </p:txBody>

--- a/docs/instructor/lab-2b-guardrails.pptx
+++ b/docs/instructor/lab-2b-guardrails.pptx
@@ -30,6 +30,7 @@
     <p:sldId id="278" r:id="rId30"/>
     <p:sldId id="279" r:id="rId31"/>
     <p:sldId id="280" r:id="rId32"/>
+    <p:sldId id="281" r:id="rId33"/>
   </p:sldIdLst>
   <p:sldSz cx="9144000" cy="5143500" type="screen4x3"/>
   <p:notesSz cx="6858000" cy="9144000"/>
@@ -876,7 +877,7 @@
           <a:lstStyle/>
           <a:p>
             <a:r>
-              <a:t>Deliberately parallel to the exhibit they just read — the shape is the point, not this rule. Make the two-rules distinction out loud; the review agent flagged it as the most likely novice confusion of the block. ~4 min.</a:t>
+              <a:t>Run the demo AGAINST this slide — call the step number as you go so anyone who drops can rejoin; on Meet nobody can glance at a neighbour's screen. COMMON QUESTIONS — Q: "Why three layers for one rule?" A: they fail differently — the line informs a reader, the deny stops the common case cheaply, the hook explains itself when it fires; you will not always build all three. Q: "My settings.json already has a hooks block — another one?" A: no — add a second entry to the EXISTING PreToolUse array (the handout shows the merged shape). Q: "Does the hook slow every edit?" A: it runs per matched tool call, milliseconds; if a hook is slow, that is the hook's fault, not the mechanism. Q: "Hook never fires?" A: nine times in ten, no new session — hooks load at session start; the rest: matcher or path normalisation (Windows backslashes). ~3 min.</a:t>
             </a:r>
           </a:p>
         </p:txBody>
@@ -946,7 +947,7 @@
           <a:lstStyle/>
           <a:p>
             <a:r>
-              <a:t>Type it live if the room is comfortable; paste if behind. Say the Windows path normalisation out loud — it is the bug every group hits and why the hook is Node, not shell. Then register it together and restart sessions — the forgotten-restart is the "my hook never fires" stuck point. ~6 min.</a:t>
+              <a:t>Deliberately parallel to the exhibit they just read — the shape is the point, not this rule. Make the two-rules distinction explicitly; the review agent flagged it as the most likely novice confusion of the block. ~3 min.</a:t>
             </a:r>
           </a:p>
         </p:txBody>
@@ -1016,7 +1017,7 @@
           <a:lstStyle/>
           <a:p>
             <a:r>
-              <a:t>Slow down here and say why: this is the step people skip. Both tests visibly. If your own hook false-positives live, that is a gift — work it through in front of them. ~6 min.</a:t>
+              <a:t>Type it live if the room is comfortable; paste if behind. Say the Windows path normalisation out loud — it is the bug every group hits and why the hook is Node, not shell. Then register it together and restart sessions — the forgotten-restart is the "my hook never fires" stuck point. ~5 min.</a:t>
             </a:r>
           </a:p>
         </p:txBody>
@@ -1086,7 +1087,7 @@
           <a:lstStyle/>
           <a:p>
             <a:r>
-              <a:t>[CALIBRATED from Lab 1.b, 2026-08-12: agenda held · checkpoint gates worked · keep as built] Walk the room — this is a build-along, so everyone should be at this state, not just the instructor. Common failure: a path check that also catches db.json.example or a test fixture. Fast finishers: read protect-seed.js and diff the two hooks' messages. ~3 min.</a:t>
+              <a:t>Slow down here and say why: this is the step people skip. Both tests visibly. If your own hook false-positives live, that is a gift — work it through on the shared screen. ~5 min.</a:t>
             </a:r>
           </a:p>
         </p:txBody>
@@ -1156,7 +1157,7 @@
           <a:lstStyle/>
           <a:p>
             <a:r>
-              <a:t>Three minutes, no hands-on. Why it is here: their real world is SQL Server and stored procedures, and the pattern they just built on a JSON file needs to visibly transfer. The false-positive row is the most valuable one — it is the PARTLY tag from the severity slide, in the wild. The takeaway card now carries a SECOND worked example ("all backends must use SQLite" — ADR for the why, NFR for the must + CI dependency scan, deny rule on npm install pg*), whose org-wide reach also previews the hand-off two slides from now. Point at it; do not teach it. ~3 min.</a:t>
+              <a:t>[CALIBRATED from Lab 1.b, 2026-08-12: agenda held · checkpoint gates worked · keep as built] Chat is the room-walk: refusal texts land where you can read them, and silence from a name is your signal to check in (Slack, not the whole call). Common failure: a path check that also catches db.json.example or a test fixture. Fast finishers: read protect-seed.js and diff the two hooks' messages. ~3 min.</a:t>
             </a:r>
           </a:p>
         </p:txBody>
@@ -1226,7 +1227,7 @@
           <a:lstStyle/>
           <a:p>
             <a:r>
-              <a:t>[CALIBRATED from Lab 1.b, 2026-08-12: agenda held · checkpoint gates worked · keep as built] Circulate with one question: "what does your allow case replay?" If they have no answer, they are about to skip verification. Groups whose clause is store-boundary build the import check; test-discipline groups build the sibling-test nudge. ~15 min.</a:t>
+              <a:t>Three minutes, no hands-on. Why it is here: their real world is SQL Server and stored procedures, and the pattern they just built on a JSON file needs to visibly transfer. The false-positive row is the most valuable one — it is the PARTLY tag from the severity slide, in the wild. The takeaway card now carries a SECOND worked example ("all backends must use SQLite" — ADR for the why, NFR for the must + CI dependency scan, deny rule on npm install pg*), whose org-wide reach also previews the hand-off two slides from now. Point at it; do not teach it. ~3 min.</a:t>
             </a:r>
           </a:p>
         </p:txBody>
@@ -1296,7 +1297,7 @@
           <a:lstStyle/>
           <a:p>
             <a:r>
-              <a:t>[CALIBRATED from Lab 1.b, 2026-08-12: agenda held · checkpoint gates worked · keep as built] The blocks sum to ~103 — the slack is deliberate; protect it for verification, which is the step people skip. Prereq check right now, out loud: Lab 2.a done (ADR + NFR wired in), and the Hooks lesson done — anyone missing either pairs up for the build sections and catches up async per the handout. Assessment disclosure: same rubric, and today's hook or gate is also the Framework Practitioner artifact. ~2 min.</a:t>
+              <a:t>[CALIBRATED from Lab 1.b, 2026-08-12: agenda held · checkpoint gates worked · keep as built] The blocks sum to ~103 — the slack is deliberate; protect it for verification, which is the step people skip. Prereq check right now, in chat: "type 2A-DONE and HOOKS-DONE if both are true" — anyone missing either follows along on the shared screen for the build sections and catches up async per the handout (Slack for 1:1 help; Meet chat has no DMs). Assessment disclosure: same rubric, and today's hook or gate is also the Framework Practitioner artifact. ~2 min.</a:t>
             </a:r>
           </a:p>
         </p:txBody>
@@ -1366,7 +1367,7 @@
           <a:lstStyle/>
           <a:p>
             <a:r>
-              <a:t>[CALIBRATED from Lab 1.b, 2026-08-12: agenda held · checkpoint gates worked · keep as built] Gate hard here: the CI-gate step depends on the clause being genuinely mechanical, which this checkpoint proves. Fast finishers: start the policy-bundle stretch or help a neighbour's allow case. ~2 min.</a:t>
+              <a:t>[CALIBRATED from Lab 1.b, 2026-08-12: agenda held · checkpoint gates worked · keep as built] Remote circulation = one whole-call chat nudge at ~7 min ("what does your allow case replay?" — no answer means verification is about to be skipped) + Slack for 1:1s. WHAT EACH TRACK BUILDS (rescue detail in the teachers guide, never on screen): test-discipline = PostToolUse nudge when an edited server/src *.ts has no sibling *.test.ts; store-boundary = PreToolUse block when a written file outside repositories/ contains an import of db/store. COMMON QUESTIONS — Q: "My clause is fuzzy — what do I build?" A: build the mechanical core of your list instead, and your fuzzy clause becomes a residue decision; nobody builds nothing. Q: "Block or nudge for mine?" A: run the PARTLY test — if your check can false-positive, nudge; write the reason down either way. Q: "Do I need the hook AND the gate?" A: yes — different audiences: the hook stops the agent, the gate stops anyone. ~15 min.</a:t>
             </a:r>
           </a:p>
         </p:txBody>
@@ -1436,7 +1437,7 @@
           <a:lstStyle/>
           <a:p>
             <a:r>
-              <a:t>[CALIBRATED from Lab 1.b, 2026-08-12: agenda held · checkpoint gates worked · keep as built] The docs-only-PR question is where block-vs-warn becomes real — do not answer it for them. Residue is an acceptance criterion, not an optional extra: "the test must have failed first" needs a named owner or an explicit drop. ~10 min.</a:t>
+              <a:t>[CALIBRATED from Lab 1.b, 2026-08-12: agenda held · checkpoint gates worked · keep as built] Gate hard here: the CI-gate step depends on the clause being genuinely mechanical, which this checkpoint proves. Fast finishers: the policy-bundle stretch, or offer an allow-case replay to whoever asks in Slack. ~2 min.</a:t>
             </a:r>
           </a:p>
         </p:txBody>
@@ -1506,7 +1507,7 @@
           <a:lstStyle/>
           <a:p>
             <a:r>
-              <a:t>Short and satisfying: the reviewer quoting their own NFR back at them is the moment governance stops being paperwork. The giget fallback matters — copies made before Jul 29 lack the agents folder. ~4 min.</a:t>
+              <a:t>[CALIBRATED from Lab 1.b, 2026-08-12: agenda held · checkpoint gates worked · keep as built] THE GOTCHA that will eat this step remotely: the gate runs on pull_request — a student who commits to their branch and waits will conclude it does not work. Say it before they start: push, open a draft PR, watch the check. CONCRETE CORES (rescue detail; guide has the code): test-discipline = fail if the PR diff touches server/src/** with no *.test.ts in the diff; store-boundary = fail if grep finds db/store imports outside repositories/. The docs-only-PR question is where block-vs-warn becomes real — do not answer it for them. Residue is an acceptance criterion: "the test must have failed first" needs a named owner or an explicit drop, back in the 2.a NFR. ~10 min.</a:t>
             </a:r>
           </a:p>
         </p:txBody>
@@ -1576,7 +1577,7 @@
           <a:lstStyle/>
           <a:p>
             <a:r>
-              <a:t>Push hardest on the residue question — it reveals whether the lesson landed. A group with an empty residue column has either a trivial rule or has not looked. ~10 min.</a:t>
+              <a:t>Short and satisfying: the reviewer quoting their own NFR back at them is the moment governance stops being paperwork. The giget fallback matters — copies made before Jul 29 lack the agents folder. COMMON QUESTIONS — Q: "How do I run it?" A: ask Claude to "review my branch with the taskboard-code-reviewer agent", or @-mention the agent; it reads CLAUDE.md, then your docs, then the diff. Q: "It did not cite my NFR." A: check your doc is in its process list AND your clause applies to something in the diff — a reviewer with nothing to catch cites nothing. Q: "Report in chat?" A: paste one finding that cites your standard — that is the loop-closing moment, share it. ~4 min.</a:t>
             </a:r>
           </a:p>
         </p:txBody>
@@ -1646,7 +1647,7 @@
           <a:lstStyle/>
           <a:p>
             <a:r>
-              <a:t>Three minutes; framing over content. The guide is written for a team new to governance — it opens with the four terms, Crawl is one person's afternoon, and every tool option carries its trap named. Callback: this handout reached you as one canonical repo plus a pointer — crawl — and giget if you ran it, most of walk. Done = the template filled: rung, FIRST MOVE, and an owner who is a person. The two fields people skip are Owner and Not-doing-yet, and they are the two that matter. "We will decide later" is the only answer that costs more than acting. ~3 min.</a:t>
+              <a:t>Push hardest on the residue question — it reveals whether the lesson landed. A group with an empty residue column has either a trivial rule or has not looked. ~10 min.</a:t>
             </a:r>
           </a:p>
         </p:txBody>
@@ -1716,7 +1717,77 @@
           <a:lstStyle/>
           <a:p>
             <a:r>
-              <a:t>[CALIBRATED from Lab 1.b, 2026-08-12: agenda held · checkpoint gates worked · keep as built] Close on the deny/ask list — the thing every person applies tomorrow regardless of how far they got. Read the ship checklist as one list; it mirrors the handout exactly. INSTRUCTOR, within 24h: file the lab-capture entry (AI-Transformation-Playbook/04-labs/lab-capture-template.md) — outcomes, stuck points, timings, Format B observations. ~5 min.</a:t>
+              <a:t>Three minutes; framing over content. The guide is written for a team new to governance — it opens with the four terms, Crawl is one person's afternoon, and every tool option carries its trap named. Callback: this handout reached you as one canonical repo plus a pointer — crawl — and giget if you ran it, most of walk. Done = the template filled: rung, FIRST MOVE, and an owner who is a person. The two fields people skip are Owner and Not-doing-yet, and they are the two that matter. "We will decide later" is the only answer that costs more than acting. ~3 min.</a:t>
+            </a:r>
+          </a:p>
+        </p:txBody>
+      </p:sp>
+      <p:sp>
+        <p:nvSpPr>
+          <p:cNvPr id="4" name="Slide Number Placeholder 3"/>
+          <p:cNvSpPr>
+            <a:spLocks noGrp="1"/>
+          </p:cNvSpPr>
+          <p:nvPr>
+            <p:ph type="sldNum" idx="5" sz="quarter"/>
+          </p:nvPr>
+        </p:nvSpPr>
+        <p:spPr/>
+      </p:sp>
+    </p:spTree>
+  </p:cSld>
+  <p:clrMapOvr>
+    <a:masterClrMapping/>
+  </p:clrMapOvr>
+</p:notes>
+</file>
+
+<file path=ppt/notesSlides/notesSlide26.xml><?xml version="1.0" encoding="utf-8"?>
+<p:notes xmlns:a="http://schemas.openxmlformats.org/drawingml/2006/main" xmlns:p="http://schemas.openxmlformats.org/presentationml/2006/main" xmlns:r="http://schemas.openxmlformats.org/officeDocument/2006/relationships">
+  <p:cSld>
+    <p:spTree>
+      <p:nvGrpSpPr>
+        <p:cNvPr id="1" name=""/>
+        <p:cNvGrpSpPr/>
+        <p:nvPr/>
+      </p:nvGrpSpPr>
+      <p:grpSpPr>
+        <a:xfrm>
+          <a:off x="0" y="0"/>
+          <a:ext cx="0" cy="0"/>
+          <a:chOff x="0" y="0"/>
+          <a:chExt cx="0" cy="0"/>
+        </a:xfrm>
+      </p:grpSpPr>
+      <p:sp>
+        <p:nvSpPr>
+          <p:cNvPr id="2" name="Slide Image Placeholder 1"/>
+          <p:cNvSpPr>
+            <a:spLocks noGrp="1"/>
+          </p:cNvSpPr>
+          <p:nvPr>
+            <p:ph type="sldImg" idx="2"/>
+          </p:nvPr>
+        </p:nvSpPr>
+        <p:spPr/>
+      </p:sp>
+      <p:sp>
+        <p:nvSpPr>
+          <p:cNvPr id="3" name="Notes Placeholder 2"/>
+          <p:cNvSpPr>
+            <a:spLocks noGrp="1"/>
+          </p:cNvSpPr>
+          <p:nvPr>
+            <p:ph type="body" idx="3" sz="quarter"/>
+          </p:nvPr>
+        </p:nvSpPr>
+        <p:spPr/>
+        <p:txBody>
+          <a:bodyPr/>
+          <a:lstStyle/>
+          <a:p>
+            <a:r>
+              <a:t>[CALIBRATED from Lab 1.b, 2026-08-12: agenda held · checkpoint gates worked · keep as built] Close on the deny/ask list — the thing every person applies tomorrow regardless of how far they got. Read the ship checklist as one list; it mirrors the handout exactly. Retro as a chat waterfall: type, hold, 3-2-1 send. COPY THE CHAT BEFORE ENDING THE CALL — Meet deletes it, and the refusal texts + retro lines feed the capture entry. INSTRUCTOR, within 24h: file the lab-capture entry (AI-Transformation-Playbook/04-labs/lab-capture-template.md) — outcomes, stuck points, timings, Format B observations. ~5 min.</a:t>
             </a:r>
           </a:p>
         </p:txBody>
@@ -1996,7 +2067,7 @@
           <a:lstStyle/>
           <a:p>
             <a:r>
-              <a:t>Everyone, together, five minutes. This is the honest answer to "no restore points" and "it did something I did not expect" — the cheapest guardrail with the largest payoff, in every repo they own tomorrow. Teach ask-vs-deny while they type: deny the unrecoverable, ask the annoying — if everything asks, people stop reading, which is prompt fatigue and it kills the layer. Watch for pasting over the file; the handout has the before-state and names settings.local.json. ~5 min.</a:t>
+              <a:t>Everyone, together, five minutes. This is the honest answer to "no restore points" and "it did something I did not expect" — the cheapest guardrail with the largest payoff, in every repo they own tomorrow. Teach ask-vs-deny while they type: deny the unrecoverable, ask the annoying — if everything asks, people stop reading, which is prompt fatigue and it kills the layer. Remote verification: "paste the refusal line Claude gave you into chat" — and the paste-over-the-file failure shows up as "seed.json rule gone"; the handout has the before-state and names settings.local.json. ~5 min.</a:t>
             </a:r>
           </a:p>
         </p:txBody>
@@ -7484,7 +7555,7 @@
                 </a:solidFill>
                 <a:latin typeface="Arial"/>
               </a:rPr>
-              <a:t>DEMO · THE RULE</a:t>
+              <a:t>DEMO · THE STEPS</a:t>
             </a:r>
           </a:p>
         </p:txBody>
@@ -7523,7 +7594,7 @@
                 </a:solidFill>
                 <a:latin typeface="Arial"/>
               </a:rPr>
-              <a:t>Read-only database unless approved</a:t>
+              <a:t>Seven steps — build along on screen</a:t>
             </a:r>
           </a:p>
         </p:txBody>
@@ -7565,7 +7636,7 @@
                 </a:solidFill>
                 <a:latin typeface="Arial"/>
               </a:rPr>
-              <a:t>The same three-layer shape as the seed guard, on a new subject — built along with me.</a:t>
+              <a:t>Steps 6 and 7 are the ones that matter — an unverified guardrail is a belief. Full walkthrough with the code: docs/labs/lab-2b-demo-walkthrough.md.</a:t>
             </a:r>
           </a:p>
         </p:txBody>
@@ -7611,14 +7682,219 @@
       </p:sp>
       <p:sp>
         <p:nvSpPr>
-          <p:cNvPr id="9" name="TextBox 8"/>
-          <p:cNvSpPr txBox="1"/>
-          <p:nvPr/>
-        </p:nvSpPr>
-        <p:spPr>
-          <a:xfrm>
-            <a:off x="548640" y="1783080"/>
-            <a:ext cx="7863840" cy="2935224"/>
+          <p:cNvPr id="9" name="Rectangle 8"/>
+          <p:cNvSpPr/>
+          <p:nvPr/>
+        </p:nvSpPr>
+        <p:spPr>
+          <a:xfrm>
+            <a:off x="548640" y="2011680"/>
+            <a:ext cx="8046720" cy="310896"/>
+          </a:xfrm>
+          <a:prstGeom prst="rect">
+            <a:avLst/>
+          </a:prstGeom>
+          <a:solidFill>
+            <a:srgbClr val="403FE8"/>
+          </a:solidFill>
+          <a:ln>
+            <a:noFill/>
+          </a:ln>
+          <a:effectLst/>
+        </p:spPr>
+        <p:style>
+          <a:lnRef idx="1">
+            <a:schemeClr val="accent1"/>
+          </a:lnRef>
+          <a:fillRef idx="3">
+            <a:schemeClr val="accent1"/>
+          </a:fillRef>
+          <a:effectRef idx="2">
+            <a:schemeClr val="accent1"/>
+          </a:effectRef>
+          <a:fontRef idx="minor">
+            <a:schemeClr val="lt1"/>
+          </a:fontRef>
+        </p:style>
+        <p:txBody>
+          <a:bodyPr rtlCol="0" anchor="ctr"/>
+          <a:lstStyle/>
+          <a:p>
+            <a:pPr algn="ctr"/>
+          </a:p>
+        </p:txBody>
+      </p:sp>
+      <p:sp>
+        <p:nvSpPr>
+          <p:cNvPr id="10" name="TextBox 9"/>
+          <p:cNvSpPr txBox="1"/>
+          <p:nvPr/>
+        </p:nvSpPr>
+        <p:spPr>
+          <a:xfrm>
+            <a:off x="640080" y="2089404"/>
+            <a:ext cx="274320" cy="219456"/>
+          </a:xfrm>
+          <a:prstGeom prst="rect">
+            <a:avLst/>
+          </a:prstGeom>
+          <a:noFill/>
+        </p:spPr>
+        <p:txBody>
+          <a:bodyPr wrap="square" anchor="t" lIns="0" rIns="0" tIns="0" bIns="0">
+            <a:spAutoFit/>
+          </a:bodyPr>
+          <a:lstStyle/>
+          <a:p>
+            <a:pPr algn="l">
+              <a:spcAft>
+                <a:spcPts val="400"/>
+              </a:spcAft>
+            </a:pPr>
+            <a:r>
+              <a:rPr sz="900" b="1">
+                <a:solidFill>
+                  <a:srgbClr val="FFFFFF"/>
+                </a:solidFill>
+                <a:latin typeface="Arial"/>
+              </a:rPr>
+              <a:t>#</a:t>
+            </a:r>
+          </a:p>
+        </p:txBody>
+      </p:sp>
+      <p:sp>
+        <p:nvSpPr>
+          <p:cNvPr id="11" name="TextBox 10"/>
+          <p:cNvSpPr txBox="1"/>
+          <p:nvPr/>
+        </p:nvSpPr>
+        <p:spPr>
+          <a:xfrm>
+            <a:off x="1097280" y="2089404"/>
+            <a:ext cx="2926079" cy="219456"/>
+          </a:xfrm>
+          <a:prstGeom prst="rect">
+            <a:avLst/>
+          </a:prstGeom>
+          <a:noFill/>
+        </p:spPr>
+        <p:txBody>
+          <a:bodyPr wrap="square" anchor="t" lIns="0" rIns="0" tIns="0" bIns="0">
+            <a:spAutoFit/>
+          </a:bodyPr>
+          <a:lstStyle/>
+          <a:p>
+            <a:pPr algn="l">
+              <a:spcAft>
+                <a:spcPts val="400"/>
+              </a:spcAft>
+            </a:pPr>
+            <a:r>
+              <a:rPr sz="900" b="1">
+                <a:solidFill>
+                  <a:srgbClr val="FFFFFF"/>
+                </a:solidFill>
+                <a:latin typeface="Arial"/>
+              </a:rPr>
+              <a:t>What we do</a:t>
+            </a:r>
+          </a:p>
+        </p:txBody>
+      </p:sp>
+      <p:sp>
+        <p:nvSpPr>
+          <p:cNvPr id="12" name="TextBox 11"/>
+          <p:cNvSpPr txBox="1"/>
+          <p:nvPr/>
+        </p:nvSpPr>
+        <p:spPr>
+          <a:xfrm>
+            <a:off x="4206240" y="2089404"/>
+            <a:ext cx="4297680" cy="219456"/>
+          </a:xfrm>
+          <a:prstGeom prst="rect">
+            <a:avLst/>
+          </a:prstGeom>
+          <a:noFill/>
+        </p:spPr>
+        <p:txBody>
+          <a:bodyPr wrap="square" anchor="t" lIns="0" rIns="0" tIns="0" bIns="0">
+            <a:spAutoFit/>
+          </a:bodyPr>
+          <a:lstStyle/>
+          <a:p>
+            <a:pPr algn="l">
+              <a:spcAft>
+                <a:spcPts val="400"/>
+              </a:spcAft>
+            </a:pPr>
+            <a:r>
+              <a:rPr sz="900" b="1">
+                <a:solidFill>
+                  <a:srgbClr val="FFFFFF"/>
+                </a:solidFill>
+                <a:latin typeface="Arial"/>
+              </a:rPr>
+              <a:t>What you should see</a:t>
+            </a:r>
+          </a:p>
+        </p:txBody>
+      </p:sp>
+      <p:sp>
+        <p:nvSpPr>
+          <p:cNvPr id="13" name="Rectangle 12"/>
+          <p:cNvSpPr/>
+          <p:nvPr/>
+        </p:nvSpPr>
+        <p:spPr>
+          <a:xfrm>
+            <a:off x="548640" y="2322576"/>
+            <a:ext cx="8046720" cy="340940"/>
+          </a:xfrm>
+          <a:prstGeom prst="rect">
+            <a:avLst/>
+          </a:prstGeom>
+          <a:solidFill>
+            <a:srgbClr val="F4F5FB"/>
+          </a:solidFill>
+          <a:ln>
+            <a:noFill/>
+          </a:ln>
+          <a:effectLst/>
+        </p:spPr>
+        <p:style>
+          <a:lnRef idx="1">
+            <a:schemeClr val="accent1"/>
+          </a:lnRef>
+          <a:fillRef idx="3">
+            <a:schemeClr val="accent1"/>
+          </a:fillRef>
+          <a:effectRef idx="2">
+            <a:schemeClr val="accent1"/>
+          </a:effectRef>
+          <a:fontRef idx="minor">
+            <a:schemeClr val="lt1"/>
+          </a:fontRef>
+        </p:style>
+        <p:txBody>
+          <a:bodyPr rtlCol="0" anchor="ctr"/>
+          <a:lstStyle/>
+          <a:p>
+            <a:pPr algn="ctr"/>
+          </a:p>
+        </p:txBody>
+      </p:sp>
+      <p:sp>
+        <p:nvSpPr>
+          <p:cNvPr id="14" name="TextBox 13"/>
+          <p:cNvSpPr txBox="1"/>
+          <p:nvPr/>
+        </p:nvSpPr>
+        <p:spPr>
+          <a:xfrm>
+            <a:off x="640080" y="2377440"/>
+            <a:ext cx="274320" cy="249500"/>
           </a:xfrm>
           <a:prstGeom prst="rect">
             <a:avLst/>
@@ -7633,149 +7909,1124 @@
           <a:p>
             <a:pPr algn="l">
               <a:lnSpc>
-                <a:spcPct val="122000"/>
+                <a:spcPct val="112000"/>
               </a:lnSpc>
               <a:spcAft>
-                <a:spcPts val="900"/>
-              </a:spcAft>
-            </a:pPr>
-            <a:r>
-              <a:rPr sz="1250" b="1">
-                <a:solidFill>
-                  <a:srgbClr val="403FE8"/>
-                </a:solidFill>
-                <a:latin typeface="Arial"/>
-              </a:rPr>
-              <a:t>•  </a:t>
-            </a:r>
-            <a:r>
-              <a:rPr sz="1250" b="1">
+                <a:spcPts val="400"/>
+              </a:spcAft>
+            </a:pPr>
+            <a:r>
+              <a:rPr sz="900" b="1">
                 <a:solidFill>
                   <a:srgbClr val="13135E"/>
                 </a:solidFill>
                 <a:latin typeface="Arial"/>
               </a:rPr>
-              <a:t>First: </a:t>
-            </a:r>
-            <a:r>
-              <a:rPr sz="1250" b="0">
+              <a:t>1</a:t>
+            </a:r>
+          </a:p>
+        </p:txBody>
+      </p:sp>
+      <p:sp>
+        <p:nvSpPr>
+          <p:cNvPr id="15" name="TextBox 14"/>
+          <p:cNvSpPr txBox="1"/>
+          <p:nvPr/>
+        </p:nvSpPr>
+        <p:spPr>
+          <a:xfrm>
+            <a:off x="1097280" y="2377440"/>
+            <a:ext cx="2926079" cy="249500"/>
+          </a:xfrm>
+          <a:prstGeom prst="rect">
+            <a:avLst/>
+          </a:prstGeom>
+          <a:noFill/>
+        </p:spPr>
+        <p:txBody>
+          <a:bodyPr wrap="square" anchor="t" lIns="0" rIns="0" tIns="0" bIns="0">
+            <a:spAutoFit/>
+          </a:bodyPr>
+          <a:lstStyle/>
+          <a:p>
+            <a:pPr algn="l">
+              <a:lnSpc>
+                <a:spcPct val="112000"/>
+              </a:lnSpc>
+              <a:spcAft>
+                <a:spcPts val="400"/>
+              </a:spcAft>
+            </a:pPr>
+            <a:r>
+              <a:rPr sz="900" b="0">
                 <a:solidFill>
                   <a:srgbClr val="434343"/>
                 </a:solidFill>
                 <a:latin typeface="Arial"/>
               </a:rPr>
-              <a:t>`npm run reset-db` — db.json is generated and git-ignored, so a fresh copy does not have it.</a:t>
-            </a:r>
-          </a:p>
+              <a:t>npm run reset-db</a:t>
+            </a:r>
+          </a:p>
+        </p:txBody>
+      </p:sp>
+      <p:sp>
+        <p:nvSpPr>
+          <p:cNvPr id="16" name="TextBox 15"/>
+          <p:cNvSpPr txBox="1"/>
+          <p:nvPr/>
+        </p:nvSpPr>
+        <p:spPr>
+          <a:xfrm>
+            <a:off x="4206240" y="2377440"/>
+            <a:ext cx="4297680" cy="249500"/>
+          </a:xfrm>
+          <a:prstGeom prst="rect">
+            <a:avLst/>
+          </a:prstGeom>
+          <a:noFill/>
+        </p:spPr>
+        <p:txBody>
+          <a:bodyPr wrap="square" anchor="t" lIns="0" rIns="0" tIns="0" bIns="0">
+            <a:spAutoFit/>
+          </a:bodyPr>
+          <a:lstStyle/>
           <a:p>
             <a:pPr algn="l">
               <a:lnSpc>
-                <a:spcPct val="122000"/>
+                <a:spcPct val="112000"/>
               </a:lnSpc>
               <a:spcAft>
-                <a:spcPts val="900"/>
-              </a:spcAft>
-            </a:pPr>
-            <a:r>
-              <a:rPr sz="1250" b="1">
-                <a:solidFill>
-                  <a:srgbClr val="403FE8"/>
-                </a:solidFill>
-                <a:latin typeface="Arial"/>
-              </a:rPr>
-              <a:t>•  </a:t>
-            </a:r>
-            <a:r>
-              <a:rPr sz="1250" b="1">
+                <a:spcPts val="400"/>
+              </a:spcAft>
+            </a:pPr>
+            <a:r>
+              <a:rPr sz="900" b="0">
+                <a:solidFill>
+                  <a:srgbClr val="434343"/>
+                </a:solidFill>
+                <a:latin typeface="Arial"/>
+              </a:rPr>
+              <a:t>db.json exists (it is generated and git-ignored)</a:t>
+            </a:r>
+          </a:p>
+        </p:txBody>
+      </p:sp>
+      <p:sp>
+        <p:nvSpPr>
+          <p:cNvPr id="17" name="Rectangle 16"/>
+          <p:cNvSpPr/>
+          <p:nvPr/>
+        </p:nvSpPr>
+        <p:spPr>
+          <a:xfrm>
+            <a:off x="548640" y="2663516"/>
+            <a:ext cx="8046720" cy="340940"/>
+          </a:xfrm>
+          <a:prstGeom prst="rect">
+            <a:avLst/>
+          </a:prstGeom>
+          <a:solidFill>
+            <a:srgbClr val="FFFFFF"/>
+          </a:solidFill>
+          <a:ln>
+            <a:noFill/>
+          </a:ln>
+          <a:effectLst/>
+        </p:spPr>
+        <p:style>
+          <a:lnRef idx="1">
+            <a:schemeClr val="accent1"/>
+          </a:lnRef>
+          <a:fillRef idx="3">
+            <a:schemeClr val="accent1"/>
+          </a:fillRef>
+          <a:effectRef idx="2">
+            <a:schemeClr val="accent1"/>
+          </a:effectRef>
+          <a:fontRef idx="minor">
+            <a:schemeClr val="lt1"/>
+          </a:fontRef>
+        </p:style>
+        <p:txBody>
+          <a:bodyPr rtlCol="0" anchor="ctr"/>
+          <a:lstStyle/>
+          <a:p>
+            <a:pPr algn="ctr"/>
+          </a:p>
+        </p:txBody>
+      </p:sp>
+      <p:sp>
+        <p:nvSpPr>
+          <p:cNvPr id="18" name="TextBox 17"/>
+          <p:cNvSpPr txBox="1"/>
+          <p:nvPr/>
+        </p:nvSpPr>
+        <p:spPr>
+          <a:xfrm>
+            <a:off x="640080" y="2718380"/>
+            <a:ext cx="274320" cy="249500"/>
+          </a:xfrm>
+          <a:prstGeom prst="rect">
+            <a:avLst/>
+          </a:prstGeom>
+          <a:noFill/>
+        </p:spPr>
+        <p:txBody>
+          <a:bodyPr wrap="square" anchor="t" lIns="0" rIns="0" tIns="0" bIns="0">
+            <a:spAutoFit/>
+          </a:bodyPr>
+          <a:lstStyle/>
+          <a:p>
+            <a:pPr algn="l">
+              <a:lnSpc>
+                <a:spcPct val="112000"/>
+              </a:lnSpc>
+              <a:spcAft>
+                <a:spcPts val="400"/>
+              </a:spcAft>
+            </a:pPr>
+            <a:r>
+              <a:rPr sz="900" b="1">
                 <a:solidFill>
                   <a:srgbClr val="13135E"/>
                 </a:solidFill>
                 <a:latin typeface="Arial"/>
               </a:rPr>
-              <a:t>The rule. </a:t>
-            </a:r>
-            <a:r>
-              <a:rPr sz="1250" b="0">
+              <a:t>2</a:t>
+            </a:r>
+          </a:p>
+        </p:txBody>
+      </p:sp>
+      <p:sp>
+        <p:nvSpPr>
+          <p:cNvPr id="19" name="TextBox 18"/>
+          <p:cNvSpPr txBox="1"/>
+          <p:nvPr/>
+        </p:nvSpPr>
+        <p:spPr>
+          <a:xfrm>
+            <a:off x="1097280" y="2718380"/>
+            <a:ext cx="2926079" cy="249500"/>
+          </a:xfrm>
+          <a:prstGeom prst="rect">
+            <a:avLst/>
+          </a:prstGeom>
+          <a:noFill/>
+        </p:spPr>
+        <p:txBody>
+          <a:bodyPr wrap="square" anchor="t" lIns="0" rIns="0" tIns="0" bIns="0">
+            <a:spAutoFit/>
+          </a:bodyPr>
+          <a:lstStyle/>
+          <a:p>
+            <a:pPr algn="l">
+              <a:lnSpc>
+                <a:spcPct val="112000"/>
+              </a:lnSpc>
+              <a:spcAft>
+                <a:spcPts val="400"/>
+              </a:spcAft>
+            </a:pPr>
+            <a:r>
+              <a:rPr sz="900" b="0">
                 <a:solidFill>
                   <a:srgbClr val="434343"/>
                 </a:solidFill>
                 <a:latin typeface="Arial"/>
               </a:rPr>
-              <a:t>`db.json` gets changed through the API or a reset — not edited directly.</a:t>
-            </a:r>
-          </a:p>
+              <a:t>Add the Don't line to CLAUDE.md</a:t>
+            </a:r>
+          </a:p>
+        </p:txBody>
+      </p:sp>
+      <p:sp>
+        <p:nvSpPr>
+          <p:cNvPr id="20" name="TextBox 19"/>
+          <p:cNvSpPr txBox="1"/>
+          <p:nvPr/>
+        </p:nvSpPr>
+        <p:spPr>
+          <a:xfrm>
+            <a:off x="4206240" y="2718380"/>
+            <a:ext cx="4297680" cy="249500"/>
+          </a:xfrm>
+          <a:prstGeom prst="rect">
+            <a:avLst/>
+          </a:prstGeom>
+          <a:noFill/>
+        </p:spPr>
+        <p:txBody>
+          <a:bodyPr wrap="square" anchor="t" lIns="0" rIns="0" tIns="0" bIns="0">
+            <a:spAutoFit/>
+          </a:bodyPr>
+          <a:lstStyle/>
           <a:p>
             <a:pPr algn="l">
               <a:lnSpc>
-                <a:spcPct val="122000"/>
+                <a:spcPct val="112000"/>
               </a:lnSpc>
               <a:spcAft>
-                <a:spcPts val="900"/>
-              </a:spcAft>
-            </a:pPr>
-            <a:r>
-              <a:rPr sz="1250" b="1">
-                <a:solidFill>
-                  <a:srgbClr val="403FE8"/>
-                </a:solidFill>
-                <a:latin typeface="Arial"/>
-              </a:rPr>
-              <a:t>•  </a:t>
-            </a:r>
-            <a:r>
-              <a:rPr sz="1250" b="1">
+                <a:spcPts val="400"/>
+              </a:spcAft>
+            </a:pPr>
+            <a:r>
+              <a:rPr sz="900" b="0">
+                <a:solidFill>
+                  <a:srgbClr val="434343"/>
+                </a:solidFill>
+                <a:latin typeface="Arial"/>
+              </a:rPr>
+              <a:t>Layer 1: "db.json is generated — change data via the API or a reset"</a:t>
+            </a:r>
+          </a:p>
+        </p:txBody>
+      </p:sp>
+      <p:sp>
+        <p:nvSpPr>
+          <p:cNvPr id="21" name="Rectangle 20"/>
+          <p:cNvSpPr/>
+          <p:nvPr/>
+        </p:nvSpPr>
+        <p:spPr>
+          <a:xfrm>
+            <a:off x="548640" y="3004457"/>
+            <a:ext cx="8046720" cy="340940"/>
+          </a:xfrm>
+          <a:prstGeom prst="rect">
+            <a:avLst/>
+          </a:prstGeom>
+          <a:solidFill>
+            <a:srgbClr val="F4F5FB"/>
+          </a:solidFill>
+          <a:ln>
+            <a:noFill/>
+          </a:ln>
+          <a:effectLst/>
+        </p:spPr>
+        <p:style>
+          <a:lnRef idx="1">
+            <a:schemeClr val="accent1"/>
+          </a:lnRef>
+          <a:fillRef idx="3">
+            <a:schemeClr val="accent1"/>
+          </a:fillRef>
+          <a:effectRef idx="2">
+            <a:schemeClr val="accent1"/>
+          </a:effectRef>
+          <a:fontRef idx="minor">
+            <a:schemeClr val="lt1"/>
+          </a:fontRef>
+        </p:style>
+        <p:txBody>
+          <a:bodyPr rtlCol="0" anchor="ctr"/>
+          <a:lstStyle/>
+          <a:p>
+            <a:pPr algn="ctr"/>
+          </a:p>
+        </p:txBody>
+      </p:sp>
+      <p:sp>
+        <p:nvSpPr>
+          <p:cNvPr id="22" name="TextBox 21"/>
+          <p:cNvSpPr txBox="1"/>
+          <p:nvPr/>
+        </p:nvSpPr>
+        <p:spPr>
+          <a:xfrm>
+            <a:off x="640080" y="3059321"/>
+            <a:ext cx="274320" cy="249500"/>
+          </a:xfrm>
+          <a:prstGeom prst="rect">
+            <a:avLst/>
+          </a:prstGeom>
+          <a:noFill/>
+        </p:spPr>
+        <p:txBody>
+          <a:bodyPr wrap="square" anchor="t" lIns="0" rIns="0" tIns="0" bIns="0">
+            <a:spAutoFit/>
+          </a:bodyPr>
+          <a:lstStyle/>
+          <a:p>
+            <a:pPr algn="l">
+              <a:lnSpc>
+                <a:spcPct val="112000"/>
+              </a:lnSpc>
+              <a:spcAft>
+                <a:spcPts val="400"/>
+              </a:spcAft>
+            </a:pPr>
+            <a:r>
+              <a:rPr sz="900" b="1">
                 <a:solidFill>
                   <a:srgbClr val="13135E"/>
                 </a:solidFill>
                 <a:latin typeface="Arial"/>
               </a:rPr>
-              <a:t>Not the same rule as 2.a's. </a:t>
-            </a:r>
-            <a:r>
-              <a:rPr sz="1250" b="0">
+              <a:t>3</a:t>
+            </a:r>
+          </a:p>
+        </p:txBody>
+      </p:sp>
+      <p:sp>
+        <p:nvSpPr>
+          <p:cNvPr id="23" name="TextBox 22"/>
+          <p:cNvSpPr txBox="1"/>
+          <p:nvPr/>
+        </p:nvSpPr>
+        <p:spPr>
+          <a:xfrm>
+            <a:off x="1097280" y="3059321"/>
+            <a:ext cx="2926079" cy="249500"/>
+          </a:xfrm>
+          <a:prstGeom prst="rect">
+            <a:avLst/>
+          </a:prstGeom>
+          <a:noFill/>
+        </p:spPr>
+        <p:txBody>
+          <a:bodyPr wrap="square" anchor="t" lIns="0" rIns="0" tIns="0" bIns="0">
+            <a:spAutoFit/>
+          </a:bodyPr>
+          <a:lstStyle/>
+          <a:p>
+            <a:pPr algn="l">
+              <a:lnSpc>
+                <a:spcPct val="112000"/>
+              </a:lnSpc>
+              <a:spcAft>
+                <a:spcPts val="400"/>
+              </a:spcAft>
+            </a:pPr>
+            <a:r>
+              <a:rPr sz="900" b="0">
                 <a:solidFill>
                   <a:srgbClr val="434343"/>
                 </a:solidFill>
                 <a:latin typeface="Arial"/>
               </a:rPr>
-              <a:t>The store boundary is about *imports* (`db/store.ts`); this is about *editing a file*. Same family, two rules — today's hook enforces this one.</a:t>
-            </a:r>
-          </a:p>
+              <a:t>Add the deny entries to settings.json</a:t>
+            </a:r>
+          </a:p>
+        </p:txBody>
+      </p:sp>
+      <p:sp>
+        <p:nvSpPr>
+          <p:cNvPr id="24" name="TextBox 23"/>
+          <p:cNvSpPr txBox="1"/>
+          <p:nvPr/>
+        </p:nvSpPr>
+        <p:spPr>
+          <a:xfrm>
+            <a:off x="4206240" y="3059321"/>
+            <a:ext cx="4297680" cy="249500"/>
+          </a:xfrm>
+          <a:prstGeom prst="rect">
+            <a:avLst/>
+          </a:prstGeom>
+          <a:noFill/>
+        </p:spPr>
+        <p:txBody>
+          <a:bodyPr wrap="square" anchor="t" lIns="0" rIns="0" tIns="0" bIns="0">
+            <a:spAutoFit/>
+          </a:bodyPr>
+          <a:lstStyle/>
           <a:p>
             <a:pPr algn="l">
               <a:lnSpc>
-                <a:spcPct val="122000"/>
+                <a:spcPct val="112000"/>
               </a:lnSpc>
               <a:spcAft>
-                <a:spcPts val="900"/>
-              </a:spcAft>
-            </a:pPr>
-            <a:r>
-              <a:rPr sz="1250" b="1">
-                <a:solidFill>
-                  <a:srgbClr val="403FE8"/>
-                </a:solidFill>
-                <a:latin typeface="Arial"/>
-              </a:rPr>
-              <a:t>•  </a:t>
-            </a:r>
-            <a:r>
-              <a:rPr sz="1250" b="1">
+                <a:spcPts val="400"/>
+              </a:spcAft>
+            </a:pPr>
+            <a:r>
+              <a:rPr sz="900" b="0">
+                <a:solidFill>
+                  <a:srgbClr val="434343"/>
+                </a:solidFill>
+                <a:latin typeface="Arial"/>
+              </a:rPr>
+              <a:t>Layer 2a: Edit/Write(server/data/db.json) in the existing deny array</a:t>
+            </a:r>
+          </a:p>
+        </p:txBody>
+      </p:sp>
+      <p:sp>
+        <p:nvSpPr>
+          <p:cNvPr id="25" name="Rectangle 24"/>
+          <p:cNvSpPr/>
+          <p:nvPr/>
+        </p:nvSpPr>
+        <p:spPr>
+          <a:xfrm>
+            <a:off x="548640" y="3345397"/>
+            <a:ext cx="8046720" cy="340940"/>
+          </a:xfrm>
+          <a:prstGeom prst="rect">
+            <a:avLst/>
+          </a:prstGeom>
+          <a:solidFill>
+            <a:srgbClr val="FFFFFF"/>
+          </a:solidFill>
+          <a:ln>
+            <a:noFill/>
+          </a:ln>
+          <a:effectLst/>
+        </p:spPr>
+        <p:style>
+          <a:lnRef idx="1">
+            <a:schemeClr val="accent1"/>
+          </a:lnRef>
+          <a:fillRef idx="3">
+            <a:schemeClr val="accent1"/>
+          </a:fillRef>
+          <a:effectRef idx="2">
+            <a:schemeClr val="accent1"/>
+          </a:effectRef>
+          <a:fontRef idx="minor">
+            <a:schemeClr val="lt1"/>
+          </a:fontRef>
+        </p:style>
+        <p:txBody>
+          <a:bodyPr rtlCol="0" anchor="ctr"/>
+          <a:lstStyle/>
+          <a:p>
+            <a:pPr algn="ctr"/>
+          </a:p>
+        </p:txBody>
+      </p:sp>
+      <p:sp>
+        <p:nvSpPr>
+          <p:cNvPr id="26" name="TextBox 25"/>
+          <p:cNvSpPr txBox="1"/>
+          <p:nvPr/>
+        </p:nvSpPr>
+        <p:spPr>
+          <a:xfrm>
+            <a:off x="640080" y="3400261"/>
+            <a:ext cx="274320" cy="249500"/>
+          </a:xfrm>
+          <a:prstGeom prst="rect">
+            <a:avLst/>
+          </a:prstGeom>
+          <a:noFill/>
+        </p:spPr>
+        <p:txBody>
+          <a:bodyPr wrap="square" anchor="t" lIns="0" rIns="0" tIns="0" bIns="0">
+            <a:spAutoFit/>
+          </a:bodyPr>
+          <a:lstStyle/>
+          <a:p>
+            <a:pPr algn="l">
+              <a:lnSpc>
+                <a:spcPct val="112000"/>
+              </a:lnSpc>
+              <a:spcAft>
+                <a:spcPts val="400"/>
+              </a:spcAft>
+            </a:pPr>
+            <a:r>
+              <a:rPr sz="900" b="1">
                 <a:solidFill>
                   <a:srgbClr val="13135E"/>
                 </a:solidFill>
                 <a:latin typeface="Arial"/>
               </a:rPr>
-              <a:t>Three layers, again. </a:t>
-            </a:r>
-            <a:r>
-              <a:rPr sz="1250" b="0">
+              <a:t>4</a:t>
+            </a:r>
+          </a:p>
+        </p:txBody>
+      </p:sp>
+      <p:sp>
+        <p:nvSpPr>
+          <p:cNvPr id="27" name="TextBox 26"/>
+          <p:cNvSpPr txBox="1"/>
+          <p:nvPr/>
+        </p:nvSpPr>
+        <p:spPr>
+          <a:xfrm>
+            <a:off x="1097280" y="3400261"/>
+            <a:ext cx="2926079" cy="249500"/>
+          </a:xfrm>
+          <a:prstGeom prst="rect">
+            <a:avLst/>
+          </a:prstGeom>
+          <a:noFill/>
+        </p:spPr>
+        <p:txBody>
+          <a:bodyPr wrap="square" anchor="t" lIns="0" rIns="0" tIns="0" bIns="0">
+            <a:spAutoFit/>
+          </a:bodyPr>
+          <a:lstStyle/>
+          <a:p>
+            <a:pPr algn="l">
+              <a:lnSpc>
+                <a:spcPct val="112000"/>
+              </a:lnSpc>
+              <a:spcAft>
+                <a:spcPts val="400"/>
+              </a:spcAft>
+            </a:pPr>
+            <a:r>
+              <a:rPr sz="900" b="0">
                 <a:solidFill>
                   <a:srgbClr val="434343"/>
                 </a:solidFill>
                 <a:latin typeface="Arial"/>
               </a:rPr>
-              <a:t>A Don't line → a `permissions.deny` entry → a PreToolUse hook that explains itself.</a:t>
+              <a:t>Write the hook: .claude/hooks/protect-db.js</a:t>
+            </a:r>
+          </a:p>
+        </p:txBody>
+      </p:sp>
+      <p:sp>
+        <p:nvSpPr>
+          <p:cNvPr id="28" name="TextBox 27"/>
+          <p:cNvSpPr txBox="1"/>
+          <p:nvPr/>
+        </p:nvSpPr>
+        <p:spPr>
+          <a:xfrm>
+            <a:off x="4206240" y="3400261"/>
+            <a:ext cx="4297680" cy="249500"/>
+          </a:xfrm>
+          <a:prstGeom prst="rect">
+            <a:avLst/>
+          </a:prstGeom>
+          <a:noFill/>
+        </p:spPr>
+        <p:txBody>
+          <a:bodyPr wrap="square" anchor="t" lIns="0" rIns="0" tIns="0" bIns="0">
+            <a:spAutoFit/>
+          </a:bodyPr>
+          <a:lstStyle/>
+          <a:p>
+            <a:pPr algn="l">
+              <a:lnSpc>
+                <a:spcPct val="112000"/>
+              </a:lnSpc>
+              <a:spcAft>
+                <a:spcPts val="400"/>
+              </a:spcAft>
+            </a:pPr>
+            <a:r>
+              <a:rPr sz="900" b="0">
+                <a:solidFill>
+                  <a:srgbClr val="434343"/>
+                </a:solidFill>
+                <a:latin typeface="Arial"/>
+              </a:rPr>
+              <a:t>Layer 2b: the 20 lines on the next slide — BLOCKED/Why/Instead/Done</a:t>
+            </a:r>
+          </a:p>
+        </p:txBody>
+      </p:sp>
+      <p:sp>
+        <p:nvSpPr>
+          <p:cNvPr id="29" name="Rectangle 28"/>
+          <p:cNvSpPr/>
+          <p:nvPr/>
+        </p:nvSpPr>
+        <p:spPr>
+          <a:xfrm>
+            <a:off x="548640" y="3686338"/>
+            <a:ext cx="8046720" cy="340940"/>
+          </a:xfrm>
+          <a:prstGeom prst="rect">
+            <a:avLst/>
+          </a:prstGeom>
+          <a:solidFill>
+            <a:srgbClr val="F4F5FB"/>
+          </a:solidFill>
+          <a:ln>
+            <a:noFill/>
+          </a:ln>
+          <a:effectLst/>
+        </p:spPr>
+        <p:style>
+          <a:lnRef idx="1">
+            <a:schemeClr val="accent1"/>
+          </a:lnRef>
+          <a:fillRef idx="3">
+            <a:schemeClr val="accent1"/>
+          </a:fillRef>
+          <a:effectRef idx="2">
+            <a:schemeClr val="accent1"/>
+          </a:effectRef>
+          <a:fontRef idx="minor">
+            <a:schemeClr val="lt1"/>
+          </a:fontRef>
+        </p:style>
+        <p:txBody>
+          <a:bodyPr rtlCol="0" anchor="ctr"/>
+          <a:lstStyle/>
+          <a:p>
+            <a:pPr algn="ctr"/>
+          </a:p>
+        </p:txBody>
+      </p:sp>
+      <p:sp>
+        <p:nvSpPr>
+          <p:cNvPr id="30" name="TextBox 29"/>
+          <p:cNvSpPr txBox="1"/>
+          <p:nvPr/>
+        </p:nvSpPr>
+        <p:spPr>
+          <a:xfrm>
+            <a:off x="640080" y="3741202"/>
+            <a:ext cx="274320" cy="249500"/>
+          </a:xfrm>
+          <a:prstGeom prst="rect">
+            <a:avLst/>
+          </a:prstGeom>
+          <a:noFill/>
+        </p:spPr>
+        <p:txBody>
+          <a:bodyPr wrap="square" anchor="t" lIns="0" rIns="0" tIns="0" bIns="0">
+            <a:spAutoFit/>
+          </a:bodyPr>
+          <a:lstStyle/>
+          <a:p>
+            <a:pPr algn="l">
+              <a:lnSpc>
+                <a:spcPct val="112000"/>
+              </a:lnSpc>
+              <a:spcAft>
+                <a:spcPts val="400"/>
+              </a:spcAft>
+            </a:pPr>
+            <a:r>
+              <a:rPr sz="900" b="1">
+                <a:solidFill>
+                  <a:srgbClr val="13135E"/>
+                </a:solidFill>
+                <a:latin typeface="Arial"/>
+              </a:rPr>
+              <a:t>5</a:t>
+            </a:r>
+          </a:p>
+        </p:txBody>
+      </p:sp>
+      <p:sp>
+        <p:nvSpPr>
+          <p:cNvPr id="31" name="TextBox 30"/>
+          <p:cNvSpPr txBox="1"/>
+          <p:nvPr/>
+        </p:nvSpPr>
+        <p:spPr>
+          <a:xfrm>
+            <a:off x="1097280" y="3741202"/>
+            <a:ext cx="2926079" cy="249500"/>
+          </a:xfrm>
+          <a:prstGeom prst="rect">
+            <a:avLst/>
+          </a:prstGeom>
+          <a:noFill/>
+        </p:spPr>
+        <p:txBody>
+          <a:bodyPr wrap="square" anchor="t" lIns="0" rIns="0" tIns="0" bIns="0">
+            <a:spAutoFit/>
+          </a:bodyPr>
+          <a:lstStyle/>
+          <a:p>
+            <a:pPr algn="l">
+              <a:lnSpc>
+                <a:spcPct val="112000"/>
+              </a:lnSpc>
+              <a:spcAft>
+                <a:spcPts val="400"/>
+              </a:spcAft>
+            </a:pPr>
+            <a:r>
+              <a:rPr sz="900" b="0">
+                <a:solidFill>
+                  <a:srgbClr val="434343"/>
+                </a:solidFill>
+                <a:latin typeface="Arial"/>
+              </a:rPr>
+              <a:t>Register it; start a NEW session</a:t>
+            </a:r>
+          </a:p>
+        </p:txBody>
+      </p:sp>
+      <p:sp>
+        <p:nvSpPr>
+          <p:cNvPr id="32" name="TextBox 31"/>
+          <p:cNvSpPr txBox="1"/>
+          <p:nvPr/>
+        </p:nvSpPr>
+        <p:spPr>
+          <a:xfrm>
+            <a:off x="4206240" y="3741202"/>
+            <a:ext cx="4297680" cy="249500"/>
+          </a:xfrm>
+          <a:prstGeom prst="rect">
+            <a:avLst/>
+          </a:prstGeom>
+          <a:noFill/>
+        </p:spPr>
+        <p:txBody>
+          <a:bodyPr wrap="square" anchor="t" lIns="0" rIns="0" tIns="0" bIns="0">
+            <a:spAutoFit/>
+          </a:bodyPr>
+          <a:lstStyle/>
+          <a:p>
+            <a:pPr algn="l">
+              <a:lnSpc>
+                <a:spcPct val="112000"/>
+              </a:lnSpc>
+              <a:spcAft>
+                <a:spcPts val="400"/>
+              </a:spcAft>
+            </a:pPr>
+            <a:r>
+              <a:rPr sz="900" b="0">
+                <a:solidFill>
+                  <a:srgbClr val="434343"/>
+                </a:solidFill>
+                <a:latin typeface="Arial"/>
+              </a:rPr>
+              <a:t>settings.json hooks block gains the entry; hooks load at session start</a:t>
+            </a:r>
+          </a:p>
+        </p:txBody>
+      </p:sp>
+      <p:sp>
+        <p:nvSpPr>
+          <p:cNvPr id="33" name="Rectangle 32"/>
+          <p:cNvSpPr/>
+          <p:nvPr/>
+        </p:nvSpPr>
+        <p:spPr>
+          <a:xfrm>
+            <a:off x="548640" y="4027278"/>
+            <a:ext cx="8046720" cy="340940"/>
+          </a:xfrm>
+          <a:prstGeom prst="rect">
+            <a:avLst/>
+          </a:prstGeom>
+          <a:solidFill>
+            <a:srgbClr val="FFFFFF"/>
+          </a:solidFill>
+          <a:ln>
+            <a:noFill/>
+          </a:ln>
+          <a:effectLst/>
+        </p:spPr>
+        <p:style>
+          <a:lnRef idx="1">
+            <a:schemeClr val="accent1"/>
+          </a:lnRef>
+          <a:fillRef idx="3">
+            <a:schemeClr val="accent1"/>
+          </a:fillRef>
+          <a:effectRef idx="2">
+            <a:schemeClr val="accent1"/>
+          </a:effectRef>
+          <a:fontRef idx="minor">
+            <a:schemeClr val="lt1"/>
+          </a:fontRef>
+        </p:style>
+        <p:txBody>
+          <a:bodyPr rtlCol="0" anchor="ctr"/>
+          <a:lstStyle/>
+          <a:p>
+            <a:pPr algn="ctr"/>
+          </a:p>
+        </p:txBody>
+      </p:sp>
+      <p:sp>
+        <p:nvSpPr>
+          <p:cNvPr id="34" name="TextBox 33"/>
+          <p:cNvSpPr txBox="1"/>
+          <p:nvPr/>
+        </p:nvSpPr>
+        <p:spPr>
+          <a:xfrm>
+            <a:off x="640080" y="4082142"/>
+            <a:ext cx="274320" cy="249500"/>
+          </a:xfrm>
+          <a:prstGeom prst="rect">
+            <a:avLst/>
+          </a:prstGeom>
+          <a:noFill/>
+        </p:spPr>
+        <p:txBody>
+          <a:bodyPr wrap="square" anchor="t" lIns="0" rIns="0" tIns="0" bIns="0">
+            <a:spAutoFit/>
+          </a:bodyPr>
+          <a:lstStyle/>
+          <a:p>
+            <a:pPr algn="l">
+              <a:lnSpc>
+                <a:spcPct val="112000"/>
+              </a:lnSpc>
+              <a:spcAft>
+                <a:spcPts val="400"/>
+              </a:spcAft>
+            </a:pPr>
+            <a:r>
+              <a:rPr sz="900" b="1">
+                <a:solidFill>
+                  <a:srgbClr val="13135E"/>
+                </a:solidFill>
+                <a:latin typeface="Arial"/>
+              </a:rPr>
+              <a:t>6</a:t>
+            </a:r>
+          </a:p>
+        </p:txBody>
+      </p:sp>
+      <p:sp>
+        <p:nvSpPr>
+          <p:cNvPr id="35" name="TextBox 34"/>
+          <p:cNvSpPr txBox="1"/>
+          <p:nvPr/>
+        </p:nvSpPr>
+        <p:spPr>
+          <a:xfrm>
+            <a:off x="1097280" y="4082142"/>
+            <a:ext cx="2926079" cy="249500"/>
+          </a:xfrm>
+          <a:prstGeom prst="rect">
+            <a:avLst/>
+          </a:prstGeom>
+          <a:noFill/>
+        </p:spPr>
+        <p:txBody>
+          <a:bodyPr wrap="square" anchor="t" lIns="0" rIns="0" tIns="0" bIns="0">
+            <a:spAutoFit/>
+          </a:bodyPr>
+          <a:lstStyle/>
+          <a:p>
+            <a:pPr algn="l">
+              <a:lnSpc>
+                <a:spcPct val="112000"/>
+              </a:lnSpc>
+              <a:spcAft>
+                <a:spcPts val="400"/>
+              </a:spcAft>
+            </a:pPr>
+            <a:r>
+              <a:rPr sz="900" b="0">
+                <a:solidFill>
+                  <a:srgbClr val="434343"/>
+                </a:solidFill>
+                <a:latin typeface="Arial"/>
+              </a:rPr>
+              <a:t>Verify the BLOCK: ask Claude to edit db.json</a:t>
+            </a:r>
+          </a:p>
+        </p:txBody>
+      </p:sp>
+      <p:sp>
+        <p:nvSpPr>
+          <p:cNvPr id="36" name="TextBox 35"/>
+          <p:cNvSpPr txBox="1"/>
+          <p:nvPr/>
+        </p:nvSpPr>
+        <p:spPr>
+          <a:xfrm>
+            <a:off x="4206240" y="4082142"/>
+            <a:ext cx="4297680" cy="249500"/>
+          </a:xfrm>
+          <a:prstGeom prst="rect">
+            <a:avLst/>
+          </a:prstGeom>
+          <a:noFill/>
+        </p:spPr>
+        <p:txBody>
+          <a:bodyPr wrap="square" anchor="t" lIns="0" rIns="0" tIns="0" bIns="0">
+            <a:spAutoFit/>
+          </a:bodyPr>
+          <a:lstStyle/>
+          <a:p>
+            <a:pPr algn="l">
+              <a:lnSpc>
+                <a:spcPct val="112000"/>
+              </a:lnSpc>
+              <a:spcAft>
+                <a:spcPts val="400"/>
+              </a:spcAft>
+            </a:pPr>
+            <a:r>
+              <a:rPr sz="900" b="0">
+                <a:solidFill>
+                  <a:srgbClr val="434343"/>
+                </a:solidFill>
+                <a:latin typeface="Arial"/>
+              </a:rPr>
+              <a:t>Refusal text — save it; confirm the file is untouched</a:t>
+            </a:r>
+          </a:p>
+        </p:txBody>
+      </p:sp>
+      <p:sp>
+        <p:nvSpPr>
+          <p:cNvPr id="37" name="Rectangle 36"/>
+          <p:cNvSpPr/>
+          <p:nvPr/>
+        </p:nvSpPr>
+        <p:spPr>
+          <a:xfrm>
+            <a:off x="548640" y="4368219"/>
+            <a:ext cx="8046720" cy="340940"/>
+          </a:xfrm>
+          <a:prstGeom prst="rect">
+            <a:avLst/>
+          </a:prstGeom>
+          <a:solidFill>
+            <a:srgbClr val="F4F5FB"/>
+          </a:solidFill>
+          <a:ln>
+            <a:noFill/>
+          </a:ln>
+          <a:effectLst/>
+        </p:spPr>
+        <p:style>
+          <a:lnRef idx="1">
+            <a:schemeClr val="accent1"/>
+          </a:lnRef>
+          <a:fillRef idx="3">
+            <a:schemeClr val="accent1"/>
+          </a:fillRef>
+          <a:effectRef idx="2">
+            <a:schemeClr val="accent1"/>
+          </a:effectRef>
+          <a:fontRef idx="minor">
+            <a:schemeClr val="lt1"/>
+          </a:fontRef>
+        </p:style>
+        <p:txBody>
+          <a:bodyPr rtlCol="0" anchor="ctr"/>
+          <a:lstStyle/>
+          <a:p>
+            <a:pPr algn="ctr"/>
+          </a:p>
+        </p:txBody>
+      </p:sp>
+      <p:sp>
+        <p:nvSpPr>
+          <p:cNvPr id="38" name="TextBox 37"/>
+          <p:cNvSpPr txBox="1"/>
+          <p:nvPr/>
+        </p:nvSpPr>
+        <p:spPr>
+          <a:xfrm>
+            <a:off x="640080" y="4423083"/>
+            <a:ext cx="274320" cy="249500"/>
+          </a:xfrm>
+          <a:prstGeom prst="rect">
+            <a:avLst/>
+          </a:prstGeom>
+          <a:noFill/>
+        </p:spPr>
+        <p:txBody>
+          <a:bodyPr wrap="square" anchor="t" lIns="0" rIns="0" tIns="0" bIns="0">
+            <a:spAutoFit/>
+          </a:bodyPr>
+          <a:lstStyle/>
+          <a:p>
+            <a:pPr algn="l">
+              <a:lnSpc>
+                <a:spcPct val="112000"/>
+              </a:lnSpc>
+              <a:spcAft>
+                <a:spcPts val="400"/>
+              </a:spcAft>
+            </a:pPr>
+            <a:r>
+              <a:rPr sz="900" b="1">
+                <a:solidFill>
+                  <a:srgbClr val="13135E"/>
+                </a:solidFill>
+                <a:latin typeface="Arial"/>
+              </a:rPr>
+              <a:t>7</a:t>
+            </a:r>
+          </a:p>
+        </p:txBody>
+      </p:sp>
+      <p:sp>
+        <p:nvSpPr>
+          <p:cNvPr id="39" name="TextBox 38"/>
+          <p:cNvSpPr txBox="1"/>
+          <p:nvPr/>
+        </p:nvSpPr>
+        <p:spPr>
+          <a:xfrm>
+            <a:off x="1097280" y="4423083"/>
+            <a:ext cx="2926079" cy="249500"/>
+          </a:xfrm>
+          <a:prstGeom prst="rect">
+            <a:avLst/>
+          </a:prstGeom>
+          <a:noFill/>
+        </p:spPr>
+        <p:txBody>
+          <a:bodyPr wrap="square" anchor="t" lIns="0" rIns="0" tIns="0" bIns="0">
+            <a:spAutoFit/>
+          </a:bodyPr>
+          <a:lstStyle/>
+          <a:p>
+            <a:pPr algn="l">
+              <a:lnSpc>
+                <a:spcPct val="112000"/>
+              </a:lnSpc>
+              <a:spcAft>
+                <a:spcPts val="400"/>
+              </a:spcAft>
+            </a:pPr>
+            <a:r>
+              <a:rPr sz="900" b="0">
+                <a:solidFill>
+                  <a:srgbClr val="434343"/>
+                </a:solidFill>
+                <a:latin typeface="Arial"/>
+              </a:rPr>
+              <a:t>Verify the ALLOW: edit a repositories/ file; npm test</a:t>
+            </a:r>
+          </a:p>
+        </p:txBody>
+      </p:sp>
+      <p:sp>
+        <p:nvSpPr>
+          <p:cNvPr id="40" name="TextBox 39"/>
+          <p:cNvSpPr txBox="1"/>
+          <p:nvPr/>
+        </p:nvSpPr>
+        <p:spPr>
+          <a:xfrm>
+            <a:off x="4206240" y="4423083"/>
+            <a:ext cx="4297680" cy="249500"/>
+          </a:xfrm>
+          <a:prstGeom prst="rect">
+            <a:avLst/>
+          </a:prstGeom>
+          <a:noFill/>
+        </p:spPr>
+        <p:txBody>
+          <a:bodyPr wrap="square" anchor="t" lIns="0" rIns="0" tIns="0" bIns="0">
+            <a:spAutoFit/>
+          </a:bodyPr>
+          <a:lstStyle/>
+          <a:p>
+            <a:pPr algn="l">
+              <a:lnSpc>
+                <a:spcPct val="112000"/>
+              </a:lnSpc>
+              <a:spcAft>
+                <a:spcPts val="400"/>
+              </a:spcAft>
+            </a:pPr>
+            <a:r>
+              <a:rPr sz="900" b="0">
+                <a:solidFill>
+                  <a:srgbClr val="434343"/>
+                </a:solidFill>
+                <a:latin typeface="Arial"/>
+              </a:rPr>
+              <a:t>No refusal, no noise, suite green — then document the bypass in CLAUDE.md</a:t>
             </a:r>
           </a:p>
         </p:txBody>
@@ -7944,7 +9195,7 @@
                 </a:solidFill>
                 <a:latin typeface="Arial"/>
               </a:rPr>
-              <a:t>DEMO · THE CHECK</a:t>
+              <a:t>DEMO · THE RULE</a:t>
             </a:r>
           </a:p>
         </p:txBody>
@@ -7983,7 +9234,7 @@
                 </a:solidFill>
                 <a:latin typeface="Arial"/>
               </a:rPr>
-              <a:t>Twenty lines, no dependencies</a:t>
+              <a:t>Read-only database unless approved</a:t>
             </a:r>
           </a:p>
         </p:txBody>
@@ -8025,7 +9276,7 @@
                 </a:solidFill>
                 <a:latin typeface="Arial"/>
               </a:rPr>
-              <a:t>Node, cross-platform, no packages. Half this room is on Windows.</a:t>
+              <a:t>The same three-layer shape as the seed guard, on a new subject — built along with me.</a:t>
             </a:r>
           </a:p>
         </p:txBody>
@@ -8071,102 +9322,14 @@
       </p:sp>
       <p:sp>
         <p:nvSpPr>
-          <p:cNvPr id="9" name="Rectangle 8"/>
-          <p:cNvSpPr/>
-          <p:nvPr/>
-        </p:nvSpPr>
-        <p:spPr>
-          <a:xfrm>
-            <a:off x="548640" y="1965960"/>
-            <a:ext cx="8046720" cy="2203704"/>
-          </a:xfrm>
-          <a:prstGeom prst="rect">
-            <a:avLst/>
-          </a:prstGeom>
-          <a:solidFill>
-            <a:srgbClr val="F4F5FB"/>
-          </a:solidFill>
-          <a:ln>
-            <a:noFill/>
-          </a:ln>
-          <a:effectLst/>
-        </p:spPr>
-        <p:style>
-          <a:lnRef idx="1">
-            <a:schemeClr val="accent1"/>
-          </a:lnRef>
-          <a:fillRef idx="3">
-            <a:schemeClr val="accent1"/>
-          </a:fillRef>
-          <a:effectRef idx="2">
-            <a:schemeClr val="accent1"/>
-          </a:effectRef>
-          <a:fontRef idx="minor">
-            <a:schemeClr val="lt1"/>
-          </a:fontRef>
-        </p:style>
-        <p:txBody>
-          <a:bodyPr rtlCol="0" anchor="ctr"/>
-          <a:lstStyle/>
-          <a:p>
-            <a:pPr algn="ctr"/>
-          </a:p>
-        </p:txBody>
-      </p:sp>
-      <p:sp>
-        <p:nvSpPr>
-          <p:cNvPr id="10" name="Rectangle 9"/>
-          <p:cNvSpPr/>
-          <p:nvPr/>
-        </p:nvSpPr>
-        <p:spPr>
-          <a:xfrm>
-            <a:off x="548640" y="1965960"/>
-            <a:ext cx="41148" cy="2203704"/>
-          </a:xfrm>
-          <a:prstGeom prst="rect">
-            <a:avLst/>
-          </a:prstGeom>
-          <a:solidFill>
-            <a:srgbClr val="403FE8"/>
-          </a:solidFill>
-          <a:ln>
-            <a:noFill/>
-          </a:ln>
-          <a:effectLst/>
-        </p:spPr>
-        <p:style>
-          <a:lnRef idx="1">
-            <a:schemeClr val="accent1"/>
-          </a:lnRef>
-          <a:fillRef idx="3">
-            <a:schemeClr val="accent1"/>
-          </a:fillRef>
-          <a:effectRef idx="2">
-            <a:schemeClr val="accent1"/>
-          </a:effectRef>
-          <a:fontRef idx="minor">
-            <a:schemeClr val="lt1"/>
-          </a:fontRef>
-        </p:style>
-        <p:txBody>
-          <a:bodyPr rtlCol="0" anchor="ctr"/>
-          <a:lstStyle/>
-          <a:p>
-            <a:pPr algn="ctr"/>
-          </a:p>
-        </p:txBody>
-      </p:sp>
-      <p:sp>
-        <p:nvSpPr>
-          <p:cNvPr id="11" name="TextBox 10"/>
-          <p:cNvSpPr txBox="1"/>
-          <p:nvPr/>
-        </p:nvSpPr>
-        <p:spPr>
-          <a:xfrm>
-            <a:off x="777240" y="2103120"/>
-            <a:ext cx="7635240" cy="1947672"/>
+          <p:cNvPr id="9" name="TextBox 8"/>
+          <p:cNvSpPr txBox="1"/>
+          <p:nvPr/>
+        </p:nvSpPr>
+        <p:spPr>
+          <a:xfrm>
+            <a:off x="548640" y="1783080"/>
+            <a:ext cx="7863840" cy="2935224"/>
           </a:xfrm>
           <a:prstGeom prst="rect">
             <a:avLst/>
@@ -8181,348 +9344,149 @@
           <a:p>
             <a:pPr algn="l">
               <a:lnSpc>
-                <a:spcPct val="114000"/>
+                <a:spcPct val="122000"/>
               </a:lnSpc>
               <a:spcAft>
-                <a:spcPts val="0"/>
-              </a:spcAft>
-            </a:pPr>
-            <a:r>
-              <a:rPr sz="850" b="0">
+                <a:spcPts val="900"/>
+              </a:spcAft>
+            </a:pPr>
+            <a:r>
+              <a:rPr sz="1250" b="1">
+                <a:solidFill>
+                  <a:srgbClr val="403FE8"/>
+                </a:solidFill>
+                <a:latin typeface="Arial"/>
+              </a:rPr>
+              <a:t>•  </a:t>
+            </a:r>
+            <a:r>
+              <a:rPr sz="1250" b="1">
+                <a:solidFill>
+                  <a:srgbClr val="13135E"/>
+                </a:solidFill>
+                <a:latin typeface="Arial"/>
+              </a:rPr>
+              <a:t>First: </a:t>
+            </a:r>
+            <a:r>
+              <a:rPr sz="1250" b="0">
                 <a:solidFill>
                   <a:srgbClr val="434343"/>
                 </a:solidFill>
-                <a:latin typeface="Consolas"/>
-              </a:rPr>
-              <a:t>const path = filePath.replaceAll('\\', '/');</a:t>
+                <a:latin typeface="Arial"/>
+              </a:rPr>
+              <a:t>`npm run reset-db` — db.json is generated and git-ignored, so a fresh copy does not have it.</a:t>
             </a:r>
           </a:p>
           <a:p>
             <a:pPr algn="l">
               <a:lnSpc>
-                <a:spcPct val="114000"/>
+                <a:spcPct val="122000"/>
               </a:lnSpc>
               <a:spcAft>
-                <a:spcPts val="0"/>
-              </a:spcAft>
-            </a:pPr>
-            <a:r>
-              <a:rPr sz="850" b="0">
+                <a:spcPts val="900"/>
+              </a:spcAft>
+            </a:pPr>
+            <a:r>
+              <a:rPr sz="1250" b="1">
+                <a:solidFill>
+                  <a:srgbClr val="403FE8"/>
+                </a:solidFill>
+                <a:latin typeface="Arial"/>
+              </a:rPr>
+              <a:t>•  </a:t>
+            </a:r>
+            <a:r>
+              <a:rPr sz="1250" b="1">
+                <a:solidFill>
+                  <a:srgbClr val="13135E"/>
+                </a:solidFill>
+                <a:latin typeface="Arial"/>
+              </a:rPr>
+              <a:t>The rule. </a:t>
+            </a:r>
+            <a:r>
+              <a:rPr sz="1250" b="0">
                 <a:solidFill>
                   <a:srgbClr val="434343"/>
                 </a:solidFill>
-                <a:latin typeface="Consolas"/>
-              </a:rPr>
-              <a:t/>
+                <a:latin typeface="Arial"/>
+              </a:rPr>
+              <a:t>`db.json` gets changed through the API or a reset — not edited directly.</a:t>
             </a:r>
           </a:p>
           <a:p>
             <a:pPr algn="l">
               <a:lnSpc>
-                <a:spcPct val="114000"/>
+                <a:spcPct val="122000"/>
               </a:lnSpc>
               <a:spcAft>
-                <a:spcPts val="0"/>
-              </a:spcAft>
-            </a:pPr>
-            <a:r>
-              <a:rPr sz="850" b="0">
+                <a:spcPts val="900"/>
+              </a:spcAft>
+            </a:pPr>
+            <a:r>
+              <a:rPr sz="1250" b="1">
+                <a:solidFill>
+                  <a:srgbClr val="403FE8"/>
+                </a:solidFill>
+                <a:latin typeface="Arial"/>
+              </a:rPr>
+              <a:t>•  </a:t>
+            </a:r>
+            <a:r>
+              <a:rPr sz="1250" b="1">
+                <a:solidFill>
+                  <a:srgbClr val="13135E"/>
+                </a:solidFill>
+                <a:latin typeface="Arial"/>
+              </a:rPr>
+              <a:t>Not the same rule as 2.a's. </a:t>
+            </a:r>
+            <a:r>
+              <a:rPr sz="1250" b="0">
                 <a:solidFill>
                   <a:srgbClr val="434343"/>
                 </a:solidFill>
-                <a:latin typeface="Consolas"/>
-              </a:rPr>
-              <a:t>if (path.endsWith('server/data/db.json')) {</a:t>
+                <a:latin typeface="Arial"/>
+              </a:rPr>
+              <a:t>The store boundary is about *imports* (`db/store.ts`); this is about *editing a file*. Same family, two rules — today's hook enforces this one.</a:t>
             </a:r>
           </a:p>
           <a:p>
             <a:pPr algn="l">
               <a:lnSpc>
-                <a:spcPct val="114000"/>
+                <a:spcPct val="122000"/>
               </a:lnSpc>
               <a:spcAft>
-                <a:spcPts val="0"/>
-              </a:spcAft>
-            </a:pPr>
-            <a:r>
-              <a:rPr sz="850" b="0">
+                <a:spcPts val="900"/>
+              </a:spcAft>
+            </a:pPr>
+            <a:r>
+              <a:rPr sz="1250" b="1">
+                <a:solidFill>
+                  <a:srgbClr val="403FE8"/>
+                </a:solidFill>
+                <a:latin typeface="Arial"/>
+              </a:rPr>
+              <a:t>•  </a:t>
+            </a:r>
+            <a:r>
+              <a:rPr sz="1250" b="1">
+                <a:solidFill>
+                  <a:srgbClr val="13135E"/>
+                </a:solidFill>
+                <a:latin typeface="Arial"/>
+              </a:rPr>
+              <a:t>Three layers, again. </a:t>
+            </a:r>
+            <a:r>
+              <a:rPr sz="1250" b="0">
                 <a:solidFill>
                   <a:srgbClr val="434343"/>
                 </a:solidFill>
-                <a:latin typeface="Consolas"/>
-              </a:rPr>
-              <a:t>  console.error([</a:t>
-            </a:r>
-          </a:p>
-          <a:p>
-            <a:pPr algn="l">
-              <a:lnSpc>
-                <a:spcPct val="114000"/>
-              </a:lnSpc>
-              <a:spcAft>
-                <a:spcPts val="0"/>
-              </a:spcAft>
-            </a:pPr>
-            <a:r>
-              <a:rPr sz="850" b="0">
-                <a:solidFill>
-                  <a:srgbClr val="434343"/>
-                </a:solidFill>
-                <a:latin typeface="Consolas"/>
-              </a:rPr>
-              <a:t>    'BLOCKED: db.json is generated, not edited.',</a:t>
-            </a:r>
-          </a:p>
-          <a:p>
-            <a:pPr algn="l">
-              <a:lnSpc>
-                <a:spcPct val="114000"/>
-              </a:lnSpc>
-              <a:spcAft>
-                <a:spcPts val="0"/>
-              </a:spcAft>
-            </a:pPr>
-            <a:r>
-              <a:rPr sz="850" b="0">
-                <a:solidFill>
-                  <a:srgbClr val="434343"/>
-                </a:solidFill>
-                <a:latin typeface="Consolas"/>
-              </a:rPr>
-              <a:t>    'Why: hand-edits are lost on the next reset and',</a:t>
-            </a:r>
-          </a:p>
-          <a:p>
-            <a:pPr algn="l">
-              <a:lnSpc>
-                <a:spcPct val="114000"/>
-              </a:lnSpc>
-              <a:spcAft>
-                <a:spcPts val="0"/>
-              </a:spcAft>
-            </a:pPr>
-            <a:r>
-              <a:rPr sz="850" b="0">
-                <a:solidFill>
-                  <a:srgbClr val="434343"/>
-                </a:solidFill>
-                <a:latin typeface="Consolas"/>
-              </a:rPr>
-              <a:t>    '  are invisible to everyone else.',</a:t>
-            </a:r>
-          </a:p>
-          <a:p>
-            <a:pPr algn="l">
-              <a:lnSpc>
-                <a:spcPct val="114000"/>
-              </a:lnSpc>
-              <a:spcAft>
-                <a:spcPts val="0"/>
-              </a:spcAft>
-            </a:pPr>
-            <a:r>
-              <a:rPr sz="850" b="0">
-                <a:solidFill>
-                  <a:srgbClr val="434343"/>
-                </a:solidFill>
-                <a:latin typeface="Consolas"/>
-              </a:rPr>
-              <a:t>    'Instead: change data through the API, or edit',</a:t>
-            </a:r>
-          </a:p>
-          <a:p>
-            <a:pPr algn="l">
-              <a:lnSpc>
-                <a:spcPct val="114000"/>
-              </a:lnSpc>
-              <a:spcAft>
-                <a:spcPts val="0"/>
-              </a:spcAft>
-            </a:pPr>
-            <a:r>
-              <a:rPr sz="850" b="0">
-                <a:solidFill>
-                  <a:srgbClr val="434343"/>
-                </a:solidFill>
-                <a:latin typeface="Consolas"/>
-              </a:rPr>
-              <a:t>    '  seed.json via PR and run npm run reset-db.',</a:t>
-            </a:r>
-          </a:p>
-          <a:p>
-            <a:pPr algn="l">
-              <a:lnSpc>
-                <a:spcPct val="114000"/>
-              </a:lnSpc>
-              <a:spcAft>
-                <a:spcPts val="0"/>
-              </a:spcAft>
-            </a:pPr>
-            <a:r>
-              <a:rPr sz="850" b="0">
-                <a:solidFill>
-                  <a:srgbClr val="434343"/>
-                </a:solidFill>
-                <a:latin typeface="Consolas"/>
-              </a:rPr>
-              <a:t>    'Done means: your data change survives a reset.',</a:t>
-            </a:r>
-          </a:p>
-          <a:p>
-            <a:pPr algn="l">
-              <a:lnSpc>
-                <a:spcPct val="114000"/>
-              </a:lnSpc>
-              <a:spcAft>
-                <a:spcPts val="0"/>
-              </a:spcAft>
-            </a:pPr>
-            <a:r>
-              <a:rPr sz="850" b="0">
-                <a:solidFill>
-                  <a:srgbClr val="434343"/>
-                </a:solidFill>
-                <a:latin typeface="Consolas"/>
-              </a:rPr>
-              <a:t>  ].join('\n'));</a:t>
-            </a:r>
-          </a:p>
-          <a:p>
-            <a:pPr algn="l">
-              <a:lnSpc>
-                <a:spcPct val="114000"/>
-              </a:lnSpc>
-              <a:spcAft>
-                <a:spcPts val="0"/>
-              </a:spcAft>
-            </a:pPr>
-            <a:r>
-              <a:rPr sz="850" b="0">
-                <a:solidFill>
-                  <a:srgbClr val="434343"/>
-                </a:solidFill>
-                <a:latin typeface="Consolas"/>
-              </a:rPr>
-              <a:t>  process.exit(2);   // PreToolUse -&gt; blocks</a:t>
-            </a:r>
-          </a:p>
-          <a:p>
-            <a:pPr algn="l">
-              <a:lnSpc>
-                <a:spcPct val="114000"/>
-              </a:lnSpc>
-              <a:spcAft>
-                <a:spcPts val="0"/>
-              </a:spcAft>
-            </a:pPr>
-            <a:r>
-              <a:rPr sz="850" b="0">
-                <a:solidFill>
-                  <a:srgbClr val="434343"/>
-                </a:solidFill>
-                <a:latin typeface="Consolas"/>
-              </a:rPr>
-              <a:t>}</a:t>
-            </a:r>
-          </a:p>
-          <a:p>
-            <a:pPr algn="l">
-              <a:lnSpc>
-                <a:spcPct val="114000"/>
-              </a:lnSpc>
-              <a:spcAft>
-                <a:spcPts val="0"/>
-              </a:spcAft>
-            </a:pPr>
-            <a:r>
-              <a:rPr sz="850" b="0">
-                <a:solidFill>
-                  <a:srgbClr val="434343"/>
-                </a:solidFill>
-                <a:latin typeface="Consolas"/>
-              </a:rPr>
-              <a:t>process.exit(0);</a:t>
-            </a:r>
-          </a:p>
-        </p:txBody>
-      </p:sp>
-      <p:sp>
-        <p:nvSpPr>
-          <p:cNvPr id="12" name="TextBox 11"/>
-          <p:cNvSpPr txBox="1"/>
-          <p:nvPr/>
-        </p:nvSpPr>
-        <p:spPr>
-          <a:xfrm>
-            <a:off x="548640" y="4279392"/>
-            <a:ext cx="7863840" cy="420624"/>
-          </a:xfrm>
-          <a:prstGeom prst="rect">
-            <a:avLst/>
-          </a:prstGeom>
-          <a:noFill/>
-        </p:spPr>
-        <p:txBody>
-          <a:bodyPr wrap="square" anchor="t" lIns="0" rIns="0" tIns="0" bIns="0">
-            <a:spAutoFit/>
-          </a:bodyPr>
-          <a:lstStyle/>
-          <a:p>
-            <a:pPr algn="l">
-              <a:lnSpc>
-                <a:spcPct val="120000"/>
-              </a:lnSpc>
-              <a:spcAft>
-                <a:spcPts val="400"/>
-              </a:spcAft>
-            </a:pPr>
-            <a:r>
-              <a:rPr sz="1000" b="0">
-                <a:solidFill>
-                  <a:srgbClr val="666666"/>
-                </a:solidFill>
-                <a:latin typeface="Arial"/>
-              </a:rPr>
-              <a:t>Registered on PreToolUse for Edit|Write — registration JSON is in the handout, and a NEW session is needed after registering: hooks load at session start.</a:t>
-            </a:r>
-          </a:p>
-        </p:txBody>
-      </p:sp>
-      <p:sp>
-        <p:nvSpPr>
-          <p:cNvPr id="13" name="TextBox 12"/>
-          <p:cNvSpPr txBox="1"/>
-          <p:nvPr/>
-        </p:nvSpPr>
-        <p:spPr>
-          <a:xfrm>
-            <a:off x="6675120" y="1728216"/>
-            <a:ext cx="1920240" cy="219456"/>
-          </a:xfrm>
-          <a:prstGeom prst="rect">
-            <a:avLst/>
-          </a:prstGeom>
-          <a:noFill/>
-        </p:spPr>
-        <p:txBody>
-          <a:bodyPr wrap="square" anchor="t" lIns="0" rIns="0" tIns="0" bIns="0">
-            <a:spAutoFit/>
-          </a:bodyPr>
-          <a:lstStyle/>
-          <a:p>
-            <a:pPr algn="r">
-              <a:spcAft>
-                <a:spcPts val="400"/>
-              </a:spcAft>
-            </a:pPr>
-            <a:r>
-              <a:rPr sz="850" b="0">
-                <a:solidFill>
-                  <a:srgbClr val="999999"/>
-                </a:solidFill>
-                <a:latin typeface="Arial"/>
-              </a:rPr>
-              <a:t>.claude/hooks/protect-db.js</a:t>
+                <a:latin typeface="Arial"/>
+              </a:rPr>
+              <a:t>A Don't line → a `permissions.deny` entry → a PreToolUse hook that explains itself.</a:t>
             </a:r>
           </a:p>
         </p:txBody>
@@ -8691,7 +9655,7 @@
                 </a:solidFill>
                 <a:latin typeface="Arial"/>
               </a:rPr>
-              <a:t>DEMO · VERIFY</a:t>
+              <a:t>DEMO · THE CHECK</a:t>
             </a:r>
           </a:p>
         </p:txBody>
@@ -8730,7 +9694,7 @@
                 </a:solidFill>
                 <a:latin typeface="Arial"/>
               </a:rPr>
-              <a:t>Both directions, then the bypass</a:t>
+              <a:t>Twenty lines, no dependencies</a:t>
             </a:r>
           </a:p>
         </p:txBody>
@@ -8772,7 +9736,7 @@
                 </a:solidFill>
                 <a:latin typeface="Arial"/>
               </a:rPr>
-              <a:t>This is the part of the demo worth your attention.</a:t>
+              <a:t>Node, cross-platform, no packages. Half this room is on Windows.</a:t>
             </a:r>
           </a:p>
         </p:txBody>
@@ -8824,8 +9788,8 @@
         </p:nvSpPr>
         <p:spPr>
           <a:xfrm>
-            <a:off x="548640" y="2103120"/>
-            <a:ext cx="2602992" cy="2011680"/>
+            <a:off x="548640" y="1965960"/>
+            <a:ext cx="8046720" cy="2203704"/>
           </a:xfrm>
           <a:prstGeom prst="rect">
             <a:avLst/>
@@ -8868,8 +9832,8 @@
         </p:nvSpPr>
         <p:spPr>
           <a:xfrm>
-            <a:off x="548640" y="2103120"/>
-            <a:ext cx="2602992" cy="41148"/>
+            <a:off x="548640" y="1965960"/>
+            <a:ext cx="41148" cy="2203704"/>
           </a:xfrm>
           <a:prstGeom prst="rect">
             <a:avLst/>
@@ -8912,8 +9876,8 @@
         </p:nvSpPr>
         <p:spPr>
           <a:xfrm>
-            <a:off x="731520" y="2286000"/>
-            <a:ext cx="2237232" cy="457200"/>
+            <a:off x="777240" y="2103120"/>
+            <a:ext cx="7635240" cy="1947672"/>
           </a:xfrm>
           <a:prstGeom prst="rect">
             <a:avLst/>
@@ -8928,20 +9892,267 @@
           <a:p>
             <a:pPr algn="l">
               <a:lnSpc>
-                <a:spcPct val="115000"/>
+                <a:spcPct val="114000"/>
               </a:lnSpc>
               <a:spcAft>
-                <a:spcPts val="400"/>
-              </a:spcAft>
-            </a:pPr>
-            <a:r>
-              <a:rPr sz="950" b="1">
-                <a:solidFill>
-                  <a:srgbClr val="403FE8"/>
-                </a:solidFill>
-                <a:latin typeface="Arial"/>
-              </a:rPr>
-              <a:t>BLOCKS</a:t>
+                <a:spcPts val="0"/>
+              </a:spcAft>
+            </a:pPr>
+            <a:r>
+              <a:rPr sz="850" b="0">
+                <a:solidFill>
+                  <a:srgbClr val="434343"/>
+                </a:solidFill>
+                <a:latin typeface="Consolas"/>
+              </a:rPr>
+              <a:t>const path = filePath.replaceAll('\\', '/');</a:t>
+            </a:r>
+          </a:p>
+          <a:p>
+            <a:pPr algn="l">
+              <a:lnSpc>
+                <a:spcPct val="114000"/>
+              </a:lnSpc>
+              <a:spcAft>
+                <a:spcPts val="0"/>
+              </a:spcAft>
+            </a:pPr>
+            <a:r>
+              <a:rPr sz="850" b="0">
+                <a:solidFill>
+                  <a:srgbClr val="434343"/>
+                </a:solidFill>
+                <a:latin typeface="Consolas"/>
+              </a:rPr>
+              <a:t/>
+            </a:r>
+          </a:p>
+          <a:p>
+            <a:pPr algn="l">
+              <a:lnSpc>
+                <a:spcPct val="114000"/>
+              </a:lnSpc>
+              <a:spcAft>
+                <a:spcPts val="0"/>
+              </a:spcAft>
+            </a:pPr>
+            <a:r>
+              <a:rPr sz="850" b="0">
+                <a:solidFill>
+                  <a:srgbClr val="434343"/>
+                </a:solidFill>
+                <a:latin typeface="Consolas"/>
+              </a:rPr>
+              <a:t>if (path.endsWith('server/data/db.json')) {</a:t>
+            </a:r>
+          </a:p>
+          <a:p>
+            <a:pPr algn="l">
+              <a:lnSpc>
+                <a:spcPct val="114000"/>
+              </a:lnSpc>
+              <a:spcAft>
+                <a:spcPts val="0"/>
+              </a:spcAft>
+            </a:pPr>
+            <a:r>
+              <a:rPr sz="850" b="0">
+                <a:solidFill>
+                  <a:srgbClr val="434343"/>
+                </a:solidFill>
+                <a:latin typeface="Consolas"/>
+              </a:rPr>
+              <a:t>  console.error([</a:t>
+            </a:r>
+          </a:p>
+          <a:p>
+            <a:pPr algn="l">
+              <a:lnSpc>
+                <a:spcPct val="114000"/>
+              </a:lnSpc>
+              <a:spcAft>
+                <a:spcPts val="0"/>
+              </a:spcAft>
+            </a:pPr>
+            <a:r>
+              <a:rPr sz="850" b="0">
+                <a:solidFill>
+                  <a:srgbClr val="434343"/>
+                </a:solidFill>
+                <a:latin typeface="Consolas"/>
+              </a:rPr>
+              <a:t>    'BLOCKED: db.json is generated, not edited.',</a:t>
+            </a:r>
+          </a:p>
+          <a:p>
+            <a:pPr algn="l">
+              <a:lnSpc>
+                <a:spcPct val="114000"/>
+              </a:lnSpc>
+              <a:spcAft>
+                <a:spcPts val="0"/>
+              </a:spcAft>
+            </a:pPr>
+            <a:r>
+              <a:rPr sz="850" b="0">
+                <a:solidFill>
+                  <a:srgbClr val="434343"/>
+                </a:solidFill>
+                <a:latin typeface="Consolas"/>
+              </a:rPr>
+              <a:t>    'Why: hand-edits are lost on the next reset and',</a:t>
+            </a:r>
+          </a:p>
+          <a:p>
+            <a:pPr algn="l">
+              <a:lnSpc>
+                <a:spcPct val="114000"/>
+              </a:lnSpc>
+              <a:spcAft>
+                <a:spcPts val="0"/>
+              </a:spcAft>
+            </a:pPr>
+            <a:r>
+              <a:rPr sz="850" b="0">
+                <a:solidFill>
+                  <a:srgbClr val="434343"/>
+                </a:solidFill>
+                <a:latin typeface="Consolas"/>
+              </a:rPr>
+              <a:t>    '  are invisible to everyone else.',</a:t>
+            </a:r>
+          </a:p>
+          <a:p>
+            <a:pPr algn="l">
+              <a:lnSpc>
+                <a:spcPct val="114000"/>
+              </a:lnSpc>
+              <a:spcAft>
+                <a:spcPts val="0"/>
+              </a:spcAft>
+            </a:pPr>
+            <a:r>
+              <a:rPr sz="850" b="0">
+                <a:solidFill>
+                  <a:srgbClr val="434343"/>
+                </a:solidFill>
+                <a:latin typeface="Consolas"/>
+              </a:rPr>
+              <a:t>    'Instead: change data through the API, or edit',</a:t>
+            </a:r>
+          </a:p>
+          <a:p>
+            <a:pPr algn="l">
+              <a:lnSpc>
+                <a:spcPct val="114000"/>
+              </a:lnSpc>
+              <a:spcAft>
+                <a:spcPts val="0"/>
+              </a:spcAft>
+            </a:pPr>
+            <a:r>
+              <a:rPr sz="850" b="0">
+                <a:solidFill>
+                  <a:srgbClr val="434343"/>
+                </a:solidFill>
+                <a:latin typeface="Consolas"/>
+              </a:rPr>
+              <a:t>    '  seed.json via PR and run npm run reset-db.',</a:t>
+            </a:r>
+          </a:p>
+          <a:p>
+            <a:pPr algn="l">
+              <a:lnSpc>
+                <a:spcPct val="114000"/>
+              </a:lnSpc>
+              <a:spcAft>
+                <a:spcPts val="0"/>
+              </a:spcAft>
+            </a:pPr>
+            <a:r>
+              <a:rPr sz="850" b="0">
+                <a:solidFill>
+                  <a:srgbClr val="434343"/>
+                </a:solidFill>
+                <a:latin typeface="Consolas"/>
+              </a:rPr>
+              <a:t>    'Done means: your data change survives a reset.',</a:t>
+            </a:r>
+          </a:p>
+          <a:p>
+            <a:pPr algn="l">
+              <a:lnSpc>
+                <a:spcPct val="114000"/>
+              </a:lnSpc>
+              <a:spcAft>
+                <a:spcPts val="0"/>
+              </a:spcAft>
+            </a:pPr>
+            <a:r>
+              <a:rPr sz="850" b="0">
+                <a:solidFill>
+                  <a:srgbClr val="434343"/>
+                </a:solidFill>
+                <a:latin typeface="Consolas"/>
+              </a:rPr>
+              <a:t>  ].join('\n'));</a:t>
+            </a:r>
+          </a:p>
+          <a:p>
+            <a:pPr algn="l">
+              <a:lnSpc>
+                <a:spcPct val="114000"/>
+              </a:lnSpc>
+              <a:spcAft>
+                <a:spcPts val="0"/>
+              </a:spcAft>
+            </a:pPr>
+            <a:r>
+              <a:rPr sz="850" b="0">
+                <a:solidFill>
+                  <a:srgbClr val="434343"/>
+                </a:solidFill>
+                <a:latin typeface="Consolas"/>
+              </a:rPr>
+              <a:t>  process.exit(2);   // PreToolUse -&gt; blocks</a:t>
+            </a:r>
+          </a:p>
+          <a:p>
+            <a:pPr algn="l">
+              <a:lnSpc>
+                <a:spcPct val="114000"/>
+              </a:lnSpc>
+              <a:spcAft>
+                <a:spcPts val="0"/>
+              </a:spcAft>
+            </a:pPr>
+            <a:r>
+              <a:rPr sz="850" b="0">
+                <a:solidFill>
+                  <a:srgbClr val="434343"/>
+                </a:solidFill>
+                <a:latin typeface="Consolas"/>
+              </a:rPr>
+              <a:t>}</a:t>
+            </a:r>
+          </a:p>
+          <a:p>
+            <a:pPr algn="l">
+              <a:lnSpc>
+                <a:spcPct val="114000"/>
+              </a:lnSpc>
+              <a:spcAft>
+                <a:spcPts val="0"/>
+              </a:spcAft>
+            </a:pPr>
+            <a:r>
+              <a:rPr sz="850" b="0">
+                <a:solidFill>
+                  <a:srgbClr val="434343"/>
+                </a:solidFill>
+                <a:latin typeface="Consolas"/>
+              </a:rPr>
+              <a:t>process.exit(0);</a:t>
             </a:r>
           </a:p>
         </p:txBody>
@@ -8954,589 +10165,8 @@
         </p:nvSpPr>
         <p:spPr>
           <a:xfrm>
-            <a:off x="731520" y="2816352"/>
-            <a:ext cx="2237232" cy="1143000"/>
-          </a:xfrm>
-          <a:prstGeom prst="rect">
-            <a:avLst/>
-          </a:prstGeom>
-          <a:noFill/>
-        </p:spPr>
-        <p:txBody>
-          <a:bodyPr wrap="square" anchor="t" lIns="0" rIns="0" tIns="0" bIns="0">
-            <a:spAutoFit/>
-          </a:bodyPr>
-          <a:lstStyle/>
-          <a:p>
-            <a:pPr algn="l">
-              <a:lnSpc>
-                <a:spcPct val="118000"/>
-              </a:lnSpc>
-              <a:spcAft>
-                <a:spcPts val="600"/>
-              </a:spcAft>
-            </a:pPr>
-            <a:r>
-              <a:rPr sz="1000" b="1">
-                <a:solidFill>
-                  <a:srgbClr val="A9B7F7"/>
-                </a:solidFill>
-                <a:latin typeface="Arial"/>
-              </a:rPr>
-              <a:t>•  </a:t>
-            </a:r>
-            <a:r>
-              <a:rPr sz="1000" b="0">
-                <a:solidFill>
-                  <a:srgbClr val="434343"/>
-                </a:solidFill>
-                <a:latin typeface="Arial"/>
-              </a:rPr>
-              <a:t>Ask Claude to edit db.json directly</a:t>
-            </a:r>
-          </a:p>
-          <a:p>
-            <a:pPr algn="l">
-              <a:lnSpc>
-                <a:spcPct val="118000"/>
-              </a:lnSpc>
-              <a:spcAft>
-                <a:spcPts val="600"/>
-              </a:spcAft>
-            </a:pPr>
-            <a:r>
-              <a:rPr sz="1000" b="1">
-                <a:solidFill>
-                  <a:srgbClr val="A9B7F7"/>
-                </a:solidFill>
-                <a:latin typeface="Arial"/>
-              </a:rPr>
-              <a:t>•  </a:t>
-            </a:r>
-            <a:r>
-              <a:rPr sz="1000" b="0">
-                <a:solidFill>
-                  <a:srgbClr val="434343"/>
-                </a:solidFill>
-                <a:latin typeface="Arial"/>
-              </a:rPr>
-              <a:t>Refusal message is useful, not just "no"</a:t>
-            </a:r>
-          </a:p>
-          <a:p>
-            <a:pPr algn="l">
-              <a:lnSpc>
-                <a:spcPct val="118000"/>
-              </a:lnSpc>
-              <a:spcAft>
-                <a:spcPts val="600"/>
-              </a:spcAft>
-            </a:pPr>
-            <a:r>
-              <a:rPr sz="1000" b="1">
-                <a:solidFill>
-                  <a:srgbClr val="A9B7F7"/>
-                </a:solidFill>
-                <a:latin typeface="Arial"/>
-              </a:rPr>
-              <a:t>•  </a:t>
-            </a:r>
-            <a:r>
-              <a:rPr sz="1000" b="0">
-                <a:solidFill>
-                  <a:srgbClr val="434343"/>
-                </a:solidFill>
-                <a:latin typeface="Arial"/>
-              </a:rPr>
-              <a:t>Confirm it did NOT touch the file</a:t>
-            </a:r>
-          </a:p>
-        </p:txBody>
-      </p:sp>
-      <p:sp>
-        <p:nvSpPr>
-          <p:cNvPr id="13" name="Rectangle 12"/>
-          <p:cNvSpPr/>
-          <p:nvPr/>
-        </p:nvSpPr>
-        <p:spPr>
-          <a:xfrm>
-            <a:off x="3270504" y="2103120"/>
-            <a:ext cx="2602992" cy="2011680"/>
-          </a:xfrm>
-          <a:prstGeom prst="rect">
-            <a:avLst/>
-          </a:prstGeom>
-          <a:solidFill>
-            <a:srgbClr val="F4F5FB"/>
-          </a:solidFill>
-          <a:ln>
-            <a:noFill/>
-          </a:ln>
-          <a:effectLst/>
-        </p:spPr>
-        <p:style>
-          <a:lnRef idx="1">
-            <a:schemeClr val="accent1"/>
-          </a:lnRef>
-          <a:fillRef idx="3">
-            <a:schemeClr val="accent1"/>
-          </a:fillRef>
-          <a:effectRef idx="2">
-            <a:schemeClr val="accent1"/>
-          </a:effectRef>
-          <a:fontRef idx="minor">
-            <a:schemeClr val="lt1"/>
-          </a:fontRef>
-        </p:style>
-        <p:txBody>
-          <a:bodyPr rtlCol="0" anchor="ctr"/>
-          <a:lstStyle/>
-          <a:p>
-            <a:pPr algn="ctr"/>
-          </a:p>
-        </p:txBody>
-      </p:sp>
-      <p:sp>
-        <p:nvSpPr>
-          <p:cNvPr id="14" name="Rectangle 13"/>
-          <p:cNvSpPr/>
-          <p:nvPr/>
-        </p:nvSpPr>
-        <p:spPr>
-          <a:xfrm>
-            <a:off x="3270504" y="2103120"/>
-            <a:ext cx="2602992" cy="41148"/>
-          </a:xfrm>
-          <a:prstGeom prst="rect">
-            <a:avLst/>
-          </a:prstGeom>
-          <a:solidFill>
-            <a:srgbClr val="403FE8"/>
-          </a:solidFill>
-          <a:ln>
-            <a:noFill/>
-          </a:ln>
-          <a:effectLst/>
-        </p:spPr>
-        <p:style>
-          <a:lnRef idx="1">
-            <a:schemeClr val="accent1"/>
-          </a:lnRef>
-          <a:fillRef idx="3">
-            <a:schemeClr val="accent1"/>
-          </a:fillRef>
-          <a:effectRef idx="2">
-            <a:schemeClr val="accent1"/>
-          </a:effectRef>
-          <a:fontRef idx="minor">
-            <a:schemeClr val="lt1"/>
-          </a:fontRef>
-        </p:style>
-        <p:txBody>
-          <a:bodyPr rtlCol="0" anchor="ctr"/>
-          <a:lstStyle/>
-          <a:p>
-            <a:pPr algn="ctr"/>
-          </a:p>
-        </p:txBody>
-      </p:sp>
-      <p:sp>
-        <p:nvSpPr>
-          <p:cNvPr id="15" name="TextBox 14"/>
-          <p:cNvSpPr txBox="1"/>
-          <p:nvPr/>
-        </p:nvSpPr>
-        <p:spPr>
-          <a:xfrm>
-            <a:off x="3453384" y="2286000"/>
-            <a:ext cx="2237232" cy="457200"/>
-          </a:xfrm>
-          <a:prstGeom prst="rect">
-            <a:avLst/>
-          </a:prstGeom>
-          <a:noFill/>
-        </p:spPr>
-        <p:txBody>
-          <a:bodyPr wrap="square" anchor="t" lIns="0" rIns="0" tIns="0" bIns="0">
-            <a:spAutoFit/>
-          </a:bodyPr>
-          <a:lstStyle/>
-          <a:p>
-            <a:pPr algn="l">
-              <a:lnSpc>
-                <a:spcPct val="115000"/>
-              </a:lnSpc>
-              <a:spcAft>
-                <a:spcPts val="400"/>
-              </a:spcAft>
-            </a:pPr>
-            <a:r>
-              <a:rPr sz="950" b="1">
-                <a:solidFill>
-                  <a:srgbClr val="403FE8"/>
-                </a:solidFill>
-                <a:latin typeface="Arial"/>
-              </a:rPr>
-              <a:t>ALLOWS</a:t>
-            </a:r>
-          </a:p>
-        </p:txBody>
-      </p:sp>
-      <p:sp>
-        <p:nvSpPr>
-          <p:cNvPr id="16" name="TextBox 15"/>
-          <p:cNvSpPr txBox="1"/>
-          <p:nvPr/>
-        </p:nvSpPr>
-        <p:spPr>
-          <a:xfrm>
-            <a:off x="3453384" y="2816352"/>
-            <a:ext cx="2237232" cy="1143000"/>
-          </a:xfrm>
-          <a:prstGeom prst="rect">
-            <a:avLst/>
-          </a:prstGeom>
-          <a:noFill/>
-        </p:spPr>
-        <p:txBody>
-          <a:bodyPr wrap="square" anchor="t" lIns="0" rIns="0" tIns="0" bIns="0">
-            <a:spAutoFit/>
-          </a:bodyPr>
-          <a:lstStyle/>
-          <a:p>
-            <a:pPr algn="l">
-              <a:lnSpc>
-                <a:spcPct val="118000"/>
-              </a:lnSpc>
-              <a:spcAft>
-                <a:spcPts val="600"/>
-              </a:spcAft>
-            </a:pPr>
-            <a:r>
-              <a:rPr sz="1000" b="1">
-                <a:solidFill>
-                  <a:srgbClr val="A9B7F7"/>
-                </a:solidFill>
-                <a:latin typeface="Arial"/>
-              </a:rPr>
-              <a:t>•  </a:t>
-            </a:r>
-            <a:r>
-              <a:rPr sz="1000" b="0">
-                <a:solidFill>
-                  <a:srgbClr val="434343"/>
-                </a:solidFill>
-                <a:latin typeface="Arial"/>
-              </a:rPr>
-              <a:t>Ask it to edit a file in server/src/repositories/</a:t>
-            </a:r>
-          </a:p>
-          <a:p>
-            <a:pPr algn="l">
-              <a:lnSpc>
-                <a:spcPct val="118000"/>
-              </a:lnSpc>
-              <a:spcAft>
-                <a:spcPts val="600"/>
-              </a:spcAft>
-            </a:pPr>
-            <a:r>
-              <a:rPr sz="1000" b="1">
-                <a:solidFill>
-                  <a:srgbClr val="A9B7F7"/>
-                </a:solidFill>
-                <a:latin typeface="Arial"/>
-              </a:rPr>
-              <a:t>•  </a:t>
-            </a:r>
-            <a:r>
-              <a:rPr sz="1000" b="0">
-                <a:solidFill>
-                  <a:srgbClr val="434343"/>
-                </a:solidFill>
-                <a:latin typeface="Arial"/>
-              </a:rPr>
-              <a:t>No refusal, no noise</a:t>
-            </a:r>
-          </a:p>
-          <a:p>
-            <a:pPr algn="l">
-              <a:lnSpc>
-                <a:spcPct val="118000"/>
-              </a:lnSpc>
-              <a:spcAft>
-                <a:spcPts val="600"/>
-              </a:spcAft>
-            </a:pPr>
-            <a:r>
-              <a:rPr sz="1000" b="1">
-                <a:solidFill>
-                  <a:srgbClr val="A9B7F7"/>
-                </a:solidFill>
-                <a:latin typeface="Arial"/>
-              </a:rPr>
-              <a:t>•  </a:t>
-            </a:r>
-            <a:r>
-              <a:rPr sz="1000" b="0">
-                <a:solidFill>
-                  <a:srgbClr val="434343"/>
-                </a:solidFill>
-                <a:latin typeface="Arial"/>
-              </a:rPr>
-              <a:t>npm test — still green</a:t>
-            </a:r>
-          </a:p>
-        </p:txBody>
-      </p:sp>
-      <p:sp>
-        <p:nvSpPr>
-          <p:cNvPr id="17" name="Rectangle 16"/>
-          <p:cNvSpPr/>
-          <p:nvPr/>
-        </p:nvSpPr>
-        <p:spPr>
-          <a:xfrm>
-            <a:off x="5992368" y="2103120"/>
-            <a:ext cx="2602992" cy="2011680"/>
-          </a:xfrm>
-          <a:prstGeom prst="rect">
-            <a:avLst/>
-          </a:prstGeom>
-          <a:solidFill>
-            <a:srgbClr val="F4F5FB"/>
-          </a:solidFill>
-          <a:ln>
-            <a:noFill/>
-          </a:ln>
-          <a:effectLst/>
-        </p:spPr>
-        <p:style>
-          <a:lnRef idx="1">
-            <a:schemeClr val="accent1"/>
-          </a:lnRef>
-          <a:fillRef idx="3">
-            <a:schemeClr val="accent1"/>
-          </a:fillRef>
-          <a:effectRef idx="2">
-            <a:schemeClr val="accent1"/>
-          </a:effectRef>
-          <a:fontRef idx="minor">
-            <a:schemeClr val="lt1"/>
-          </a:fontRef>
-        </p:style>
-        <p:txBody>
-          <a:bodyPr rtlCol="0" anchor="ctr"/>
-          <a:lstStyle/>
-          <a:p>
-            <a:pPr algn="ctr"/>
-          </a:p>
-        </p:txBody>
-      </p:sp>
-      <p:sp>
-        <p:nvSpPr>
-          <p:cNvPr id="18" name="Rectangle 17"/>
-          <p:cNvSpPr/>
-          <p:nvPr/>
-        </p:nvSpPr>
-        <p:spPr>
-          <a:xfrm>
-            <a:off x="5992368" y="2103120"/>
-            <a:ext cx="2602992" cy="41148"/>
-          </a:xfrm>
-          <a:prstGeom prst="rect">
-            <a:avLst/>
-          </a:prstGeom>
-          <a:solidFill>
-            <a:srgbClr val="403FE8"/>
-          </a:solidFill>
-          <a:ln>
-            <a:noFill/>
-          </a:ln>
-          <a:effectLst/>
-        </p:spPr>
-        <p:style>
-          <a:lnRef idx="1">
-            <a:schemeClr val="accent1"/>
-          </a:lnRef>
-          <a:fillRef idx="3">
-            <a:schemeClr val="accent1"/>
-          </a:fillRef>
-          <a:effectRef idx="2">
-            <a:schemeClr val="accent1"/>
-          </a:effectRef>
-          <a:fontRef idx="minor">
-            <a:schemeClr val="lt1"/>
-          </a:fontRef>
-        </p:style>
-        <p:txBody>
-          <a:bodyPr rtlCol="0" anchor="ctr"/>
-          <a:lstStyle/>
-          <a:p>
-            <a:pPr algn="ctr"/>
-          </a:p>
-        </p:txBody>
-      </p:sp>
-      <p:sp>
-        <p:nvSpPr>
-          <p:cNvPr id="19" name="TextBox 18"/>
-          <p:cNvSpPr txBox="1"/>
-          <p:nvPr/>
-        </p:nvSpPr>
-        <p:spPr>
-          <a:xfrm>
-            <a:off x="6175248" y="2286000"/>
-            <a:ext cx="2237232" cy="457200"/>
-          </a:xfrm>
-          <a:prstGeom prst="rect">
-            <a:avLst/>
-          </a:prstGeom>
-          <a:noFill/>
-        </p:spPr>
-        <p:txBody>
-          <a:bodyPr wrap="square" anchor="t" lIns="0" rIns="0" tIns="0" bIns="0">
-            <a:spAutoFit/>
-          </a:bodyPr>
-          <a:lstStyle/>
-          <a:p>
-            <a:pPr algn="l">
-              <a:lnSpc>
-                <a:spcPct val="115000"/>
-              </a:lnSpc>
-              <a:spcAft>
-                <a:spcPts val="400"/>
-              </a:spcAft>
-            </a:pPr>
-            <a:r>
-              <a:rPr sz="950" b="1">
-                <a:solidFill>
-                  <a:srgbClr val="403FE8"/>
-                </a:solidFill>
-                <a:latin typeface="Arial"/>
-              </a:rPr>
-              <a:t>BYPASS</a:t>
-            </a:r>
-          </a:p>
-        </p:txBody>
-      </p:sp>
-      <p:sp>
-        <p:nvSpPr>
-          <p:cNvPr id="20" name="TextBox 19"/>
-          <p:cNvSpPr txBox="1"/>
-          <p:nvPr/>
-        </p:nvSpPr>
-        <p:spPr>
-          <a:xfrm>
-            <a:off x="6175248" y="2816352"/>
-            <a:ext cx="2237232" cy="1143000"/>
-          </a:xfrm>
-          <a:prstGeom prst="rect">
-            <a:avLst/>
-          </a:prstGeom>
-          <a:noFill/>
-        </p:spPr>
-        <p:txBody>
-          <a:bodyPr wrap="square" anchor="t" lIns="0" rIns="0" tIns="0" bIns="0">
-            <a:spAutoFit/>
-          </a:bodyPr>
-          <a:lstStyle/>
-          <a:p>
-            <a:pPr algn="l">
-              <a:lnSpc>
-                <a:spcPct val="118000"/>
-              </a:lnSpc>
-              <a:spcAft>
-                <a:spcPts val="600"/>
-              </a:spcAft>
-            </a:pPr>
-            <a:r>
-              <a:rPr sz="1000" b="1">
-                <a:solidFill>
-                  <a:srgbClr val="A9B7F7"/>
-                </a:solidFill>
-                <a:latin typeface="Arial"/>
-              </a:rPr>
-              <a:t>•  </a:t>
-            </a:r>
-            <a:r>
-              <a:rPr sz="1000" b="0">
-                <a:solidFill>
-                  <a:srgbClr val="434343"/>
-                </a:solidFill>
-                <a:latin typeface="Arial"/>
-              </a:rPr>
-              <a:t>Documented in CLAUDE.md</a:t>
-            </a:r>
-          </a:p>
-          <a:p>
-            <a:pPr algn="l">
-              <a:lnSpc>
-                <a:spcPct val="118000"/>
-              </a:lnSpc>
-              <a:spcAft>
-                <a:spcPts val="600"/>
-              </a:spcAft>
-            </a:pPr>
-            <a:r>
-              <a:rPr sz="1000" b="1">
-                <a:solidFill>
-                  <a:srgbClr val="A9B7F7"/>
-                </a:solidFill>
-                <a:latin typeface="Arial"/>
-              </a:rPr>
-              <a:t>•  </a:t>
-            </a:r>
-            <a:r>
-              <a:rPr sz="1000" b="0">
-                <a:solidFill>
-                  <a:srgbClr val="434343"/>
-                </a:solidFill>
-                <a:latin typeface="Arial"/>
-              </a:rPr>
-              <a:t>Instructor approval, via PR</a:t>
-            </a:r>
-          </a:p>
-          <a:p>
-            <a:pPr algn="l">
-              <a:lnSpc>
-                <a:spcPct val="118000"/>
-              </a:lnSpc>
-              <a:spcAft>
-                <a:spcPts val="600"/>
-              </a:spcAft>
-            </a:pPr>
-            <a:r>
-              <a:rPr sz="1000" b="1">
-                <a:solidFill>
-                  <a:srgbClr val="A9B7F7"/>
-                </a:solidFill>
-                <a:latin typeface="Arial"/>
-              </a:rPr>
-              <a:t>•  </a:t>
-            </a:r>
-            <a:r>
-              <a:rPr sz="1000" b="0">
-                <a:solidFill>
-                  <a:srgbClr val="434343"/>
-                </a:solidFill>
-                <a:latin typeface="Arial"/>
-              </a:rPr>
-              <a:t>Not "disable the hook"</a:t>
-            </a:r>
-          </a:p>
-        </p:txBody>
-      </p:sp>
-      <p:sp>
-        <p:nvSpPr>
-          <p:cNvPr id="21" name="TextBox 20"/>
-          <p:cNvSpPr txBox="1"/>
-          <p:nvPr/>
-        </p:nvSpPr>
-        <p:spPr>
-          <a:xfrm>
-            <a:off x="548640" y="4261104"/>
-            <a:ext cx="7863840" cy="402336"/>
+            <a:off x="548640" y="4279392"/>
+            <a:ext cx="7863840" cy="420624"/>
           </a:xfrm>
           <a:prstGeom prst="rect">
             <a:avLst/>
@@ -9558,13 +10188,52 @@
               </a:spcAft>
             </a:pPr>
             <a:r>
-              <a:rPr sz="1050" b="0">
+              <a:rPr sz="1000" b="0">
                 <a:solidFill>
                   <a:srgbClr val="666666"/>
                 </a:solidFill>
                 <a:latin typeface="Arial"/>
               </a:rPr>
-              <a:t>If the allow case fails, the guardrail is worse than nothing — it now blocks work, and someone will remove it by Friday.</a:t>
+              <a:t>Registered on PreToolUse for Edit|Write — registration JSON is in the handout, and a NEW session is needed after registering: hooks load at session start.</a:t>
+            </a:r>
+          </a:p>
+        </p:txBody>
+      </p:sp>
+      <p:sp>
+        <p:nvSpPr>
+          <p:cNvPr id="13" name="TextBox 12"/>
+          <p:cNvSpPr txBox="1"/>
+          <p:nvPr/>
+        </p:nvSpPr>
+        <p:spPr>
+          <a:xfrm>
+            <a:off x="6675120" y="1728216"/>
+            <a:ext cx="1920240" cy="219456"/>
+          </a:xfrm>
+          <a:prstGeom prst="rect">
+            <a:avLst/>
+          </a:prstGeom>
+          <a:noFill/>
+        </p:spPr>
+        <p:txBody>
+          <a:bodyPr wrap="square" anchor="t" lIns="0" rIns="0" tIns="0" bIns="0">
+            <a:spAutoFit/>
+          </a:bodyPr>
+          <a:lstStyle/>
+          <a:p>
+            <a:pPr algn="r">
+              <a:spcAft>
+                <a:spcPts val="400"/>
+              </a:spcAft>
+            </a:pPr>
+            <a:r>
+              <a:rPr sz="850" b="0">
+                <a:solidFill>
+                  <a:srgbClr val="999999"/>
+                </a:solidFill>
+                <a:latin typeface="Arial"/>
+              </a:rPr>
+              <a:t>.claude/hooks/protect-db.js</a:t>
             </a:r>
           </a:p>
         </p:txBody>
@@ -9733,7 +10402,7 @@
                 </a:solidFill>
                 <a:latin typeface="Arial"/>
               </a:rPr>
-              <a:t>CHECKPOINT</a:t>
+              <a:t>DEMO · VERIFY</a:t>
             </a:r>
           </a:p>
         </p:txBody>
@@ -9772,7 +10441,7 @@
                 </a:solidFill>
                 <a:latin typeface="Arial"/>
               </a:rPr>
-              <a:t>Checkpoint 1</a:t>
+              <a:t>Both directions, then the bypass</a:t>
             </a:r>
           </a:p>
         </p:txBody>
@@ -9780,6 +10449,48 @@
       <p:sp>
         <p:nvSpPr>
           <p:cNvPr id="7" name="TextBox 6"/>
+          <p:cNvSpPr txBox="1"/>
+          <p:nvPr/>
+        </p:nvSpPr>
+        <p:spPr>
+          <a:xfrm>
+            <a:off x="548640" y="1316736"/>
+            <a:ext cx="7863840" cy="566928"/>
+          </a:xfrm>
+          <a:prstGeom prst="rect">
+            <a:avLst/>
+          </a:prstGeom>
+          <a:noFill/>
+        </p:spPr>
+        <p:txBody>
+          <a:bodyPr wrap="square" anchor="t" lIns="0" rIns="0" tIns="0" bIns="0">
+            <a:spAutoFit/>
+          </a:bodyPr>
+          <a:lstStyle/>
+          <a:p>
+            <a:pPr algn="l">
+              <a:lnSpc>
+                <a:spcPct val="125000"/>
+              </a:lnSpc>
+              <a:spcAft>
+                <a:spcPts val="400"/>
+              </a:spcAft>
+            </a:pPr>
+            <a:r>
+              <a:rPr sz="1200" b="0">
+                <a:solidFill>
+                  <a:srgbClr val="434343"/>
+                </a:solidFill>
+                <a:latin typeface="Arial"/>
+              </a:rPr>
+              <a:t>This is the part of the demo worth your attention.</a:t>
+            </a:r>
+          </a:p>
+        </p:txBody>
+      </p:sp>
+      <p:sp>
+        <p:nvSpPr>
+          <p:cNvPr id="8" name="TextBox 7"/>
           <p:cNvSpPr txBox="1"/>
           <p:nvPr/>
         </p:nvSpPr>
@@ -9818,20 +10529,20 @@
       </p:sp>
       <p:sp>
         <p:nvSpPr>
-          <p:cNvPr id="8" name="Rectangle 7"/>
+          <p:cNvPr id="9" name="Rectangle 8"/>
           <p:cNvSpPr/>
           <p:nvPr/>
         </p:nvSpPr>
         <p:spPr>
           <a:xfrm>
-            <a:off x="548640" y="1691640"/>
-            <a:ext cx="8046720" cy="1417320"/>
+            <a:off x="548640" y="2103120"/>
+            <a:ext cx="2602992" cy="2011680"/>
           </a:xfrm>
           <a:prstGeom prst="rect">
             <a:avLst/>
           </a:prstGeom>
           <a:solidFill>
-            <a:srgbClr val="E2ECFF"/>
+            <a:srgbClr val="F4F5FB"/>
           </a:solidFill>
           <a:ln>
             <a:noFill/>
@@ -9862,20 +10573,20 @@
       </p:sp>
       <p:sp>
         <p:nvSpPr>
-          <p:cNvPr id="9" name="Rectangle 8"/>
+          <p:cNvPr id="10" name="Rectangle 9"/>
           <p:cNvSpPr/>
           <p:nvPr/>
         </p:nvSpPr>
         <p:spPr>
           <a:xfrm>
-            <a:off x="548640" y="1691640"/>
-            <a:ext cx="54864" cy="1417320"/>
+            <a:off x="548640" y="2103120"/>
+            <a:ext cx="2602992" cy="41148"/>
           </a:xfrm>
           <a:prstGeom prst="rect">
             <a:avLst/>
           </a:prstGeom>
           <a:solidFill>
-            <a:srgbClr val="1B7F4B"/>
+            <a:srgbClr val="403FE8"/>
           </a:solidFill>
           <a:ln>
             <a:noFill/>
@@ -9906,27 +10617,30 @@
       </p:sp>
       <p:sp>
         <p:nvSpPr>
-          <p:cNvPr id="10" name="TextBox 9"/>
-          <p:cNvSpPr txBox="1"/>
-          <p:nvPr/>
-        </p:nvSpPr>
-        <p:spPr>
-          <a:xfrm>
-            <a:off x="868680" y="1874519"/>
-            <a:ext cx="7498079" cy="310896"/>
-          </a:xfrm>
-          <a:prstGeom prst="rect">
-            <a:avLst/>
-          </a:prstGeom>
-          <a:noFill/>
-        </p:spPr>
-        <p:txBody>
-          <a:bodyPr wrap="square" anchor="t" lIns="0" rIns="0" tIns="0" bIns="0">
-            <a:spAutoFit/>
-          </a:bodyPr>
-          <a:lstStyle/>
-          <a:p>
-            <a:pPr algn="l">
+          <p:cNvPr id="11" name="TextBox 10"/>
+          <p:cNvSpPr txBox="1"/>
+          <p:nvPr/>
+        </p:nvSpPr>
+        <p:spPr>
+          <a:xfrm>
+            <a:off x="731520" y="2286000"/>
+            <a:ext cx="2237232" cy="457200"/>
+          </a:xfrm>
+          <a:prstGeom prst="rect">
+            <a:avLst/>
+          </a:prstGeom>
+          <a:noFill/>
+        </p:spPr>
+        <p:txBody>
+          <a:bodyPr wrap="square" anchor="t" lIns="0" rIns="0" tIns="0" bIns="0">
+            <a:spAutoFit/>
+          </a:bodyPr>
+          <a:lstStyle/>
+          <a:p>
+            <a:pPr algn="l">
+              <a:lnSpc>
+                <a:spcPct val="115000"/>
+              </a:lnSpc>
               <a:spcAft>
                 <a:spcPts val="400"/>
               </a:spcAft>
@@ -9934,25 +10648,606 @@
             <a:r>
               <a:rPr sz="950" b="1">
                 <a:solidFill>
-                  <a:srgbClr val="1B7F4B"/>
-                </a:solidFill>
-                <a:latin typeface="Arial"/>
-              </a:rPr>
-              <a:t>NOBODY ADVANCES UNTIL THIS IS TRUE</a:t>
-            </a:r>
-          </a:p>
-        </p:txBody>
-      </p:sp>
-      <p:sp>
-        <p:nvSpPr>
-          <p:cNvPr id="11" name="TextBox 10"/>
-          <p:cNvSpPr txBox="1"/>
-          <p:nvPr/>
-        </p:nvSpPr>
-        <p:spPr>
-          <a:xfrm>
-            <a:off x="868680" y="2240280"/>
-            <a:ext cx="7498079" cy="777240"/>
+                  <a:srgbClr val="403FE8"/>
+                </a:solidFill>
+                <a:latin typeface="Arial"/>
+              </a:rPr>
+              <a:t>BLOCKS</a:t>
+            </a:r>
+          </a:p>
+        </p:txBody>
+      </p:sp>
+      <p:sp>
+        <p:nvSpPr>
+          <p:cNvPr id="12" name="TextBox 11"/>
+          <p:cNvSpPr txBox="1"/>
+          <p:nvPr/>
+        </p:nvSpPr>
+        <p:spPr>
+          <a:xfrm>
+            <a:off x="731520" y="2816352"/>
+            <a:ext cx="2237232" cy="1143000"/>
+          </a:xfrm>
+          <a:prstGeom prst="rect">
+            <a:avLst/>
+          </a:prstGeom>
+          <a:noFill/>
+        </p:spPr>
+        <p:txBody>
+          <a:bodyPr wrap="square" anchor="t" lIns="0" rIns="0" tIns="0" bIns="0">
+            <a:spAutoFit/>
+          </a:bodyPr>
+          <a:lstStyle/>
+          <a:p>
+            <a:pPr algn="l">
+              <a:lnSpc>
+                <a:spcPct val="118000"/>
+              </a:lnSpc>
+              <a:spcAft>
+                <a:spcPts val="600"/>
+              </a:spcAft>
+            </a:pPr>
+            <a:r>
+              <a:rPr sz="1000" b="1">
+                <a:solidFill>
+                  <a:srgbClr val="A9B7F7"/>
+                </a:solidFill>
+                <a:latin typeface="Arial"/>
+              </a:rPr>
+              <a:t>•  </a:t>
+            </a:r>
+            <a:r>
+              <a:rPr sz="1000" b="0">
+                <a:solidFill>
+                  <a:srgbClr val="434343"/>
+                </a:solidFill>
+                <a:latin typeface="Arial"/>
+              </a:rPr>
+              <a:t>Ask Claude to edit db.json directly</a:t>
+            </a:r>
+          </a:p>
+          <a:p>
+            <a:pPr algn="l">
+              <a:lnSpc>
+                <a:spcPct val="118000"/>
+              </a:lnSpc>
+              <a:spcAft>
+                <a:spcPts val="600"/>
+              </a:spcAft>
+            </a:pPr>
+            <a:r>
+              <a:rPr sz="1000" b="1">
+                <a:solidFill>
+                  <a:srgbClr val="A9B7F7"/>
+                </a:solidFill>
+                <a:latin typeface="Arial"/>
+              </a:rPr>
+              <a:t>•  </a:t>
+            </a:r>
+            <a:r>
+              <a:rPr sz="1000" b="0">
+                <a:solidFill>
+                  <a:srgbClr val="434343"/>
+                </a:solidFill>
+                <a:latin typeface="Arial"/>
+              </a:rPr>
+              <a:t>Refusal message is useful, not just "no"</a:t>
+            </a:r>
+          </a:p>
+          <a:p>
+            <a:pPr algn="l">
+              <a:lnSpc>
+                <a:spcPct val="118000"/>
+              </a:lnSpc>
+              <a:spcAft>
+                <a:spcPts val="600"/>
+              </a:spcAft>
+            </a:pPr>
+            <a:r>
+              <a:rPr sz="1000" b="1">
+                <a:solidFill>
+                  <a:srgbClr val="A9B7F7"/>
+                </a:solidFill>
+                <a:latin typeface="Arial"/>
+              </a:rPr>
+              <a:t>•  </a:t>
+            </a:r>
+            <a:r>
+              <a:rPr sz="1000" b="0">
+                <a:solidFill>
+                  <a:srgbClr val="434343"/>
+                </a:solidFill>
+                <a:latin typeface="Arial"/>
+              </a:rPr>
+              <a:t>Confirm it did NOT touch the file</a:t>
+            </a:r>
+          </a:p>
+        </p:txBody>
+      </p:sp>
+      <p:sp>
+        <p:nvSpPr>
+          <p:cNvPr id="13" name="Rectangle 12"/>
+          <p:cNvSpPr/>
+          <p:nvPr/>
+        </p:nvSpPr>
+        <p:spPr>
+          <a:xfrm>
+            <a:off x="3270504" y="2103120"/>
+            <a:ext cx="2602992" cy="2011680"/>
+          </a:xfrm>
+          <a:prstGeom prst="rect">
+            <a:avLst/>
+          </a:prstGeom>
+          <a:solidFill>
+            <a:srgbClr val="F4F5FB"/>
+          </a:solidFill>
+          <a:ln>
+            <a:noFill/>
+          </a:ln>
+          <a:effectLst/>
+        </p:spPr>
+        <p:style>
+          <a:lnRef idx="1">
+            <a:schemeClr val="accent1"/>
+          </a:lnRef>
+          <a:fillRef idx="3">
+            <a:schemeClr val="accent1"/>
+          </a:fillRef>
+          <a:effectRef idx="2">
+            <a:schemeClr val="accent1"/>
+          </a:effectRef>
+          <a:fontRef idx="minor">
+            <a:schemeClr val="lt1"/>
+          </a:fontRef>
+        </p:style>
+        <p:txBody>
+          <a:bodyPr rtlCol="0" anchor="ctr"/>
+          <a:lstStyle/>
+          <a:p>
+            <a:pPr algn="ctr"/>
+          </a:p>
+        </p:txBody>
+      </p:sp>
+      <p:sp>
+        <p:nvSpPr>
+          <p:cNvPr id="14" name="Rectangle 13"/>
+          <p:cNvSpPr/>
+          <p:nvPr/>
+        </p:nvSpPr>
+        <p:spPr>
+          <a:xfrm>
+            <a:off x="3270504" y="2103120"/>
+            <a:ext cx="2602992" cy="41148"/>
+          </a:xfrm>
+          <a:prstGeom prst="rect">
+            <a:avLst/>
+          </a:prstGeom>
+          <a:solidFill>
+            <a:srgbClr val="403FE8"/>
+          </a:solidFill>
+          <a:ln>
+            <a:noFill/>
+          </a:ln>
+          <a:effectLst/>
+        </p:spPr>
+        <p:style>
+          <a:lnRef idx="1">
+            <a:schemeClr val="accent1"/>
+          </a:lnRef>
+          <a:fillRef idx="3">
+            <a:schemeClr val="accent1"/>
+          </a:fillRef>
+          <a:effectRef idx="2">
+            <a:schemeClr val="accent1"/>
+          </a:effectRef>
+          <a:fontRef idx="minor">
+            <a:schemeClr val="lt1"/>
+          </a:fontRef>
+        </p:style>
+        <p:txBody>
+          <a:bodyPr rtlCol="0" anchor="ctr"/>
+          <a:lstStyle/>
+          <a:p>
+            <a:pPr algn="ctr"/>
+          </a:p>
+        </p:txBody>
+      </p:sp>
+      <p:sp>
+        <p:nvSpPr>
+          <p:cNvPr id="15" name="TextBox 14"/>
+          <p:cNvSpPr txBox="1"/>
+          <p:nvPr/>
+        </p:nvSpPr>
+        <p:spPr>
+          <a:xfrm>
+            <a:off x="3453384" y="2286000"/>
+            <a:ext cx="2237232" cy="457200"/>
+          </a:xfrm>
+          <a:prstGeom prst="rect">
+            <a:avLst/>
+          </a:prstGeom>
+          <a:noFill/>
+        </p:spPr>
+        <p:txBody>
+          <a:bodyPr wrap="square" anchor="t" lIns="0" rIns="0" tIns="0" bIns="0">
+            <a:spAutoFit/>
+          </a:bodyPr>
+          <a:lstStyle/>
+          <a:p>
+            <a:pPr algn="l">
+              <a:lnSpc>
+                <a:spcPct val="115000"/>
+              </a:lnSpc>
+              <a:spcAft>
+                <a:spcPts val="400"/>
+              </a:spcAft>
+            </a:pPr>
+            <a:r>
+              <a:rPr sz="950" b="1">
+                <a:solidFill>
+                  <a:srgbClr val="403FE8"/>
+                </a:solidFill>
+                <a:latin typeface="Arial"/>
+              </a:rPr>
+              <a:t>ALLOWS</a:t>
+            </a:r>
+          </a:p>
+        </p:txBody>
+      </p:sp>
+      <p:sp>
+        <p:nvSpPr>
+          <p:cNvPr id="16" name="TextBox 15"/>
+          <p:cNvSpPr txBox="1"/>
+          <p:nvPr/>
+        </p:nvSpPr>
+        <p:spPr>
+          <a:xfrm>
+            <a:off x="3453384" y="2816352"/>
+            <a:ext cx="2237232" cy="1143000"/>
+          </a:xfrm>
+          <a:prstGeom prst="rect">
+            <a:avLst/>
+          </a:prstGeom>
+          <a:noFill/>
+        </p:spPr>
+        <p:txBody>
+          <a:bodyPr wrap="square" anchor="t" lIns="0" rIns="0" tIns="0" bIns="0">
+            <a:spAutoFit/>
+          </a:bodyPr>
+          <a:lstStyle/>
+          <a:p>
+            <a:pPr algn="l">
+              <a:lnSpc>
+                <a:spcPct val="118000"/>
+              </a:lnSpc>
+              <a:spcAft>
+                <a:spcPts val="600"/>
+              </a:spcAft>
+            </a:pPr>
+            <a:r>
+              <a:rPr sz="1000" b="1">
+                <a:solidFill>
+                  <a:srgbClr val="A9B7F7"/>
+                </a:solidFill>
+                <a:latin typeface="Arial"/>
+              </a:rPr>
+              <a:t>•  </a:t>
+            </a:r>
+            <a:r>
+              <a:rPr sz="1000" b="0">
+                <a:solidFill>
+                  <a:srgbClr val="434343"/>
+                </a:solidFill>
+                <a:latin typeface="Arial"/>
+              </a:rPr>
+              <a:t>Ask it to edit a file in server/src/repositories/</a:t>
+            </a:r>
+          </a:p>
+          <a:p>
+            <a:pPr algn="l">
+              <a:lnSpc>
+                <a:spcPct val="118000"/>
+              </a:lnSpc>
+              <a:spcAft>
+                <a:spcPts val="600"/>
+              </a:spcAft>
+            </a:pPr>
+            <a:r>
+              <a:rPr sz="1000" b="1">
+                <a:solidFill>
+                  <a:srgbClr val="A9B7F7"/>
+                </a:solidFill>
+                <a:latin typeface="Arial"/>
+              </a:rPr>
+              <a:t>•  </a:t>
+            </a:r>
+            <a:r>
+              <a:rPr sz="1000" b="0">
+                <a:solidFill>
+                  <a:srgbClr val="434343"/>
+                </a:solidFill>
+                <a:latin typeface="Arial"/>
+              </a:rPr>
+              <a:t>No refusal, no noise</a:t>
+            </a:r>
+          </a:p>
+          <a:p>
+            <a:pPr algn="l">
+              <a:lnSpc>
+                <a:spcPct val="118000"/>
+              </a:lnSpc>
+              <a:spcAft>
+                <a:spcPts val="600"/>
+              </a:spcAft>
+            </a:pPr>
+            <a:r>
+              <a:rPr sz="1000" b="1">
+                <a:solidFill>
+                  <a:srgbClr val="A9B7F7"/>
+                </a:solidFill>
+                <a:latin typeface="Arial"/>
+              </a:rPr>
+              <a:t>•  </a:t>
+            </a:r>
+            <a:r>
+              <a:rPr sz="1000" b="0">
+                <a:solidFill>
+                  <a:srgbClr val="434343"/>
+                </a:solidFill>
+                <a:latin typeface="Arial"/>
+              </a:rPr>
+              <a:t>npm test — still green</a:t>
+            </a:r>
+          </a:p>
+        </p:txBody>
+      </p:sp>
+      <p:sp>
+        <p:nvSpPr>
+          <p:cNvPr id="17" name="Rectangle 16"/>
+          <p:cNvSpPr/>
+          <p:nvPr/>
+        </p:nvSpPr>
+        <p:spPr>
+          <a:xfrm>
+            <a:off x="5992368" y="2103120"/>
+            <a:ext cx="2602992" cy="2011680"/>
+          </a:xfrm>
+          <a:prstGeom prst="rect">
+            <a:avLst/>
+          </a:prstGeom>
+          <a:solidFill>
+            <a:srgbClr val="F4F5FB"/>
+          </a:solidFill>
+          <a:ln>
+            <a:noFill/>
+          </a:ln>
+          <a:effectLst/>
+        </p:spPr>
+        <p:style>
+          <a:lnRef idx="1">
+            <a:schemeClr val="accent1"/>
+          </a:lnRef>
+          <a:fillRef idx="3">
+            <a:schemeClr val="accent1"/>
+          </a:fillRef>
+          <a:effectRef idx="2">
+            <a:schemeClr val="accent1"/>
+          </a:effectRef>
+          <a:fontRef idx="minor">
+            <a:schemeClr val="lt1"/>
+          </a:fontRef>
+        </p:style>
+        <p:txBody>
+          <a:bodyPr rtlCol="0" anchor="ctr"/>
+          <a:lstStyle/>
+          <a:p>
+            <a:pPr algn="ctr"/>
+          </a:p>
+        </p:txBody>
+      </p:sp>
+      <p:sp>
+        <p:nvSpPr>
+          <p:cNvPr id="18" name="Rectangle 17"/>
+          <p:cNvSpPr/>
+          <p:nvPr/>
+        </p:nvSpPr>
+        <p:spPr>
+          <a:xfrm>
+            <a:off x="5992368" y="2103120"/>
+            <a:ext cx="2602992" cy="41148"/>
+          </a:xfrm>
+          <a:prstGeom prst="rect">
+            <a:avLst/>
+          </a:prstGeom>
+          <a:solidFill>
+            <a:srgbClr val="403FE8"/>
+          </a:solidFill>
+          <a:ln>
+            <a:noFill/>
+          </a:ln>
+          <a:effectLst/>
+        </p:spPr>
+        <p:style>
+          <a:lnRef idx="1">
+            <a:schemeClr val="accent1"/>
+          </a:lnRef>
+          <a:fillRef idx="3">
+            <a:schemeClr val="accent1"/>
+          </a:fillRef>
+          <a:effectRef idx="2">
+            <a:schemeClr val="accent1"/>
+          </a:effectRef>
+          <a:fontRef idx="minor">
+            <a:schemeClr val="lt1"/>
+          </a:fontRef>
+        </p:style>
+        <p:txBody>
+          <a:bodyPr rtlCol="0" anchor="ctr"/>
+          <a:lstStyle/>
+          <a:p>
+            <a:pPr algn="ctr"/>
+          </a:p>
+        </p:txBody>
+      </p:sp>
+      <p:sp>
+        <p:nvSpPr>
+          <p:cNvPr id="19" name="TextBox 18"/>
+          <p:cNvSpPr txBox="1"/>
+          <p:nvPr/>
+        </p:nvSpPr>
+        <p:spPr>
+          <a:xfrm>
+            <a:off x="6175248" y="2286000"/>
+            <a:ext cx="2237232" cy="457200"/>
+          </a:xfrm>
+          <a:prstGeom prst="rect">
+            <a:avLst/>
+          </a:prstGeom>
+          <a:noFill/>
+        </p:spPr>
+        <p:txBody>
+          <a:bodyPr wrap="square" anchor="t" lIns="0" rIns="0" tIns="0" bIns="0">
+            <a:spAutoFit/>
+          </a:bodyPr>
+          <a:lstStyle/>
+          <a:p>
+            <a:pPr algn="l">
+              <a:lnSpc>
+                <a:spcPct val="115000"/>
+              </a:lnSpc>
+              <a:spcAft>
+                <a:spcPts val="400"/>
+              </a:spcAft>
+            </a:pPr>
+            <a:r>
+              <a:rPr sz="950" b="1">
+                <a:solidFill>
+                  <a:srgbClr val="403FE8"/>
+                </a:solidFill>
+                <a:latin typeface="Arial"/>
+              </a:rPr>
+              <a:t>BYPASS</a:t>
+            </a:r>
+          </a:p>
+        </p:txBody>
+      </p:sp>
+      <p:sp>
+        <p:nvSpPr>
+          <p:cNvPr id="20" name="TextBox 19"/>
+          <p:cNvSpPr txBox="1"/>
+          <p:nvPr/>
+        </p:nvSpPr>
+        <p:spPr>
+          <a:xfrm>
+            <a:off x="6175248" y="2816352"/>
+            <a:ext cx="2237232" cy="1143000"/>
+          </a:xfrm>
+          <a:prstGeom prst="rect">
+            <a:avLst/>
+          </a:prstGeom>
+          <a:noFill/>
+        </p:spPr>
+        <p:txBody>
+          <a:bodyPr wrap="square" anchor="t" lIns="0" rIns="0" tIns="0" bIns="0">
+            <a:spAutoFit/>
+          </a:bodyPr>
+          <a:lstStyle/>
+          <a:p>
+            <a:pPr algn="l">
+              <a:lnSpc>
+                <a:spcPct val="118000"/>
+              </a:lnSpc>
+              <a:spcAft>
+                <a:spcPts val="600"/>
+              </a:spcAft>
+            </a:pPr>
+            <a:r>
+              <a:rPr sz="1000" b="1">
+                <a:solidFill>
+                  <a:srgbClr val="A9B7F7"/>
+                </a:solidFill>
+                <a:latin typeface="Arial"/>
+              </a:rPr>
+              <a:t>•  </a:t>
+            </a:r>
+            <a:r>
+              <a:rPr sz="1000" b="0">
+                <a:solidFill>
+                  <a:srgbClr val="434343"/>
+                </a:solidFill>
+                <a:latin typeface="Arial"/>
+              </a:rPr>
+              <a:t>Documented in CLAUDE.md</a:t>
+            </a:r>
+          </a:p>
+          <a:p>
+            <a:pPr algn="l">
+              <a:lnSpc>
+                <a:spcPct val="118000"/>
+              </a:lnSpc>
+              <a:spcAft>
+                <a:spcPts val="600"/>
+              </a:spcAft>
+            </a:pPr>
+            <a:r>
+              <a:rPr sz="1000" b="1">
+                <a:solidFill>
+                  <a:srgbClr val="A9B7F7"/>
+                </a:solidFill>
+                <a:latin typeface="Arial"/>
+              </a:rPr>
+              <a:t>•  </a:t>
+            </a:r>
+            <a:r>
+              <a:rPr sz="1000" b="0">
+                <a:solidFill>
+                  <a:srgbClr val="434343"/>
+                </a:solidFill>
+                <a:latin typeface="Arial"/>
+              </a:rPr>
+              <a:t>Instructor approval, via PR</a:t>
+            </a:r>
+          </a:p>
+          <a:p>
+            <a:pPr algn="l">
+              <a:lnSpc>
+                <a:spcPct val="118000"/>
+              </a:lnSpc>
+              <a:spcAft>
+                <a:spcPts val="600"/>
+              </a:spcAft>
+            </a:pPr>
+            <a:r>
+              <a:rPr sz="1000" b="1">
+                <a:solidFill>
+                  <a:srgbClr val="A9B7F7"/>
+                </a:solidFill>
+                <a:latin typeface="Arial"/>
+              </a:rPr>
+              <a:t>•  </a:t>
+            </a:r>
+            <a:r>
+              <a:rPr sz="1000" b="0">
+                <a:solidFill>
+                  <a:srgbClr val="434343"/>
+                </a:solidFill>
+                <a:latin typeface="Arial"/>
+              </a:rPr>
+              <a:t>Not "disable the hook"</a:t>
+            </a:r>
+          </a:p>
+        </p:txBody>
+      </p:sp>
+      <p:sp>
+        <p:nvSpPr>
+          <p:cNvPr id="21" name="TextBox 20"/>
+          <p:cNvSpPr txBox="1"/>
+          <p:nvPr/>
+        </p:nvSpPr>
+        <p:spPr>
+          <a:xfrm>
+            <a:off x="548640" y="4261104"/>
+            <a:ext cx="7863840" cy="402336"/>
           </a:xfrm>
           <a:prstGeom prst="rect">
             <a:avLst/>
@@ -9974,55 +11269,13 @@
               </a:spcAft>
             </a:pPr>
             <a:r>
-              <a:rPr sz="1400" b="1">
-                <a:solidFill>
-                  <a:srgbClr val="13135E"/>
-                </a:solidFill>
-                <a:latin typeface="Arial"/>
-              </a:rPr>
-              <a:t>In YOUR copy: Claude is refused when it edits server/data/db.json, and succeeds when it edits a file in server/src/repositories/.</a:t>
-            </a:r>
-          </a:p>
-        </p:txBody>
-      </p:sp>
-      <p:sp>
-        <p:nvSpPr>
-          <p:cNvPr id="12" name="TextBox 11"/>
-          <p:cNvSpPr txBox="1"/>
-          <p:nvPr/>
-        </p:nvSpPr>
-        <p:spPr>
-          <a:xfrm>
-            <a:off x="548640" y="3337560"/>
-            <a:ext cx="7863840" cy="1005840"/>
-          </a:xfrm>
-          <a:prstGeom prst="rect">
-            <a:avLst/>
-          </a:prstGeom>
-          <a:noFill/>
-        </p:spPr>
-        <p:txBody>
-          <a:bodyPr wrap="square" anchor="t" lIns="0" rIns="0" tIns="0" bIns="0">
-            <a:spAutoFit/>
-          </a:bodyPr>
-          <a:lstStyle/>
-          <a:p>
-            <a:pPr algn="l">
-              <a:lnSpc>
-                <a:spcPct val="130000"/>
-              </a:lnSpc>
-              <a:spcAft>
-                <a:spcPts val="400"/>
-              </a:spcAft>
-            </a:pPr>
-            <a:r>
-              <a:rPr sz="1150" b="0">
-                <a:solidFill>
-                  <a:srgbClr val="434343"/>
-                </a:solidFill>
-                <a:latin typeface="Arial"/>
-              </a:rPr>
-              <a:t>Both directions, out loud. If you only tested the block, you have not finished — run the allow case now.</a:t>
+              <a:rPr sz="1050" b="0">
+                <a:solidFill>
+                  <a:srgbClr val="666666"/>
+                </a:solidFill>
+                <a:latin typeface="Arial"/>
+              </a:rPr>
+              <a:t>If the allow case fails, the guardrail is worse than nothing — it now blocks work, and someone will remove it by Friday.</a:t>
             </a:r>
           </a:p>
         </p:txBody>
@@ -10191,7 +11444,7 @@
                 </a:solidFill>
                 <a:latin typeface="Arial"/>
               </a:rPr>
-              <a:t>YOUR STACK</a:t>
+              <a:t>CHECKPOINT</a:t>
             </a:r>
           </a:p>
         </p:txBody>
@@ -10230,7 +11483,7 @@
                 </a:solidFill>
                 <a:latin typeface="Arial"/>
               </a:rPr>
-              <a:t>The same pattern, somewhere you will recognise</a:t>
+              <a:t>Checkpoint 1</a:t>
             </a:r>
           </a:p>
         </p:txBody>
@@ -10238,48 +11491,6 @@
       <p:sp>
         <p:nvSpPr>
           <p:cNvPr id="7" name="TextBox 6"/>
-          <p:cNvSpPr txBox="1"/>
-          <p:nvPr/>
-        </p:nvSpPr>
-        <p:spPr>
-          <a:xfrm>
-            <a:off x="548640" y="1316736"/>
-            <a:ext cx="7863840" cy="566928"/>
-          </a:xfrm>
-          <a:prstGeom prst="rect">
-            <a:avLst/>
-          </a:prstGeom>
-          <a:noFill/>
-        </p:spPr>
-        <p:txBody>
-          <a:bodyPr wrap="square" anchor="t" lIns="0" rIns="0" tIns="0" bIns="0">
-            <a:spAutoFit/>
-          </a:bodyPr>
-          <a:lstStyle/>
-          <a:p>
-            <a:pPr algn="l">
-              <a:lnSpc>
-                <a:spcPct val="125000"/>
-              </a:lnSpc>
-              <a:spcAft>
-                <a:spcPts val="400"/>
-              </a:spcAft>
-            </a:pPr>
-            <a:r>
-              <a:rPr sz="1200" b="0">
-                <a:solidFill>
-                  <a:srgbClr val="434343"/>
-                </a:solidFill>
-                <a:latin typeface="Arial"/>
-              </a:rPr>
-              <a:t>Illustration, not today's exercise. A rule most teams have written down and almost nobody checks.</a:t>
-            </a:r>
-          </a:p>
-        </p:txBody>
-      </p:sp>
-      <p:sp>
-        <p:nvSpPr>
-          <p:cNvPr id="8" name="TextBox 7"/>
           <p:cNvSpPr txBox="1"/>
           <p:nvPr/>
         </p:nvSpPr>
@@ -10318,20 +11529,20 @@
       </p:sp>
       <p:sp>
         <p:nvSpPr>
-          <p:cNvPr id="9" name="Rectangle 8"/>
+          <p:cNvPr id="8" name="Rectangle 7"/>
           <p:cNvSpPr/>
           <p:nvPr/>
         </p:nvSpPr>
         <p:spPr>
           <a:xfrm>
-            <a:off x="548640" y="2011680"/>
-            <a:ext cx="8046720" cy="310896"/>
+            <a:off x="548640" y="1691640"/>
+            <a:ext cx="8046720" cy="1417320"/>
           </a:xfrm>
           <a:prstGeom prst="rect">
             <a:avLst/>
           </a:prstGeom>
           <a:solidFill>
-            <a:srgbClr val="403FE8"/>
+            <a:srgbClr val="E2ECFF"/>
           </a:solidFill>
           <a:ln>
             <a:noFill/>
@@ -10362,98 +11573,20 @@
       </p:sp>
       <p:sp>
         <p:nvSpPr>
-          <p:cNvPr id="10" name="TextBox 9"/>
-          <p:cNvSpPr txBox="1"/>
-          <p:nvPr/>
-        </p:nvSpPr>
-        <p:spPr>
-          <a:xfrm>
-            <a:off x="640080" y="2089404"/>
-            <a:ext cx="1828800" cy="219456"/>
-          </a:xfrm>
-          <a:prstGeom prst="rect">
-            <a:avLst/>
-          </a:prstGeom>
-          <a:noFill/>
-        </p:spPr>
-        <p:txBody>
-          <a:bodyPr wrap="square" anchor="t" lIns="0" rIns="0" tIns="0" bIns="0">
-            <a:spAutoFit/>
-          </a:bodyPr>
-          <a:lstStyle/>
-          <a:p>
-            <a:pPr algn="l">
-              <a:spcAft>
-                <a:spcPts val="400"/>
-              </a:spcAft>
-            </a:pPr>
-            <a:r>
-              <a:rPr sz="900" b="1">
-                <a:solidFill>
-                  <a:srgbClr val="FFFFFF"/>
-                </a:solidFill>
-                <a:latin typeface="Arial"/>
-              </a:rPr>
-              <a:t>Layer</a:t>
-            </a:r>
-          </a:p>
-        </p:txBody>
-      </p:sp>
-      <p:sp>
-        <p:nvSpPr>
-          <p:cNvPr id="11" name="TextBox 10"/>
-          <p:cNvSpPr txBox="1"/>
-          <p:nvPr/>
-        </p:nvSpPr>
-        <p:spPr>
-          <a:xfrm>
-            <a:off x="2651760" y="2089404"/>
-            <a:ext cx="5852159" cy="219456"/>
-          </a:xfrm>
-          <a:prstGeom prst="rect">
-            <a:avLst/>
-          </a:prstGeom>
-          <a:noFill/>
-        </p:spPr>
-        <p:txBody>
-          <a:bodyPr wrap="square" anchor="t" lIns="0" rIns="0" tIns="0" bIns="0">
-            <a:spAutoFit/>
-          </a:bodyPr>
-          <a:lstStyle/>
-          <a:p>
-            <a:pPr algn="l">
-              <a:spcAft>
-                <a:spcPts val="400"/>
-              </a:spcAft>
-            </a:pPr>
-            <a:r>
-              <a:rPr sz="900" b="1">
-                <a:solidFill>
-                  <a:srgbClr val="FFFFFF"/>
-                </a:solidFill>
-                <a:latin typeface="Arial"/>
-              </a:rPr>
-              <a:t>Applied to a stored-procedure convention</a:t>
-            </a:r>
-          </a:p>
-        </p:txBody>
-      </p:sp>
-      <p:sp>
-        <p:nvSpPr>
-          <p:cNvPr id="12" name="Rectangle 11"/>
+          <p:cNvPr id="9" name="Rectangle 8"/>
           <p:cNvSpPr/>
           <p:nvPr/>
         </p:nvSpPr>
         <p:spPr>
           <a:xfrm>
-            <a:off x="548640" y="2322576"/>
-            <a:ext cx="8046720" cy="384048"/>
+            <a:off x="548640" y="1691640"/>
+            <a:ext cx="54864" cy="1417320"/>
           </a:xfrm>
           <a:prstGeom prst="rect">
             <a:avLst/>
           </a:prstGeom>
           <a:solidFill>
-            <a:srgbClr val="F4F5FB"/>
+            <a:srgbClr val="1B7F4B"/>
           </a:solidFill>
           <a:ln>
             <a:noFill/>
@@ -10484,30 +11617,27 @@
       </p:sp>
       <p:sp>
         <p:nvSpPr>
-          <p:cNvPr id="13" name="TextBox 12"/>
-          <p:cNvSpPr txBox="1"/>
-          <p:nvPr/>
-        </p:nvSpPr>
-        <p:spPr>
-          <a:xfrm>
-            <a:off x="640080" y="2377440"/>
-            <a:ext cx="1828800" cy="292607"/>
-          </a:xfrm>
-          <a:prstGeom prst="rect">
-            <a:avLst/>
-          </a:prstGeom>
-          <a:noFill/>
-        </p:spPr>
-        <p:txBody>
-          <a:bodyPr wrap="square" anchor="t" lIns="0" rIns="0" tIns="0" bIns="0">
-            <a:spAutoFit/>
-          </a:bodyPr>
-          <a:lstStyle/>
-          <a:p>
-            <a:pPr algn="l">
-              <a:lnSpc>
-                <a:spcPct val="112000"/>
-              </a:lnSpc>
+          <p:cNvPr id="10" name="TextBox 9"/>
+          <p:cNvSpPr txBox="1"/>
+          <p:nvPr/>
+        </p:nvSpPr>
+        <p:spPr>
+          <a:xfrm>
+            <a:off x="868680" y="1874519"/>
+            <a:ext cx="7498079" cy="310896"/>
+          </a:xfrm>
+          <a:prstGeom prst="rect">
+            <a:avLst/>
+          </a:prstGeom>
+          <a:noFill/>
+        </p:spPr>
+        <p:txBody>
+          <a:bodyPr wrap="square" anchor="t" lIns="0" rIns="0" tIns="0" bIns="0">
+            <a:spAutoFit/>
+          </a:bodyPr>
+          <a:lstStyle/>
+          <a:p>
+            <a:pPr algn="l">
               <a:spcAft>
                 <a:spcPts val="400"/>
               </a:spcAft>
@@ -10515,579 +11645,25 @@
             <a:r>
               <a:rPr sz="950" b="1">
                 <a:solidFill>
-                  <a:srgbClr val="13135E"/>
-                </a:solidFill>
-                <a:latin typeface="Arial"/>
-              </a:rPr>
-              <a:t>1 Instruction</a:t>
-            </a:r>
-          </a:p>
-        </p:txBody>
-      </p:sp>
-      <p:sp>
-        <p:nvSpPr>
-          <p:cNvPr id="14" name="TextBox 13"/>
-          <p:cNvSpPr txBox="1"/>
-          <p:nvPr/>
-        </p:nvSpPr>
-        <p:spPr>
-          <a:xfrm>
-            <a:off x="2651760" y="2377440"/>
-            <a:ext cx="5852159" cy="292607"/>
-          </a:xfrm>
-          <a:prstGeom prst="rect">
-            <a:avLst/>
-          </a:prstGeom>
-          <a:noFill/>
-        </p:spPr>
-        <p:txBody>
-          <a:bodyPr wrap="square" anchor="t" lIns="0" rIns="0" tIns="0" bIns="0">
-            <a:spAutoFit/>
-          </a:bodyPr>
-          <a:lstStyle/>
-          <a:p>
-            <a:pPr algn="l">
-              <a:lnSpc>
-                <a:spcPct val="112000"/>
-              </a:lnSpc>
-              <a:spcAft>
-                <a:spcPts val="400"/>
-              </a:spcAft>
-            </a:pPr>
-            <a:r>
-              <a:rPr sz="950" b="0">
-                <a:solidFill>
-                  <a:srgbClr val="434343"/>
-                </a:solidFill>
-                <a:latin typeface="Arial"/>
-              </a:rPr>
-              <a:t>One line: parameters only — never concatenate into executable SQL</a:t>
-            </a:r>
-          </a:p>
-        </p:txBody>
-      </p:sp>
-      <p:sp>
-        <p:nvSpPr>
-          <p:cNvPr id="15" name="Rectangle 14"/>
-          <p:cNvSpPr/>
-          <p:nvPr/>
-        </p:nvSpPr>
-        <p:spPr>
-          <a:xfrm>
-            <a:off x="548640" y="2706624"/>
-            <a:ext cx="8046720" cy="384048"/>
-          </a:xfrm>
-          <a:prstGeom prst="rect">
-            <a:avLst/>
-          </a:prstGeom>
-          <a:solidFill>
-            <a:srgbClr val="FFFFFF"/>
-          </a:solidFill>
-          <a:ln>
-            <a:noFill/>
-          </a:ln>
-          <a:effectLst/>
-        </p:spPr>
-        <p:style>
-          <a:lnRef idx="1">
-            <a:schemeClr val="accent1"/>
-          </a:lnRef>
-          <a:fillRef idx="3">
-            <a:schemeClr val="accent1"/>
-          </a:fillRef>
-          <a:effectRef idx="2">
-            <a:schemeClr val="accent1"/>
-          </a:effectRef>
-          <a:fontRef idx="minor">
-            <a:schemeClr val="lt1"/>
-          </a:fontRef>
-        </p:style>
-        <p:txBody>
-          <a:bodyPr rtlCol="0" anchor="ctr"/>
-          <a:lstStyle/>
-          <a:p>
-            <a:pPr algn="ctr"/>
-          </a:p>
-        </p:txBody>
-      </p:sp>
-      <p:sp>
-        <p:nvSpPr>
-          <p:cNvPr id="16" name="TextBox 15"/>
-          <p:cNvSpPr txBox="1"/>
-          <p:nvPr/>
-        </p:nvSpPr>
-        <p:spPr>
-          <a:xfrm>
-            <a:off x="640080" y="2761488"/>
-            <a:ext cx="1828800" cy="292607"/>
-          </a:xfrm>
-          <a:prstGeom prst="rect">
-            <a:avLst/>
-          </a:prstGeom>
-          <a:noFill/>
-        </p:spPr>
-        <p:txBody>
-          <a:bodyPr wrap="square" anchor="t" lIns="0" rIns="0" tIns="0" bIns="0">
-            <a:spAutoFit/>
-          </a:bodyPr>
-          <a:lstStyle/>
-          <a:p>
-            <a:pPr algn="l">
-              <a:lnSpc>
-                <a:spcPct val="112000"/>
-              </a:lnSpc>
-              <a:spcAft>
-                <a:spcPts val="400"/>
-              </a:spcAft>
-            </a:pPr>
-            <a:r>
-              <a:rPr sz="950" b="1">
-                <a:solidFill>
-                  <a:srgbClr val="13135E"/>
-                </a:solidFill>
-                <a:latin typeface="Arial"/>
-              </a:rPr>
-              <a:t>2 Client-side deterministic</a:t>
-            </a:r>
-          </a:p>
-        </p:txBody>
-      </p:sp>
-      <p:sp>
-        <p:nvSpPr>
-          <p:cNvPr id="17" name="TextBox 16"/>
-          <p:cNvSpPr txBox="1"/>
-          <p:nvPr/>
-        </p:nvSpPr>
-        <p:spPr>
-          <a:xfrm>
-            <a:off x="2651760" y="2761488"/>
-            <a:ext cx="5852159" cy="292607"/>
-          </a:xfrm>
-          <a:prstGeom prst="rect">
-            <a:avLst/>
-          </a:prstGeom>
-          <a:noFill/>
-        </p:spPr>
-        <p:txBody>
-          <a:bodyPr wrap="square" anchor="t" lIns="0" rIns="0" tIns="0" bIns="0">
-            <a:spAutoFit/>
-          </a:bodyPr>
-          <a:lstStyle/>
-          <a:p>
-            <a:pPr algn="l">
-              <a:lnSpc>
-                <a:spcPct val="112000"/>
-              </a:lnSpc>
-              <a:spcAft>
-                <a:spcPts val="400"/>
-              </a:spcAft>
-            </a:pPr>
-            <a:r>
-              <a:rPr sz="950" b="0">
-                <a:solidFill>
-                  <a:srgbClr val="434343"/>
-                </a:solidFill>
-                <a:latin typeface="Arial"/>
-              </a:rPr>
-              <a:t>A hook inspecting the CONTENT of the .sql being written, not just the path</a:t>
-            </a:r>
-          </a:p>
-        </p:txBody>
-      </p:sp>
-      <p:sp>
-        <p:nvSpPr>
-          <p:cNvPr id="18" name="Rectangle 17"/>
-          <p:cNvSpPr/>
-          <p:nvPr/>
-        </p:nvSpPr>
-        <p:spPr>
-          <a:xfrm>
-            <a:off x="548640" y="3090672"/>
-            <a:ext cx="8046720" cy="384048"/>
-          </a:xfrm>
-          <a:prstGeom prst="rect">
-            <a:avLst/>
-          </a:prstGeom>
-          <a:solidFill>
-            <a:srgbClr val="F4F5FB"/>
-          </a:solidFill>
-          <a:ln>
-            <a:noFill/>
-          </a:ln>
-          <a:effectLst/>
-        </p:spPr>
-        <p:style>
-          <a:lnRef idx="1">
-            <a:schemeClr val="accent1"/>
-          </a:lnRef>
-          <a:fillRef idx="3">
-            <a:schemeClr val="accent1"/>
-          </a:fillRef>
-          <a:effectRef idx="2">
-            <a:schemeClr val="accent1"/>
-          </a:effectRef>
-          <a:fontRef idx="minor">
-            <a:schemeClr val="lt1"/>
-          </a:fontRef>
-        </p:style>
-        <p:txBody>
-          <a:bodyPr rtlCol="0" anchor="ctr"/>
-          <a:lstStyle/>
-          <a:p>
-            <a:pPr algn="ctr"/>
-          </a:p>
-        </p:txBody>
-      </p:sp>
-      <p:sp>
-        <p:nvSpPr>
-          <p:cNvPr id="19" name="TextBox 18"/>
-          <p:cNvSpPr txBox="1"/>
-          <p:nvPr/>
-        </p:nvSpPr>
-        <p:spPr>
-          <a:xfrm>
-            <a:off x="640080" y="3145536"/>
-            <a:ext cx="1828800" cy="292607"/>
-          </a:xfrm>
-          <a:prstGeom prst="rect">
-            <a:avLst/>
-          </a:prstGeom>
-          <a:noFill/>
-        </p:spPr>
-        <p:txBody>
-          <a:bodyPr wrap="square" anchor="t" lIns="0" rIns="0" tIns="0" bIns="0">
-            <a:spAutoFit/>
-          </a:bodyPr>
-          <a:lstStyle/>
-          <a:p>
-            <a:pPr algn="l">
-              <a:lnSpc>
-                <a:spcPct val="112000"/>
-              </a:lnSpc>
-              <a:spcAft>
-                <a:spcPts val="400"/>
-              </a:spcAft>
-            </a:pPr>
-            <a:r>
-              <a:rPr sz="950" b="1">
-                <a:solidFill>
-                  <a:srgbClr val="13135E"/>
-                </a:solidFill>
-                <a:latin typeface="Arial"/>
-              </a:rPr>
-              <a:t>4 CI gate</a:t>
-            </a:r>
-          </a:p>
-        </p:txBody>
-      </p:sp>
-      <p:sp>
-        <p:nvSpPr>
-          <p:cNvPr id="20" name="TextBox 19"/>
-          <p:cNvSpPr txBox="1"/>
-          <p:nvPr/>
-        </p:nvSpPr>
-        <p:spPr>
-          <a:xfrm>
-            <a:off x="2651760" y="3145536"/>
-            <a:ext cx="5852159" cy="292607"/>
-          </a:xfrm>
-          <a:prstGeom prst="rect">
-            <a:avLst/>
-          </a:prstGeom>
-          <a:noFill/>
-        </p:spPr>
-        <p:txBody>
-          <a:bodyPr wrap="square" anchor="t" lIns="0" rIns="0" tIns="0" bIns="0">
-            <a:spAutoFit/>
-          </a:bodyPr>
-          <a:lstStyle/>
-          <a:p>
-            <a:pPr algn="l">
-              <a:lnSpc>
-                <a:spcPct val="112000"/>
-              </a:lnSpc>
-              <a:spcAft>
-                <a:spcPts val="400"/>
-              </a:spcAft>
-            </a:pPr>
-            <a:r>
-              <a:rPr sz="950" b="0">
-                <a:solidFill>
-                  <a:srgbClr val="434343"/>
-                </a:solidFill>
-                <a:latin typeface="Arial"/>
-              </a:rPr>
-              <a:t>The same rule module, run again at merge time</a:t>
-            </a:r>
-          </a:p>
-        </p:txBody>
-      </p:sp>
-      <p:sp>
-        <p:nvSpPr>
-          <p:cNvPr id="21" name="Rectangle 20"/>
-          <p:cNvSpPr/>
-          <p:nvPr/>
-        </p:nvSpPr>
-        <p:spPr>
-          <a:xfrm>
-            <a:off x="548640" y="3474720"/>
-            <a:ext cx="8046720" cy="384048"/>
-          </a:xfrm>
-          <a:prstGeom prst="rect">
-            <a:avLst/>
-          </a:prstGeom>
-          <a:solidFill>
-            <a:srgbClr val="FFFFFF"/>
-          </a:solidFill>
-          <a:ln>
-            <a:noFill/>
-          </a:ln>
-          <a:effectLst/>
-        </p:spPr>
-        <p:style>
-          <a:lnRef idx="1">
-            <a:schemeClr val="accent1"/>
-          </a:lnRef>
-          <a:fillRef idx="3">
-            <a:schemeClr val="accent1"/>
-          </a:fillRef>
-          <a:effectRef idx="2">
-            <a:schemeClr val="accent1"/>
-          </a:effectRef>
-          <a:fontRef idx="minor">
-            <a:schemeClr val="lt1"/>
-          </a:fontRef>
-        </p:style>
-        <p:txBody>
-          <a:bodyPr rtlCol="0" anchor="ctr"/>
-          <a:lstStyle/>
-          <a:p>
-            <a:pPr algn="ctr"/>
-          </a:p>
-        </p:txBody>
-      </p:sp>
-      <p:sp>
-        <p:nvSpPr>
-          <p:cNvPr id="22" name="TextBox 21"/>
-          <p:cNvSpPr txBox="1"/>
-          <p:nvPr/>
-        </p:nvSpPr>
-        <p:spPr>
-          <a:xfrm>
-            <a:off x="640080" y="3529584"/>
-            <a:ext cx="1828800" cy="292607"/>
-          </a:xfrm>
-          <a:prstGeom prst="rect">
-            <a:avLst/>
-          </a:prstGeom>
-          <a:noFill/>
-        </p:spPr>
-        <p:txBody>
-          <a:bodyPr wrap="square" anchor="t" lIns="0" rIns="0" tIns="0" bIns="0">
-            <a:spAutoFit/>
-          </a:bodyPr>
-          <a:lstStyle/>
-          <a:p>
-            <a:pPr algn="l">
-              <a:lnSpc>
-                <a:spcPct val="112000"/>
-              </a:lnSpc>
-              <a:spcAft>
-                <a:spcPts val="400"/>
-              </a:spcAft>
-            </a:pPr>
-            <a:r>
-              <a:rPr sz="950" b="1">
-                <a:solidFill>
-                  <a:srgbClr val="13135E"/>
-                </a:solidFill>
-                <a:latin typeface="Arial"/>
-              </a:rPr>
-              <a:t>5 Documented bypass</a:t>
-            </a:r>
-          </a:p>
-        </p:txBody>
-      </p:sp>
-      <p:sp>
-        <p:nvSpPr>
-          <p:cNvPr id="23" name="TextBox 22"/>
-          <p:cNvSpPr txBox="1"/>
-          <p:nvPr/>
-        </p:nvSpPr>
-        <p:spPr>
-          <a:xfrm>
-            <a:off x="2651760" y="3529584"/>
-            <a:ext cx="5852159" cy="292607"/>
-          </a:xfrm>
-          <a:prstGeom prst="rect">
-            <a:avLst/>
-          </a:prstGeom>
-          <a:noFill/>
-        </p:spPr>
-        <p:txBody>
-          <a:bodyPr wrap="square" anchor="t" lIns="0" rIns="0" tIns="0" bIns="0">
-            <a:spAutoFit/>
-          </a:bodyPr>
-          <a:lstStyle/>
-          <a:p>
-            <a:pPr algn="l">
-              <a:lnSpc>
-                <a:spcPct val="112000"/>
-              </a:lnSpc>
-              <a:spcAft>
-                <a:spcPts val="400"/>
-              </a:spcAft>
-            </a:pPr>
-            <a:r>
-              <a:rPr sz="950" b="0">
-                <a:solidFill>
-                  <a:srgbClr val="434343"/>
-                </a:solidFill>
-                <a:latin typeface="Arial"/>
-              </a:rPr>
-              <a:t>APPROVED-DYNAMIC-SQL: &lt;reason + reviewer&gt;</a:t>
-            </a:r>
-          </a:p>
-        </p:txBody>
-      </p:sp>
-      <p:sp>
-        <p:nvSpPr>
-          <p:cNvPr id="24" name="Rectangle 23"/>
-          <p:cNvSpPr/>
-          <p:nvPr/>
-        </p:nvSpPr>
-        <p:spPr>
-          <a:xfrm>
-            <a:off x="548640" y="3858768"/>
-            <a:ext cx="8046720" cy="384048"/>
-          </a:xfrm>
-          <a:prstGeom prst="rect">
-            <a:avLst/>
-          </a:prstGeom>
-          <a:solidFill>
-            <a:srgbClr val="F4F5FB"/>
-          </a:solidFill>
-          <a:ln>
-            <a:noFill/>
-          </a:ln>
-          <a:effectLst/>
-        </p:spPr>
-        <p:style>
-          <a:lnRef idx="1">
-            <a:schemeClr val="accent1"/>
-          </a:lnRef>
-          <a:fillRef idx="3">
-            <a:schemeClr val="accent1"/>
-          </a:fillRef>
-          <a:effectRef idx="2">
-            <a:schemeClr val="accent1"/>
-          </a:effectRef>
-          <a:fontRef idx="minor">
-            <a:schemeClr val="lt1"/>
-          </a:fontRef>
-        </p:style>
-        <p:txBody>
-          <a:bodyPr rtlCol="0" anchor="ctr"/>
-          <a:lstStyle/>
-          <a:p>
-            <a:pPr algn="ctr"/>
-          </a:p>
-        </p:txBody>
-      </p:sp>
-      <p:sp>
-        <p:nvSpPr>
-          <p:cNvPr id="25" name="TextBox 24"/>
-          <p:cNvSpPr txBox="1"/>
-          <p:nvPr/>
-        </p:nvSpPr>
-        <p:spPr>
-          <a:xfrm>
-            <a:off x="640080" y="3913631"/>
-            <a:ext cx="1828800" cy="292607"/>
-          </a:xfrm>
-          <a:prstGeom prst="rect">
-            <a:avLst/>
-          </a:prstGeom>
-          <a:noFill/>
-        </p:spPr>
-        <p:txBody>
-          <a:bodyPr wrap="square" anchor="t" lIns="0" rIns="0" tIns="0" bIns="0">
-            <a:spAutoFit/>
-          </a:bodyPr>
-          <a:lstStyle/>
-          <a:p>
-            <a:pPr algn="l">
-              <a:lnSpc>
-                <a:spcPct val="112000"/>
-              </a:lnSpc>
-              <a:spcAft>
-                <a:spcPts val="400"/>
-              </a:spcAft>
-            </a:pPr>
-            <a:r>
-              <a:rPr sz="950" b="1">
-                <a:solidFill>
-                  <a:srgbClr val="13135E"/>
-                </a:solidFill>
-                <a:latin typeface="Arial"/>
-              </a:rPr>
-              <a:t>The honest part</a:t>
-            </a:r>
-          </a:p>
-        </p:txBody>
-      </p:sp>
-      <p:sp>
-        <p:nvSpPr>
-          <p:cNvPr id="26" name="TextBox 25"/>
-          <p:cNvSpPr txBox="1"/>
-          <p:nvPr/>
-        </p:nvSpPr>
-        <p:spPr>
-          <a:xfrm>
-            <a:off x="2651760" y="3913631"/>
-            <a:ext cx="5852159" cy="292607"/>
-          </a:xfrm>
-          <a:prstGeom prst="rect">
-            <a:avLst/>
-          </a:prstGeom>
-          <a:noFill/>
-        </p:spPr>
-        <p:txBody>
-          <a:bodyPr wrap="square" anchor="t" lIns="0" rIns="0" tIns="0" bIns="0">
-            <a:spAutoFit/>
-          </a:bodyPr>
-          <a:lstStyle/>
-          <a:p>
-            <a:pPr algn="l">
-              <a:lnSpc>
-                <a:spcPct val="112000"/>
-              </a:lnSpc>
-              <a:spcAft>
-                <a:spcPts val="400"/>
-              </a:spcAft>
-            </a:pPr>
-            <a:r>
-              <a:rPr sz="950" b="0">
-                <a:solidFill>
-                  <a:srgbClr val="434343"/>
-                </a:solidFill>
-                <a:latin typeface="Arial"/>
-              </a:rPr>
-              <a:t>The check has real false positives — a static parameterised sp_executesql is fine</a:t>
-            </a:r>
-          </a:p>
-        </p:txBody>
-      </p:sp>
-      <p:sp>
-        <p:nvSpPr>
-          <p:cNvPr id="27" name="TextBox 26"/>
-          <p:cNvSpPr txBox="1"/>
-          <p:nvPr/>
-        </p:nvSpPr>
-        <p:spPr>
-          <a:xfrm>
-            <a:off x="548640" y="4315968"/>
-            <a:ext cx="7863840" cy="402336"/>
+                  <a:srgbClr val="1B7F4B"/>
+                </a:solidFill>
+                <a:latin typeface="Arial"/>
+              </a:rPr>
+              <a:t>NOBODY ADVANCES UNTIL THIS IS TRUE</a:t>
+            </a:r>
+          </a:p>
+        </p:txBody>
+      </p:sp>
+      <p:sp>
+        <p:nvSpPr>
+          <p:cNvPr id="11" name="TextBox 10"/>
+          <p:cNvSpPr txBox="1"/>
+          <p:nvPr/>
+        </p:nvSpPr>
+        <p:spPr>
+          <a:xfrm>
+            <a:off x="868680" y="2240280"/>
+            <a:ext cx="7498079" cy="777240"/>
           </a:xfrm>
           <a:prstGeom prst="rect">
             <a:avLst/>
@@ -11109,13 +11685,55 @@
               </a:spcAft>
             </a:pPr>
             <a:r>
-              <a:rPr sz="1000" b="0">
-                <a:solidFill>
-                  <a:srgbClr val="666666"/>
-                </a:solidFill>
-                <a:latin typeface="Arial"/>
-              </a:rPr>
-              <a:t>Takeaway card: docs/best-practices/enforcing-a-convention.md works the whole shape through — including the clauses no gate can decide. Independent follow-up; office hours supports it.</a:t>
+              <a:rPr sz="1400" b="1">
+                <a:solidFill>
+                  <a:srgbClr val="13135E"/>
+                </a:solidFill>
+                <a:latin typeface="Arial"/>
+              </a:rPr>
+              <a:t>In YOUR copy: Claude is refused when it edits server/data/db.json, and succeeds when it edits a file in server/src/repositories/.</a:t>
+            </a:r>
+          </a:p>
+        </p:txBody>
+      </p:sp>
+      <p:sp>
+        <p:nvSpPr>
+          <p:cNvPr id="12" name="TextBox 11"/>
+          <p:cNvSpPr txBox="1"/>
+          <p:nvPr/>
+        </p:nvSpPr>
+        <p:spPr>
+          <a:xfrm>
+            <a:off x="548640" y="3337560"/>
+            <a:ext cx="7863840" cy="1005840"/>
+          </a:xfrm>
+          <a:prstGeom prst="rect">
+            <a:avLst/>
+          </a:prstGeom>
+          <a:noFill/>
+        </p:spPr>
+        <p:txBody>
+          <a:bodyPr wrap="square" anchor="t" lIns="0" rIns="0" tIns="0" bIns="0">
+            <a:spAutoFit/>
+          </a:bodyPr>
+          <a:lstStyle/>
+          <a:p>
+            <a:pPr algn="l">
+              <a:lnSpc>
+                <a:spcPct val="130000"/>
+              </a:lnSpc>
+              <a:spcAft>
+                <a:spcPts val="400"/>
+              </a:spcAft>
+            </a:pPr>
+            <a:r>
+              <a:rPr sz="1150" b="0">
+                <a:solidFill>
+                  <a:srgbClr val="434343"/>
+                </a:solidFill>
+                <a:latin typeface="Arial"/>
+              </a:rPr>
+              <a:t>Paste your refusal text into chat. If you only tested the block, you have not finished — run the allow case now.</a:t>
             </a:r>
           </a:p>
         </p:txBody>
@@ -11284,7 +11902,7 @@
                 </a:solidFill>
                 <a:latin typeface="Arial"/>
               </a:rPr>
-              <a:t>YOUR CLAUSE · 1 OF 3</a:t>
+              <a:t>YOUR STACK</a:t>
             </a:r>
           </a:p>
         </p:txBody>
@@ -11323,7 +11941,7 @@
                 </a:solidFill>
                 <a:latin typeface="Arial"/>
               </a:rPr>
-              <a:t>The hook — enforce what you wrote</a:t>
+              <a:t>The same pattern, somewhere you will recognise</a:t>
             </a:r>
           </a:p>
         </p:txBody>
@@ -11365,7 +11983,7 @@
                 </a:solidFill>
                 <a:latin typeface="Arial"/>
               </a:rPr>
-              <a:t>Fifteen minutes. The plumbing is given; the policy is yours.</a:t>
+              <a:t>Illustration, not today's exercise. A rule most teams have written down and almost nobody checks.</a:t>
             </a:r>
           </a:p>
         </p:txBody>
@@ -11411,14 +12029,180 @@
       </p:sp>
       <p:sp>
         <p:nvSpPr>
-          <p:cNvPr id="9" name="TextBox 8"/>
-          <p:cNvSpPr txBox="1"/>
-          <p:nvPr/>
-        </p:nvSpPr>
-        <p:spPr>
-          <a:xfrm>
-            <a:off x="548640" y="1783080"/>
-            <a:ext cx="7863840" cy="2935224"/>
+          <p:cNvPr id="9" name="Rectangle 8"/>
+          <p:cNvSpPr/>
+          <p:nvPr/>
+        </p:nvSpPr>
+        <p:spPr>
+          <a:xfrm>
+            <a:off x="548640" y="2011680"/>
+            <a:ext cx="8046720" cy="310896"/>
+          </a:xfrm>
+          <a:prstGeom prst="rect">
+            <a:avLst/>
+          </a:prstGeom>
+          <a:solidFill>
+            <a:srgbClr val="403FE8"/>
+          </a:solidFill>
+          <a:ln>
+            <a:noFill/>
+          </a:ln>
+          <a:effectLst/>
+        </p:spPr>
+        <p:style>
+          <a:lnRef idx="1">
+            <a:schemeClr val="accent1"/>
+          </a:lnRef>
+          <a:fillRef idx="3">
+            <a:schemeClr val="accent1"/>
+          </a:fillRef>
+          <a:effectRef idx="2">
+            <a:schemeClr val="accent1"/>
+          </a:effectRef>
+          <a:fontRef idx="minor">
+            <a:schemeClr val="lt1"/>
+          </a:fontRef>
+        </p:style>
+        <p:txBody>
+          <a:bodyPr rtlCol="0" anchor="ctr"/>
+          <a:lstStyle/>
+          <a:p>
+            <a:pPr algn="ctr"/>
+          </a:p>
+        </p:txBody>
+      </p:sp>
+      <p:sp>
+        <p:nvSpPr>
+          <p:cNvPr id="10" name="TextBox 9"/>
+          <p:cNvSpPr txBox="1"/>
+          <p:nvPr/>
+        </p:nvSpPr>
+        <p:spPr>
+          <a:xfrm>
+            <a:off x="640080" y="2089404"/>
+            <a:ext cx="1828800" cy="219456"/>
+          </a:xfrm>
+          <a:prstGeom prst="rect">
+            <a:avLst/>
+          </a:prstGeom>
+          <a:noFill/>
+        </p:spPr>
+        <p:txBody>
+          <a:bodyPr wrap="square" anchor="t" lIns="0" rIns="0" tIns="0" bIns="0">
+            <a:spAutoFit/>
+          </a:bodyPr>
+          <a:lstStyle/>
+          <a:p>
+            <a:pPr algn="l">
+              <a:spcAft>
+                <a:spcPts val="400"/>
+              </a:spcAft>
+            </a:pPr>
+            <a:r>
+              <a:rPr sz="900" b="1">
+                <a:solidFill>
+                  <a:srgbClr val="FFFFFF"/>
+                </a:solidFill>
+                <a:latin typeface="Arial"/>
+              </a:rPr>
+              <a:t>Layer</a:t>
+            </a:r>
+          </a:p>
+        </p:txBody>
+      </p:sp>
+      <p:sp>
+        <p:nvSpPr>
+          <p:cNvPr id="11" name="TextBox 10"/>
+          <p:cNvSpPr txBox="1"/>
+          <p:nvPr/>
+        </p:nvSpPr>
+        <p:spPr>
+          <a:xfrm>
+            <a:off x="2651760" y="2089404"/>
+            <a:ext cx="5852159" cy="219456"/>
+          </a:xfrm>
+          <a:prstGeom prst="rect">
+            <a:avLst/>
+          </a:prstGeom>
+          <a:noFill/>
+        </p:spPr>
+        <p:txBody>
+          <a:bodyPr wrap="square" anchor="t" lIns="0" rIns="0" tIns="0" bIns="0">
+            <a:spAutoFit/>
+          </a:bodyPr>
+          <a:lstStyle/>
+          <a:p>
+            <a:pPr algn="l">
+              <a:spcAft>
+                <a:spcPts val="400"/>
+              </a:spcAft>
+            </a:pPr>
+            <a:r>
+              <a:rPr sz="900" b="1">
+                <a:solidFill>
+                  <a:srgbClr val="FFFFFF"/>
+                </a:solidFill>
+                <a:latin typeface="Arial"/>
+              </a:rPr>
+              <a:t>Applied to a stored-procedure convention</a:t>
+            </a:r>
+          </a:p>
+        </p:txBody>
+      </p:sp>
+      <p:sp>
+        <p:nvSpPr>
+          <p:cNvPr id="12" name="Rectangle 11"/>
+          <p:cNvSpPr/>
+          <p:nvPr/>
+        </p:nvSpPr>
+        <p:spPr>
+          <a:xfrm>
+            <a:off x="548640" y="2322576"/>
+            <a:ext cx="8046720" cy="384048"/>
+          </a:xfrm>
+          <a:prstGeom prst="rect">
+            <a:avLst/>
+          </a:prstGeom>
+          <a:solidFill>
+            <a:srgbClr val="F4F5FB"/>
+          </a:solidFill>
+          <a:ln>
+            <a:noFill/>
+          </a:ln>
+          <a:effectLst/>
+        </p:spPr>
+        <p:style>
+          <a:lnRef idx="1">
+            <a:schemeClr val="accent1"/>
+          </a:lnRef>
+          <a:fillRef idx="3">
+            <a:schemeClr val="accent1"/>
+          </a:fillRef>
+          <a:effectRef idx="2">
+            <a:schemeClr val="accent1"/>
+          </a:effectRef>
+          <a:fontRef idx="minor">
+            <a:schemeClr val="lt1"/>
+          </a:fontRef>
+        </p:style>
+        <p:txBody>
+          <a:bodyPr rtlCol="0" anchor="ctr"/>
+          <a:lstStyle/>
+          <a:p>
+            <a:pPr algn="ctr"/>
+          </a:p>
+        </p:txBody>
+      </p:sp>
+      <p:sp>
+        <p:nvSpPr>
+          <p:cNvPr id="13" name="TextBox 12"/>
+          <p:cNvSpPr txBox="1"/>
+          <p:nvPr/>
+        </p:nvSpPr>
+        <p:spPr>
+          <a:xfrm>
+            <a:off x="640080" y="2377440"/>
+            <a:ext cx="1828800" cy="292607"/>
           </a:xfrm>
           <a:prstGeom prst="rect">
             <a:avLst/>
@@ -11433,186 +12217,616 @@
           <a:p>
             <a:pPr algn="l">
               <a:lnSpc>
-                <a:spcPct val="122000"/>
+                <a:spcPct val="112000"/>
               </a:lnSpc>
               <a:spcAft>
-                <a:spcPts val="900"/>
-              </a:spcAft>
-            </a:pPr>
-            <a:r>
-              <a:rPr sz="1250" b="1">
-                <a:solidFill>
-                  <a:srgbClr val="403FE8"/>
-                </a:solidFill>
-                <a:latin typeface="Arial"/>
-              </a:rPr>
-              <a:t>•  </a:t>
-            </a:r>
-            <a:r>
-              <a:rPr sz="1250" b="1">
+                <a:spcPts val="400"/>
+              </a:spcAft>
+            </a:pPr>
+            <a:r>
+              <a:rPr sz="950" b="1">
                 <a:solidFill>
                   <a:srgbClr val="13135E"/>
                 </a:solidFill>
                 <a:latin typeface="Arial"/>
               </a:rPr>
-              <a:t>Your 2.a clause, revisited. </a:t>
-            </a:r>
-            <a:r>
-              <a:rPr sz="1250" b="0">
+              <a:t>1 Instruction</a:t>
+            </a:r>
+          </a:p>
+        </p:txBody>
+      </p:sp>
+      <p:sp>
+        <p:nvSpPr>
+          <p:cNvPr id="14" name="TextBox 13"/>
+          <p:cNvSpPr txBox="1"/>
+          <p:nvPr/>
+        </p:nvSpPr>
+        <p:spPr>
+          <a:xfrm>
+            <a:off x="2651760" y="2377440"/>
+            <a:ext cx="5852159" cy="292607"/>
+          </a:xfrm>
+          <a:prstGeom prst="rect">
+            <a:avLst/>
+          </a:prstGeom>
+          <a:noFill/>
+        </p:spPr>
+        <p:txBody>
+          <a:bodyPr wrap="square" anchor="t" lIns="0" rIns="0" tIns="0" bIns="0">
+            <a:spAutoFit/>
+          </a:bodyPr>
+          <a:lstStyle/>
+          <a:p>
+            <a:pPr algn="l">
+              <a:lnSpc>
+                <a:spcPct val="112000"/>
+              </a:lnSpc>
+              <a:spcAft>
+                <a:spcPts val="400"/>
+              </a:spcAft>
+            </a:pPr>
+            <a:r>
+              <a:rPr sz="950" b="0">
                 <a:solidFill>
                   <a:srgbClr val="434343"/>
                 </a:solidFill>
                 <a:latin typeface="Arial"/>
               </a:rPr>
-              <a:t>The residue decisions you record today update that same NFR.</a:t>
-            </a:r>
-          </a:p>
+              <a:t>One line: parameters only — never concatenate into executable SQL</a:t>
+            </a:r>
+          </a:p>
+        </p:txBody>
+      </p:sp>
+      <p:sp>
+        <p:nvSpPr>
+          <p:cNvPr id="15" name="Rectangle 14"/>
+          <p:cNvSpPr/>
+          <p:nvPr/>
+        </p:nvSpPr>
+        <p:spPr>
+          <a:xfrm>
+            <a:off x="548640" y="2706624"/>
+            <a:ext cx="8046720" cy="384048"/>
+          </a:xfrm>
+          <a:prstGeom prst="rect">
+            <a:avLst/>
+          </a:prstGeom>
+          <a:solidFill>
+            <a:srgbClr val="FFFFFF"/>
+          </a:solidFill>
+          <a:ln>
+            <a:noFill/>
+          </a:ln>
+          <a:effectLst/>
+        </p:spPr>
+        <p:style>
+          <a:lnRef idx="1">
+            <a:schemeClr val="accent1"/>
+          </a:lnRef>
+          <a:fillRef idx="3">
+            <a:schemeClr val="accent1"/>
+          </a:fillRef>
+          <a:effectRef idx="2">
+            <a:schemeClr val="accent1"/>
+          </a:effectRef>
+          <a:fontRef idx="minor">
+            <a:schemeClr val="lt1"/>
+          </a:fontRef>
+        </p:style>
+        <p:txBody>
+          <a:bodyPr rtlCol="0" anchor="ctr"/>
+          <a:lstStyle/>
+          <a:p>
+            <a:pPr algn="ctr"/>
+          </a:p>
+        </p:txBody>
+      </p:sp>
+      <p:sp>
+        <p:nvSpPr>
+          <p:cNvPr id="16" name="TextBox 15"/>
+          <p:cNvSpPr txBox="1"/>
+          <p:nvPr/>
+        </p:nvSpPr>
+        <p:spPr>
+          <a:xfrm>
+            <a:off x="640080" y="2761488"/>
+            <a:ext cx="1828800" cy="292607"/>
+          </a:xfrm>
+          <a:prstGeom prst="rect">
+            <a:avLst/>
+          </a:prstGeom>
+          <a:noFill/>
+        </p:spPr>
+        <p:txBody>
+          <a:bodyPr wrap="square" anchor="t" lIns="0" rIns="0" tIns="0" bIns="0">
+            <a:spAutoFit/>
+          </a:bodyPr>
+          <a:lstStyle/>
           <a:p>
             <a:pPr algn="l">
               <a:lnSpc>
-                <a:spcPct val="122000"/>
+                <a:spcPct val="112000"/>
               </a:lnSpc>
               <a:spcAft>
-                <a:spcPts val="900"/>
-              </a:spcAft>
-            </a:pPr>
-            <a:r>
-              <a:rPr sz="1250" b="1">
-                <a:solidFill>
-                  <a:srgbClr val="403FE8"/>
-                </a:solidFill>
-                <a:latin typeface="Arial"/>
-              </a:rPr>
-              <a:t>•  </a:t>
-            </a:r>
-            <a:r>
-              <a:rPr sz="1250" b="1">
+                <a:spcPts val="400"/>
+              </a:spcAft>
+            </a:pPr>
+            <a:r>
+              <a:rPr sz="950" b="1">
                 <a:solidFill>
                   <a:srgbClr val="13135E"/>
                 </a:solidFill>
                 <a:latin typeface="Arial"/>
               </a:rPr>
-              <a:t>Start from the skeleton. </a:t>
-            </a:r>
-            <a:r>
-              <a:rPr sz="1250" b="0">
+              <a:t>2 Client-side deterministic</a:t>
+            </a:r>
+          </a:p>
+        </p:txBody>
+      </p:sp>
+      <p:sp>
+        <p:nvSpPr>
+          <p:cNvPr id="17" name="TextBox 16"/>
+          <p:cNvSpPr txBox="1"/>
+          <p:nvPr/>
+        </p:nvSpPr>
+        <p:spPr>
+          <a:xfrm>
+            <a:off x="2651760" y="2761488"/>
+            <a:ext cx="5852159" cy="292607"/>
+          </a:xfrm>
+          <a:prstGeom prst="rect">
+            <a:avLst/>
+          </a:prstGeom>
+          <a:noFill/>
+        </p:spPr>
+        <p:txBody>
+          <a:bodyPr wrap="square" anchor="t" lIns="0" rIns="0" tIns="0" bIns="0">
+            <a:spAutoFit/>
+          </a:bodyPr>
+          <a:lstStyle/>
+          <a:p>
+            <a:pPr algn="l">
+              <a:lnSpc>
+                <a:spcPct val="112000"/>
+              </a:lnSpc>
+              <a:spcAft>
+                <a:spcPts val="400"/>
+              </a:spcAft>
+            </a:pPr>
+            <a:r>
+              <a:rPr sz="950" b="0">
                 <a:solidFill>
                   <a:srgbClr val="434343"/>
                 </a:solidFill>
                 <a:latin typeface="Arial"/>
               </a:rPr>
-              <a:t>`docs/labs/snippets/hook-skeleton.js` → `.claude/hooks/check-convention.js`; delete the two example rules; put yours in.</a:t>
-            </a:r>
-          </a:p>
+              <a:t>A hook inspecting the CONTENT of the .sql being written, not just the path</a:t>
+            </a:r>
+          </a:p>
+        </p:txBody>
+      </p:sp>
+      <p:sp>
+        <p:nvSpPr>
+          <p:cNvPr id="18" name="Rectangle 17"/>
+          <p:cNvSpPr/>
+          <p:nvPr/>
+        </p:nvSpPr>
+        <p:spPr>
+          <a:xfrm>
+            <a:off x="548640" y="3090672"/>
+            <a:ext cx="8046720" cy="384048"/>
+          </a:xfrm>
+          <a:prstGeom prst="rect">
+            <a:avLst/>
+          </a:prstGeom>
+          <a:solidFill>
+            <a:srgbClr val="F4F5FB"/>
+          </a:solidFill>
+          <a:ln>
+            <a:noFill/>
+          </a:ln>
+          <a:effectLst/>
+        </p:spPr>
+        <p:style>
+          <a:lnRef idx="1">
+            <a:schemeClr val="accent1"/>
+          </a:lnRef>
+          <a:fillRef idx="3">
+            <a:schemeClr val="accent1"/>
+          </a:fillRef>
+          <a:effectRef idx="2">
+            <a:schemeClr val="accent1"/>
+          </a:effectRef>
+          <a:fontRef idx="minor">
+            <a:schemeClr val="lt1"/>
+          </a:fontRef>
+        </p:style>
+        <p:txBody>
+          <a:bodyPr rtlCol="0" anchor="ctr"/>
+          <a:lstStyle/>
+          <a:p>
+            <a:pPr algn="ctr"/>
+          </a:p>
+        </p:txBody>
+      </p:sp>
+      <p:sp>
+        <p:nvSpPr>
+          <p:cNvPr id="19" name="TextBox 18"/>
+          <p:cNvSpPr txBox="1"/>
+          <p:nvPr/>
+        </p:nvSpPr>
+        <p:spPr>
+          <a:xfrm>
+            <a:off x="640080" y="3145536"/>
+            <a:ext cx="1828800" cy="292607"/>
+          </a:xfrm>
+          <a:prstGeom prst="rect">
+            <a:avLst/>
+          </a:prstGeom>
+          <a:noFill/>
+        </p:spPr>
+        <p:txBody>
+          <a:bodyPr wrap="square" anchor="t" lIns="0" rIns="0" tIns="0" bIns="0">
+            <a:spAutoFit/>
+          </a:bodyPr>
+          <a:lstStyle/>
           <a:p>
             <a:pPr algn="l">
               <a:lnSpc>
-                <a:spcPct val="122000"/>
+                <a:spcPct val="112000"/>
               </a:lnSpc>
               <a:spcAft>
-                <a:spcPts val="900"/>
-              </a:spcAft>
-            </a:pPr>
-            <a:r>
-              <a:rPr sz="1250" b="1">
-                <a:solidFill>
-                  <a:srgbClr val="403FE8"/>
-                </a:solidFill>
-                <a:latin typeface="Arial"/>
-              </a:rPr>
-              <a:t>•  </a:t>
-            </a:r>
-            <a:r>
-              <a:rPr sz="1250" b="1">
+                <a:spcPts val="400"/>
+              </a:spcAft>
+            </a:pPr>
+            <a:r>
+              <a:rPr sz="950" b="1">
                 <a:solidFill>
                   <a:srgbClr val="13135E"/>
                 </a:solidFill>
                 <a:latin typeface="Arial"/>
               </a:rPr>
-              <a:t>Register it, then NEW session. </a:t>
-            </a:r>
-            <a:r>
-              <a:rPr sz="1250" b="0">
+              <a:t>4 CI gate</a:t>
+            </a:r>
+          </a:p>
+        </p:txBody>
+      </p:sp>
+      <p:sp>
+        <p:nvSpPr>
+          <p:cNvPr id="20" name="TextBox 19"/>
+          <p:cNvSpPr txBox="1"/>
+          <p:nvPr/>
+        </p:nvSpPr>
+        <p:spPr>
+          <a:xfrm>
+            <a:off x="2651760" y="3145536"/>
+            <a:ext cx="5852159" cy="292607"/>
+          </a:xfrm>
+          <a:prstGeom prst="rect">
+            <a:avLst/>
+          </a:prstGeom>
+          <a:noFill/>
+        </p:spPr>
+        <p:txBody>
+          <a:bodyPr wrap="square" anchor="t" lIns="0" rIns="0" tIns="0" bIns="0">
+            <a:spAutoFit/>
+          </a:bodyPr>
+          <a:lstStyle/>
+          <a:p>
+            <a:pPr algn="l">
+              <a:lnSpc>
+                <a:spcPct val="112000"/>
+              </a:lnSpc>
+              <a:spcAft>
+                <a:spcPts val="400"/>
+              </a:spcAft>
+            </a:pPr>
+            <a:r>
+              <a:rPr sz="950" b="0">
                 <a:solidFill>
                   <a:srgbClr val="434343"/>
                 </a:solidFill>
                 <a:latin typeface="Arial"/>
               </a:rPr>
-              <a:t>The settings JSON is in the handout — matcher, event, `$CLAUDE_PROJECT_DIR`. Hooks load at session start.</a:t>
-            </a:r>
-          </a:p>
+              <a:t>The same rule module, run again at merge time</a:t>
+            </a:r>
+          </a:p>
+        </p:txBody>
+      </p:sp>
+      <p:sp>
+        <p:nvSpPr>
+          <p:cNvPr id="21" name="Rectangle 20"/>
+          <p:cNvSpPr/>
+          <p:nvPr/>
+        </p:nvSpPr>
+        <p:spPr>
+          <a:xfrm>
+            <a:off x="548640" y="3474720"/>
+            <a:ext cx="8046720" cy="384048"/>
+          </a:xfrm>
+          <a:prstGeom prst="rect">
+            <a:avLst/>
+          </a:prstGeom>
+          <a:solidFill>
+            <a:srgbClr val="FFFFFF"/>
+          </a:solidFill>
+          <a:ln>
+            <a:noFill/>
+          </a:ln>
+          <a:effectLst/>
+        </p:spPr>
+        <p:style>
+          <a:lnRef idx="1">
+            <a:schemeClr val="accent1"/>
+          </a:lnRef>
+          <a:fillRef idx="3">
+            <a:schemeClr val="accent1"/>
+          </a:fillRef>
+          <a:effectRef idx="2">
+            <a:schemeClr val="accent1"/>
+          </a:effectRef>
+          <a:fontRef idx="minor">
+            <a:schemeClr val="lt1"/>
+          </a:fontRef>
+        </p:style>
+        <p:txBody>
+          <a:bodyPr rtlCol="0" anchor="ctr"/>
+          <a:lstStyle/>
+          <a:p>
+            <a:pPr algn="ctr"/>
+          </a:p>
+        </p:txBody>
+      </p:sp>
+      <p:sp>
+        <p:nvSpPr>
+          <p:cNvPr id="22" name="TextBox 21"/>
+          <p:cNvSpPr txBox="1"/>
+          <p:nvPr/>
+        </p:nvSpPr>
+        <p:spPr>
+          <a:xfrm>
+            <a:off x="640080" y="3529584"/>
+            <a:ext cx="1828800" cy="292607"/>
+          </a:xfrm>
+          <a:prstGeom prst="rect">
+            <a:avLst/>
+          </a:prstGeom>
+          <a:noFill/>
+        </p:spPr>
+        <p:txBody>
+          <a:bodyPr wrap="square" anchor="t" lIns="0" rIns="0" tIns="0" bIns="0">
+            <a:spAutoFit/>
+          </a:bodyPr>
+          <a:lstStyle/>
           <a:p>
             <a:pPr algn="l">
               <a:lnSpc>
-                <a:spcPct val="122000"/>
+                <a:spcPct val="112000"/>
               </a:lnSpc>
               <a:spcAft>
-                <a:spcPts val="900"/>
-              </a:spcAft>
-            </a:pPr>
-            <a:r>
-              <a:rPr sz="1250" b="1">
-                <a:solidFill>
-                  <a:srgbClr val="403FE8"/>
-                </a:solidFill>
-                <a:latin typeface="Arial"/>
-              </a:rPr>
-              <a:t>•  </a:t>
-            </a:r>
-            <a:r>
-              <a:rPr sz="1250" b="1">
+                <a:spcPts val="400"/>
+              </a:spcAft>
+            </a:pPr>
+            <a:r>
+              <a:rPr sz="950" b="1">
                 <a:solidFill>
                   <a:srgbClr val="13135E"/>
                 </a:solidFill>
                 <a:latin typeface="Arial"/>
               </a:rPr>
-              <a:t>Choose the severity on purpose. </a:t>
-            </a:r>
-            <a:r>
-              <a:rPr sz="1250" b="0">
+              <a:t>5 Documented bypass</a:t>
+            </a:r>
+          </a:p>
+        </p:txBody>
+      </p:sp>
+      <p:sp>
+        <p:nvSpPr>
+          <p:cNvPr id="23" name="TextBox 22"/>
+          <p:cNvSpPr txBox="1"/>
+          <p:nvPr/>
+        </p:nvSpPr>
+        <p:spPr>
+          <a:xfrm>
+            <a:off x="2651760" y="3529584"/>
+            <a:ext cx="5852159" cy="292607"/>
+          </a:xfrm>
+          <a:prstGeom prst="rect">
+            <a:avLst/>
+          </a:prstGeom>
+          <a:noFill/>
+        </p:spPr>
+        <p:txBody>
+          <a:bodyPr wrap="square" anchor="t" lIns="0" rIns="0" tIns="0" bIns="0">
+            <a:spAutoFit/>
+          </a:bodyPr>
+          <a:lstStyle/>
+          <a:p>
+            <a:pPr algn="l">
+              <a:lnSpc>
+                <a:spcPct val="112000"/>
+              </a:lnSpc>
+              <a:spcAft>
+                <a:spcPts val="400"/>
+              </a:spcAft>
+            </a:pPr>
+            <a:r>
+              <a:rPr sz="950" b="0">
                 <a:solidFill>
                   <a:srgbClr val="434343"/>
                 </a:solidFill>
                 <a:latin typeface="Arial"/>
               </a:rPr>
-              <a:t>PreToolUse blocks; PostToolUse nudges. If your clause is PARTLY, nudge — and write down why.</a:t>
-            </a:r>
-          </a:p>
+              <a:t>APPROVED-DYNAMIC-SQL: &lt;reason + reviewer&gt;</a:t>
+            </a:r>
+          </a:p>
+        </p:txBody>
+      </p:sp>
+      <p:sp>
+        <p:nvSpPr>
+          <p:cNvPr id="24" name="Rectangle 23"/>
+          <p:cNvSpPr/>
+          <p:nvPr/>
+        </p:nvSpPr>
+        <p:spPr>
+          <a:xfrm>
+            <a:off x="548640" y="3858768"/>
+            <a:ext cx="8046720" cy="384048"/>
+          </a:xfrm>
+          <a:prstGeom prst="rect">
+            <a:avLst/>
+          </a:prstGeom>
+          <a:solidFill>
+            <a:srgbClr val="F4F5FB"/>
+          </a:solidFill>
+          <a:ln>
+            <a:noFill/>
+          </a:ln>
+          <a:effectLst/>
+        </p:spPr>
+        <p:style>
+          <a:lnRef idx="1">
+            <a:schemeClr val="accent1"/>
+          </a:lnRef>
+          <a:fillRef idx="3">
+            <a:schemeClr val="accent1"/>
+          </a:fillRef>
+          <a:effectRef idx="2">
+            <a:schemeClr val="accent1"/>
+          </a:effectRef>
+          <a:fontRef idx="minor">
+            <a:schemeClr val="lt1"/>
+          </a:fontRef>
+        </p:style>
+        <p:txBody>
+          <a:bodyPr rtlCol="0" anchor="ctr"/>
+          <a:lstStyle/>
+          <a:p>
+            <a:pPr algn="ctr"/>
+          </a:p>
+        </p:txBody>
+      </p:sp>
+      <p:sp>
+        <p:nvSpPr>
+          <p:cNvPr id="25" name="TextBox 24"/>
+          <p:cNvSpPr txBox="1"/>
+          <p:nvPr/>
+        </p:nvSpPr>
+        <p:spPr>
+          <a:xfrm>
+            <a:off x="640080" y="3913631"/>
+            <a:ext cx="1828800" cy="292607"/>
+          </a:xfrm>
+          <a:prstGeom prst="rect">
+            <a:avLst/>
+          </a:prstGeom>
+          <a:noFill/>
+        </p:spPr>
+        <p:txBody>
+          <a:bodyPr wrap="square" anchor="t" lIns="0" rIns="0" tIns="0" bIns="0">
+            <a:spAutoFit/>
+          </a:bodyPr>
+          <a:lstStyle/>
           <a:p>
             <a:pPr algn="l">
               <a:lnSpc>
-                <a:spcPct val="122000"/>
+                <a:spcPct val="112000"/>
               </a:lnSpc>
               <a:spcAft>
-                <a:spcPts val="900"/>
-              </a:spcAft>
-            </a:pPr>
-            <a:r>
-              <a:rPr sz="1250" b="1">
-                <a:solidFill>
-                  <a:srgbClr val="403FE8"/>
-                </a:solidFill>
-                <a:latin typeface="Arial"/>
-              </a:rPr>
-              <a:t>•  </a:t>
-            </a:r>
-            <a:r>
-              <a:rPr sz="1250" b="1">
+                <a:spcPts val="400"/>
+              </a:spcAft>
+            </a:pPr>
+            <a:r>
+              <a:rPr sz="950" b="1">
                 <a:solidFill>
                   <a:srgbClr val="13135E"/>
                 </a:solidFill>
                 <a:latin typeface="Arial"/>
               </a:rPr>
-              <a:t>Verify both directions. </a:t>
-            </a:r>
-            <a:r>
-              <a:rPr sz="1250" b="0">
+              <a:t>The honest part</a:t>
+            </a:r>
+          </a:p>
+        </p:txBody>
+      </p:sp>
+      <p:sp>
+        <p:nvSpPr>
+          <p:cNvPr id="26" name="TextBox 25"/>
+          <p:cNvSpPr txBox="1"/>
+          <p:nvPr/>
+        </p:nvSpPr>
+        <p:spPr>
+          <a:xfrm>
+            <a:off x="2651760" y="3913631"/>
+            <a:ext cx="5852159" cy="292607"/>
+          </a:xfrm>
+          <a:prstGeom prst="rect">
+            <a:avLst/>
+          </a:prstGeom>
+          <a:noFill/>
+        </p:spPr>
+        <p:txBody>
+          <a:bodyPr wrap="square" anchor="t" lIns="0" rIns="0" tIns="0" bIns="0">
+            <a:spAutoFit/>
+          </a:bodyPr>
+          <a:lstStyle/>
+          <a:p>
+            <a:pPr algn="l">
+              <a:lnSpc>
+                <a:spcPct val="112000"/>
+              </a:lnSpc>
+              <a:spcAft>
+                <a:spcPts val="400"/>
+              </a:spcAft>
+            </a:pPr>
+            <a:r>
+              <a:rPr sz="950" b="0">
                 <a:solidFill>
                   <a:srgbClr val="434343"/>
                 </a:solidFill>
                 <a:latin typeface="Arial"/>
               </a:rPr>
-              <a:t>Violation on purpose → save the refusal. Your 1.b change → silence. Refusal text goes in the PR.</a:t>
+              <a:t>The check has real false positives — a static parameterised sp_executesql is fine</a:t>
+            </a:r>
+          </a:p>
+        </p:txBody>
+      </p:sp>
+      <p:sp>
+        <p:nvSpPr>
+          <p:cNvPr id="27" name="TextBox 26"/>
+          <p:cNvSpPr txBox="1"/>
+          <p:nvPr/>
+        </p:nvSpPr>
+        <p:spPr>
+          <a:xfrm>
+            <a:off x="548640" y="4315968"/>
+            <a:ext cx="7863840" cy="402336"/>
+          </a:xfrm>
+          <a:prstGeom prst="rect">
+            <a:avLst/>
+          </a:prstGeom>
+          <a:noFill/>
+        </p:spPr>
+        <p:txBody>
+          <a:bodyPr wrap="square" anchor="t" lIns="0" rIns="0" tIns="0" bIns="0">
+            <a:spAutoFit/>
+          </a:bodyPr>
+          <a:lstStyle/>
+          <a:p>
+            <a:pPr algn="l">
+              <a:lnSpc>
+                <a:spcPct val="120000"/>
+              </a:lnSpc>
+              <a:spcAft>
+                <a:spcPts val="400"/>
+              </a:spcAft>
+            </a:pPr>
+            <a:r>
+              <a:rPr sz="1000" b="0">
+                <a:solidFill>
+                  <a:srgbClr val="666666"/>
+                </a:solidFill>
+                <a:latin typeface="Arial"/>
+              </a:rPr>
+              <a:t>Takeaway card: docs/best-practices/enforcing-a-convention.md works the whole shape through — including the clauses no gate can decide. Independent follow-up; office hours supports it.</a:t>
             </a:r>
           </a:p>
         </p:txBody>
@@ -13176,7 +14390,7 @@
                 </a:solidFill>
                 <a:latin typeface="Arial"/>
               </a:rPr>
-              <a:t>CHECKPOINT</a:t>
+              <a:t>YOUR CLAUSE · 1 OF 3</a:t>
             </a:r>
           </a:p>
         </p:txBody>
@@ -13215,7 +14429,7 @@
                 </a:solidFill>
                 <a:latin typeface="Arial"/>
               </a:rPr>
-              <a:t>Checkpoint 2</a:t>
+              <a:t>The hook — enforce what you wrote</a:t>
             </a:r>
           </a:p>
         </p:txBody>
@@ -13223,6 +14437,48 @@
       <p:sp>
         <p:nvSpPr>
           <p:cNvPr id="7" name="TextBox 6"/>
+          <p:cNvSpPr txBox="1"/>
+          <p:nvPr/>
+        </p:nvSpPr>
+        <p:spPr>
+          <a:xfrm>
+            <a:off x="548640" y="1316736"/>
+            <a:ext cx="7863840" cy="566928"/>
+          </a:xfrm>
+          <a:prstGeom prst="rect">
+            <a:avLst/>
+          </a:prstGeom>
+          <a:noFill/>
+        </p:spPr>
+        <p:txBody>
+          <a:bodyPr wrap="square" anchor="t" lIns="0" rIns="0" tIns="0" bIns="0">
+            <a:spAutoFit/>
+          </a:bodyPr>
+          <a:lstStyle/>
+          <a:p>
+            <a:pPr algn="l">
+              <a:lnSpc>
+                <a:spcPct val="125000"/>
+              </a:lnSpc>
+              <a:spcAft>
+                <a:spcPts val="400"/>
+              </a:spcAft>
+            </a:pPr>
+            <a:r>
+              <a:rPr sz="1200" b="0">
+                <a:solidFill>
+                  <a:srgbClr val="434343"/>
+                </a:solidFill>
+                <a:latin typeface="Arial"/>
+              </a:rPr>
+              <a:t>Fifteen minutes. The plumbing is given; the policy is yours — test-discipline group: the sibling-test nudge. Store-boundary group: the import check.</a:t>
+            </a:r>
+          </a:p>
+        </p:txBody>
+      </p:sp>
+      <p:sp>
+        <p:nvSpPr>
+          <p:cNvPr id="8" name="TextBox 7"/>
           <p:cNvSpPr txBox="1"/>
           <p:nvPr/>
         </p:nvSpPr>
@@ -13261,141 +14517,14 @@
       </p:sp>
       <p:sp>
         <p:nvSpPr>
-          <p:cNvPr id="8" name="Rectangle 7"/>
-          <p:cNvSpPr/>
-          <p:nvPr/>
-        </p:nvSpPr>
-        <p:spPr>
-          <a:xfrm>
-            <a:off x="548640" y="1691640"/>
-            <a:ext cx="8046720" cy="1417320"/>
-          </a:xfrm>
-          <a:prstGeom prst="rect">
-            <a:avLst/>
-          </a:prstGeom>
-          <a:solidFill>
-            <a:srgbClr val="E2ECFF"/>
-          </a:solidFill>
-          <a:ln>
-            <a:noFill/>
-          </a:ln>
-          <a:effectLst/>
-        </p:spPr>
-        <p:style>
-          <a:lnRef idx="1">
-            <a:schemeClr val="accent1"/>
-          </a:lnRef>
-          <a:fillRef idx="3">
-            <a:schemeClr val="accent1"/>
-          </a:fillRef>
-          <a:effectRef idx="2">
-            <a:schemeClr val="accent1"/>
-          </a:effectRef>
-          <a:fontRef idx="minor">
-            <a:schemeClr val="lt1"/>
-          </a:fontRef>
-        </p:style>
-        <p:txBody>
-          <a:bodyPr rtlCol="0" anchor="ctr"/>
-          <a:lstStyle/>
-          <a:p>
-            <a:pPr algn="ctr"/>
-          </a:p>
-        </p:txBody>
-      </p:sp>
-      <p:sp>
-        <p:nvSpPr>
-          <p:cNvPr id="9" name="Rectangle 8"/>
-          <p:cNvSpPr/>
-          <p:nvPr/>
-        </p:nvSpPr>
-        <p:spPr>
-          <a:xfrm>
-            <a:off x="548640" y="1691640"/>
-            <a:ext cx="54864" cy="1417320"/>
-          </a:xfrm>
-          <a:prstGeom prst="rect">
-            <a:avLst/>
-          </a:prstGeom>
-          <a:solidFill>
-            <a:srgbClr val="1B7F4B"/>
-          </a:solidFill>
-          <a:ln>
-            <a:noFill/>
-          </a:ln>
-          <a:effectLst/>
-        </p:spPr>
-        <p:style>
-          <a:lnRef idx="1">
-            <a:schemeClr val="accent1"/>
-          </a:lnRef>
-          <a:fillRef idx="3">
-            <a:schemeClr val="accent1"/>
-          </a:fillRef>
-          <a:effectRef idx="2">
-            <a:schemeClr val="accent1"/>
-          </a:effectRef>
-          <a:fontRef idx="minor">
-            <a:schemeClr val="lt1"/>
-          </a:fontRef>
-        </p:style>
-        <p:txBody>
-          <a:bodyPr rtlCol="0" anchor="ctr"/>
-          <a:lstStyle/>
-          <a:p>
-            <a:pPr algn="ctr"/>
-          </a:p>
-        </p:txBody>
-      </p:sp>
-      <p:sp>
-        <p:nvSpPr>
-          <p:cNvPr id="10" name="TextBox 9"/>
-          <p:cNvSpPr txBox="1"/>
-          <p:nvPr/>
-        </p:nvSpPr>
-        <p:spPr>
-          <a:xfrm>
-            <a:off x="868680" y="1874519"/>
-            <a:ext cx="7498079" cy="310896"/>
-          </a:xfrm>
-          <a:prstGeom prst="rect">
-            <a:avLst/>
-          </a:prstGeom>
-          <a:noFill/>
-        </p:spPr>
-        <p:txBody>
-          <a:bodyPr wrap="square" anchor="t" lIns="0" rIns="0" tIns="0" bIns="0">
-            <a:spAutoFit/>
-          </a:bodyPr>
-          <a:lstStyle/>
-          <a:p>
-            <a:pPr algn="l">
-              <a:spcAft>
-                <a:spcPts val="400"/>
-              </a:spcAft>
-            </a:pPr>
-            <a:r>
-              <a:rPr sz="950" b="1">
-                <a:solidFill>
-                  <a:srgbClr val="1B7F4B"/>
-                </a:solidFill>
-                <a:latin typeface="Arial"/>
-              </a:rPr>
-              <a:t>NOBODY ADVANCES UNTIL THIS IS TRUE</a:t>
-            </a:r>
-          </a:p>
-        </p:txBody>
-      </p:sp>
-      <p:sp>
-        <p:nvSpPr>
-          <p:cNvPr id="11" name="TextBox 10"/>
-          <p:cNvSpPr txBox="1"/>
-          <p:nvPr/>
-        </p:nvSpPr>
-        <p:spPr>
-          <a:xfrm>
-            <a:off x="868680" y="2240280"/>
-            <a:ext cx="7498079" cy="777240"/>
+          <p:cNvPr id="9" name="TextBox 8"/>
+          <p:cNvSpPr txBox="1"/>
+          <p:nvPr/>
+        </p:nvSpPr>
+        <p:spPr>
+          <a:xfrm>
+            <a:off x="548640" y="1783080"/>
+            <a:ext cx="7863840" cy="2935224"/>
           </a:xfrm>
           <a:prstGeom prst="rect">
             <a:avLst/>
@@ -13410,62 +14539,186 @@
           <a:p>
             <a:pPr algn="l">
               <a:lnSpc>
-                <a:spcPct val="120000"/>
+                <a:spcPct val="122000"/>
               </a:lnSpc>
               <a:spcAft>
-                <a:spcPts val="400"/>
-              </a:spcAft>
-            </a:pPr>
-            <a:r>
-              <a:rPr sz="1400" b="1">
+                <a:spcPts val="900"/>
+              </a:spcAft>
+            </a:pPr>
+            <a:r>
+              <a:rPr sz="1250" b="1">
+                <a:solidFill>
+                  <a:srgbClr val="403FE8"/>
+                </a:solidFill>
+                <a:latin typeface="Arial"/>
+              </a:rPr>
+              <a:t>•  </a:t>
+            </a:r>
+            <a:r>
+              <a:rPr sz="1250" b="1">
                 <a:solidFill>
                   <a:srgbClr val="13135E"/>
                 </a:solidFill>
                 <a:latin typeface="Arial"/>
               </a:rPr>
-              <a:t>Your hook refuses the violation, stays silent on your Lab 1.b change, and the refusal text is pasted in your PR description.</a:t>
-            </a:r>
-          </a:p>
-        </p:txBody>
-      </p:sp>
-      <p:sp>
-        <p:nvSpPr>
-          <p:cNvPr id="12" name="TextBox 11"/>
-          <p:cNvSpPr txBox="1"/>
-          <p:nvPr/>
-        </p:nvSpPr>
-        <p:spPr>
-          <a:xfrm>
-            <a:off x="548640" y="3337560"/>
-            <a:ext cx="7863840" cy="1005840"/>
-          </a:xfrm>
-          <a:prstGeom prst="rect">
-            <a:avLst/>
-          </a:prstGeom>
-          <a:noFill/>
-        </p:spPr>
-        <p:txBody>
-          <a:bodyPr wrap="square" anchor="t" lIns="0" rIns="0" tIns="0" bIns="0">
-            <a:spAutoFit/>
-          </a:bodyPr>
-          <a:lstStyle/>
+              <a:t>Your 2.a clause, revisited. </a:t>
+            </a:r>
+            <a:r>
+              <a:rPr sz="1250" b="0">
+                <a:solidFill>
+                  <a:srgbClr val="434343"/>
+                </a:solidFill>
+                <a:latin typeface="Arial"/>
+              </a:rPr>
+              <a:t>The residue decisions you record today update that same NFR.</a:t>
+            </a:r>
+          </a:p>
           <a:p>
             <a:pPr algn="l">
               <a:lnSpc>
-                <a:spcPct val="130000"/>
+                <a:spcPct val="122000"/>
               </a:lnSpc>
               <a:spcAft>
-                <a:spcPts val="400"/>
-              </a:spcAft>
-            </a:pPr>
-            <a:r>
-              <a:rPr sz="1150" b="0">
+                <a:spcPts val="900"/>
+              </a:spcAft>
+            </a:pPr>
+            <a:r>
+              <a:rPr sz="1250" b="1">
+                <a:solidFill>
+                  <a:srgbClr val="403FE8"/>
+                </a:solidFill>
+                <a:latin typeface="Arial"/>
+              </a:rPr>
+              <a:t>•  </a:t>
+            </a:r>
+            <a:r>
+              <a:rPr sz="1250" b="1">
+                <a:solidFill>
+                  <a:srgbClr val="13135E"/>
+                </a:solidFill>
+                <a:latin typeface="Arial"/>
+              </a:rPr>
+              <a:t>Start from the skeleton. </a:t>
+            </a:r>
+            <a:r>
+              <a:rPr sz="1250" b="0">
                 <a:solidFill>
                   <a:srgbClr val="434343"/>
                 </a:solidFill>
                 <a:latin typeface="Arial"/>
               </a:rPr>
-              <a:t>The refusal text is the evidence standard — "it worked" is not verification.</a:t>
+              <a:t>`docs/labs/snippets/hook-skeleton.js` → `.claude/hooks/check-convention.js`; delete the two example rules; put yours in.</a:t>
+            </a:r>
+          </a:p>
+          <a:p>
+            <a:pPr algn="l">
+              <a:lnSpc>
+                <a:spcPct val="122000"/>
+              </a:lnSpc>
+              <a:spcAft>
+                <a:spcPts val="900"/>
+              </a:spcAft>
+            </a:pPr>
+            <a:r>
+              <a:rPr sz="1250" b="1">
+                <a:solidFill>
+                  <a:srgbClr val="403FE8"/>
+                </a:solidFill>
+                <a:latin typeface="Arial"/>
+              </a:rPr>
+              <a:t>•  </a:t>
+            </a:r>
+            <a:r>
+              <a:rPr sz="1250" b="1">
+                <a:solidFill>
+                  <a:srgbClr val="13135E"/>
+                </a:solidFill>
+                <a:latin typeface="Arial"/>
+              </a:rPr>
+              <a:t>Register it, then NEW session. </a:t>
+            </a:r>
+            <a:r>
+              <a:rPr sz="1250" b="0">
+                <a:solidFill>
+                  <a:srgbClr val="434343"/>
+                </a:solidFill>
+                <a:latin typeface="Arial"/>
+              </a:rPr>
+              <a:t>The settings JSON is in the handout — matcher, event, `$CLAUDE_PROJECT_DIR`. Hooks load at session start.</a:t>
+            </a:r>
+          </a:p>
+          <a:p>
+            <a:pPr algn="l">
+              <a:lnSpc>
+                <a:spcPct val="122000"/>
+              </a:lnSpc>
+              <a:spcAft>
+                <a:spcPts val="900"/>
+              </a:spcAft>
+            </a:pPr>
+            <a:r>
+              <a:rPr sz="1250" b="1">
+                <a:solidFill>
+                  <a:srgbClr val="403FE8"/>
+                </a:solidFill>
+                <a:latin typeface="Arial"/>
+              </a:rPr>
+              <a:t>•  </a:t>
+            </a:r>
+            <a:r>
+              <a:rPr sz="1250" b="1">
+                <a:solidFill>
+                  <a:srgbClr val="13135E"/>
+                </a:solidFill>
+                <a:latin typeface="Arial"/>
+              </a:rPr>
+              <a:t>Choose the severity on purpose. </a:t>
+            </a:r>
+            <a:r>
+              <a:rPr sz="1250" b="0">
+                <a:solidFill>
+                  <a:srgbClr val="434343"/>
+                </a:solidFill>
+                <a:latin typeface="Arial"/>
+              </a:rPr>
+              <a:t>PreToolUse blocks; PostToolUse nudges. If your clause is PARTLY, nudge — and write down why.</a:t>
+            </a:r>
+          </a:p>
+          <a:p>
+            <a:pPr algn="l">
+              <a:lnSpc>
+                <a:spcPct val="122000"/>
+              </a:lnSpc>
+              <a:spcAft>
+                <a:spcPts val="900"/>
+              </a:spcAft>
+            </a:pPr>
+            <a:r>
+              <a:rPr sz="1250" b="1">
+                <a:solidFill>
+                  <a:srgbClr val="403FE8"/>
+                </a:solidFill>
+                <a:latin typeface="Arial"/>
+              </a:rPr>
+              <a:t>•  </a:t>
+            </a:r>
+            <a:r>
+              <a:rPr sz="1250" b="1">
+                <a:solidFill>
+                  <a:srgbClr val="13135E"/>
+                </a:solidFill>
+                <a:latin typeface="Arial"/>
+              </a:rPr>
+              <a:t>Verify both directions. </a:t>
+            </a:r>
+            <a:r>
+              <a:rPr sz="1250" b="0">
+                <a:solidFill>
+                  <a:srgbClr val="434343"/>
+                </a:solidFill>
+                <a:latin typeface="Arial"/>
+              </a:rPr>
+              <a:t>Violation on purpose → save the refusal. Your 1.b change → silence. Refusal text goes in the PR.</a:t>
             </a:r>
           </a:p>
         </p:txBody>
@@ -13634,7 +14887,7 @@
                 </a:solidFill>
                 <a:latin typeface="Arial"/>
               </a:rPr>
-              <a:t>YOUR CLAUSE · 2 OF 3</a:t>
+              <a:t>CHECKPOINT</a:t>
             </a:r>
           </a:p>
         </p:txBody>
@@ -13673,7 +14926,7 @@
                 </a:solidFill>
                 <a:latin typeface="Arial"/>
               </a:rPr>
-              <a:t>The same clause at merge time</a:t>
+              <a:t>Checkpoint 2</a:t>
             </a:r>
           </a:p>
         </p:txBody>
@@ -13681,48 +14934,6 @@
       <p:sp>
         <p:nvSpPr>
           <p:cNvPr id="7" name="TextBox 6"/>
-          <p:cNvSpPr txBox="1"/>
-          <p:nvPr/>
-        </p:nvSpPr>
-        <p:spPr>
-          <a:xfrm>
-            <a:off x="548640" y="1316736"/>
-            <a:ext cx="7863840" cy="566928"/>
-          </a:xfrm>
-          <a:prstGeom prst="rect">
-            <a:avLst/>
-          </a:prstGeom>
-          <a:noFill/>
-        </p:spPr>
-        <p:txBody>
-          <a:bodyPr wrap="square" anchor="t" lIns="0" rIns="0" tIns="0" bIns="0">
-            <a:spAutoFit/>
-          </a:bodyPr>
-          <a:lstStyle/>
-          <a:p>
-            <a:pPr algn="l">
-              <a:lnSpc>
-                <a:spcPct val="125000"/>
-              </a:lnSpc>
-              <a:spcAft>
-                <a:spcPts val="400"/>
-              </a:spcAft>
-            </a:pPr>
-            <a:r>
-              <a:rPr sz="1200" b="0">
-                <a:solidFill>
-                  <a:srgbClr val="434343"/>
-                </a:solidFill>
-                <a:latin typeface="Arial"/>
-              </a:rPr>
-              <a:t>Ten minutes. This is the one layer-4 gate you build today.</a:t>
-            </a:r>
-          </a:p>
-        </p:txBody>
-      </p:sp>
-      <p:sp>
-        <p:nvSpPr>
-          <p:cNvPr id="8" name="TextBox 7"/>
           <p:cNvSpPr txBox="1"/>
           <p:nvPr/>
         </p:nvSpPr>
@@ -13761,14 +14972,141 @@
       </p:sp>
       <p:sp>
         <p:nvSpPr>
-          <p:cNvPr id="9" name="TextBox 8"/>
-          <p:cNvSpPr txBox="1"/>
-          <p:nvPr/>
-        </p:nvSpPr>
-        <p:spPr>
-          <a:xfrm>
-            <a:off x="548640" y="1783080"/>
-            <a:ext cx="7863840" cy="2935224"/>
+          <p:cNvPr id="8" name="Rectangle 7"/>
+          <p:cNvSpPr/>
+          <p:nvPr/>
+        </p:nvSpPr>
+        <p:spPr>
+          <a:xfrm>
+            <a:off x="548640" y="1691640"/>
+            <a:ext cx="8046720" cy="1417320"/>
+          </a:xfrm>
+          <a:prstGeom prst="rect">
+            <a:avLst/>
+          </a:prstGeom>
+          <a:solidFill>
+            <a:srgbClr val="E2ECFF"/>
+          </a:solidFill>
+          <a:ln>
+            <a:noFill/>
+          </a:ln>
+          <a:effectLst/>
+        </p:spPr>
+        <p:style>
+          <a:lnRef idx="1">
+            <a:schemeClr val="accent1"/>
+          </a:lnRef>
+          <a:fillRef idx="3">
+            <a:schemeClr val="accent1"/>
+          </a:fillRef>
+          <a:effectRef idx="2">
+            <a:schemeClr val="accent1"/>
+          </a:effectRef>
+          <a:fontRef idx="minor">
+            <a:schemeClr val="lt1"/>
+          </a:fontRef>
+        </p:style>
+        <p:txBody>
+          <a:bodyPr rtlCol="0" anchor="ctr"/>
+          <a:lstStyle/>
+          <a:p>
+            <a:pPr algn="ctr"/>
+          </a:p>
+        </p:txBody>
+      </p:sp>
+      <p:sp>
+        <p:nvSpPr>
+          <p:cNvPr id="9" name="Rectangle 8"/>
+          <p:cNvSpPr/>
+          <p:nvPr/>
+        </p:nvSpPr>
+        <p:spPr>
+          <a:xfrm>
+            <a:off x="548640" y="1691640"/>
+            <a:ext cx="54864" cy="1417320"/>
+          </a:xfrm>
+          <a:prstGeom prst="rect">
+            <a:avLst/>
+          </a:prstGeom>
+          <a:solidFill>
+            <a:srgbClr val="1B7F4B"/>
+          </a:solidFill>
+          <a:ln>
+            <a:noFill/>
+          </a:ln>
+          <a:effectLst/>
+        </p:spPr>
+        <p:style>
+          <a:lnRef idx="1">
+            <a:schemeClr val="accent1"/>
+          </a:lnRef>
+          <a:fillRef idx="3">
+            <a:schemeClr val="accent1"/>
+          </a:fillRef>
+          <a:effectRef idx="2">
+            <a:schemeClr val="accent1"/>
+          </a:effectRef>
+          <a:fontRef idx="minor">
+            <a:schemeClr val="lt1"/>
+          </a:fontRef>
+        </p:style>
+        <p:txBody>
+          <a:bodyPr rtlCol="0" anchor="ctr"/>
+          <a:lstStyle/>
+          <a:p>
+            <a:pPr algn="ctr"/>
+          </a:p>
+        </p:txBody>
+      </p:sp>
+      <p:sp>
+        <p:nvSpPr>
+          <p:cNvPr id="10" name="TextBox 9"/>
+          <p:cNvSpPr txBox="1"/>
+          <p:nvPr/>
+        </p:nvSpPr>
+        <p:spPr>
+          <a:xfrm>
+            <a:off x="868680" y="1874519"/>
+            <a:ext cx="7498079" cy="310896"/>
+          </a:xfrm>
+          <a:prstGeom prst="rect">
+            <a:avLst/>
+          </a:prstGeom>
+          <a:noFill/>
+        </p:spPr>
+        <p:txBody>
+          <a:bodyPr wrap="square" anchor="t" lIns="0" rIns="0" tIns="0" bIns="0">
+            <a:spAutoFit/>
+          </a:bodyPr>
+          <a:lstStyle/>
+          <a:p>
+            <a:pPr algn="l">
+              <a:spcAft>
+                <a:spcPts val="400"/>
+              </a:spcAft>
+            </a:pPr>
+            <a:r>
+              <a:rPr sz="950" b="1">
+                <a:solidFill>
+                  <a:srgbClr val="1B7F4B"/>
+                </a:solidFill>
+                <a:latin typeface="Arial"/>
+              </a:rPr>
+              <a:t>NOBODY ADVANCES UNTIL THIS IS TRUE</a:t>
+            </a:r>
+          </a:p>
+        </p:txBody>
+      </p:sp>
+      <p:sp>
+        <p:nvSpPr>
+          <p:cNvPr id="11" name="TextBox 10"/>
+          <p:cNvSpPr txBox="1"/>
+          <p:nvPr/>
+        </p:nvSpPr>
+        <p:spPr>
+          <a:xfrm>
+            <a:off x="868680" y="2240280"/>
+            <a:ext cx="7498079" cy="777240"/>
           </a:xfrm>
           <a:prstGeom prst="rect">
             <a:avLst/>
@@ -13783,186 +15121,62 @@
           <a:p>
             <a:pPr algn="l">
               <a:lnSpc>
-                <a:spcPct val="122000"/>
+                <a:spcPct val="120000"/>
               </a:lnSpc>
               <a:spcAft>
-                <a:spcPts val="900"/>
-              </a:spcAft>
-            </a:pPr>
-            <a:r>
-              <a:rPr sz="1250" b="1">
-                <a:solidFill>
-                  <a:srgbClr val="403FE8"/>
-                </a:solidFill>
-                <a:latin typeface="Arial"/>
-              </a:rPr>
-              <a:t>•  </a:t>
-            </a:r>
-            <a:r>
-              <a:rPr sz="1250" b="1">
+                <a:spcPts val="400"/>
+              </a:spcAft>
+            </a:pPr>
+            <a:r>
+              <a:rPr sz="1400" b="1">
                 <a:solidFill>
                   <a:srgbClr val="13135E"/>
                 </a:solidFill>
                 <a:latin typeface="Arial"/>
               </a:rPr>
-              <a:t>The hook stops the agent. This stops anyone. </a:t>
-            </a:r>
-            <a:r>
-              <a:rPr sz="1250" b="0">
+              <a:t>Your hook refuses the violation, stays silent on your Lab 1.b change, and the refusal text is pasted in your PR description.</a:t>
+            </a:r>
+          </a:p>
+        </p:txBody>
+      </p:sp>
+      <p:sp>
+        <p:nvSpPr>
+          <p:cNvPr id="12" name="TextBox 11"/>
+          <p:cNvSpPr txBox="1"/>
+          <p:nvPr/>
+        </p:nvSpPr>
+        <p:spPr>
+          <a:xfrm>
+            <a:off x="548640" y="3337560"/>
+            <a:ext cx="7863840" cy="1005840"/>
+          </a:xfrm>
+          <a:prstGeom prst="rect">
+            <a:avLst/>
+          </a:prstGeom>
+          <a:noFill/>
+        </p:spPr>
+        <p:txBody>
+          <a:bodyPr wrap="square" anchor="t" lIns="0" rIns="0" tIns="0" bIns="0">
+            <a:spAutoFit/>
+          </a:bodyPr>
+          <a:lstStyle/>
+          <a:p>
+            <a:pPr algn="l">
+              <a:lnSpc>
+                <a:spcPct val="130000"/>
+              </a:lnSpc>
+              <a:spcAft>
+                <a:spcPts val="400"/>
+              </a:spcAft>
+            </a:pPr>
+            <a:r>
+              <a:rPr sz="1150" b="0">
                 <a:solidFill>
                   <a:srgbClr val="434343"/>
                 </a:solidFill>
                 <a:latin typeface="Arial"/>
               </a:rPr>
-              <a:t>Including a human who never opened Claude Code.</a:t>
-            </a:r>
-          </a:p>
-          <a:p>
-            <a:pPr algn="l">
-              <a:lnSpc>
-                <a:spcPct val="122000"/>
-              </a:lnSpc>
-              <a:spcAft>
-                <a:spcPts val="900"/>
-              </a:spcAft>
-            </a:pPr>
-            <a:r>
-              <a:rPr sz="1250" b="1">
-                <a:solidFill>
-                  <a:srgbClr val="403FE8"/>
-                </a:solidFill>
-                <a:latin typeface="Arial"/>
-              </a:rPr>
-              <a:t>•  </a:t>
-            </a:r>
-            <a:r>
-              <a:rPr sz="1250" b="1">
-                <a:solidFill>
-                  <a:srgbClr val="13135E"/>
-                </a:solidFill>
-                <a:latin typeface="Arial"/>
-              </a:rPr>
-              <a:t>Start from the gate skeleton. </a:t>
-            </a:r>
-            <a:r>
-              <a:rPr sz="1250" b="0">
-                <a:solidFill>
-                  <a:srgbClr val="434343"/>
-                </a:solidFill>
-                <a:latin typeface="Arial"/>
-              </a:rPr>
-              <a:t>`docs/labs/snippets/governance-gate.yml` → `.github/workflows/governance.yml`; encode the mechanical core only.</a:t>
-            </a:r>
-          </a:p>
-          <a:p>
-            <a:pPr algn="l">
-              <a:lnSpc>
-                <a:spcPct val="122000"/>
-              </a:lnSpc>
-              <a:spcAft>
-                <a:spcPts val="900"/>
-              </a:spcAft>
-            </a:pPr>
-            <a:r>
-              <a:rPr sz="1250" b="1">
-                <a:solidFill>
-                  <a:srgbClr val="403FE8"/>
-                </a:solidFill>
-                <a:latin typeface="Arial"/>
-              </a:rPr>
-              <a:t>•  </a:t>
-            </a:r>
-            <a:r>
-              <a:rPr sz="1250" b="1">
-                <a:solidFill>
-                  <a:srgbClr val="13135E"/>
-                </a:solidFill>
-                <a:latin typeface="Arial"/>
-              </a:rPr>
-              <a:t>`fetch-depth: 0` or it breaks. </a:t>
-            </a:r>
-            <a:r>
-              <a:rPr sz="1250" b="0">
-                <a:solidFill>
-                  <a:srgbClr val="434343"/>
-                </a:solidFill>
-                <a:latin typeface="Arial"/>
-              </a:rPr>
-              <a:t>The default shallow clone makes any diff against the base branch fail with an unhelpful error.</a:t>
-            </a:r>
-          </a:p>
-          <a:p>
-            <a:pPr algn="l">
-              <a:lnSpc>
-                <a:spcPct val="122000"/>
-              </a:lnSpc>
-              <a:spcAft>
-                <a:spcPts val="900"/>
-              </a:spcAft>
-            </a:pPr>
-            <a:r>
-              <a:rPr sz="1250" b="1">
-                <a:solidFill>
-                  <a:srgbClr val="403FE8"/>
-                </a:solidFill>
-                <a:latin typeface="Arial"/>
-              </a:rPr>
-              <a:t>•  </a:t>
-            </a:r>
-            <a:r>
-              <a:rPr sz="1250" b="1">
-                <a:solidFill>
-                  <a:srgbClr val="13135E"/>
-                </a:solidFill>
-                <a:latin typeface="Arial"/>
-              </a:rPr>
-              <a:t>Fail or annotate — decide. </a:t>
-            </a:r>
-            <a:r>
-              <a:rPr sz="1250" b="0">
-                <a:solidFill>
-                  <a:srgbClr val="434343"/>
-                </a:solidFill>
-                <a:latin typeface="Arial"/>
-              </a:rPr>
-              <a:t>What does a docs-only PR do? Path filter, warn, or accept — on purpose, written down.</a:t>
-            </a:r>
-          </a:p>
-          <a:p>
-            <a:pPr algn="l">
-              <a:lnSpc>
-                <a:spcPct val="122000"/>
-              </a:lnSpc>
-              <a:spcAft>
-                <a:spcPts val="900"/>
-              </a:spcAft>
-            </a:pPr>
-            <a:r>
-              <a:rPr sz="1250" b="1">
-                <a:solidFill>
-                  <a:srgbClr val="403FE8"/>
-                </a:solidFill>
-                <a:latin typeface="Arial"/>
-              </a:rPr>
-              <a:t>•  </a:t>
-            </a:r>
-            <a:r>
-              <a:rPr sz="1250" b="1">
-                <a:solidFill>
-                  <a:srgbClr val="13135E"/>
-                </a:solidFill>
-                <a:latin typeface="Arial"/>
-              </a:rPr>
-              <a:t>Record the residue. </a:t>
-            </a:r>
-            <a:r>
-              <a:rPr sz="1250" b="0">
-                <a:solidFill>
-                  <a:srgbClr val="434343"/>
-                </a:solidFill>
-                <a:latin typeface="Arial"/>
-              </a:rPr>
-              <a:t>Every clause the gate cannot hold: accepted risk, human gate, or dropped — with a name, back in the 2.a NFR.</a:t>
+              <a:t>The refusal text is the evidence standard — "it worked" is not verification.</a:t>
             </a:r>
           </a:p>
         </p:txBody>
@@ -14131,7 +15345,7 @@
                 </a:solidFill>
                 <a:latin typeface="Arial"/>
               </a:rPr>
-              <a:t>YOUR CLAUSE · 3 OF 3</a:t>
+              <a:t>YOUR CLAUSE · 2 OF 3</a:t>
             </a:r>
           </a:p>
         </p:txBody>
@@ -14170,7 +15384,7 @@
                 </a:solidFill>
                 <a:latin typeface="Arial"/>
               </a:rPr>
-              <a:t>Point the reviewer at your standards</a:t>
+              <a:t>The same clause at merge time</a:t>
             </a:r>
           </a:p>
         </p:txBody>
@@ -14212,7 +15426,7 @@
                 </a:solidFill>
                 <a:latin typeface="Arial"/>
               </a:rPr>
-              <a:t>This is what "fed to the agent as explicit constraints" actually looks like.</a:t>
+              <a:t>Ten minutes. This is the one layer-4 gate you build today — and it only runs when a PR exists, so open one (draft is fine) to see it fire.</a:t>
             </a:r>
           </a:p>
         </p:txBody>
@@ -14264,546 +15478,202 @@
         </p:nvSpPr>
         <p:spPr>
           <a:xfrm>
-            <a:off x="548640" y="2011680"/>
-            <a:ext cx="3703320" cy="274320"/>
-          </a:xfrm>
-          <a:prstGeom prst="rect">
-            <a:avLst/>
-          </a:prstGeom>
-          <a:noFill/>
-        </p:spPr>
-        <p:txBody>
-          <a:bodyPr wrap="square" anchor="t" lIns="0" rIns="0" tIns="0" bIns="0">
-            <a:spAutoFit/>
-          </a:bodyPr>
-          <a:lstStyle/>
-          <a:p>
-            <a:pPr algn="l">
-              <a:spcAft>
-                <a:spcPts val="400"/>
-              </a:spcAft>
-            </a:pPr>
-            <a:r>
-              <a:rPr sz="950" b="1">
+            <a:off x="548640" y="1783080"/>
+            <a:ext cx="7863840" cy="2935224"/>
+          </a:xfrm>
+          <a:prstGeom prst="rect">
+            <a:avLst/>
+          </a:prstGeom>
+          <a:noFill/>
+        </p:spPr>
+        <p:txBody>
+          <a:bodyPr wrap="square" anchor="t" lIns="0" rIns="0" tIns="0" bIns="0">
+            <a:spAutoFit/>
+          </a:bodyPr>
+          <a:lstStyle/>
+          <a:p>
+            <a:pPr algn="l">
+              <a:lnSpc>
+                <a:spcPct val="122000"/>
+              </a:lnSpc>
+              <a:spcAft>
+                <a:spcPts val="900"/>
+              </a:spcAft>
+            </a:pPr>
+            <a:r>
+              <a:rPr sz="1250" b="1">
                 <a:solidFill>
                   <a:srgbClr val="403FE8"/>
                 </a:solidFill>
                 <a:latin typeface="Arial"/>
               </a:rPr>
-              <a:t>FEEDING THE AGENT CONSTRAINTS</a:t>
-            </a:r>
-          </a:p>
-        </p:txBody>
-      </p:sp>
-      <p:sp>
-        <p:nvSpPr>
-          <p:cNvPr id="10" name="TextBox 9"/>
-          <p:cNvSpPr txBox="1"/>
-          <p:nvPr/>
-        </p:nvSpPr>
-        <p:spPr>
-          <a:xfrm>
-            <a:off x="548640" y="2377440"/>
-            <a:ext cx="3703320" cy="2249424"/>
-          </a:xfrm>
-          <a:prstGeom prst="rect">
-            <a:avLst/>
-          </a:prstGeom>
-          <a:noFill/>
-        </p:spPr>
-        <p:txBody>
-          <a:bodyPr wrap="square" anchor="t" lIns="0" rIns="0" tIns="0" bIns="0">
-            <a:spAutoFit/>
-          </a:bodyPr>
-          <a:lstStyle/>
+              <a:t>•  </a:t>
+            </a:r>
+            <a:r>
+              <a:rPr sz="1250" b="1">
+                <a:solidFill>
+                  <a:srgbClr val="13135E"/>
+                </a:solidFill>
+                <a:latin typeface="Arial"/>
+              </a:rPr>
+              <a:t>The hook stops the agent. This stops anyone. </a:t>
+            </a:r>
+            <a:r>
+              <a:rPr sz="1250" b="0">
+                <a:solidFill>
+                  <a:srgbClr val="434343"/>
+                </a:solidFill>
+                <a:latin typeface="Arial"/>
+              </a:rPr>
+              <a:t>Including a human who never opened Claude Code.</a:t>
+            </a:r>
+          </a:p>
           <a:p>
             <a:pPr algn="l">
               <a:lnSpc>
-                <a:spcPct val="120000"/>
+                <a:spcPct val="122000"/>
               </a:lnSpc>
               <a:spcAft>
-                <a:spcPts val="800"/>
-              </a:spcAft>
-            </a:pPr>
-            <a:r>
-              <a:rPr sz="1100" b="1">
-                <a:solidFill>
-                  <a:srgbClr val="A9B7F7"/>
+                <a:spcPts val="900"/>
+              </a:spcAft>
+            </a:pPr>
+            <a:r>
+              <a:rPr sz="1250" b="1">
+                <a:solidFill>
+                  <a:srgbClr val="403FE8"/>
                 </a:solidFill>
                 <a:latin typeface="Arial"/>
               </a:rPr>
               <a:t>•  </a:t>
             </a:r>
             <a:r>
-              <a:rPr sz="1100" b="0">
+              <a:rPr sz="1250" b="1">
+                <a:solidFill>
+                  <a:srgbClr val="13135E"/>
+                </a:solidFill>
+                <a:latin typeface="Arial"/>
+              </a:rPr>
+              <a:t>Start from the gate skeleton. </a:t>
+            </a:r>
+            <a:r>
+              <a:rPr sz="1250" b="0">
                 <a:solidFill>
                   <a:srgbClr val="434343"/>
                 </a:solidFill>
                 <a:latin typeface="Arial"/>
               </a:rPr>
-              <a:t>The repo ships a review subagent that reads CLAUDE.md, then whichever ADRs / NFRs / rules apply.</a:t>
+              <a:t>`docs/labs/snippets/governance-gate.yml` → `.github/workflows/governance.yml`; encode the mechanical core only.</a:t>
             </a:r>
           </a:p>
           <a:p>
             <a:pPr algn="l">
               <a:lnSpc>
-                <a:spcPct val="120000"/>
+                <a:spcPct val="122000"/>
               </a:lnSpc>
               <a:spcAft>
-                <a:spcPts val="800"/>
-              </a:spcAft>
-            </a:pPr>
-            <a:r>
-              <a:rPr sz="1100" b="1">
-                <a:solidFill>
-                  <a:srgbClr val="A9B7F7"/>
+                <a:spcPts val="900"/>
+              </a:spcAft>
+            </a:pPr>
+            <a:r>
+              <a:rPr sz="1250" b="1">
+                <a:solidFill>
+                  <a:srgbClr val="403FE8"/>
                 </a:solidFill>
                 <a:latin typeface="Arial"/>
               </a:rPr>
               <a:t>•  </a:t>
             </a:r>
             <a:r>
-              <a:rPr sz="1100" b="0">
+              <a:rPr sz="1250" b="1">
+                <a:solidFill>
+                  <a:srgbClr val="13135E"/>
+                </a:solidFill>
+                <a:latin typeface="Arial"/>
+              </a:rPr>
+              <a:t>`fetch-depth: 0` or it breaks. </a:t>
+            </a:r>
+            <a:r>
+              <a:rPr sz="1250" b="0">
                 <a:solidFill>
                   <a:srgbClr val="434343"/>
                 </a:solidFill>
                 <a:latin typeface="Arial"/>
               </a:rPr>
-              <a:t>Add YOUR two docs to its reading list.</a:t>
+              <a:t>The default shallow clone makes any diff against the base branch fail with an unhelpful error.</a:t>
             </a:r>
           </a:p>
           <a:p>
             <a:pPr algn="l">
               <a:lnSpc>
-                <a:spcPct val="120000"/>
+                <a:spcPct val="122000"/>
               </a:lnSpc>
               <a:spcAft>
-                <a:spcPts val="800"/>
-              </a:spcAft>
-            </a:pPr>
-            <a:r>
-              <a:rPr sz="1100" b="1">
-                <a:solidFill>
-                  <a:srgbClr val="A9B7F7"/>
+                <a:spcPts val="900"/>
+              </a:spcAft>
+            </a:pPr>
+            <a:r>
+              <a:rPr sz="1250" b="1">
+                <a:solidFill>
+                  <a:srgbClr val="403FE8"/>
                 </a:solidFill>
                 <a:latin typeface="Arial"/>
               </a:rPr>
               <a:t>•  </a:t>
             </a:r>
             <a:r>
-              <a:rPr sz="1100" b="0">
+              <a:rPr sz="1250" b="1">
+                <a:solidFill>
+                  <a:srgbClr val="13135E"/>
+                </a:solidFill>
+                <a:latin typeface="Arial"/>
+              </a:rPr>
+              <a:t>Fail or annotate — decide. </a:t>
+            </a:r>
+            <a:r>
+              <a:rPr sz="1250" b="0">
                 <a:solidFill>
                   <a:srgbClr val="434343"/>
                 </a:solidFill>
                 <a:latin typeface="Arial"/>
               </a:rPr>
-              <a:t>Run it on your own branch.</a:t>
+              <a:t>What does a docs-only PR do? Path filter, warn, or accept — on purpose, written down.</a:t>
             </a:r>
           </a:p>
           <a:p>
             <a:pPr algn="l">
               <a:lnSpc>
-                <a:spcPct val="120000"/>
+                <a:spcPct val="122000"/>
               </a:lnSpc>
               <a:spcAft>
-                <a:spcPts val="800"/>
-              </a:spcAft>
-            </a:pPr>
-            <a:r>
-              <a:rPr sz="1100" b="1">
-                <a:solidFill>
-                  <a:srgbClr val="A9B7F7"/>
+                <a:spcPts val="900"/>
+              </a:spcAft>
+            </a:pPr>
+            <a:r>
+              <a:rPr sz="1250" b="1">
+                <a:solidFill>
+                  <a:srgbClr val="403FE8"/>
                 </a:solidFill>
                 <a:latin typeface="Arial"/>
               </a:rPr>
               <a:t>•  </a:t>
             </a:r>
             <a:r>
-              <a:rPr sz="1100" b="0">
+              <a:rPr sz="1250" b="1">
+                <a:solidFill>
+                  <a:srgbClr val="13135E"/>
+                </a:solidFill>
+                <a:latin typeface="Arial"/>
+              </a:rPr>
+              <a:t>Record the residue. </a:t>
+            </a:r>
+            <a:r>
+              <a:rPr sz="1250" b="0">
                 <a:solidFill>
                   <a:srgbClr val="434343"/>
                 </a:solidFill>
                 <a:latin typeface="Arial"/>
               </a:rPr>
-              <a:t>Its findings now cite your standard — that is the loop closing.</a:t>
-            </a:r>
-          </a:p>
-        </p:txBody>
-      </p:sp>
-      <p:sp>
-        <p:nvSpPr>
-          <p:cNvPr id="11" name="Rectangle 10"/>
-          <p:cNvSpPr/>
-          <p:nvPr/>
-        </p:nvSpPr>
-        <p:spPr>
-          <a:xfrm>
-            <a:off x="4572000" y="2011680"/>
-            <a:ext cx="4023360" cy="2706624"/>
-          </a:xfrm>
-          <a:prstGeom prst="rect">
-            <a:avLst/>
-          </a:prstGeom>
-          <a:solidFill>
-            <a:srgbClr val="F4F5FB"/>
-          </a:solidFill>
-          <a:ln>
-            <a:noFill/>
-          </a:ln>
-          <a:effectLst/>
-        </p:spPr>
-        <p:style>
-          <a:lnRef idx="1">
-            <a:schemeClr val="accent1"/>
-          </a:lnRef>
-          <a:fillRef idx="3">
-            <a:schemeClr val="accent1"/>
-          </a:fillRef>
-          <a:effectRef idx="2">
-            <a:schemeClr val="accent1"/>
-          </a:effectRef>
-          <a:fontRef idx="minor">
-            <a:schemeClr val="lt1"/>
-          </a:fontRef>
-        </p:style>
-        <p:txBody>
-          <a:bodyPr rtlCol="0" anchor="ctr"/>
-          <a:lstStyle/>
-          <a:p>
-            <a:pPr algn="ctr"/>
-          </a:p>
-        </p:txBody>
-      </p:sp>
-      <p:sp>
-        <p:nvSpPr>
-          <p:cNvPr id="12" name="Rectangle 11"/>
-          <p:cNvSpPr/>
-          <p:nvPr/>
-        </p:nvSpPr>
-        <p:spPr>
-          <a:xfrm>
-            <a:off x="4572000" y="2011680"/>
-            <a:ext cx="41148" cy="2706624"/>
-          </a:xfrm>
-          <a:prstGeom prst="rect">
-            <a:avLst/>
-          </a:prstGeom>
-          <a:solidFill>
-            <a:srgbClr val="403FE8"/>
-          </a:solidFill>
-          <a:ln>
-            <a:noFill/>
-          </a:ln>
-          <a:effectLst/>
-        </p:spPr>
-        <p:style>
-          <a:lnRef idx="1">
-            <a:schemeClr val="accent1"/>
-          </a:lnRef>
-          <a:fillRef idx="3">
-            <a:schemeClr val="accent1"/>
-          </a:fillRef>
-          <a:effectRef idx="2">
-            <a:schemeClr val="accent1"/>
-          </a:effectRef>
-          <a:fontRef idx="minor">
-            <a:schemeClr val="lt1"/>
-          </a:fontRef>
-        </p:style>
-        <p:txBody>
-          <a:bodyPr rtlCol="0" anchor="ctr"/>
-          <a:lstStyle/>
-          <a:p>
-            <a:pPr algn="ctr"/>
-          </a:p>
-        </p:txBody>
-      </p:sp>
-      <p:sp>
-        <p:nvSpPr>
-          <p:cNvPr id="13" name="TextBox 12"/>
-          <p:cNvSpPr txBox="1"/>
-          <p:nvPr/>
-        </p:nvSpPr>
-        <p:spPr>
-          <a:xfrm>
-            <a:off x="4773168" y="2139696"/>
-            <a:ext cx="3657600" cy="219456"/>
-          </a:xfrm>
-          <a:prstGeom prst="rect">
-            <a:avLst/>
-          </a:prstGeom>
-          <a:noFill/>
-        </p:spPr>
-        <p:txBody>
-          <a:bodyPr wrap="square" anchor="t" lIns="0" rIns="0" tIns="0" bIns="0">
-            <a:spAutoFit/>
-          </a:bodyPr>
-          <a:lstStyle/>
-          <a:p>
-            <a:pPr algn="l">
-              <a:spcAft>
-                <a:spcPts val="400"/>
-              </a:spcAft>
-            </a:pPr>
-            <a:r>
-              <a:rPr sz="850" b="1">
-                <a:solidFill>
-                  <a:srgbClr val="999999"/>
-                </a:solidFill>
-                <a:latin typeface="Arial"/>
-              </a:rPr>
-              <a:t>4 MINUTES</a:t>
-            </a:r>
-          </a:p>
-        </p:txBody>
-      </p:sp>
-      <p:sp>
-        <p:nvSpPr>
-          <p:cNvPr id="14" name="TextBox 13"/>
-          <p:cNvSpPr txBox="1"/>
-          <p:nvPr/>
-        </p:nvSpPr>
-        <p:spPr>
-          <a:xfrm>
-            <a:off x="4773168" y="2414016"/>
-            <a:ext cx="3657600" cy="2212848"/>
-          </a:xfrm>
-          <a:prstGeom prst="rect">
-            <a:avLst/>
-          </a:prstGeom>
-          <a:noFill/>
-        </p:spPr>
-        <p:txBody>
-          <a:bodyPr wrap="square" anchor="t" lIns="0" rIns="0" tIns="0" bIns="0">
-            <a:spAutoFit/>
-          </a:bodyPr>
-          <a:lstStyle/>
-          <a:p>
-            <a:pPr algn="l">
-              <a:lnSpc>
-                <a:spcPct val="114000"/>
-              </a:lnSpc>
-              <a:spcAft>
-                <a:spcPts val="0"/>
-              </a:spcAft>
-            </a:pPr>
-            <a:r>
-              <a:rPr sz="900" b="0">
-                <a:solidFill>
-                  <a:srgbClr val="434343"/>
-                </a:solidFill>
-                <a:latin typeface="Consolas"/>
-              </a:rPr>
-              <a:t># .claude/agents/</a:t>
-            </a:r>
-          </a:p>
-          <a:p>
-            <a:pPr algn="l">
-              <a:lnSpc>
-                <a:spcPct val="114000"/>
-              </a:lnSpc>
-              <a:spcAft>
-                <a:spcPts val="0"/>
-              </a:spcAft>
-            </a:pPr>
-            <a:r>
-              <a:rPr sz="900" b="0">
-                <a:solidFill>
-                  <a:srgbClr val="434343"/>
-                </a:solidFill>
-                <a:latin typeface="Consolas"/>
-              </a:rPr>
-              <a:t>#   taskboard-code-reviewer.md</a:t>
-            </a:r>
-          </a:p>
-          <a:p>
-            <a:pPr algn="l">
-              <a:lnSpc>
-                <a:spcPct val="114000"/>
-              </a:lnSpc>
-              <a:spcAft>
-                <a:spcPts val="0"/>
-              </a:spcAft>
-            </a:pPr>
-            <a:r>
-              <a:rPr sz="900" b="0">
-                <a:solidFill>
-                  <a:srgbClr val="434343"/>
-                </a:solidFill>
-                <a:latin typeface="Consolas"/>
-              </a:rPr>
-              <a:t/>
-            </a:r>
-          </a:p>
-          <a:p>
-            <a:pPr algn="l">
-              <a:lnSpc>
-                <a:spcPct val="114000"/>
-              </a:lnSpc>
-              <a:spcAft>
-                <a:spcPts val="0"/>
-              </a:spcAft>
-            </a:pPr>
-            <a:r>
-              <a:rPr sz="900" b="0">
-                <a:solidFill>
-                  <a:srgbClr val="434343"/>
-                </a:solidFill>
-                <a:latin typeface="Consolas"/>
-              </a:rPr>
-              <a:t># add to its process list:</a:t>
-            </a:r>
-          </a:p>
-          <a:p>
-            <a:pPr algn="l">
-              <a:lnSpc>
-                <a:spcPct val="114000"/>
-              </a:lnSpc>
-              <a:spcAft>
-                <a:spcPts val="0"/>
-              </a:spcAft>
-            </a:pPr>
-            <a:r>
-              <a:rPr sz="900" b="0">
-                <a:solidFill>
-                  <a:srgbClr val="434343"/>
-                </a:solidFill>
-                <a:latin typeface="Consolas"/>
-              </a:rPr>
-              <a:t>- docs/adr/0002-&lt;yours&gt;.md</a:t>
-            </a:r>
-          </a:p>
-          <a:p>
-            <a:pPr algn="l">
-              <a:lnSpc>
-                <a:spcPct val="114000"/>
-              </a:lnSpc>
-              <a:spcAft>
-                <a:spcPts val="0"/>
-              </a:spcAft>
-            </a:pPr>
-            <a:r>
-              <a:rPr sz="900" b="0">
-                <a:solidFill>
-                  <a:srgbClr val="434343"/>
-                </a:solidFill>
-                <a:latin typeface="Consolas"/>
-              </a:rPr>
-              <a:t>- docs/nfr/0002-&lt;yours&gt;.md</a:t>
-            </a:r>
-          </a:p>
-          <a:p>
-            <a:pPr algn="l">
-              <a:lnSpc>
-                <a:spcPct val="114000"/>
-              </a:lnSpc>
-              <a:spcAft>
-                <a:spcPts val="0"/>
-              </a:spcAft>
-            </a:pPr>
-            <a:r>
-              <a:rPr sz="900" b="0">
-                <a:solidFill>
-                  <a:srgbClr val="434343"/>
-                </a:solidFill>
-                <a:latin typeface="Consolas"/>
-              </a:rPr>
-              <a:t/>
-            </a:r>
-          </a:p>
-          <a:p>
-            <a:pPr algn="l">
-              <a:lnSpc>
-                <a:spcPct val="114000"/>
-              </a:lnSpc>
-              <a:spcAft>
-                <a:spcPts val="0"/>
-              </a:spcAft>
-            </a:pPr>
-            <a:r>
-              <a:rPr sz="900" b="0">
-                <a:solidFill>
-                  <a:srgbClr val="434343"/>
-                </a:solidFill>
-                <a:latin typeface="Consolas"/>
-              </a:rPr>
-              <a:t># no .claude/agents/ folder?</a:t>
-            </a:r>
-          </a:p>
-          <a:p>
-            <a:pPr algn="l">
-              <a:lnSpc>
-                <a:spcPct val="114000"/>
-              </a:lnSpc>
-              <a:spcAft>
-                <a:spcPts val="0"/>
-              </a:spcAft>
-            </a:pPr>
-            <a:r>
-              <a:rPr sz="900" b="0">
-                <a:solidFill>
-                  <a:srgbClr val="434343"/>
-                </a:solidFill>
-                <a:latin typeface="Consolas"/>
-              </a:rPr>
-              <a:t># your copy predates it — pull it:</a:t>
-            </a:r>
-          </a:p>
-          <a:p>
-            <a:pPr algn="l">
-              <a:lnSpc>
-                <a:spcPct val="114000"/>
-              </a:lnSpc>
-              <a:spcAft>
-                <a:spcPts val="0"/>
-              </a:spcAft>
-            </a:pPr>
-            <a:r>
-              <a:rPr sz="900" b="0">
-                <a:solidFill>
-                  <a:srgbClr val="434343"/>
-                </a:solidFill>
-                <a:latin typeface="Consolas"/>
-              </a:rPr>
-              <a:t>npx giget gh:mike-tajmajer-</a:t>
-            </a:r>
-          </a:p>
-          <a:p>
-            <a:pPr algn="l">
-              <a:lnSpc>
-                <a:spcPct val="114000"/>
-              </a:lnSpc>
-              <a:spcAft>
-                <a:spcPts val="0"/>
-              </a:spcAft>
-            </a:pPr>
-            <a:r>
-              <a:rPr sz="900" b="0">
-                <a:solidFill>
-                  <a:srgbClr val="434343"/>
-                </a:solidFill>
-                <a:latin typeface="Consolas"/>
-              </a:rPr>
-              <a:t>  fullstacklabs/fsl-taskboard-lab/</a:t>
-            </a:r>
-          </a:p>
-          <a:p>
-            <a:pPr algn="l">
-              <a:lnSpc>
-                <a:spcPct val="114000"/>
-              </a:lnSpc>
-              <a:spcAft>
-                <a:spcPts val="0"/>
-              </a:spcAft>
-            </a:pPr>
-            <a:r>
-              <a:rPr sz="900" b="0">
-                <a:solidFill>
-                  <a:srgbClr val="434343"/>
-                </a:solidFill>
-                <a:latin typeface="Consolas"/>
-              </a:rPr>
-              <a:t>  .claude/agents .claude/agents</a:t>
+              <a:t>Every clause the gate cannot hold: accepted risk, human gate, or dropped — with a name, back in the 2.a NFR.</a:t>
             </a:r>
           </a:p>
         </p:txBody>
@@ -14972,7 +15842,7 @@
                 </a:solidFill>
                 <a:latin typeface="Arial"/>
               </a:rPr>
-              <a:t>REVIEW</a:t>
+              <a:t>YOUR CLAUSE · 3 OF 3</a:t>
             </a:r>
           </a:p>
         </p:txBody>
@@ -15011,7 +15881,7 @@
                 </a:solidFill>
                 <a:latin typeface="Arial"/>
               </a:rPr>
-              <a:t>Let us compare</a:t>
+              <a:t>Point the reviewer at your standards</a:t>
             </a:r>
           </a:p>
         </p:txBody>
@@ -15053,7 +15923,7 @@
                 </a:solidFill>
                 <a:latin typeface="Arial"/>
               </a:rPr>
-              <a:t>Ten minutes. Two or three screens, not everyone.</a:t>
+              <a:t>This is what "fed to the agent as explicit constraints" actually looks like.</a:t>
             </a:r>
           </a:p>
         </p:txBody>
@@ -15105,8 +15975,47 @@
         </p:nvSpPr>
         <p:spPr>
           <a:xfrm>
-            <a:off x="548640" y="1783080"/>
-            <a:ext cx="7863840" cy="2935224"/>
+            <a:off x="548640" y="2011680"/>
+            <a:ext cx="3703320" cy="274320"/>
+          </a:xfrm>
+          <a:prstGeom prst="rect">
+            <a:avLst/>
+          </a:prstGeom>
+          <a:noFill/>
+        </p:spPr>
+        <p:txBody>
+          <a:bodyPr wrap="square" anchor="t" lIns="0" rIns="0" tIns="0" bIns="0">
+            <a:spAutoFit/>
+          </a:bodyPr>
+          <a:lstStyle/>
+          <a:p>
+            <a:pPr algn="l">
+              <a:spcAft>
+                <a:spcPts val="400"/>
+              </a:spcAft>
+            </a:pPr>
+            <a:r>
+              <a:rPr sz="950" b="1">
+                <a:solidFill>
+                  <a:srgbClr val="403FE8"/>
+                </a:solidFill>
+                <a:latin typeface="Arial"/>
+              </a:rPr>
+              <a:t>FEEDING THE AGENT CONSTRAINTS</a:t>
+            </a:r>
+          </a:p>
+        </p:txBody>
+      </p:sp>
+      <p:sp>
+        <p:nvSpPr>
+          <p:cNvPr id="10" name="TextBox 9"/>
+          <p:cNvSpPr txBox="1"/>
+          <p:nvPr/>
+        </p:nvSpPr>
+        <p:spPr>
+          <a:xfrm>
+            <a:off x="548640" y="2377440"/>
+            <a:ext cx="3703320" cy="2249424"/>
           </a:xfrm>
           <a:prstGeom prst="rect">
             <a:avLst/>
@@ -15121,141 +16030,491 @@
           <a:p>
             <a:pPr algn="l">
               <a:lnSpc>
-                <a:spcPct val="122000"/>
+                <a:spcPct val="120000"/>
               </a:lnSpc>
               <a:spcAft>
-                <a:spcPts val="900"/>
-              </a:spcAft>
-            </a:pPr>
-            <a:r>
-              <a:rPr sz="1250" b="1">
-                <a:solidFill>
-                  <a:srgbClr val="403FE8"/>
+                <a:spcPts val="800"/>
+              </a:spcAft>
+            </a:pPr>
+            <a:r>
+              <a:rPr sz="1100" b="1">
+                <a:solidFill>
+                  <a:srgbClr val="A9B7F7"/>
                 </a:solidFill>
                 <a:latin typeface="Arial"/>
               </a:rPr>
               <a:t>•  </a:t>
             </a:r>
             <a:r>
-              <a:rPr sz="1250" b="0">
+              <a:rPr sz="1100" b="0">
                 <a:solidFill>
                   <a:srgbClr val="434343"/>
                 </a:solidFill>
                 <a:latin typeface="Arial"/>
               </a:rPr>
-              <a:t>Whose guardrail has a false positive — and how did you find out?</a:t>
+              <a:t>The repo ships a review subagent that reads CLAUDE.md, then whichever ADRs / NFRs / rules apply.</a:t>
             </a:r>
           </a:p>
           <a:p>
             <a:pPr algn="l">
               <a:lnSpc>
-                <a:spcPct val="122000"/>
+                <a:spcPct val="120000"/>
               </a:lnSpc>
               <a:spcAft>
-                <a:spcPts val="900"/>
-              </a:spcAft>
-            </a:pPr>
-            <a:r>
-              <a:rPr sz="1250" b="1">
-                <a:solidFill>
-                  <a:srgbClr val="403FE8"/>
+                <a:spcPts val="800"/>
+              </a:spcAft>
+            </a:pPr>
+            <a:r>
+              <a:rPr sz="1100" b="1">
+                <a:solidFill>
+                  <a:srgbClr val="A9B7F7"/>
                 </a:solidFill>
                 <a:latin typeface="Arial"/>
               </a:rPr>
               <a:t>•  </a:t>
             </a:r>
             <a:r>
-              <a:rPr sz="1250" b="0">
+              <a:rPr sz="1100" b="0">
                 <a:solidFill>
                   <a:srgbClr val="434343"/>
                 </a:solidFill>
                 <a:latin typeface="Arial"/>
               </a:rPr>
-              <a:t>Who chose nudge over block, and what was the reasoning?</a:t>
+              <a:t>Add YOUR two docs to its reading list.</a:t>
             </a:r>
           </a:p>
           <a:p>
             <a:pPr algn="l">
               <a:lnSpc>
-                <a:spcPct val="122000"/>
+                <a:spcPct val="120000"/>
               </a:lnSpc>
               <a:spcAft>
-                <a:spcPts val="900"/>
-              </a:spcAft>
-            </a:pPr>
-            <a:r>
-              <a:rPr sz="1250" b="1">
-                <a:solidFill>
-                  <a:srgbClr val="403FE8"/>
+                <a:spcPts val="800"/>
+              </a:spcAft>
+            </a:pPr>
+            <a:r>
+              <a:rPr sz="1100" b="1">
+                <a:solidFill>
+                  <a:srgbClr val="A9B7F7"/>
                 </a:solidFill>
                 <a:latin typeface="Arial"/>
               </a:rPr>
               <a:t>•  </a:t>
             </a:r>
             <a:r>
-              <a:rPr sz="1250" b="0">
+              <a:rPr sz="1100" b="0">
                 <a:solidFill>
                   <a:srgbClr val="434343"/>
                 </a:solidFill>
                 <a:latin typeface="Arial"/>
               </a:rPr>
-              <a:t>Whose bypass is documented, and who approves it?</a:t>
+              <a:t>Run it on your own branch.</a:t>
             </a:r>
           </a:p>
           <a:p>
             <a:pPr algn="l">
               <a:lnSpc>
-                <a:spcPct val="122000"/>
+                <a:spcPct val="120000"/>
               </a:lnSpc>
               <a:spcAft>
-                <a:spcPts val="900"/>
-              </a:spcAft>
-            </a:pPr>
-            <a:r>
-              <a:rPr sz="1250" b="1">
-                <a:solidFill>
-                  <a:srgbClr val="403FE8"/>
+                <a:spcPts val="800"/>
+              </a:spcAft>
+            </a:pPr>
+            <a:r>
+              <a:rPr sz="1100" b="1">
+                <a:solidFill>
+                  <a:srgbClr val="A9B7F7"/>
                 </a:solidFill>
                 <a:latin typeface="Arial"/>
               </a:rPr>
               <a:t>•  </a:t>
             </a:r>
             <a:r>
-              <a:rPr sz="1250" b="0">
+              <a:rPr sz="1100" b="0">
                 <a:solidFill>
                   <a:srgbClr val="434343"/>
                 </a:solidFill>
                 <a:latin typeface="Arial"/>
               </a:rPr>
-              <a:t>What went in the residue column — and whose name is against it?</a:t>
-            </a:r>
-          </a:p>
+              <a:t>Its findings now cite your standard — that is the loop closing.</a:t>
+            </a:r>
+          </a:p>
+        </p:txBody>
+      </p:sp>
+      <p:sp>
+        <p:nvSpPr>
+          <p:cNvPr id="11" name="Rectangle 10"/>
+          <p:cNvSpPr/>
+          <p:nvPr/>
+        </p:nvSpPr>
+        <p:spPr>
+          <a:xfrm>
+            <a:off x="4572000" y="2011680"/>
+            <a:ext cx="4023360" cy="2706624"/>
+          </a:xfrm>
+          <a:prstGeom prst="rect">
+            <a:avLst/>
+          </a:prstGeom>
+          <a:solidFill>
+            <a:srgbClr val="F4F5FB"/>
+          </a:solidFill>
+          <a:ln>
+            <a:noFill/>
+          </a:ln>
+          <a:effectLst/>
+        </p:spPr>
+        <p:style>
+          <a:lnRef idx="1">
+            <a:schemeClr val="accent1"/>
+          </a:lnRef>
+          <a:fillRef idx="3">
+            <a:schemeClr val="accent1"/>
+          </a:fillRef>
+          <a:effectRef idx="2">
+            <a:schemeClr val="accent1"/>
+          </a:effectRef>
+          <a:fontRef idx="minor">
+            <a:schemeClr val="lt1"/>
+          </a:fontRef>
+        </p:style>
+        <p:txBody>
+          <a:bodyPr rtlCol="0" anchor="ctr"/>
+          <a:lstStyle/>
+          <a:p>
+            <a:pPr algn="ctr"/>
+          </a:p>
+        </p:txBody>
+      </p:sp>
+      <p:sp>
+        <p:nvSpPr>
+          <p:cNvPr id="12" name="Rectangle 11"/>
+          <p:cNvSpPr/>
+          <p:nvPr/>
+        </p:nvSpPr>
+        <p:spPr>
+          <a:xfrm>
+            <a:off x="4572000" y="2011680"/>
+            <a:ext cx="41148" cy="2706624"/>
+          </a:xfrm>
+          <a:prstGeom prst="rect">
+            <a:avLst/>
+          </a:prstGeom>
+          <a:solidFill>
+            <a:srgbClr val="403FE8"/>
+          </a:solidFill>
+          <a:ln>
+            <a:noFill/>
+          </a:ln>
+          <a:effectLst/>
+        </p:spPr>
+        <p:style>
+          <a:lnRef idx="1">
+            <a:schemeClr val="accent1"/>
+          </a:lnRef>
+          <a:fillRef idx="3">
+            <a:schemeClr val="accent1"/>
+          </a:fillRef>
+          <a:effectRef idx="2">
+            <a:schemeClr val="accent1"/>
+          </a:effectRef>
+          <a:fontRef idx="minor">
+            <a:schemeClr val="lt1"/>
+          </a:fontRef>
+        </p:style>
+        <p:txBody>
+          <a:bodyPr rtlCol="0" anchor="ctr"/>
+          <a:lstStyle/>
+          <a:p>
+            <a:pPr algn="ctr"/>
+          </a:p>
+        </p:txBody>
+      </p:sp>
+      <p:sp>
+        <p:nvSpPr>
+          <p:cNvPr id="13" name="TextBox 12"/>
+          <p:cNvSpPr txBox="1"/>
+          <p:nvPr/>
+        </p:nvSpPr>
+        <p:spPr>
+          <a:xfrm>
+            <a:off x="4773168" y="2139696"/>
+            <a:ext cx="3657600" cy="219456"/>
+          </a:xfrm>
+          <a:prstGeom prst="rect">
+            <a:avLst/>
+          </a:prstGeom>
+          <a:noFill/>
+        </p:spPr>
+        <p:txBody>
+          <a:bodyPr wrap="square" anchor="t" lIns="0" rIns="0" tIns="0" bIns="0">
+            <a:spAutoFit/>
+          </a:bodyPr>
+          <a:lstStyle/>
+          <a:p>
+            <a:pPr algn="l">
+              <a:spcAft>
+                <a:spcPts val="400"/>
+              </a:spcAft>
+            </a:pPr>
+            <a:r>
+              <a:rPr sz="850" b="1">
+                <a:solidFill>
+                  <a:srgbClr val="999999"/>
+                </a:solidFill>
+                <a:latin typeface="Arial"/>
+              </a:rPr>
+              <a:t>4 MINUTES</a:t>
+            </a:r>
+          </a:p>
+        </p:txBody>
+      </p:sp>
+      <p:sp>
+        <p:nvSpPr>
+          <p:cNvPr id="14" name="TextBox 13"/>
+          <p:cNvSpPr txBox="1"/>
+          <p:nvPr/>
+        </p:nvSpPr>
+        <p:spPr>
+          <a:xfrm>
+            <a:off x="4773168" y="2414016"/>
+            <a:ext cx="3657600" cy="2212848"/>
+          </a:xfrm>
+          <a:prstGeom prst="rect">
+            <a:avLst/>
+          </a:prstGeom>
+          <a:noFill/>
+        </p:spPr>
+        <p:txBody>
+          <a:bodyPr wrap="square" anchor="t" lIns="0" rIns="0" tIns="0" bIns="0">
+            <a:spAutoFit/>
+          </a:bodyPr>
+          <a:lstStyle/>
           <a:p>
             <a:pPr algn="l">
               <a:lnSpc>
-                <a:spcPct val="122000"/>
+                <a:spcPct val="114000"/>
               </a:lnSpc>
               <a:spcAft>
-                <a:spcPts val="900"/>
-              </a:spcAft>
-            </a:pPr>
-            <a:r>
-              <a:rPr sz="1250" b="1">
-                <a:solidFill>
-                  <a:srgbClr val="403FE8"/>
-                </a:solidFill>
-                <a:latin typeface="Arial"/>
-              </a:rPr>
-              <a:t>•  </a:t>
-            </a:r>
-            <a:r>
-              <a:rPr sz="1250" b="0">
+                <a:spcPts val="0"/>
+              </a:spcAft>
+            </a:pPr>
+            <a:r>
+              <a:rPr sz="900" b="0">
                 <a:solidFill>
                   <a:srgbClr val="434343"/>
                 </a:solidFill>
-                <a:latin typeface="Arial"/>
-              </a:rPr>
-              <a:t>What does your gate do on a docs-only PR — and was that on purpose?</a:t>
+                <a:latin typeface="Consolas"/>
+              </a:rPr>
+              <a:t># .claude/agents/</a:t>
+            </a:r>
+          </a:p>
+          <a:p>
+            <a:pPr algn="l">
+              <a:lnSpc>
+                <a:spcPct val="114000"/>
+              </a:lnSpc>
+              <a:spcAft>
+                <a:spcPts val="0"/>
+              </a:spcAft>
+            </a:pPr>
+            <a:r>
+              <a:rPr sz="900" b="0">
+                <a:solidFill>
+                  <a:srgbClr val="434343"/>
+                </a:solidFill>
+                <a:latin typeface="Consolas"/>
+              </a:rPr>
+              <a:t>#   taskboard-code-reviewer.md</a:t>
+            </a:r>
+          </a:p>
+          <a:p>
+            <a:pPr algn="l">
+              <a:lnSpc>
+                <a:spcPct val="114000"/>
+              </a:lnSpc>
+              <a:spcAft>
+                <a:spcPts val="0"/>
+              </a:spcAft>
+            </a:pPr>
+            <a:r>
+              <a:rPr sz="900" b="0">
+                <a:solidFill>
+                  <a:srgbClr val="434343"/>
+                </a:solidFill>
+                <a:latin typeface="Consolas"/>
+              </a:rPr>
+              <a:t/>
+            </a:r>
+          </a:p>
+          <a:p>
+            <a:pPr algn="l">
+              <a:lnSpc>
+                <a:spcPct val="114000"/>
+              </a:lnSpc>
+              <a:spcAft>
+                <a:spcPts val="0"/>
+              </a:spcAft>
+            </a:pPr>
+            <a:r>
+              <a:rPr sz="900" b="0">
+                <a:solidFill>
+                  <a:srgbClr val="434343"/>
+                </a:solidFill>
+                <a:latin typeface="Consolas"/>
+              </a:rPr>
+              <a:t># add to its process list:</a:t>
+            </a:r>
+          </a:p>
+          <a:p>
+            <a:pPr algn="l">
+              <a:lnSpc>
+                <a:spcPct val="114000"/>
+              </a:lnSpc>
+              <a:spcAft>
+                <a:spcPts val="0"/>
+              </a:spcAft>
+            </a:pPr>
+            <a:r>
+              <a:rPr sz="900" b="0">
+                <a:solidFill>
+                  <a:srgbClr val="434343"/>
+                </a:solidFill>
+                <a:latin typeface="Consolas"/>
+              </a:rPr>
+              <a:t>- docs/adr/0002-&lt;yours&gt;.md</a:t>
+            </a:r>
+          </a:p>
+          <a:p>
+            <a:pPr algn="l">
+              <a:lnSpc>
+                <a:spcPct val="114000"/>
+              </a:lnSpc>
+              <a:spcAft>
+                <a:spcPts val="0"/>
+              </a:spcAft>
+            </a:pPr>
+            <a:r>
+              <a:rPr sz="900" b="0">
+                <a:solidFill>
+                  <a:srgbClr val="434343"/>
+                </a:solidFill>
+                <a:latin typeface="Consolas"/>
+              </a:rPr>
+              <a:t>- docs/nfr/0002-&lt;yours&gt;.md</a:t>
+            </a:r>
+          </a:p>
+          <a:p>
+            <a:pPr algn="l">
+              <a:lnSpc>
+                <a:spcPct val="114000"/>
+              </a:lnSpc>
+              <a:spcAft>
+                <a:spcPts val="0"/>
+              </a:spcAft>
+            </a:pPr>
+            <a:r>
+              <a:rPr sz="900" b="0">
+                <a:solidFill>
+                  <a:srgbClr val="434343"/>
+                </a:solidFill>
+                <a:latin typeface="Consolas"/>
+              </a:rPr>
+              <a:t/>
+            </a:r>
+          </a:p>
+          <a:p>
+            <a:pPr algn="l">
+              <a:lnSpc>
+                <a:spcPct val="114000"/>
+              </a:lnSpc>
+              <a:spcAft>
+                <a:spcPts val="0"/>
+              </a:spcAft>
+            </a:pPr>
+            <a:r>
+              <a:rPr sz="900" b="0">
+                <a:solidFill>
+                  <a:srgbClr val="434343"/>
+                </a:solidFill>
+                <a:latin typeface="Consolas"/>
+              </a:rPr>
+              <a:t># no .claude/agents/ folder?</a:t>
+            </a:r>
+          </a:p>
+          <a:p>
+            <a:pPr algn="l">
+              <a:lnSpc>
+                <a:spcPct val="114000"/>
+              </a:lnSpc>
+              <a:spcAft>
+                <a:spcPts val="0"/>
+              </a:spcAft>
+            </a:pPr>
+            <a:r>
+              <a:rPr sz="900" b="0">
+                <a:solidFill>
+                  <a:srgbClr val="434343"/>
+                </a:solidFill>
+                <a:latin typeface="Consolas"/>
+              </a:rPr>
+              <a:t># your copy predates it — pull it:</a:t>
+            </a:r>
+          </a:p>
+          <a:p>
+            <a:pPr algn="l">
+              <a:lnSpc>
+                <a:spcPct val="114000"/>
+              </a:lnSpc>
+              <a:spcAft>
+                <a:spcPts val="0"/>
+              </a:spcAft>
+            </a:pPr>
+            <a:r>
+              <a:rPr sz="900" b="0">
+                <a:solidFill>
+                  <a:srgbClr val="434343"/>
+                </a:solidFill>
+                <a:latin typeface="Consolas"/>
+              </a:rPr>
+              <a:t>npx giget gh:mike-tajmajer-</a:t>
+            </a:r>
+          </a:p>
+          <a:p>
+            <a:pPr algn="l">
+              <a:lnSpc>
+                <a:spcPct val="114000"/>
+              </a:lnSpc>
+              <a:spcAft>
+                <a:spcPts val="0"/>
+              </a:spcAft>
+            </a:pPr>
+            <a:r>
+              <a:rPr sz="900" b="0">
+                <a:solidFill>
+                  <a:srgbClr val="434343"/>
+                </a:solidFill>
+                <a:latin typeface="Consolas"/>
+              </a:rPr>
+              <a:t>  fullstacklabs/fsl-taskboard-lab/</a:t>
+            </a:r>
+          </a:p>
+          <a:p>
+            <a:pPr algn="l">
+              <a:lnSpc>
+                <a:spcPct val="114000"/>
+              </a:lnSpc>
+              <a:spcAft>
+                <a:spcPts val="0"/>
+              </a:spcAft>
+            </a:pPr>
+            <a:r>
+              <a:rPr sz="900" b="0">
+                <a:solidFill>
+                  <a:srgbClr val="434343"/>
+                </a:solidFill>
+                <a:latin typeface="Consolas"/>
+              </a:rPr>
+              <a:t>  .claude/agents .claude/agents</a:t>
             </a:r>
           </a:p>
         </p:txBody>
@@ -15424,7 +16683,7 @@
                 </a:solidFill>
                 <a:latin typeface="Arial"/>
               </a:rPr>
-              <a:t>HAND-OFF</a:t>
+              <a:t>REVIEW</a:t>
             </a:r>
           </a:p>
         </p:txBody>
@@ -15463,7 +16722,7 @@
                 </a:solidFill>
                 <a:latin typeface="Arial"/>
               </a:rPr>
-              <a:t>The sixth artifact, and it is yours</a:t>
+              <a:t>Let us compare</a:t>
             </a:r>
           </a:p>
         </p:txBody>
@@ -15505,7 +16764,7 @@
                 </a:solidFill>
                 <a:latin typeface="Arial"/>
               </a:rPr>
-              <a:t>2.a named five artifacts that live in a repo. The sixth is the only Collective-layer one — how a standard reaches every repo — and we are deliberately not handing you the answer, because choosing the mechanism, the rung, and the owner IS the roll-up.</a:t>
+              <a:t>Ten minutes. Two or three volunteers share their screen — not everyone.</a:t>
             </a:r>
           </a:p>
         </p:txBody>
@@ -15557,612 +16816,157 @@
         </p:nvSpPr>
         <p:spPr>
           <a:xfrm>
-            <a:off x="548640" y="2011680"/>
-            <a:ext cx="3703320" cy="274320"/>
-          </a:xfrm>
-          <a:prstGeom prst="rect">
-            <a:avLst/>
-          </a:prstGeom>
-          <a:noFill/>
-        </p:spPr>
-        <p:txBody>
-          <a:bodyPr wrap="square" anchor="t" lIns="0" rIns="0" tIns="0" bIns="0">
-            <a:spAutoFit/>
-          </a:bodyPr>
-          <a:lstStyle/>
-          <a:p>
-            <a:pPr algn="l">
-              <a:spcAft>
-                <a:spcPts val="400"/>
-              </a:spcAft>
-            </a:pPr>
-            <a:r>
-              <a:rPr sz="950" b="1">
+            <a:off x="548640" y="1783080"/>
+            <a:ext cx="7863840" cy="2935224"/>
+          </a:xfrm>
+          <a:prstGeom prst="rect">
+            <a:avLst/>
+          </a:prstGeom>
+          <a:noFill/>
+        </p:spPr>
+        <p:txBody>
+          <a:bodyPr wrap="square" anchor="t" lIns="0" rIns="0" tIns="0" bIns="0">
+            <a:spAutoFit/>
+          </a:bodyPr>
+          <a:lstStyle/>
+          <a:p>
+            <a:pPr algn="l">
+              <a:lnSpc>
+                <a:spcPct val="122000"/>
+              </a:lnSpc>
+              <a:spcAft>
+                <a:spcPts val="900"/>
+              </a:spcAft>
+            </a:pPr>
+            <a:r>
+              <a:rPr sz="1250" b="1">
                 <a:solidFill>
                   <a:srgbClr val="403FE8"/>
                 </a:solidFill>
                 <a:latin typeface="Arial"/>
               </a:rPr>
-              <a:t>WHAT THE GUIDE GIVES YOU</a:t>
-            </a:r>
-          </a:p>
-        </p:txBody>
-      </p:sp>
-      <p:sp>
-        <p:nvSpPr>
-          <p:cNvPr id="10" name="TextBox 9"/>
-          <p:cNvSpPr txBox="1"/>
-          <p:nvPr/>
-        </p:nvSpPr>
-        <p:spPr>
-          <a:xfrm>
-            <a:off x="548640" y="2377440"/>
-            <a:ext cx="3703320" cy="2249424"/>
-          </a:xfrm>
-          <a:prstGeom prst="rect">
-            <a:avLst/>
-          </a:prstGeom>
-          <a:noFill/>
-        </p:spPr>
-        <p:txBody>
-          <a:bodyPr wrap="square" anchor="t" lIns="0" rIns="0" tIns="0" bIns="0">
-            <a:spAutoFit/>
-          </a:bodyPr>
-          <a:lstStyle/>
+              <a:t>•  </a:t>
+            </a:r>
+            <a:r>
+              <a:rPr sz="1250" b="0">
+                <a:solidFill>
+                  <a:srgbClr val="434343"/>
+                </a:solidFill>
+                <a:latin typeface="Arial"/>
+              </a:rPr>
+              <a:t>Whose guardrail has a false positive — and how did you find out?</a:t>
+            </a:r>
+          </a:p>
           <a:p>
             <a:pPr algn="l">
               <a:lnSpc>
-                <a:spcPct val="120000"/>
+                <a:spcPct val="122000"/>
               </a:lnSpc>
               <a:spcAft>
-                <a:spcPts val="800"/>
-              </a:spcAft>
-            </a:pPr>
-            <a:r>
-              <a:rPr sz="1100" b="1">
-                <a:solidFill>
-                  <a:srgbClr val="A9B7F7"/>
+                <a:spcPts val="900"/>
+              </a:spcAft>
+            </a:pPr>
+            <a:r>
+              <a:rPr sz="1250" b="1">
+                <a:solidFill>
+                  <a:srgbClr val="403FE8"/>
                 </a:solidFill>
                 <a:latin typeface="Arial"/>
               </a:rPr>
               <a:t>•  </a:t>
             </a:r>
             <a:r>
-              <a:rPr sz="1100" b="0">
+              <a:rPr sz="1250" b="0">
                 <a:solidFill>
                   <a:srgbClr val="434343"/>
                 </a:solidFill>
                 <a:latin typeface="Arial"/>
               </a:rPr>
-              <a:t>Four words that carry it: standard, drift, pin, enforce.</a:t>
+              <a:t>Who chose nudge over block, and what was the reasoning?</a:t>
             </a:r>
           </a:p>
           <a:p>
             <a:pPr algn="l">
               <a:lnSpc>
-                <a:spcPct val="120000"/>
+                <a:spcPct val="122000"/>
               </a:lnSpc>
               <a:spcAft>
-                <a:spcPts val="800"/>
-              </a:spcAft>
-            </a:pPr>
-            <a:r>
-              <a:rPr sz="1100" b="1">
-                <a:solidFill>
-                  <a:srgbClr val="A9B7F7"/>
+                <a:spcPts val="900"/>
+              </a:spcAft>
+            </a:pPr>
+            <a:r>
+              <a:rPr sz="1250" b="1">
+                <a:solidFill>
+                  <a:srgbClr val="403FE8"/>
                 </a:solidFill>
                 <a:latin typeface="Arial"/>
               </a:rPr>
               <a:t>•  </a:t>
             </a:r>
             <a:r>
-              <a:rPr sz="1100" b="0">
+              <a:rPr sz="1250" b="0">
                 <a:solidFill>
                   <a:srgbClr val="434343"/>
                 </a:solidFill>
                 <a:latin typeface="Arial"/>
               </a:rPr>
-              <a:t>CRAWL: one repo + two CLAUDE.md lines — a 4-step checklist, ~30 min.</a:t>
+              <a:t>Whose bypass is documented, and who approves it?</a:t>
             </a:r>
           </a:p>
           <a:p>
             <a:pPr algn="l">
               <a:lnSpc>
-                <a:spcPct val="120000"/>
+                <a:spcPct val="122000"/>
               </a:lnSpc>
               <a:spcAft>
-                <a:spcPts val="800"/>
-              </a:spcAft>
-            </a:pPr>
-            <a:r>
-              <a:rPr sz="1100" b="1">
-                <a:solidFill>
-                  <a:srgbClr val="A9B7F7"/>
+                <a:spcPts val="900"/>
+              </a:spcAft>
+            </a:pPr>
+            <a:r>
+              <a:rPr sz="1250" b="1">
+                <a:solidFill>
+                  <a:srgbClr val="403FE8"/>
                 </a:solidFill>
                 <a:latin typeface="Arial"/>
               </a:rPr>
               <a:t>•  </a:t>
             </a:r>
             <a:r>
-              <a:rPr sz="1100" b="0">
+              <a:rPr sz="1250" b="0">
                 <a:solidFill>
                   <a:srgbClr val="434343"/>
                 </a:solidFill>
                 <a:latin typeface="Arial"/>
               </a:rPr>
-              <a:t>WALK: queryable (3 tool options, traps named) + pinned copies.</a:t>
+              <a:t>What went in the residue column — and whose name is against it?</a:t>
             </a:r>
           </a:p>
           <a:p>
             <a:pPr algn="l">
               <a:lnSpc>
-                <a:spcPct val="120000"/>
+                <a:spcPct val="122000"/>
               </a:lnSpc>
               <a:spcAft>
-                <a:spcPts val="800"/>
-              </a:spcAft>
-            </a:pPr>
-            <a:r>
-              <a:rPr sz="1100" b="1">
-                <a:solidFill>
-                  <a:srgbClr val="A9B7F7"/>
+                <a:spcPts val="900"/>
+              </a:spcAft>
+            </a:pPr>
+            <a:r>
+              <a:rPr sz="1250" b="1">
+                <a:solidFill>
+                  <a:srgbClr val="403FE8"/>
                 </a:solidFill>
                 <a:latin typeface="Arial"/>
               </a:rPr>
               <a:t>•  </a:t>
             </a:r>
             <a:r>
-              <a:rPr sz="1100" b="0">
+              <a:rPr sz="1250" b="0">
                 <a:solidFill>
                   <a:srgbClr val="434343"/>
                 </a:solidFill>
                 <a:latin typeface="Arial"/>
               </a:rPr>
-              <a:t>RUN: gates, served docs, a versioned plugin — each needs an owner.</a:t>
-            </a:r>
-          </a:p>
-          <a:p>
-            <a:pPr algn="l">
-              <a:lnSpc>
-                <a:spcPct val="120000"/>
-              </a:lnSpc>
-              <a:spcAft>
-                <a:spcPts val="800"/>
-              </a:spcAft>
-            </a:pPr>
-            <a:r>
-              <a:rPr sz="1100" b="1">
-                <a:solidFill>
-                  <a:srgbClr val="A9B7F7"/>
-                </a:solidFill>
-                <a:latin typeface="Arial"/>
-              </a:rPr>
-              <a:t>•  </a:t>
-            </a:r>
-            <a:r>
-              <a:rPr sz="1100" b="0">
-                <a:solidFill>
-                  <a:srgbClr val="434343"/>
-                </a:solidFill>
-                <a:latin typeface="Arial"/>
-              </a:rPr>
-              <a:t>And a fill-in template for recording what you chose.</a:t>
-            </a:r>
-          </a:p>
-        </p:txBody>
-      </p:sp>
-      <p:sp>
-        <p:nvSpPr>
-          <p:cNvPr id="11" name="Rectangle 10"/>
-          <p:cNvSpPr/>
-          <p:nvPr/>
-        </p:nvSpPr>
-        <p:spPr>
-          <a:xfrm>
-            <a:off x="4572000" y="2011680"/>
-            <a:ext cx="4023360" cy="2706624"/>
-          </a:xfrm>
-          <a:prstGeom prst="rect">
-            <a:avLst/>
-          </a:prstGeom>
-          <a:solidFill>
-            <a:srgbClr val="F4F5FB"/>
-          </a:solidFill>
-          <a:ln>
-            <a:noFill/>
-          </a:ln>
-          <a:effectLst/>
-        </p:spPr>
-        <p:style>
-          <a:lnRef idx="1">
-            <a:schemeClr val="accent1"/>
-          </a:lnRef>
-          <a:fillRef idx="3">
-            <a:schemeClr val="accent1"/>
-          </a:fillRef>
-          <a:effectRef idx="2">
-            <a:schemeClr val="accent1"/>
-          </a:effectRef>
-          <a:fontRef idx="minor">
-            <a:schemeClr val="lt1"/>
-          </a:fontRef>
-        </p:style>
-        <p:txBody>
-          <a:bodyPr rtlCol="0" anchor="ctr"/>
-          <a:lstStyle/>
-          <a:p>
-            <a:pPr algn="ctr"/>
-          </a:p>
-        </p:txBody>
-      </p:sp>
-      <p:sp>
-        <p:nvSpPr>
-          <p:cNvPr id="12" name="Rectangle 11"/>
-          <p:cNvSpPr/>
-          <p:nvPr/>
-        </p:nvSpPr>
-        <p:spPr>
-          <a:xfrm>
-            <a:off x="4572000" y="2011680"/>
-            <a:ext cx="41148" cy="2706624"/>
-          </a:xfrm>
-          <a:prstGeom prst="rect">
-            <a:avLst/>
-          </a:prstGeom>
-          <a:solidFill>
-            <a:srgbClr val="403FE8"/>
-          </a:solidFill>
-          <a:ln>
-            <a:noFill/>
-          </a:ln>
-          <a:effectLst/>
-        </p:spPr>
-        <p:style>
-          <a:lnRef idx="1">
-            <a:schemeClr val="accent1"/>
-          </a:lnRef>
-          <a:fillRef idx="3">
-            <a:schemeClr val="accent1"/>
-          </a:fillRef>
-          <a:effectRef idx="2">
-            <a:schemeClr val="accent1"/>
-          </a:effectRef>
-          <a:fontRef idx="minor">
-            <a:schemeClr val="lt1"/>
-          </a:fontRef>
-        </p:style>
-        <p:txBody>
-          <a:bodyPr rtlCol="0" anchor="ctr"/>
-          <a:lstStyle/>
-          <a:p>
-            <a:pPr algn="ctr"/>
-          </a:p>
-        </p:txBody>
-      </p:sp>
-      <p:sp>
-        <p:nvSpPr>
-          <p:cNvPr id="13" name="TextBox 12"/>
-          <p:cNvSpPr txBox="1"/>
-          <p:nvPr/>
-        </p:nvSpPr>
-        <p:spPr>
-          <a:xfrm>
-            <a:off x="4773168" y="2139696"/>
-            <a:ext cx="3657600" cy="219456"/>
-          </a:xfrm>
-          <a:prstGeom prst="rect">
-            <a:avLst/>
-          </a:prstGeom>
-          <a:noFill/>
-        </p:spPr>
-        <p:txBody>
-          <a:bodyPr wrap="square" anchor="t" lIns="0" rIns="0" tIns="0" bIns="0">
-            <a:spAutoFit/>
-          </a:bodyPr>
-          <a:lstStyle/>
-          <a:p>
-            <a:pPr algn="l">
-              <a:spcAft>
-                <a:spcPts val="400"/>
-              </a:spcAft>
-            </a:pPr>
-            <a:r>
-              <a:rPr sz="850" b="1">
-                <a:solidFill>
-                  <a:srgbClr val="999999"/>
-                </a:solidFill>
-                <a:latin typeface="Arial"/>
-              </a:rPr>
-              <a:t>THE DECISION TEMPLATE</a:t>
-            </a:r>
-          </a:p>
-        </p:txBody>
-      </p:sp>
-      <p:sp>
-        <p:nvSpPr>
-          <p:cNvPr id="14" name="TextBox 13"/>
-          <p:cNvSpPr txBox="1"/>
-          <p:nvPr/>
-        </p:nvSpPr>
-        <p:spPr>
-          <a:xfrm>
-            <a:off x="4773168" y="2414016"/>
-            <a:ext cx="3657600" cy="2212848"/>
-          </a:xfrm>
-          <a:prstGeom prst="rect">
-            <a:avLst/>
-          </a:prstGeom>
-          <a:noFill/>
-        </p:spPr>
-        <p:txBody>
-          <a:bodyPr wrap="square" anchor="t" lIns="0" rIns="0" tIns="0" bIns="0">
-            <a:spAutoFit/>
-          </a:bodyPr>
-          <a:lstStyle/>
-          <a:p>
-            <a:pPr algn="l">
-              <a:lnSpc>
-                <a:spcPct val="114000"/>
-              </a:lnSpc>
-              <a:spcAft>
-                <a:spcPts val="0"/>
-              </a:spcAft>
-            </a:pPr>
-            <a:r>
-              <a:rPr sz="850" b="0">
-                <a:solidFill>
-                  <a:srgbClr val="434343"/>
-                </a:solidFill>
-                <a:latin typeface="Consolas"/>
-              </a:rPr>
-              <a:t># docs/best-practices/</a:t>
-            </a:r>
-          </a:p>
-          <a:p>
-            <a:pPr algn="l">
-              <a:lnSpc>
-                <a:spcPct val="114000"/>
-              </a:lnSpc>
-              <a:spcAft>
-                <a:spcPts val="0"/>
-              </a:spcAft>
-            </a:pPr>
-            <a:r>
-              <a:rPr sz="850" b="0">
-                <a:solidFill>
-                  <a:srgbClr val="434343"/>
-                </a:solidFill>
-                <a:latin typeface="Consolas"/>
-              </a:rPr>
-              <a:t>#   distributing-standards.md</a:t>
-            </a:r>
-          </a:p>
-          <a:p>
-            <a:pPr algn="l">
-              <a:lnSpc>
-                <a:spcPct val="114000"/>
-              </a:lnSpc>
-              <a:spcAft>
-                <a:spcPts val="0"/>
-              </a:spcAft>
-            </a:pPr>
-            <a:r>
-              <a:rPr sz="850" b="0">
-                <a:solidFill>
-                  <a:srgbClr val="434343"/>
-                </a:solidFill>
-                <a:latin typeface="Consolas"/>
-              </a:rPr>
-              <a:t/>
-            </a:r>
-          </a:p>
-          <a:p>
-            <a:pPr algn="l">
-              <a:lnSpc>
-                <a:spcPct val="114000"/>
-              </a:lnSpc>
-              <a:spcAft>
-                <a:spcPts val="0"/>
-              </a:spcAft>
-            </a:pPr>
-            <a:r>
-              <a:rPr sz="850" b="0">
-                <a:solidFill>
-                  <a:srgbClr val="434343"/>
-                </a:solidFill>
-                <a:latin typeface="Consolas"/>
-              </a:rPr>
-              <a:t># what "done" looks like:</a:t>
-            </a:r>
-          </a:p>
-          <a:p>
-            <a:pPr algn="l">
-              <a:lnSpc>
-                <a:spcPct val="114000"/>
-              </a:lnSpc>
-              <a:spcAft>
-                <a:spcPts val="0"/>
-              </a:spcAft>
-            </a:pPr>
-            <a:r>
-              <a:rPr sz="850" b="0">
-                <a:solidFill>
-                  <a:srgbClr val="434343"/>
-                </a:solidFill>
-                <a:latin typeface="Consolas"/>
-              </a:rPr>
-              <a:t>Owner:      &lt;a person, not a team&gt;</a:t>
-            </a:r>
-          </a:p>
-          <a:p>
-            <a:pPr algn="l">
-              <a:lnSpc>
-                <a:spcPct val="114000"/>
-              </a:lnSpc>
-              <a:spcAft>
-                <a:spcPts val="0"/>
-              </a:spcAft>
-            </a:pPr>
-            <a:r>
-              <a:rPr sz="850" b="0">
-                <a:solidFill>
-                  <a:srgbClr val="434343"/>
-                </a:solidFill>
-                <a:latin typeface="Consolas"/>
-              </a:rPr>
-              <a:t>Rung:       crawl | walk | run</a:t>
-            </a:r>
-          </a:p>
-          <a:p>
-            <a:pPr algn="l">
-              <a:lnSpc>
-                <a:spcPct val="114000"/>
-              </a:lnSpc>
-              <a:spcAft>
-                <a:spcPts val="0"/>
-              </a:spcAft>
-            </a:pPr>
-            <a:r>
-              <a:rPr sz="850" b="0">
-                <a:solidFill>
-                  <a:srgbClr val="434343"/>
-                </a:solidFill>
-                <a:latin typeface="Consolas"/>
-              </a:rPr>
-              <a:t>First move: &lt;the ~30-min step&gt;</a:t>
-            </a:r>
-          </a:p>
-          <a:p>
-            <a:pPr algn="l">
-              <a:lnSpc>
-                <a:spcPct val="114000"/>
-              </a:lnSpc>
-              <a:spcAft>
-                <a:spcPts val="0"/>
-              </a:spcAft>
-            </a:pPr>
-            <a:r>
-              <a:rPr sz="850" b="0">
-                <a:solidFill>
-                  <a:srgbClr val="434343"/>
-                </a:solidFill>
-                <a:latin typeface="Consolas"/>
-              </a:rPr>
-              <a:t>Decided:    YYYY-MM-DD</a:t>
-            </a:r>
-          </a:p>
-          <a:p>
-            <a:pPr algn="l">
-              <a:lnSpc>
-                <a:spcPct val="114000"/>
-              </a:lnSpc>
-              <a:spcAft>
-                <a:spcPts val="0"/>
-              </a:spcAft>
-            </a:pPr>
-            <a:r>
-              <a:rPr sz="850" b="0">
-                <a:solidFill>
-                  <a:srgbClr val="434343"/>
-                </a:solidFill>
-                <a:latin typeface="Consolas"/>
-              </a:rPr>
-              <a:t>Next review: YYYY-MM-DD</a:t>
-            </a:r>
-          </a:p>
-          <a:p>
-            <a:pPr algn="l">
-              <a:lnSpc>
-                <a:spcPct val="114000"/>
-              </a:lnSpc>
-              <a:spcAft>
-                <a:spcPts val="0"/>
-              </a:spcAft>
-            </a:pPr>
-            <a:r>
-              <a:rPr sz="850" b="0">
-                <a:solidFill>
-                  <a:srgbClr val="434343"/>
-                </a:solidFill>
-                <a:latin typeface="Consolas"/>
-              </a:rPr>
-              <a:t/>
-            </a:r>
-          </a:p>
-          <a:p>
-            <a:pPr algn="l">
-              <a:lnSpc>
-                <a:spcPct val="114000"/>
-              </a:lnSpc>
-              <a:spcAft>
-                <a:spcPts val="0"/>
-              </a:spcAft>
-            </a:pPr>
-            <a:r>
-              <a:rPr sz="850" b="0">
-                <a:solidFill>
-                  <a:srgbClr val="434343"/>
-                </a:solidFill>
-                <a:latin typeface="Consolas"/>
-              </a:rPr>
-              <a:t># ...plus: where standards live,</a:t>
-            </a:r>
-          </a:p>
-          <a:p>
-            <a:pPr algn="l">
-              <a:lnSpc>
-                <a:spcPct val="114000"/>
-              </a:lnSpc>
-              <a:spcAft>
-                <a:spcPts val="0"/>
-              </a:spcAft>
-            </a:pPr>
-            <a:r>
-              <a:rPr sz="850" b="0">
-                <a:solidFill>
-                  <a:srgbClr val="434343"/>
-                </a:solidFill>
-                <a:latin typeface="Consolas"/>
-              </a:rPr>
-              <a:t># how a project gets them, current-</a:t>
-            </a:r>
-          </a:p>
-          <a:p>
-            <a:pPr algn="l">
-              <a:lnSpc>
-                <a:spcPct val="114000"/>
-              </a:lnSpc>
-              <a:spcAft>
-                <a:spcPts val="0"/>
-              </a:spcAft>
-            </a:pPr>
-            <a:r>
-              <a:rPr sz="850" b="0">
-                <a:solidFill>
-                  <a:srgbClr val="434343"/>
-                </a:solidFill>
-                <a:latin typeface="Consolas"/>
-              </a:rPr>
-              <a:t># ness, enforced vs advisory,</a:t>
-            </a:r>
-          </a:p>
-          <a:p>
-            <a:pPr algn="l">
-              <a:lnSpc>
-                <a:spcPct val="114000"/>
-              </a:lnSpc>
-              <a:spcAft>
-                <a:spcPts val="0"/>
-              </a:spcAft>
-            </a:pPr>
-            <a:r>
-              <a:rPr sz="850" b="0">
-                <a:solidFill>
-                  <a:srgbClr val="434343"/>
-                </a:solidFill>
-                <a:latin typeface="Consolas"/>
-              </a:rPr>
-              <a:t># bypass, NOT-doing-yet</a:t>
+              <a:t>What does your gate do on a docs-only PR — and was that on purpose?</a:t>
             </a:r>
           </a:p>
         </p:txBody>
@@ -16331,7 +17135,7 @@
                 </a:solidFill>
                 <a:latin typeface="Arial"/>
               </a:rPr>
-              <a:t>WRAP &amp; RETRO</a:t>
+              <a:t>HAND-OFF</a:t>
             </a:r>
           </a:p>
         </p:txBody>
@@ -16370,7 +17174,7 @@
                 </a:solidFill>
                 <a:latin typeface="Arial"/>
               </a:rPr>
-              <a:t>What leaves this room</a:t>
+              <a:t>The sixth artifact, and it is yours</a:t>
             </a:r>
           </a:p>
         </p:txBody>
@@ -16412,6 +17216,913 @@
                 </a:solidFill>
                 <a:latin typeface="Arial"/>
               </a:rPr>
+              <a:t>2.a named five artifacts that live in a repo. The sixth is the only Collective-layer one — how a standard reaches every repo — and we are deliberately not handing you the answer, because choosing the mechanism, the rung, and the owner IS the roll-up.</a:t>
+            </a:r>
+          </a:p>
+        </p:txBody>
+      </p:sp>
+      <p:sp>
+        <p:nvSpPr>
+          <p:cNvPr id="8" name="TextBox 7"/>
+          <p:cNvSpPr txBox="1"/>
+          <p:nvPr/>
+        </p:nvSpPr>
+        <p:spPr>
+          <a:xfrm>
+            <a:off x="548640" y="4846320"/>
+            <a:ext cx="7315200" cy="219456"/>
+          </a:xfrm>
+          <a:prstGeom prst="rect">
+            <a:avLst/>
+          </a:prstGeom>
+          <a:noFill/>
+        </p:spPr>
+        <p:txBody>
+          <a:bodyPr wrap="square" anchor="t" lIns="0" rIns="0" tIns="0" bIns="0">
+            <a:spAutoFit/>
+          </a:bodyPr>
+          <a:lstStyle/>
+          <a:p>
+            <a:pPr algn="l">
+              <a:spcAft>
+                <a:spcPts val="400"/>
+              </a:spcAft>
+            </a:pPr>
+            <a:r>
+              <a:rPr sz="800" b="0">
+                <a:solidFill>
+                  <a:srgbClr val="999999"/>
+                </a:solidFill>
+                <a:latin typeface="Arial"/>
+              </a:rPr>
+              <a:t>FSL AI Training · Lab 2.b — Guardrails, and Making Standards Travel</a:t>
+            </a:r>
+          </a:p>
+        </p:txBody>
+      </p:sp>
+      <p:sp>
+        <p:nvSpPr>
+          <p:cNvPr id="9" name="TextBox 8"/>
+          <p:cNvSpPr txBox="1"/>
+          <p:nvPr/>
+        </p:nvSpPr>
+        <p:spPr>
+          <a:xfrm>
+            <a:off x="548640" y="2011680"/>
+            <a:ext cx="3703320" cy="274320"/>
+          </a:xfrm>
+          <a:prstGeom prst="rect">
+            <a:avLst/>
+          </a:prstGeom>
+          <a:noFill/>
+        </p:spPr>
+        <p:txBody>
+          <a:bodyPr wrap="square" anchor="t" lIns="0" rIns="0" tIns="0" bIns="0">
+            <a:spAutoFit/>
+          </a:bodyPr>
+          <a:lstStyle/>
+          <a:p>
+            <a:pPr algn="l">
+              <a:spcAft>
+                <a:spcPts val="400"/>
+              </a:spcAft>
+            </a:pPr>
+            <a:r>
+              <a:rPr sz="950" b="1">
+                <a:solidFill>
+                  <a:srgbClr val="403FE8"/>
+                </a:solidFill>
+                <a:latin typeface="Arial"/>
+              </a:rPr>
+              <a:t>WHAT THE GUIDE GIVES YOU</a:t>
+            </a:r>
+          </a:p>
+        </p:txBody>
+      </p:sp>
+      <p:sp>
+        <p:nvSpPr>
+          <p:cNvPr id="10" name="TextBox 9"/>
+          <p:cNvSpPr txBox="1"/>
+          <p:nvPr/>
+        </p:nvSpPr>
+        <p:spPr>
+          <a:xfrm>
+            <a:off x="548640" y="2377440"/>
+            <a:ext cx="3703320" cy="2249424"/>
+          </a:xfrm>
+          <a:prstGeom prst="rect">
+            <a:avLst/>
+          </a:prstGeom>
+          <a:noFill/>
+        </p:spPr>
+        <p:txBody>
+          <a:bodyPr wrap="square" anchor="t" lIns="0" rIns="0" tIns="0" bIns="0">
+            <a:spAutoFit/>
+          </a:bodyPr>
+          <a:lstStyle/>
+          <a:p>
+            <a:pPr algn="l">
+              <a:lnSpc>
+                <a:spcPct val="120000"/>
+              </a:lnSpc>
+              <a:spcAft>
+                <a:spcPts val="800"/>
+              </a:spcAft>
+            </a:pPr>
+            <a:r>
+              <a:rPr sz="1100" b="1">
+                <a:solidFill>
+                  <a:srgbClr val="A9B7F7"/>
+                </a:solidFill>
+                <a:latin typeface="Arial"/>
+              </a:rPr>
+              <a:t>•  </a:t>
+            </a:r>
+            <a:r>
+              <a:rPr sz="1100" b="0">
+                <a:solidFill>
+                  <a:srgbClr val="434343"/>
+                </a:solidFill>
+                <a:latin typeface="Arial"/>
+              </a:rPr>
+              <a:t>Four words that carry it: standard, drift, pin, enforce.</a:t>
+            </a:r>
+          </a:p>
+          <a:p>
+            <a:pPr algn="l">
+              <a:lnSpc>
+                <a:spcPct val="120000"/>
+              </a:lnSpc>
+              <a:spcAft>
+                <a:spcPts val="800"/>
+              </a:spcAft>
+            </a:pPr>
+            <a:r>
+              <a:rPr sz="1100" b="1">
+                <a:solidFill>
+                  <a:srgbClr val="A9B7F7"/>
+                </a:solidFill>
+                <a:latin typeface="Arial"/>
+              </a:rPr>
+              <a:t>•  </a:t>
+            </a:r>
+            <a:r>
+              <a:rPr sz="1100" b="0">
+                <a:solidFill>
+                  <a:srgbClr val="434343"/>
+                </a:solidFill>
+                <a:latin typeface="Arial"/>
+              </a:rPr>
+              <a:t>CRAWL: one repo + two CLAUDE.md lines — a 4-step checklist, ~30 min.</a:t>
+            </a:r>
+          </a:p>
+          <a:p>
+            <a:pPr algn="l">
+              <a:lnSpc>
+                <a:spcPct val="120000"/>
+              </a:lnSpc>
+              <a:spcAft>
+                <a:spcPts val="800"/>
+              </a:spcAft>
+            </a:pPr>
+            <a:r>
+              <a:rPr sz="1100" b="1">
+                <a:solidFill>
+                  <a:srgbClr val="A9B7F7"/>
+                </a:solidFill>
+                <a:latin typeface="Arial"/>
+              </a:rPr>
+              <a:t>•  </a:t>
+            </a:r>
+            <a:r>
+              <a:rPr sz="1100" b="0">
+                <a:solidFill>
+                  <a:srgbClr val="434343"/>
+                </a:solidFill>
+                <a:latin typeface="Arial"/>
+              </a:rPr>
+              <a:t>WALK: queryable (3 tool options, traps named) + pinned copies.</a:t>
+            </a:r>
+          </a:p>
+          <a:p>
+            <a:pPr algn="l">
+              <a:lnSpc>
+                <a:spcPct val="120000"/>
+              </a:lnSpc>
+              <a:spcAft>
+                <a:spcPts val="800"/>
+              </a:spcAft>
+            </a:pPr>
+            <a:r>
+              <a:rPr sz="1100" b="1">
+                <a:solidFill>
+                  <a:srgbClr val="A9B7F7"/>
+                </a:solidFill>
+                <a:latin typeface="Arial"/>
+              </a:rPr>
+              <a:t>•  </a:t>
+            </a:r>
+            <a:r>
+              <a:rPr sz="1100" b="0">
+                <a:solidFill>
+                  <a:srgbClr val="434343"/>
+                </a:solidFill>
+                <a:latin typeface="Arial"/>
+              </a:rPr>
+              <a:t>RUN: gates, served docs, a versioned plugin — each needs an owner.</a:t>
+            </a:r>
+          </a:p>
+          <a:p>
+            <a:pPr algn="l">
+              <a:lnSpc>
+                <a:spcPct val="120000"/>
+              </a:lnSpc>
+              <a:spcAft>
+                <a:spcPts val="800"/>
+              </a:spcAft>
+            </a:pPr>
+            <a:r>
+              <a:rPr sz="1100" b="1">
+                <a:solidFill>
+                  <a:srgbClr val="A9B7F7"/>
+                </a:solidFill>
+                <a:latin typeface="Arial"/>
+              </a:rPr>
+              <a:t>•  </a:t>
+            </a:r>
+            <a:r>
+              <a:rPr sz="1100" b="0">
+                <a:solidFill>
+                  <a:srgbClr val="434343"/>
+                </a:solidFill>
+                <a:latin typeface="Arial"/>
+              </a:rPr>
+              <a:t>And a fill-in template for recording what you chose.</a:t>
+            </a:r>
+          </a:p>
+        </p:txBody>
+      </p:sp>
+      <p:sp>
+        <p:nvSpPr>
+          <p:cNvPr id="11" name="Rectangle 10"/>
+          <p:cNvSpPr/>
+          <p:nvPr/>
+        </p:nvSpPr>
+        <p:spPr>
+          <a:xfrm>
+            <a:off x="4572000" y="2011680"/>
+            <a:ext cx="4023360" cy="2706624"/>
+          </a:xfrm>
+          <a:prstGeom prst="rect">
+            <a:avLst/>
+          </a:prstGeom>
+          <a:solidFill>
+            <a:srgbClr val="F4F5FB"/>
+          </a:solidFill>
+          <a:ln>
+            <a:noFill/>
+          </a:ln>
+          <a:effectLst/>
+        </p:spPr>
+        <p:style>
+          <a:lnRef idx="1">
+            <a:schemeClr val="accent1"/>
+          </a:lnRef>
+          <a:fillRef idx="3">
+            <a:schemeClr val="accent1"/>
+          </a:fillRef>
+          <a:effectRef idx="2">
+            <a:schemeClr val="accent1"/>
+          </a:effectRef>
+          <a:fontRef idx="minor">
+            <a:schemeClr val="lt1"/>
+          </a:fontRef>
+        </p:style>
+        <p:txBody>
+          <a:bodyPr rtlCol="0" anchor="ctr"/>
+          <a:lstStyle/>
+          <a:p>
+            <a:pPr algn="ctr"/>
+          </a:p>
+        </p:txBody>
+      </p:sp>
+      <p:sp>
+        <p:nvSpPr>
+          <p:cNvPr id="12" name="Rectangle 11"/>
+          <p:cNvSpPr/>
+          <p:nvPr/>
+        </p:nvSpPr>
+        <p:spPr>
+          <a:xfrm>
+            <a:off x="4572000" y="2011680"/>
+            <a:ext cx="41148" cy="2706624"/>
+          </a:xfrm>
+          <a:prstGeom prst="rect">
+            <a:avLst/>
+          </a:prstGeom>
+          <a:solidFill>
+            <a:srgbClr val="403FE8"/>
+          </a:solidFill>
+          <a:ln>
+            <a:noFill/>
+          </a:ln>
+          <a:effectLst/>
+        </p:spPr>
+        <p:style>
+          <a:lnRef idx="1">
+            <a:schemeClr val="accent1"/>
+          </a:lnRef>
+          <a:fillRef idx="3">
+            <a:schemeClr val="accent1"/>
+          </a:fillRef>
+          <a:effectRef idx="2">
+            <a:schemeClr val="accent1"/>
+          </a:effectRef>
+          <a:fontRef idx="minor">
+            <a:schemeClr val="lt1"/>
+          </a:fontRef>
+        </p:style>
+        <p:txBody>
+          <a:bodyPr rtlCol="0" anchor="ctr"/>
+          <a:lstStyle/>
+          <a:p>
+            <a:pPr algn="ctr"/>
+          </a:p>
+        </p:txBody>
+      </p:sp>
+      <p:sp>
+        <p:nvSpPr>
+          <p:cNvPr id="13" name="TextBox 12"/>
+          <p:cNvSpPr txBox="1"/>
+          <p:nvPr/>
+        </p:nvSpPr>
+        <p:spPr>
+          <a:xfrm>
+            <a:off x="4773168" y="2139696"/>
+            <a:ext cx="3657600" cy="219456"/>
+          </a:xfrm>
+          <a:prstGeom prst="rect">
+            <a:avLst/>
+          </a:prstGeom>
+          <a:noFill/>
+        </p:spPr>
+        <p:txBody>
+          <a:bodyPr wrap="square" anchor="t" lIns="0" rIns="0" tIns="0" bIns="0">
+            <a:spAutoFit/>
+          </a:bodyPr>
+          <a:lstStyle/>
+          <a:p>
+            <a:pPr algn="l">
+              <a:spcAft>
+                <a:spcPts val="400"/>
+              </a:spcAft>
+            </a:pPr>
+            <a:r>
+              <a:rPr sz="850" b="1">
+                <a:solidFill>
+                  <a:srgbClr val="999999"/>
+                </a:solidFill>
+                <a:latin typeface="Arial"/>
+              </a:rPr>
+              <a:t>THE DECISION TEMPLATE</a:t>
+            </a:r>
+          </a:p>
+        </p:txBody>
+      </p:sp>
+      <p:sp>
+        <p:nvSpPr>
+          <p:cNvPr id="14" name="TextBox 13"/>
+          <p:cNvSpPr txBox="1"/>
+          <p:nvPr/>
+        </p:nvSpPr>
+        <p:spPr>
+          <a:xfrm>
+            <a:off x="4773168" y="2414016"/>
+            <a:ext cx="3657600" cy="2212848"/>
+          </a:xfrm>
+          <a:prstGeom prst="rect">
+            <a:avLst/>
+          </a:prstGeom>
+          <a:noFill/>
+        </p:spPr>
+        <p:txBody>
+          <a:bodyPr wrap="square" anchor="t" lIns="0" rIns="0" tIns="0" bIns="0">
+            <a:spAutoFit/>
+          </a:bodyPr>
+          <a:lstStyle/>
+          <a:p>
+            <a:pPr algn="l">
+              <a:lnSpc>
+                <a:spcPct val="114000"/>
+              </a:lnSpc>
+              <a:spcAft>
+                <a:spcPts val="0"/>
+              </a:spcAft>
+            </a:pPr>
+            <a:r>
+              <a:rPr sz="850" b="0">
+                <a:solidFill>
+                  <a:srgbClr val="434343"/>
+                </a:solidFill>
+                <a:latin typeface="Consolas"/>
+              </a:rPr>
+              <a:t># docs/best-practices/</a:t>
+            </a:r>
+          </a:p>
+          <a:p>
+            <a:pPr algn="l">
+              <a:lnSpc>
+                <a:spcPct val="114000"/>
+              </a:lnSpc>
+              <a:spcAft>
+                <a:spcPts val="0"/>
+              </a:spcAft>
+            </a:pPr>
+            <a:r>
+              <a:rPr sz="850" b="0">
+                <a:solidFill>
+                  <a:srgbClr val="434343"/>
+                </a:solidFill>
+                <a:latin typeface="Consolas"/>
+              </a:rPr>
+              <a:t>#   distributing-standards.md</a:t>
+            </a:r>
+          </a:p>
+          <a:p>
+            <a:pPr algn="l">
+              <a:lnSpc>
+                <a:spcPct val="114000"/>
+              </a:lnSpc>
+              <a:spcAft>
+                <a:spcPts val="0"/>
+              </a:spcAft>
+            </a:pPr>
+            <a:r>
+              <a:rPr sz="850" b="0">
+                <a:solidFill>
+                  <a:srgbClr val="434343"/>
+                </a:solidFill>
+                <a:latin typeface="Consolas"/>
+              </a:rPr>
+              <a:t/>
+            </a:r>
+          </a:p>
+          <a:p>
+            <a:pPr algn="l">
+              <a:lnSpc>
+                <a:spcPct val="114000"/>
+              </a:lnSpc>
+              <a:spcAft>
+                <a:spcPts val="0"/>
+              </a:spcAft>
+            </a:pPr>
+            <a:r>
+              <a:rPr sz="850" b="0">
+                <a:solidFill>
+                  <a:srgbClr val="434343"/>
+                </a:solidFill>
+                <a:latin typeface="Consolas"/>
+              </a:rPr>
+              <a:t># what "done" looks like:</a:t>
+            </a:r>
+          </a:p>
+          <a:p>
+            <a:pPr algn="l">
+              <a:lnSpc>
+                <a:spcPct val="114000"/>
+              </a:lnSpc>
+              <a:spcAft>
+                <a:spcPts val="0"/>
+              </a:spcAft>
+            </a:pPr>
+            <a:r>
+              <a:rPr sz="850" b="0">
+                <a:solidFill>
+                  <a:srgbClr val="434343"/>
+                </a:solidFill>
+                <a:latin typeface="Consolas"/>
+              </a:rPr>
+              <a:t>Owner:      &lt;a person, not a team&gt;</a:t>
+            </a:r>
+          </a:p>
+          <a:p>
+            <a:pPr algn="l">
+              <a:lnSpc>
+                <a:spcPct val="114000"/>
+              </a:lnSpc>
+              <a:spcAft>
+                <a:spcPts val="0"/>
+              </a:spcAft>
+            </a:pPr>
+            <a:r>
+              <a:rPr sz="850" b="0">
+                <a:solidFill>
+                  <a:srgbClr val="434343"/>
+                </a:solidFill>
+                <a:latin typeface="Consolas"/>
+              </a:rPr>
+              <a:t>Rung:       crawl | walk | run</a:t>
+            </a:r>
+          </a:p>
+          <a:p>
+            <a:pPr algn="l">
+              <a:lnSpc>
+                <a:spcPct val="114000"/>
+              </a:lnSpc>
+              <a:spcAft>
+                <a:spcPts val="0"/>
+              </a:spcAft>
+            </a:pPr>
+            <a:r>
+              <a:rPr sz="850" b="0">
+                <a:solidFill>
+                  <a:srgbClr val="434343"/>
+                </a:solidFill>
+                <a:latin typeface="Consolas"/>
+              </a:rPr>
+              <a:t>First move: &lt;the ~30-min step&gt;</a:t>
+            </a:r>
+          </a:p>
+          <a:p>
+            <a:pPr algn="l">
+              <a:lnSpc>
+                <a:spcPct val="114000"/>
+              </a:lnSpc>
+              <a:spcAft>
+                <a:spcPts val="0"/>
+              </a:spcAft>
+            </a:pPr>
+            <a:r>
+              <a:rPr sz="850" b="0">
+                <a:solidFill>
+                  <a:srgbClr val="434343"/>
+                </a:solidFill>
+                <a:latin typeface="Consolas"/>
+              </a:rPr>
+              <a:t>Decided:    YYYY-MM-DD</a:t>
+            </a:r>
+          </a:p>
+          <a:p>
+            <a:pPr algn="l">
+              <a:lnSpc>
+                <a:spcPct val="114000"/>
+              </a:lnSpc>
+              <a:spcAft>
+                <a:spcPts val="0"/>
+              </a:spcAft>
+            </a:pPr>
+            <a:r>
+              <a:rPr sz="850" b="0">
+                <a:solidFill>
+                  <a:srgbClr val="434343"/>
+                </a:solidFill>
+                <a:latin typeface="Consolas"/>
+              </a:rPr>
+              <a:t>Next review: YYYY-MM-DD</a:t>
+            </a:r>
+          </a:p>
+          <a:p>
+            <a:pPr algn="l">
+              <a:lnSpc>
+                <a:spcPct val="114000"/>
+              </a:lnSpc>
+              <a:spcAft>
+                <a:spcPts val="0"/>
+              </a:spcAft>
+            </a:pPr>
+            <a:r>
+              <a:rPr sz="850" b="0">
+                <a:solidFill>
+                  <a:srgbClr val="434343"/>
+                </a:solidFill>
+                <a:latin typeface="Consolas"/>
+              </a:rPr>
+              <a:t/>
+            </a:r>
+          </a:p>
+          <a:p>
+            <a:pPr algn="l">
+              <a:lnSpc>
+                <a:spcPct val="114000"/>
+              </a:lnSpc>
+              <a:spcAft>
+                <a:spcPts val="0"/>
+              </a:spcAft>
+            </a:pPr>
+            <a:r>
+              <a:rPr sz="850" b="0">
+                <a:solidFill>
+                  <a:srgbClr val="434343"/>
+                </a:solidFill>
+                <a:latin typeface="Consolas"/>
+              </a:rPr>
+              <a:t># ...plus: where standards live,</a:t>
+            </a:r>
+          </a:p>
+          <a:p>
+            <a:pPr algn="l">
+              <a:lnSpc>
+                <a:spcPct val="114000"/>
+              </a:lnSpc>
+              <a:spcAft>
+                <a:spcPts val="0"/>
+              </a:spcAft>
+            </a:pPr>
+            <a:r>
+              <a:rPr sz="850" b="0">
+                <a:solidFill>
+                  <a:srgbClr val="434343"/>
+                </a:solidFill>
+                <a:latin typeface="Consolas"/>
+              </a:rPr>
+              <a:t># how a project gets them, current-</a:t>
+            </a:r>
+          </a:p>
+          <a:p>
+            <a:pPr algn="l">
+              <a:lnSpc>
+                <a:spcPct val="114000"/>
+              </a:lnSpc>
+              <a:spcAft>
+                <a:spcPts val="0"/>
+              </a:spcAft>
+            </a:pPr>
+            <a:r>
+              <a:rPr sz="850" b="0">
+                <a:solidFill>
+                  <a:srgbClr val="434343"/>
+                </a:solidFill>
+                <a:latin typeface="Consolas"/>
+              </a:rPr>
+              <a:t># ness, enforced vs advisory,</a:t>
+            </a:r>
+          </a:p>
+          <a:p>
+            <a:pPr algn="l">
+              <a:lnSpc>
+                <a:spcPct val="114000"/>
+              </a:lnSpc>
+              <a:spcAft>
+                <a:spcPts val="0"/>
+              </a:spcAft>
+            </a:pPr>
+            <a:r>
+              <a:rPr sz="850" b="0">
+                <a:solidFill>
+                  <a:srgbClr val="434343"/>
+                </a:solidFill>
+                <a:latin typeface="Consolas"/>
+              </a:rPr>
+              <a:t># bypass, NOT-doing-yet</a:t>
+            </a:r>
+          </a:p>
+        </p:txBody>
+      </p:sp>
+    </p:spTree>
+  </p:cSld>
+  <p:clrMapOvr>
+    <a:masterClrMapping/>
+  </p:clrMapOvr>
+</p:sld>
+</file>
+
+<file path=ppt/slides/slide26.xml><?xml version="1.0" encoding="utf-8"?>
+<p:sld xmlns:a="http://schemas.openxmlformats.org/drawingml/2006/main" xmlns:p="http://schemas.openxmlformats.org/presentationml/2006/main" xmlns:r="http://schemas.openxmlformats.org/officeDocument/2006/relationships">
+  <p:cSld>
+    <p:spTree>
+      <p:nvGrpSpPr>
+        <p:cNvPr id="1" name=""/>
+        <p:cNvGrpSpPr/>
+        <p:nvPr/>
+      </p:nvGrpSpPr>
+      <p:grpSpPr/>
+      <p:sp>
+        <p:nvSpPr>
+          <p:cNvPr id="2" name="Rectangle 1"/>
+          <p:cNvSpPr/>
+          <p:nvPr/>
+        </p:nvSpPr>
+        <p:spPr>
+          <a:xfrm>
+            <a:off x="0" y="0"/>
+            <a:ext cx="9144000" cy="5143500"/>
+          </a:xfrm>
+          <a:prstGeom prst="rect">
+            <a:avLst/>
+          </a:prstGeom>
+          <a:solidFill>
+            <a:srgbClr val="FFFFFF"/>
+          </a:solidFill>
+          <a:ln>
+            <a:noFill/>
+          </a:ln>
+          <a:effectLst/>
+        </p:spPr>
+        <p:style>
+          <a:lnRef idx="1">
+            <a:schemeClr val="accent1"/>
+          </a:lnRef>
+          <a:fillRef idx="3">
+            <a:schemeClr val="accent1"/>
+          </a:fillRef>
+          <a:effectRef idx="2">
+            <a:schemeClr val="accent1"/>
+          </a:effectRef>
+          <a:fontRef idx="minor">
+            <a:schemeClr val="lt1"/>
+          </a:fontRef>
+        </p:style>
+        <p:txBody>
+          <a:bodyPr rtlCol="0" anchor="ctr"/>
+          <a:lstStyle/>
+          <a:p>
+            <a:pPr algn="ctr"/>
+          </a:p>
+        </p:txBody>
+      </p:sp>
+      <p:pic>
+        <p:nvPicPr>
+          <p:cNvPr id="3" name="Picture 2" descr="image3.png"/>
+          <p:cNvPicPr>
+            <a:picLocks noChangeAspect="1"/>
+          </p:cNvPicPr>
+          <p:nvPr/>
+        </p:nvPicPr>
+        <p:blipFill>
+          <a:blip r:embed="rId2"/>
+          <a:stretch>
+            <a:fillRect/>
+          </a:stretch>
+        </p:blipFill>
+        <p:spPr>
+          <a:xfrm>
+            <a:off x="8229600" y="411480"/>
+            <a:ext cx="713232" cy="384048"/>
+          </a:xfrm>
+          <a:prstGeom prst="rect">
+            <a:avLst/>
+          </a:prstGeom>
+        </p:spPr>
+      </p:pic>
+      <p:sp>
+        <p:nvSpPr>
+          <p:cNvPr id="4" name="Rectangle 3"/>
+          <p:cNvSpPr/>
+          <p:nvPr/>
+        </p:nvSpPr>
+        <p:spPr>
+          <a:xfrm>
+            <a:off x="548640" y="457200"/>
+            <a:ext cx="237744" cy="54864"/>
+          </a:xfrm>
+          <a:prstGeom prst="rect">
+            <a:avLst/>
+          </a:prstGeom>
+          <a:solidFill>
+            <a:srgbClr val="403FE8"/>
+          </a:solidFill>
+          <a:ln>
+            <a:noFill/>
+          </a:ln>
+          <a:effectLst/>
+        </p:spPr>
+        <p:style>
+          <a:lnRef idx="1">
+            <a:schemeClr val="accent1"/>
+          </a:lnRef>
+          <a:fillRef idx="3">
+            <a:schemeClr val="accent1"/>
+          </a:fillRef>
+          <a:effectRef idx="2">
+            <a:schemeClr val="accent1"/>
+          </a:effectRef>
+          <a:fontRef idx="minor">
+            <a:schemeClr val="lt1"/>
+          </a:fontRef>
+        </p:style>
+        <p:txBody>
+          <a:bodyPr rtlCol="0" anchor="ctr"/>
+          <a:lstStyle/>
+          <a:p>
+            <a:pPr algn="ctr"/>
+          </a:p>
+        </p:txBody>
+      </p:sp>
+      <p:sp>
+        <p:nvSpPr>
+          <p:cNvPr id="5" name="TextBox 4"/>
+          <p:cNvSpPr txBox="1"/>
+          <p:nvPr/>
+        </p:nvSpPr>
+        <p:spPr>
+          <a:xfrm>
+            <a:off x="868680" y="402336"/>
+            <a:ext cx="7132320" cy="274320"/>
+          </a:xfrm>
+          <a:prstGeom prst="rect">
+            <a:avLst/>
+          </a:prstGeom>
+          <a:noFill/>
+        </p:spPr>
+        <p:txBody>
+          <a:bodyPr wrap="square" anchor="t" lIns="0" rIns="0" tIns="0" bIns="0">
+            <a:spAutoFit/>
+          </a:bodyPr>
+          <a:lstStyle/>
+          <a:p>
+            <a:pPr algn="l">
+              <a:spcAft>
+                <a:spcPts val="400"/>
+              </a:spcAft>
+            </a:pPr>
+            <a:r>
+              <a:rPr sz="950" b="1">
+                <a:solidFill>
+                  <a:srgbClr val="403FE8"/>
+                </a:solidFill>
+                <a:latin typeface="Arial"/>
+              </a:rPr>
+              <a:t>WRAP &amp; RETRO</a:t>
+            </a:r>
+          </a:p>
+        </p:txBody>
+      </p:sp>
+      <p:sp>
+        <p:nvSpPr>
+          <p:cNvPr id="6" name="TextBox 5"/>
+          <p:cNvSpPr txBox="1"/>
+          <p:nvPr/>
+        </p:nvSpPr>
+        <p:spPr>
+          <a:xfrm>
+            <a:off x="548640" y="658368"/>
+            <a:ext cx="7589520" cy="566928"/>
+          </a:xfrm>
+          <a:prstGeom prst="rect">
+            <a:avLst/>
+          </a:prstGeom>
+          <a:noFill/>
+        </p:spPr>
+        <p:txBody>
+          <a:bodyPr wrap="square" anchor="t" lIns="0" rIns="0" tIns="0" bIns="0">
+            <a:spAutoFit/>
+          </a:bodyPr>
+          <a:lstStyle/>
+          <a:p>
+            <a:pPr algn="l">
+              <a:spcAft>
+                <a:spcPts val="400"/>
+              </a:spcAft>
+            </a:pPr>
+            <a:r>
+              <a:rPr sz="2500" b="1">
+                <a:solidFill>
+                  <a:srgbClr val="13135E"/>
+                </a:solidFill>
+                <a:latin typeface="Arial"/>
+              </a:rPr>
+              <a:t>What leaves this room</a:t>
+            </a:r>
+          </a:p>
+        </p:txBody>
+      </p:sp>
+      <p:sp>
+        <p:nvSpPr>
+          <p:cNvPr id="7" name="TextBox 6"/>
+          <p:cNvSpPr txBox="1"/>
+          <p:nvPr/>
+        </p:nvSpPr>
+        <p:spPr>
+          <a:xfrm>
+            <a:off x="548640" y="1316736"/>
+            <a:ext cx="7863840" cy="566928"/>
+          </a:xfrm>
+          <a:prstGeom prst="rect">
+            <a:avLst/>
+          </a:prstGeom>
+          <a:noFill/>
+        </p:spPr>
+        <p:txBody>
+          <a:bodyPr wrap="square" anchor="t" lIns="0" rIns="0" tIns="0" bIns="0">
+            <a:spAutoFit/>
+          </a:bodyPr>
+          <a:lstStyle/>
+          <a:p>
+            <a:pPr algn="l">
+              <a:lnSpc>
+                <a:spcPct val="125000"/>
+              </a:lnSpc>
+              <a:spcAft>
+                <a:spcPts val="400"/>
+              </a:spcAft>
+            </a:pPr>
+            <a:r>
+              <a:rPr sz="1200" b="0">
+                <a:solidFill>
+                  <a:srgbClr val="434343"/>
+                </a:solidFill>
+                <a:latin typeface="Arial"/>
+              </a:rPr>
               <a:t>Questions &amp; support: #extra-duty-solutions-ai-training — your instructor and the Applied AI Engineer are there.</a:t>
             </a:r>
           </a:p>
@@ -16585,7 +18296,7 @@
                 </a:solidFill>
                 <a:latin typeface="Arial"/>
               </a:rPr>
-              <a:t>What was hard, what was easy — thirty seconds each.</a:t>
+              <a:t>What was hard, what was easy — one line each, in chat, waterfall style.</a:t>
             </a:r>
           </a:p>
           <a:p>

--- a/docs/instructor/lab-2b-guardrails.pptx
+++ b/docs/instructor/lab-2b-guardrails.pptx
@@ -527,7 +527,7 @@
           <a:lstStyle/>
           <a:p>
             <a:r>
-              <a:t>Welcome to 2.b. The challenge in one breath: take the rule your group wrote last week and give it teeth — a hook that stops the agent while it writes, and a CI gate that stops anyone at merge time, both verified in both directions, with the unenforceable clauses honestly decided rather than quietly dropped. The interesting output today is not the hook — it is the list of things the hook could not check. ~1 min.</a:t>
+              <a:t>Welcome to 2.b. The challenge in one breath: take the rule the class agreed last week and give it teeth — a hook that stops the agent while it writes, and a CI gate that stops anyone at merge time, both verified in both directions, with the unenforceable clauses honestly decided rather than quietly dropped. The interesting output today is not the hook — it is the list of things the hook could not check. ~1 min.</a:t>
             </a:r>
           </a:p>
         </p:txBody>
@@ -1017,7 +1017,7 @@
           <a:lstStyle/>
           <a:p>
             <a:r>
-              <a:t>Type it live if the room is comfortable; paste if behind. Say the Windows path normalisation out loud — it is the bug every group hits and why the hook is Node, not shell. Then register it together and restart sessions — the forgotten-restart is the "my hook never fires" stuck point. ~5 min.</a:t>
+              <a:t>Type it live if the room is comfortable; paste if behind. Say the Windows path normalisation out loud — it is the bug every cohort hits and why the hook is Node, not shell. Then register it together and restart sessions — the forgotten-restart is the "my hook never fires" stuck point. ~5 min.</a:t>
             </a:r>
           </a:p>
         </p:txBody>
@@ -1367,7 +1367,7 @@
           <a:lstStyle/>
           <a:p>
             <a:r>
-              <a:t>[CALIBRATED from Lab 1.b, 2026-08-12: agenda held · checkpoint gates worked · keep as built] Remote circulation = one whole-call chat nudge at ~7 min ("what does your allow case replay?" — no answer means verification is about to be skipped) + Slack for 1:1s. WHAT EACH TRACK BUILDS (rescue detail in the teachers guide, never on screen): test-discipline = PostToolUse nudge when an edited server/src *.ts has no sibling *.test.ts; store-boundary = PreToolUse block when a written file outside repositories/ contains an import of db/store. COMMON QUESTIONS — Q: "My clause is fuzzy — what do I build?" A: build the mechanical core of your list instead, and your fuzzy clause becomes a residue decision; nobody builds nothing. Q: "Block or nudge for mine?" A: run the PARTLY test — if your check can false-positive, nudge; write the reason down either way. Q: "Do I need the hook AND the gate?" A: yes — different audiences: the hook stops the agent, the gate stops anyone. ~15 min.</a:t>
+              <a:t>[CALIBRATED from Lab 1.b, 2026-08-12: agenda held · checkpoint gates worked · keep as built] Remote circulation = one whole-call chat nudge at ~7 min ("what does your allow case replay?" — no answer means verification is about to be skipped) + Slack for 1:1s. WHAT EACH TARGET IS (rescue detail in the teachers guide, never on screen): default = PostToolUse nudge when an edited server/src *.ts has no sibling *.test.ts; store-boundary choice = PreToolUse block when a written file outside repositories/ contains an import of db/store. COMMON QUESTIONS — Q: "My clause is fuzzy — what do I build?" A: build the mechanical core of your list instead, and your fuzzy clause becomes a residue decision; nobody builds nothing. Q: "Block or nudge for mine?" A: run the PARTLY test — if your check can false-positive, nudge; write the reason down either way. Q: "Do I need the hook AND the gate?" A: yes — different audiences: the hook stops the agent, the gate stops anyone. ~15 min.</a:t>
             </a:r>
           </a:p>
         </p:txBody>
@@ -1647,7 +1647,7 @@
           <a:lstStyle/>
           <a:p>
             <a:r>
-              <a:t>Push hardest on the residue question — it reveals whether the lesson landed. A group with an empty residue column has either a trivial rule or has not looked. ~10 min.</a:t>
+              <a:t>Push hardest on the residue question — it reveals whether the lesson landed. A PR with an empty residue column has either a trivial rule or has not looked. ~10 min.</a:t>
             </a:r>
           </a:p>
         </p:txBody>
@@ -14471,7 +14471,7 @@
                 </a:solidFill>
                 <a:latin typeface="Arial"/>
               </a:rPr>
-              <a:t>Fifteen minutes. The plumbing is given; the policy is yours — test-discipline group: the sibling-test nudge. Store-boundary group: the import check.</a:t>
+              <a:t>Fifteen minutes. The plumbing is given; the policy is yours — default target: the sibling-test nudge. Did the store-boundary stretch? Build the import block instead.</a:t>
             </a:r>
           </a:p>
         </p:txBody>
@@ -14561,7 +14561,7 @@
                 </a:solidFill>
                 <a:latin typeface="Arial"/>
               </a:rPr>
-              <a:t>Your 2.a clause, revisited. </a:t>
+              <a:t>Your 2.a NFR, revisited. </a:t>
             </a:r>
             <a:r>
               <a:rPr sz="1250" b="0">
@@ -14570,7 +14570,7 @@
                 </a:solidFill>
                 <a:latin typeface="Arial"/>
               </a:rPr>
-              <a:t>The residue decisions you record today update that same NFR.</a:t>
+              <a:t>Pick one MECHANICAL clause from it; the residue decisions you record today update that same document.</a:t>
             </a:r>
           </a:p>
           <a:p>

--- a/docs/instructor/lab-2b-guardrails.pptx
+++ b/docs/instructor/lab-2b-guardrails.pptx
@@ -1367,7 +1367,7 @@
           <a:lstStyle/>
           <a:p>
             <a:r>
-              <a:t>[CALIBRATED from Lab 1.b, 2026-08-12: agenda held · checkpoint gates worked · keep as built] Remote circulation = one whole-call chat nudge at ~7 min ("what does your allow case replay?" — no answer means verification is about to be skipped) + Slack for 1:1s. WHAT EACH TARGET IS (rescue detail in the teachers guide, never on screen): default = PostToolUse nudge when an edited server/src *.ts has no sibling *.test.ts; store-boundary choice = PreToolUse block when a written file outside repositories/ contains an import of db/store. COMMON QUESTIONS — Q: "My clause is fuzzy — what do I build?" A: build the mechanical core of your list instead, and your fuzzy clause becomes a residue decision; nobody builds nothing. Q: "Block or nudge for mine?" A: run the PARTLY test — if your check can false-positive, nudge; write the reason down either way. Q: "Do I need the hook AND the gate?" A: yes — different audiences: the hook stops the agent, the gate stops anyone. ~15 min.</a:t>
+              <a:t>[CALIBRATED from Lab 1.b, 2026-08-12: agenda held · checkpoint gates worked · keep as built] FRAME THE EXERCISE FIRST, one breath, before any mechanics — this is 2.a's wire-in promise landing: last week the rule reached layer 1 (informs); today it moves to layers 2 and 4 (enforce) — but only PARTIALLY, per clause, and that is by design, not failure. The mechanical clause ("ships with a test in the same PR") gets a nudge and a gate. The fuzzy clause ("the test failed first" — the one that catches fix B, the most important line in their NFR) cannot be enforced by anything built today; it ends in the residue column as a recorded decision with a name. Enforcement is a PER-CLAUSE property of a rule — the same per-clause lesson as 2.a's Checked-by line, now with teeth. Said up front, the residue column becomes the point of the exercise instead of its leftovers. Remote circulation = one whole-call chat nudge at ~7 min ("what does your allow case replay?" — no answer means verification is about to be skipped) + Slack for 1:1s. WHAT EACH TARGET IS (rescue detail in the teachers guide, never on screen): default = PostToolUse nudge when an edited server/src *.ts has no sibling *.test.ts; store-boundary choice = PreToolUse block when a written file outside repositories/ contains an import of db/store. COMMON QUESTIONS — Q: "My clause is fuzzy — what do I build?" A: build the mechanical core of your list instead, and your fuzzy clause becomes a residue decision; nobody builds nothing. Q: "Block or nudge for mine?" A: run the PARTLY test — if your check can false-positive, nudge; write the reason down either way. Q: "Do I need the hook AND the gate?" A: yes — different audiences: the hook stops the agent, the gate stops anyone. ~15 min.</a:t>
             </a:r>
           </a:p>
         </p:txBody>

--- a/docs/instructor/lab-2b-guardrails.pptx
+++ b/docs/instructor/lab-2b-guardrails.pptx
@@ -527,7 +527,13 @@
           <a:lstStyle/>
           <a:p>
             <a:r>
-              <a:t>Welcome to 2.b. The challenge in one breath: take the rule the class agreed last week and give it teeth — a hook that stops the agent while it writes, and a CI gate that stops anyone at merge time, both verified in both directions, with the unenforceable clauses honestly decided rather than quietly dropped. The interesting output today is not the hook — it is the list of things the hook could not check. ~1 min.</a:t>
+              <a:t>Welcome to 2.b. The challenge in one breath: take the rule the class agreed last week and give it teeth — a hook that stops the agent while it writes, and a CI gate that stops anyone at merge time, both verified in both directions, with the unenforceable clauses honestly decided rather than quietly dropped. The interesting output today is not the hook — it is the list of things the hook could not check.</a:t>
+            </a:r>
+          </a:p>
+          <a:p/>
+          <a:p>
+            <a:r>
+              <a:t>~1 min.</a:t>
             </a:r>
           </a:p>
         </p:txBody>
@@ -597,7 +603,13 @@
           <a:lstStyle/>
           <a:p>
             <a:r>
-              <a:t>The most senior idea in the block. The bypass rate is a signal about the RULE, not about discipline — if people constantly go around it, the rule is mis-scoped. That reframe lands well with leads. ~2 min.</a:t>
+              <a:t>The most senior idea in the block. The bypass rate is a signal about the RULE, not about discipline — if people constantly go around it, the rule is mis-scoped. That reframe lands well with leads.</a:t>
+            </a:r>
+          </a:p>
+          <a:p/>
+          <a:p>
+            <a:r>
+              <a:t>~2 min.</a:t>
             </a:r>
           </a:p>
         </p:txBody>
@@ -667,7 +679,13 @@
           <a:lstStyle/>
           <a:p>
             <a:r>
-              <a:t>Sanitised exemplar — no client, product, or domain detail; if asked, "another engagement." The proportion is the insight: nine validators sounds heavy until you see the bypass is a single comment convention. ~2 min.</a:t>
+              <a:t>Sanitised exemplar — no client, product, or domain detail; if asked, "another engagement." The proportion is the insight: nine validators sounds heavy until you see the bypass is a single comment convention.</a:t>
+            </a:r>
+          </a:p>
+          <a:p/>
+          <a:p>
+            <a:r>
+              <a:t>~2 min.</a:t>
             </a:r>
           </a:p>
         </p:txBody>
@@ -737,7 +755,13 @@
           <a:lstStyle/>
           <a:p>
             <a:r>
-              <a:t>Ninety seconds; it collapses a distinction people assume exists. If the room heads toward "we need an AI policy", the answer is: you need an NFR, and you wrote one last week. ~2 min.</a:t>
+              <a:t>Ninety seconds; it collapses a distinction people assume exists. If the room heads toward "we need an AI policy", the answer is: you need an NFR, and you wrote one last week.</a:t>
+            </a:r>
+          </a:p>
+          <a:p/>
+          <a:p>
+            <a:r>
+              <a:t>~2 min.</a:t>
             </a:r>
           </a:p>
         </p:txBody>
@@ -877,7 +901,63 @@
           <a:lstStyle/>
           <a:p>
             <a:r>
-              <a:t>Run the demo AGAINST this slide — call the step number as you go so anyone who drops can rejoin; on Meet nobody can glance at a neighbour's screen. COMMON QUESTIONS — Q: "Why three layers for one rule?" A: they fail differently — the line informs a reader, the deny stops the common case cheaply, the hook explains itself when it fires; you will not always build all three. Q: "My settings.json already has a hooks block — another one?" A: no — add a second entry to the EXISTING PreToolUse array (the handout shows the merged shape). Q: "Does the hook slow every edit?" A: it runs per matched tool call, milliseconds; if a hook is slow, that is the hook's fault, not the mechanism. Q: "Hook never fires?" A: nine times in ten, no new session — hooks load at session start; the rest: matcher or path normalisation (Windows backslashes). ~3 min.</a:t>
+              <a:t>Run the demo AGAINST this slide — call the step number as you go so anyone who drops can rejoin; on Meet nobody can glance at a neighbour's screen.</a:t>
+            </a:r>
+          </a:p>
+          <a:p/>
+          <a:p>
+            <a:r>
+              <a:t>COMMON QUESTIONS</a:t>
+            </a:r>
+          </a:p>
+          <a:p/>
+          <a:p>
+            <a:r>
+              <a:t>Q: "Why three layers for one rule?"</a:t>
+            </a:r>
+          </a:p>
+          <a:p>
+            <a:r>
+              <a:t>A: they fail differently — the line informs a reader, the deny stops the common case cheaply, the hook explains itself when it fires; you will not always build all three.</a:t>
+            </a:r>
+          </a:p>
+          <a:p/>
+          <a:p>
+            <a:r>
+              <a:t>Q: "My settings.json already has a hooks block — another one?"</a:t>
+            </a:r>
+          </a:p>
+          <a:p>
+            <a:r>
+              <a:t>A: no — add a second entry to the EXISTING PreToolUse array (the handout shows the merged shape).</a:t>
+            </a:r>
+          </a:p>
+          <a:p/>
+          <a:p>
+            <a:r>
+              <a:t>Q: "Does the hook slow every edit?"</a:t>
+            </a:r>
+          </a:p>
+          <a:p>
+            <a:r>
+              <a:t>A: it runs per matched tool call, milliseconds; if a hook is slow, that is the hook's fault, not the mechanism.</a:t>
+            </a:r>
+          </a:p>
+          <a:p/>
+          <a:p>
+            <a:r>
+              <a:t>Q: "Hook never fires?"</a:t>
+            </a:r>
+          </a:p>
+          <a:p>
+            <a:r>
+              <a:t>A: nine times in ten, no new session — hooks load at session start; the rest: matcher or path normalisation (Windows backslashes).</a:t>
+            </a:r>
+          </a:p>
+          <a:p/>
+          <a:p>
+            <a:r>
+              <a:t>~3 min.</a:t>
             </a:r>
           </a:p>
         </p:txBody>
@@ -947,7 +1027,13 @@
           <a:lstStyle/>
           <a:p>
             <a:r>
-              <a:t>Deliberately parallel to the exhibit they just read — the shape is the point, not this rule. Make the two-rules distinction explicitly; the review agent flagged it as the most likely novice confusion of the block. ~3 min.</a:t>
+              <a:t>Deliberately parallel to the exhibit they just read — the shape is the point, not this rule. Make the two-rules distinction explicitly; the review agent flagged it as the most likely novice confusion of the block.</a:t>
+            </a:r>
+          </a:p>
+          <a:p/>
+          <a:p>
+            <a:r>
+              <a:t>~3 min.</a:t>
             </a:r>
           </a:p>
         </p:txBody>
@@ -1017,7 +1103,13 @@
           <a:lstStyle/>
           <a:p>
             <a:r>
-              <a:t>Type it live if the room is comfortable; paste if behind. Say the Windows path normalisation out loud — it is the bug every cohort hits and why the hook is Node, not shell. Then register it together and restart sessions — the forgotten-restart is the "my hook never fires" stuck point. ~5 min.</a:t>
+              <a:t>Type it live if the room is comfortable; paste if behind. Say the Windows path normalisation out loud — it is the bug every cohort hits and why the hook is Node, not shell. Then register it together and restart sessions — the forgotten-restart is the "my hook never fires" stuck point.</a:t>
+            </a:r>
+          </a:p>
+          <a:p/>
+          <a:p>
+            <a:r>
+              <a:t>~5 min.</a:t>
             </a:r>
           </a:p>
         </p:txBody>
@@ -1087,7 +1179,13 @@
           <a:lstStyle/>
           <a:p>
             <a:r>
-              <a:t>Slow down here and say why: this is the step people skip. Both tests visibly. If your own hook false-positives live, that is a gift — work it through on the shared screen. ~5 min.</a:t>
+              <a:t>Slow down here and say why: this is the step people skip. Both tests visibly. If your own hook false-positives live, that is a gift — work it through on the shared screen.</a:t>
+            </a:r>
+          </a:p>
+          <a:p/>
+          <a:p>
+            <a:r>
+              <a:t>~5 min.</a:t>
             </a:r>
           </a:p>
         </p:txBody>
@@ -1157,7 +1255,19 @@
           <a:lstStyle/>
           <a:p>
             <a:r>
-              <a:t>[CALIBRATED from Lab 1.b, 2026-08-12: agenda held · checkpoint gates worked · keep as built] Chat is the room-walk: refusal texts land where you can read them, and silence from a name is your signal to check in (Slack, not the whole call). Common failure: a path check that also catches db.json.example or a test fixture. Fast finishers: read protect-seed.js and diff the two hooks' messages. ~3 min.</a:t>
+              <a:t>[CALIBRATED from Lab 1.b, 2026-08-12: agenda held · checkpoint gates worked · keep as built]</a:t>
+            </a:r>
+          </a:p>
+          <a:p/>
+          <a:p>
+            <a:r>
+              <a:t>Chat is the room-walk: refusal texts land where you can read them, and silence from a name is your signal to check in (Slack, not the whole call). Common failure: a path check that also catches db.json.example or a test fixture. Fast finishers: read protect-seed.js and diff the two hooks' messages.</a:t>
+            </a:r>
+          </a:p>
+          <a:p/>
+          <a:p>
+            <a:r>
+              <a:t>~3 min.</a:t>
             </a:r>
           </a:p>
         </p:txBody>
@@ -1227,7 +1337,13 @@
           <a:lstStyle/>
           <a:p>
             <a:r>
-              <a:t>Three minutes, no hands-on. Why it is here: their real world is SQL Server and stored procedures, and the pattern they just built on a JSON file needs to visibly transfer. The false-positive row is the most valuable one — it is the PARTLY tag from the severity slide, in the wild. The takeaway card now carries a SECOND worked example ("all backends must use SQLite" — ADR for the why, NFR for the must + CI dependency scan, deny rule on npm install pg*), whose org-wide reach also previews the hand-off two slides from now. Point at it; do not teach it. ~3 min.</a:t>
+              <a:t>Three minutes, no hands-on. Why it is here: their real world is SQL Server and stored procedures, and the pattern they just built on a JSON file needs to visibly transfer. The false-positive row is the most valuable one — it is the PARTLY tag from the severity slide, in the wild. The takeaway card now carries a SECOND worked example ("all backends must use SQLite" — ADR for the why, NFR for the must + CI dependency scan, deny rule on npm install pg*), whose org-wide reach also previews the hand-off two slides from now. Point at it; do not teach it.</a:t>
+            </a:r>
+          </a:p>
+          <a:p/>
+          <a:p>
+            <a:r>
+              <a:t>~3 min.</a:t>
             </a:r>
           </a:p>
         </p:txBody>
@@ -1297,7 +1413,19 @@
           <a:lstStyle/>
           <a:p>
             <a:r>
-              <a:t>[CALIBRATED from Lab 1.b, 2026-08-12: agenda held · checkpoint gates worked · keep as built] The blocks sum to ~103 — the slack is deliberate; protect it for verification, which is the step people skip. Prereq check right now, in chat: "type 2A-DONE and HOOKS-DONE if both are true" — anyone missing either follows along on the shared screen for the build sections and catches up async per the handout (Slack for 1:1 help; Meet chat has no DMs). Assessment disclosure: same rubric, and today's hook or gate is also the Framework Practitioner artifact. ~2 min.</a:t>
+              <a:t>[CALIBRATED from Lab 1.b, 2026-08-12: agenda held · checkpoint gates worked · keep as built]</a:t>
+            </a:r>
+          </a:p>
+          <a:p/>
+          <a:p>
+            <a:r>
+              <a:t>The blocks sum to ~103 — the slack is deliberate; protect it for verification, which is the step people skip. Prereq check right now, in chat: "type 2A-DONE and HOOKS-DONE if both are true" — anyone missing either follows along on the shared screen for the build sections and catches up async per the handout (Slack for 1:1 help; Meet chat has no DMs). Assessment disclosure: same rubric, and today's hook or gate is also the Framework Practitioner artifact.</a:t>
+            </a:r>
+          </a:p>
+          <a:p/>
+          <a:p>
+            <a:r>
+              <a:t>~2 min.</a:t>
             </a:r>
           </a:p>
         </p:txBody>
@@ -1367,7 +1495,64 @@
           <a:lstStyle/>
           <a:p>
             <a:r>
-              <a:t>[CALIBRATED from Lab 1.b, 2026-08-12: agenda held · checkpoint gates worked · keep as built] FRAME THE EXERCISE FIRST, one breath, before any mechanics — this is 2.a's wire-in promise landing: last week the rule reached layer 1 (informs); today it moves to layers 2 and 4 (enforce) — but only PARTIALLY, per clause, and that is by design, not failure. The mechanical clause ("ships with a test in the same PR") gets a nudge and a gate. The fuzzy clause ("the test failed first" — the one that catches fix B, the most important line in their NFR) cannot be enforced by anything built today; it ends in the residue column as a recorded decision with a name. Enforcement is a PER-CLAUSE property of a rule — the same per-clause lesson as 2.a's Checked-by line, now with teeth. Said up front, the residue column becomes the point of the exercise instead of its leftovers. Remote circulation = one whole-call chat nudge at ~7 min ("what does your allow case replay?" — no answer means verification is about to be skipped) + Slack for 1:1s. WHAT EACH TARGET IS (rescue detail in the teachers guide, never on screen): default = PostToolUse nudge when an edited server/src *.ts has no sibling *.test.ts; store-boundary choice = PreToolUse block when a written file outside repositories/ contains an import of db/store. COMMON QUESTIONS — Q: "My clause is fuzzy — what do I build?" A: build the mechanical core of your list instead, and your fuzzy clause becomes a residue decision; nobody builds nothing. Q: "Block or nudge for mine?" A: run the PARTLY test — if your check can false-positive, nudge; write the reason down either way. Q: "Do I need the hook AND the gate?" A: yes — different audiences: the hook stops the agent, the gate stops anyone. ~15 min.</a:t>
+              <a:t>[CALIBRATED from Lab 1.b, 2026-08-12: agenda held · checkpoint gates worked · keep as built]</a:t>
+            </a:r>
+          </a:p>
+          <a:p/>
+          <a:p>
+            <a:r>
+              <a:t>FRAME THE EXERCISE FIRST, one breath, before any mechanics — this is 2.a's wire-in promise landing: last week the rule reached layer 1 (informs); today it moves to layers 2 and 4 (enforce) — but only PARTIALLY, per clause, and that is by design, not failure. The mechanical clause ("ships with a test in the same PR") gets a nudge and a gate. The fuzzy clause ("the test failed first" — the one that catches fix B, the most important line in their NFR) cannot be enforced by anything built today; it ends in the residue column as a recorded decision with a name. Enforcement is a PER-CLAUSE property of a rule — the same per-clause lesson as 2.a's Checked-by line, now with teeth. Said up front, the residue column becomes the point of the exercise instead of its leftovers. Remote circulation = one whole-call chat nudge at ~7 min ("what does your allow case replay?" — no answer means verification is about to be skipped) + Slack for 1:1s.</a:t>
+            </a:r>
+          </a:p>
+          <a:p/>
+          <a:p>
+            <a:r>
+              <a:t>WHAT EACH TARGET IS (rescue detail in the teachers guide, never on screen): default = PostToolUse nudge when an edited server/src *.ts has no sibling *.test.ts; store-boundary choice = PreToolUse block when a written file outside repositories/ contains an import of db/store.</a:t>
+            </a:r>
+          </a:p>
+          <a:p/>
+          <a:p>
+            <a:r>
+              <a:t>COMMON QUESTIONS</a:t>
+            </a:r>
+          </a:p>
+          <a:p/>
+          <a:p>
+            <a:r>
+              <a:t>Q: "My clause is fuzzy — what do I build?"</a:t>
+            </a:r>
+          </a:p>
+          <a:p>
+            <a:r>
+              <a:t>A: build the mechanical core of your list instead, and your fuzzy clause becomes a residue decision; nobody builds nothing.</a:t>
+            </a:r>
+          </a:p>
+          <a:p/>
+          <a:p>
+            <a:r>
+              <a:t>Q: "Block or nudge for mine?"</a:t>
+            </a:r>
+          </a:p>
+          <a:p>
+            <a:r>
+              <a:t>A: run the PARTLY test — if your check can false-positive, nudge; write the reason down either way.</a:t>
+            </a:r>
+          </a:p>
+          <a:p/>
+          <a:p>
+            <a:r>
+              <a:t>Q: "Do I need the hook AND the gate?"</a:t>
+            </a:r>
+          </a:p>
+          <a:p>
+            <a:r>
+              <a:t>A: yes — different audiences: the hook stops the agent, the gate stops anyone.</a:t>
+            </a:r>
+          </a:p>
+          <a:p/>
+          <a:p>
+            <a:r>
+              <a:t>~15 min.</a:t>
             </a:r>
           </a:p>
         </p:txBody>
@@ -1437,7 +1622,19 @@
           <a:lstStyle/>
           <a:p>
             <a:r>
-              <a:t>[CALIBRATED from Lab 1.b, 2026-08-12: agenda held · checkpoint gates worked · keep as built] Gate hard here: the CI-gate step depends on the clause being genuinely mechanical, which this checkpoint proves. Fast finishers: the policy-bundle stretch, or offer an allow-case replay to whoever asks in Slack. ~2 min.</a:t>
+              <a:t>[CALIBRATED from Lab 1.b, 2026-08-12: agenda held · checkpoint gates worked · keep as built]</a:t>
+            </a:r>
+          </a:p>
+          <a:p/>
+          <a:p>
+            <a:r>
+              <a:t>Gate hard here: the CI-gate step depends on the clause being genuinely mechanical, which this checkpoint proves. Fast finishers: the policy-bundle stretch, or offer an allow-case replay to whoever asks in Slack.</a:t>
+            </a:r>
+          </a:p>
+          <a:p/>
+          <a:p>
+            <a:r>
+              <a:t>~2 min.</a:t>
             </a:r>
           </a:p>
         </p:txBody>
@@ -1507,7 +1704,25 @@
           <a:lstStyle/>
           <a:p>
             <a:r>
-              <a:t>[CALIBRATED from Lab 1.b, 2026-08-12: agenda held · checkpoint gates worked · keep as built] THE GOTCHA that will eat this step remotely: the gate runs on pull_request — a student who commits to their branch and waits will conclude it does not work. Say it before they start: push, open a draft PR, watch the check. CONCRETE CORES (rescue detail; guide has the code): test-discipline = fail if the PR diff touches server/src/** with no *.test.ts in the diff; store-boundary = fail if grep finds db/store imports outside repositories/. The docs-only-PR question is where block-vs-warn becomes real — do not answer it for them. Residue is an acceptance criterion: "the test must have failed first" needs a named owner or an explicit drop, back in the 2.a NFR. ~10 min.</a:t>
+              <a:t>[CALIBRATED from Lab 1.b, 2026-08-12: agenda held · checkpoint gates worked · keep as built]</a:t>
+            </a:r>
+          </a:p>
+          <a:p/>
+          <a:p>
+            <a:r>
+              <a:t>THE GOTCHA that will eat this step remotely: the gate runs on pull_request — a student who commits to their branch and waits will conclude it does not work. Say it before they start: push, open a draft PR, watch the check.</a:t>
+            </a:r>
+          </a:p>
+          <a:p/>
+          <a:p>
+            <a:r>
+              <a:t>CONCRETE CORES (rescue detail; guide has the code): test-discipline = fail if the PR diff touches server/src/** with no *.test.ts in the diff; store-boundary = fail if grep finds db/store imports outside repositories/. The docs-only-PR question is where block-vs-warn becomes real — do not answer it for them. Residue is an acceptance criterion: "the test must have failed first" needs a named owner or an explicit drop, back in the 2.a NFR.</a:t>
+            </a:r>
+          </a:p>
+          <a:p/>
+          <a:p>
+            <a:r>
+              <a:t>~10 min.</a:t>
             </a:r>
           </a:p>
         </p:txBody>
@@ -1577,7 +1792,52 @@
           <a:lstStyle/>
           <a:p>
             <a:r>
-              <a:t>Short and satisfying: the reviewer quoting their own NFR back at them is the moment governance stops being paperwork. The giget fallback matters — copies made before Jul 29 lack the agents folder. COMMON QUESTIONS — Q: "How do I run it?" A: ask Claude to "review my branch with the taskboard-code-reviewer agent", or @-mention the agent; it reads CLAUDE.md, then your docs, then the diff. Q: "It did not cite my NFR." A: check your doc is in its process list AND your clause applies to something in the diff — a reviewer with nothing to catch cites nothing. Q: "Report in chat?" A: paste one finding that cites your standard — that is the loop-closing moment, share it. ~4 min.</a:t>
+              <a:t>Short and satisfying: the reviewer quoting their own NFR back at them is the moment governance stops being paperwork. The giget fallback matters — copies made before Jul 29 lack the agents folder.</a:t>
+            </a:r>
+          </a:p>
+          <a:p/>
+          <a:p>
+            <a:r>
+              <a:t>COMMON QUESTIONS</a:t>
+            </a:r>
+          </a:p>
+          <a:p/>
+          <a:p>
+            <a:r>
+              <a:t>Q: "How do I run it?"</a:t>
+            </a:r>
+          </a:p>
+          <a:p>
+            <a:r>
+              <a:t>A: ask Claude to "review my branch with the taskboard-code-reviewer agent", or @-mention the agent; it reads CLAUDE.md, then your docs, then the diff.</a:t>
+            </a:r>
+          </a:p>
+          <a:p/>
+          <a:p>
+            <a:r>
+              <a:t>Q: "It did not cite my NFR."</a:t>
+            </a:r>
+          </a:p>
+          <a:p>
+            <a:r>
+              <a:t>A: check your doc is in its process list AND your clause applies to something in the diff — a reviewer with nothing to catch cites nothing.</a:t>
+            </a:r>
+          </a:p>
+          <a:p/>
+          <a:p>
+            <a:r>
+              <a:t>Q: "Report in chat?"</a:t>
+            </a:r>
+          </a:p>
+          <a:p>
+            <a:r>
+              <a:t>A: paste one finding that cites your standard — that is the loop-closing moment, share it.</a:t>
+            </a:r>
+          </a:p>
+          <a:p/>
+          <a:p>
+            <a:r>
+              <a:t>~4 min.</a:t>
             </a:r>
           </a:p>
         </p:txBody>
@@ -1647,7 +1907,13 @@
           <a:lstStyle/>
           <a:p>
             <a:r>
-              <a:t>Push hardest on the residue question — it reveals whether the lesson landed. A PR with an empty residue column has either a trivial rule or has not looked. ~10 min.</a:t>
+              <a:t>Push hardest on the residue question — it reveals whether the lesson landed. A PR with an empty residue column has either a trivial rule or has not looked.</a:t>
+            </a:r>
+          </a:p>
+          <a:p/>
+          <a:p>
+            <a:r>
+              <a:t>~10 min.</a:t>
             </a:r>
           </a:p>
         </p:txBody>
@@ -1717,7 +1983,13 @@
           <a:lstStyle/>
           <a:p>
             <a:r>
-              <a:t>Three minutes; framing over content. The guide is written for a team new to governance — it opens with the four terms, Crawl is one person's afternoon, and every tool option carries its trap named. Callback: this handout reached you as one canonical repo plus a pointer — crawl — and giget if you ran it, most of walk. Done = the template filled: rung, FIRST MOVE, and an owner who is a person. The two fields people skip are Owner and Not-doing-yet, and they are the two that matter. "We will decide later" is the only answer that costs more than acting. ~3 min.</a:t>
+              <a:t>Three minutes; framing over content. The guide is written for a team new to governance — it opens with the four terms, Crawl is one person's afternoon, and every tool option carries its trap named. Callback: this handout reached you as one canonical repo plus a pointer — crawl — and giget if you ran it, most of walk. Done = the template filled: rung, FIRST MOVE, and an owner who is a person. The two fields people skip are Owner and Not-doing-yet, and they are the two that matter. "We will decide later" is the only answer that costs more than acting.</a:t>
+            </a:r>
+          </a:p>
+          <a:p/>
+          <a:p>
+            <a:r>
+              <a:t>~3 min.</a:t>
             </a:r>
           </a:p>
         </p:txBody>
@@ -1787,7 +2059,25 @@
           <a:lstStyle/>
           <a:p>
             <a:r>
-              <a:t>[CALIBRATED from Lab 1.b, 2026-08-12: agenda held · checkpoint gates worked · keep as built] Close on the deny/ask list — the thing every person applies tomorrow regardless of how far they got. Read the ship checklist as one list; it mirrors the handout exactly. Retro as a chat waterfall: type, hold, 3-2-1 send. COPY THE CHAT BEFORE ENDING THE CALL — Meet deletes it, and the refusal texts + retro lines feed the capture entry. INSTRUCTOR, within 24h: file the lab-capture entry (AI-Transformation-Playbook/04-labs/lab-capture-template.md) — outcomes, stuck points, timings, Format B observations. ~5 min.</a:t>
+              <a:t>[CALIBRATED from Lab 1.b, 2026-08-12: agenda held · checkpoint gates worked · keep as built]</a:t>
+            </a:r>
+          </a:p>
+          <a:p/>
+          <a:p>
+            <a:r>
+              <a:t>Close on the deny/ask list — the thing every person applies tomorrow regardless of how far they got. Read the ship checklist as one list; it mirrors the handout exactly. Retro as a chat waterfall: type, hold, 3-2-1 send.</a:t>
+            </a:r>
+          </a:p>
+          <a:p/>
+          <a:p>
+            <a:r>
+              <a:t>COPY THE CHAT BEFORE ENDING THE CALL — Meet deletes it, and the refusal texts + retro lines feed the capture entry. INSTRUCTOR, within 24h: file the lab-capture entry (AI-Transformation-Playbook/04-labs/lab-capture-template.md) — outcomes, stuck points, timings, Format B observations.</a:t>
+            </a:r>
+          </a:p>
+          <a:p/>
+          <a:p>
+            <a:r>
+              <a:t>~5 min.</a:t>
             </a:r>
           </a:p>
         </p:txBody>
@@ -1857,7 +2147,13 @@
           <a:lstStyle/>
           <a:p>
             <a:r>
-              <a:t>Fast. The only new idea is the last bullet — the premise of the block. Today REVISITS the 2.a NFR: the residue decisions recorded this session update that same document, not a new one. ~2 min.</a:t>
+              <a:t>Fast. The only new idea is the last bullet — the premise of the block. Today REVISITS the 2.a NFR: the residue decisions recorded this session update that same document, not a new one.</a:t>
+            </a:r>
+          </a:p>
+          <a:p/>
+          <a:p>
+            <a:r>
+              <a:t>~2 min.</a:t>
             </a:r>
           </a:p>
         </p:txBody>
@@ -1927,7 +2223,13 @@
           <a:lstStyle/>
           <a:p>
             <a:r>
-              <a:t>Industry consensus, not our opinion — say so. The phrase to land: "model-independent governance." Connect to their own interview complaints about the agent being a yes-man and ignoring stated patterns — this is the failure mode it addresses. ~3 min.</a:t>
+              <a:t>Industry consensus, not our opinion — say so. The phrase to land: "model-independent governance." Connect to their own interview complaints about the agent being a yes-man and ignoring stated patterns — this is the failure mode it addresses.</a:t>
+            </a:r>
+          </a:p>
+          <a:p/>
+          <a:p>
+            <a:r>
+              <a:t>~3 min.</a:t>
             </a:r>
           </a:p>
         </p:txBody>
@@ -1997,7 +2299,13 @@
           <a:lstStyle/>
           <a:p>
             <a:r>
-              <a:t>The honesty about this repo matters — it models the behaviour we want. Note the build framing precisely: layers 1–2 plus one layer-4 gate; a governance doc that overstates its own coverage is the failure mode. Layer 5 is not a gap in the others — it is what makes them credible. ~4 min.</a:t>
+              <a:t>The honesty about this repo matters — it models the behaviour we want. Note the build framing precisely: layers 1–2 plus one layer-4 gate; a governance doc that overstates its own coverage is the failure mode. Layer 5 is not a gap in the others — it is what makes them credible.</a:t>
+            </a:r>
+          </a:p>
+          <a:p/>
+          <a:p>
+            <a:r>
+              <a:t>~4 min.</a:t>
             </a:r>
           </a:p>
         </p:txBody>
@@ -2067,7 +2375,13 @@
           <a:lstStyle/>
           <a:p>
             <a:r>
-              <a:t>Everyone, together, five minutes. This is the honest answer to "no restore points" and "it did something I did not expect" — the cheapest guardrail with the largest payoff, in every repo they own tomorrow. Teach ask-vs-deny while they type: deny the unrecoverable, ask the annoying — if everything asks, people stop reading, which is prompt fatigue and it kills the layer. Remote verification: "paste the refusal line Claude gave you into chat" — and the paste-over-the-file failure shows up as "seed.json rule gone"; the handout has the before-state and names settings.local.json. ~5 min.</a:t>
+              <a:t>Everyone, together, five minutes. This is the honest answer to "no restore points" and "it did something I did not expect" — the cheapest guardrail with the largest payoff, in every repo they own tomorrow. Teach ask-vs-deny while they type: deny the unrecoverable, ask the annoying — if everything asks, people stop reading, which is prompt fatigue and it kills the layer. Remote verification: "paste the refusal line Claude gave you into chat" — and the paste-over-the-file failure shows up as "seed.json rule gone"; the handout has the before-state and names settings.local.json.</a:t>
+            </a:r>
+          </a:p>
+          <a:p/>
+          <a:p>
+            <a:r>
+              <a:t>~5 min.</a:t>
             </a:r>
           </a:p>
         </p:txBody>
@@ -2137,7 +2451,13 @@
           <a:lstStyle/>
           <a:p>
             <a:r>
-              <a:t>The message structure is the teaching point: BLOCKED / Why / Instead / Done means. A guardrail that only says no makes the agent guess, and it guesses creatively. Four lines turn a refusal into a redirection. ~3 min.</a:t>
+              <a:t>The message structure is the teaching point: BLOCKED / Why / Instead / Done means. A guardrail that only says no makes the agent guess, and it guesses creatively. Four lines turn a refusal into a redirection.</a:t>
+            </a:r>
+          </a:p>
+          <a:p/>
+          <a:p>
+            <a:r>
+              <a:t>~3 min.</a:t>
             </a:r>
           </a:p>
         </p:txBody>
@@ -2207,7 +2527,13 @@
           <a:lstStyle/>
           <a:p>
             <a:r>
-              <a:t>New material for most of the room. The nudge shape (PostToolUse + exit 2) is genuinely useful and almost nobody knows it: the edit lands, and Claude is told to fix it. Name the taxonomy refinement explicitly — mechanical, PARTLY, fuzzy — because their 2.a lists were binary and the middle bucket is where their hook will live. ~3 min.</a:t>
+              <a:t>New material for most of the room. The nudge shape (PostToolUse + exit 2) is genuinely useful and almost nobody knows it: the edit lands, and Claude is told to fix it. Name the taxonomy refinement explicitly — mechanical, PARTLY, fuzzy — because their 2.a lists were binary and the middle bucket is where their hook will live.</a:t>
+            </a:r>
+          </a:p>
+          <a:p/>
+          <a:p>
+            <a:r>
+              <a:t>~3 min.</a:t>
             </a:r>
           </a:p>
         </p:txBody>
@@ -2277,7 +2603,13 @@
           <a:lstStyle/>
           <a:p>
             <a:r>
-              <a:t>Insist on this in the exercise. The usual death of a guardrail is not failing to block — it is blocking something legitimate on day three, getting disabled, and taking the layer with it. The evidence standard matters: a claim without the refusal text is not verified. ~2 min.</a:t>
+              <a:t>Insist on this in the exercise. The usual death of a guardrail is not failing to block — it is blocking something legitimate on day three, getting disabled, and taking the layer with it. The evidence standard matters: a claim without the refusal text is not verified.</a:t>
+            </a:r>
+          </a:p>
+          <a:p/>
+          <a:p>
+            <a:r>
+              <a:t>~2 min.</a:t>
             </a:r>
           </a:p>
         </p:txBody>

--- a/docs/instructor/lab-2b-guardrails.pptx
+++ b/docs/instructor/lab-2b-guardrails.pptx
@@ -31,7 +31,6 @@
     <p:sldId id="279" r:id="rId31"/>
     <p:sldId id="280" r:id="rId32"/>
     <p:sldId id="281" r:id="rId33"/>
-    <p:sldId id="282" r:id="rId34"/>
   </p:sldIdLst>
   <p:sldSz cx="9144000" cy="5143500" type="screen4x3"/>
   <p:notesSz cx="6858000" cy="9144000"/>
@@ -528,7 +527,19 @@
           <a:lstStyle/>
           <a:p>
             <a:r>
-              <a:t>Welcome to 2.b. The challenge in one breath: pick one of this repo's written rules and give it teeth — a hook that stops (or nudges) the agent while it writes, and a CI gate that stops anyone at merge time, both verified in both directions. The win today is simple and real: a rule with teeth, proven to fire and proven to stay quiet.</a:t>
+              <a:t>WHAT THIS SLIDE TEACHES: the session's promise — by the end, each person has given a written rule teeth and proven it in both directions.</a:t>
+            </a:r>
+          </a:p>
+          <a:p/>
+          <a:p>
+            <a:r>
+              <a:t>Welcome to 2.b. The challenge in one breath: pick one of this repo's written rules and give it teeth — a hook that stops (or nudges) the agent while it writes, and a CI gate that stops anyone at merge time, both verified in both directions.</a:t>
+            </a:r>
+          </a:p>
+          <a:p/>
+          <a:p>
+            <a:r>
+              <a:t>The win today is simple and real: a rule with teeth, proven to fire and proven to stay quiet.</a:t>
             </a:r>
           </a:p>
           <a:p/>
@@ -604,13 +615,37 @@
           <a:lstStyle/>
           <a:p>
             <a:r>
+              <a:t>WHAT THIS SLIDE TEACHES: the complete Claude-hook contract — events, matcher, JSON on stdin, exit codes, session-start loading — and the exact registration JSON the exercise reuses.</a:t>
+            </a:r>
+          </a:p>
+          <a:p/>
+          <a:p>
+            <a:r>
               <a:t>[CALIBRATED from review, 2026-08-19: refresher added — the prereq Hooks lesson is weeks old for most of the room, and the severity slide assumes its vocabulary]</a:t>
             </a:r>
           </a:p>
           <a:p/>
           <a:p>
             <a:r>
-              <a:t>Sixty to ninety seconds down the left column, then point at the JSON: it is the SAME shape the handout gives for registering their exercise hook, shown here wired to protect-seed.js — the hook that blocked them in Lab 1. This is a REFRESHER, not first teaching — anyone who missed the Hooks lesson gets their teaching in the build-along. Other events exist (SessionStart, UserPromptSubmit, Stop) — name them only if asked; today is the two tool-call events. The exit-code bullet hands off to the next slide: WHICH event you register on is the severity decision. The new-session bullet previews the #1 stuck point of the exercise.</a:t>
+              <a:t>Sixty to ninety seconds down the left column, then point at the JSON: it is the SAME shape the handout gives for registering their exercise hook, shown here wired to protect-seed.js — the hook that blocked them in Lab 1.</a:t>
+            </a:r>
+          </a:p>
+          <a:p/>
+          <a:p>
+            <a:r>
+              <a:t>This is a REFRESHER, not first teaching — anyone who missed the Hooks lesson gets their teaching in the build-along.</a:t>
+            </a:r>
+          </a:p>
+          <a:p/>
+          <a:p>
+            <a:r>
+              <a:t>Other events exist (SessionStart, UserPromptSubmit, Stop) — name them only if asked; today is the two tool-call events.</a:t>
+            </a:r>
+          </a:p>
+          <a:p/>
+          <a:p>
+            <a:r>
+              <a:t>The exit-code bullet hands off to the next slide: WHICH event you register on is the severity decision. The new-session bullet previews the #1 stuck point of the exercise.</a:t>
             </a:r>
           </a:p>
           <a:p/>
@@ -686,13 +721,37 @@
           <a:lstStyle/>
           <a:p>
             <a:r>
-              <a:t>The room now knows both hook kinds, so this reads as the Claude-side refinement of the anatomy: git hooks have one lever (block or not); Claude hooks add WHICH EVENT, and that choice is the severity. The nudge shape (PostToolUse + exit 2) is genuinely useful and almost nobody knows it: the edit lands, and Claude is told to fix it.</a:t>
+              <a:t>WHAT THIS SLIDE TEACHES: choosing WHICH event to register on IS the severity decision — PreToolUse blocks, PostToolUse nudges — and heuristic rules should nudge, because a false-positive block gets the hook disabled.</a:t>
             </a:r>
           </a:p>
           <a:p/>
           <a:p>
             <a:r>
-              <a:t>WORKED POSTTOOLUSE EXAMPLE, say it out loud (it is on the exercise menu, so this foreshadows): a PostToolUse hook on Edit|Write watches for an edited server/src *.ts with no sibling *.test.ts. The agent writes todos.service.ts — the edit LANDS, PostToolUse cannot stop it — the hook exits 2, and its stderr goes straight to the agent: "NOTE: todos.service.ts has no sibling test — add or extend todos.service.test.ts before opening the PR." The agent reads that mid-task and writes the test without being asked. Why nudge, not block? The rule is PARTLY — a comment fix or a rename would false-positive a block; the nudge informs without ever interrupting legitimate work. Name the taxonomy explicitly — mechanical, PARTLY, fuzzy — because most of the exercise menu lives in the middle bucket, and that is where their hook will live too.</a:t>
+              <a:t>The room now knows both hook kinds, so this reads as the Claude-side refinement of the anatomy: git hooks have one lever (block or not); Claude hooks add WHICH EVENT, and that choice is the severity.</a:t>
+            </a:r>
+          </a:p>
+          <a:p/>
+          <a:p>
+            <a:r>
+              <a:t>The nudge shape (PostToolUse + exit 2) is genuinely useful and almost nobody knows it: the edit lands, and Claude is told to fix it.</a:t>
+            </a:r>
+          </a:p>
+          <a:p/>
+          <a:p>
+            <a:r>
+              <a:t>WORKED POSTTOOLUSE EXAMPLE — say it out loud (it is on the exercise menu, so this foreshadows): a PostToolUse hook on Edit|Write watches for an edited server/src *.ts with no sibling *.test.ts. The agent writes todos.service.ts — the edit LANDS, PostToolUse cannot stop it — the hook exits 2, and its stderr goes straight to the agent: "NOTE: todos.service.ts has no sibling test — add or extend todos.service.test.ts before opening the PR." The agent reads that mid-task and writes the test without being asked.</a:t>
+            </a:r>
+          </a:p>
+          <a:p/>
+          <a:p>
+            <a:r>
+              <a:t>Why nudge, not block? The rule is PARTLY — a comment fix or a rename would false-positive a block; the nudge informs without ever interrupting legitimate work.</a:t>
+            </a:r>
+          </a:p>
+          <a:p/>
+          <a:p>
+            <a:r>
+              <a:t>Name the taxonomy explicitly — mechanical, PARTLY, fuzzy — because most of the exercise menu lives in the middle bucket, and that is where their hook will live too.</a:t>
             </a:r>
           </a:p>
           <a:p/>
@@ -768,13 +827,43 @@
           <a:lstStyle/>
           <a:p>
             <a:r>
+              <a:t>WHAT THIS SLIDE TEACHES: nothing new — it converts the session into their backlog. Each table names one rule from their own repo and places it on the timeline they just learned.</a:t>
+            </a:r>
+          </a:p>
+          <a:p/>
+          <a:p>
+            <a:r>
               <a:t>[CALIBRATED from team-lead feedback, 2026-08-18: shorter demos · git hook as the vehicle for Claude hooks · table talk]</a:t>
             </a:r>
           </a:p>
           <a:p/>
           <a:p>
             <a:r>
-              <a:t>THE STRUCTURED BEAT the tables asked for — you go on mute and watch chat; a reporter per table types the line; solo attendees answer individually. If the team sends a topics list before the session, seed it here by reading two items aloud as candidate rules. Silence from a table → Slack someone at it, never a call-out on the open call. The chat lines are tomorrow's guardrail backlog — say so, and copy the chat before call end (it feeds the capture entry too). This beat doubles as the mental break before the 19-minute build-along. Expected shapes: formatting/lint rules land at commit; test-discipline and boundary rules split between authoring-nudge and merge-gate — both defensible, ask "who are you holding it against?"</a:t>
+              <a:t>THE STRUCTURED BEAT the tables asked for: you go on mute and watch chat; a reporter per table types the line; solo attendees answer individually.</a:t>
+            </a:r>
+          </a:p>
+          <a:p/>
+          <a:p>
+            <a:r>
+              <a:t>If the team sends a topics list before the session, seed it here by reading two items aloud as candidate rules.</a:t>
+            </a:r>
+          </a:p>
+          <a:p/>
+          <a:p>
+            <a:r>
+              <a:t>Silence from a table → Slack someone at it, never a call-out on the open call.</a:t>
+            </a:r>
+          </a:p>
+          <a:p/>
+          <a:p>
+            <a:r>
+              <a:t>The chat lines are tomorrow's guardrail backlog — say so, and copy the chat before call end (it feeds the capture entry too). This beat doubles as the mental break before the 19-minute build-along.</a:t>
+            </a:r>
+          </a:p>
+          <a:p/>
+          <a:p>
+            <a:r>
+              <a:t>Expected shapes: formatting/lint rules land at commit; test-discipline and boundary rules split between authoring-nudge and merge-gate — both defensible; ask "who are you holding it against?"</a:t>
             </a:r>
           </a:p>
           <a:p/>
@@ -850,7 +939,19 @@
           <a:lstStyle/>
           <a:p>
             <a:r>
-              <a:t>Transition. Two instructions: build along in your own copy as I go, and watch where the time goes — I will spend more time verifying than writing. Frame with the bridge: same anatomy as the git hook you just watched; the event is now the agent's tool call, the message file is now JSON on stdin, and non-zero is now exit 2.</a:t>
+              <a:t>WHAT THIS SLIDE TEACHES: transition only — the build-along is the git-hook concept moved to authoring time, and verification will take longer than writing.</a:t>
+            </a:r>
+          </a:p>
+          <a:p/>
+          <a:p>
+            <a:r>
+              <a:t>Two instructions for the room: build along in your own copy as I go, and watch where the time goes — I will spend more time verifying than writing.</a:t>
+            </a:r>
+          </a:p>
+          <a:p/>
+          <a:p>
+            <a:r>
+              <a:t>Frame with the bridge: same anatomy as the git hook you just watched; the event is now the agent's tool call, the message file is now JSON on stdin, and non-zero is now exit 2.</a:t>
             </a:r>
           </a:p>
         </p:txBody>
@@ -920,12 +1021,30 @@
           <a:lstStyle/>
           <a:p>
             <a:r>
-              <a:t>Run the demo AGAINST this slide — call the step number as you go so anyone who drops can rejoin; on Meet nobody can glance at a neighbour's screen (though tables can — let them). STEP 6 IS THE TWO-MESSAGE BEAT and the demo's strongest minute — permission rules evaluate BEFORE PreToolUse hooks (verified live, 2026-08-19), so the deny answers first with the generic wall; pull the two db.json deny entries, NEW session, ask again — the hook answers with the four-part signpost; restore the entries. Say it: "the wall stops; the signpost redirects — and your clause this afternoon can ONLY be a hook, because deny rules match paths and hooks run logic."</a:t>
+              <a:t>WHAT THIS SLIDE TEACHES: the demo's seven-step route — the rejoin map you narrate against while executing the steps across the next three slides — and that steps 6–7 (verify both directions) are the point, not the code.</a:t>
             </a:r>
           </a:p>
           <a:p/>
           <a:p>
             <a:r>
+              <a:t>HOW TO RUN IT: show this map for the ~3 minutes here, then ADVANCE — the rule (next slide), the code (the check slide), and verification (the verify slide) carry the demo while you execute the steps live. As you perform each step, SAY ITS NUMBER — on Meet nobody can glance at a neighbour's screen (though tables can — let them), so the number is the rejoin point; flip back to this map whenever the room drifts, and the walkthrough mirrors these rows 1:1.</a:t>
+            </a:r>
+          </a:p>
+          <a:p/>
+          <a:p>
+            <a:r>
+              <a:t>STEP 6 IS THE TWO-MESSAGE BEAT and the demo's strongest minute. Permission rules evaluate BEFORE PreToolUse hooks (verified live, 2026-08-19), so the deny answers first with the generic wall; pull the two db.json deny entries, NEW session, ask again — the hook answers with the four-part signpost; restore the entries.</a:t>
+            </a:r>
+          </a:p>
+          <a:p/>
+          <a:p>
+            <a:r>
+              <a:t>Say it: "the wall stops; the signpost redirects — and your rule this afternoon can ONLY be a hook, because deny rules match paths and hooks run logic."</a:t>
+            </a:r>
+          </a:p>
+          <a:p/>
+          <a:p>
+            <a:r>
               <a:t>COMMON QUESTIONS</a:t>
             </a:r>
           </a:p>
@@ -937,7 +1056,7 @@
           </a:p>
           <a:p>
             <a:r>
-              <a:t>A: three reasons — the deny is a WALL (generic refusal; the agent knows it was stopped, not why, so it guesses creatively) while the hook is a SIGNPOST (BLOCKED / Why / Instead / Done redirects it to the sanctioned path); deny rules can only match paths while hooks run LOGIC — the exercise clauses (sibling test, import boundary) cannot be deny rules at all; and the layers fail independently — the warm-up's paste-over failure kills a deny rule silently while the hook stands.</a:t>
+              <a:t>A: three reasons. The deny is a WALL (generic refusal; the agent knows it was stopped, not why, so it guesses creatively) while the hook is a SIGNPOST (BLOCKED / Why / Instead / Done redirects it to the sanctioned path). Deny rules can only match paths while hooks run LOGIC — the menu rules (sibling test, import boundary) cannot be deny rules at all. And the layers fail independently — the warm-up's paste-over failure kills a deny rule silently while the hook stands.</a:t>
             </a:r>
           </a:p>
           <a:p/>
@@ -981,7 +1100,7 @@
           </a:p>
           <a:p>
             <a:r>
-              <a:t>A: nine times in ten, no new session — hooks load at session start, the way git hooks arrive at npm install; the rest: matcher or path normalisation (Windows backslashes).</a:t>
+              <a:t>A: nine times in ten, no new session — hooks load at session start, the way git hooks arrive at npm install. The rest: matcher, or path normalisation (Windows backslashes).</a:t>
             </a:r>
           </a:p>
           <a:p/>
@@ -1057,7 +1176,19 @@
           <a:lstStyle/>
           <a:p>
             <a:r>
-              <a:t>Deliberately parallel to protect-seed, which they met on the bridge slide and can read in the repo — the shape is the point, not this rule. Make the two-rules distinction explicitly; the review agent flagged it as the most likely novice confusion of the block.</a:t>
+              <a:t>WHAT THIS SLIDE TEACHES: the demo's target rule and the three-layer shape it gets (CLAUDE.md line → deny entry → hook) — and that it is NOT the store-boundary rule from the menu.</a:t>
+            </a:r>
+          </a:p>
+          <a:p/>
+          <a:p>
+            <a:r>
+              <a:t>Deliberately parallel to protect-seed, which they met on the bridge slide and can read in the repo — the shape is the point, not this rule.</a:t>
+            </a:r>
+          </a:p>
+          <a:p/>
+          <a:p>
+            <a:r>
+              <a:t>Make the two-rules distinction explicitly; a review pass flagged it as the most likely novice confusion of the block.</a:t>
             </a:r>
           </a:p>
           <a:p/>
@@ -1133,7 +1264,37 @@
           <a:lstStyle/>
           <a:p>
             <a:r>
-              <a:t>Type it live if the room is comfortable; paste if behind. Call back the commit-msg hook as you type: same read-input → test → refuse shape — the input is JSON on stdin instead of a message file, and the block is exit 2 because exit codes are the contract everywhere. Say the Windows path normalisation out loud — it is the bug every cohort hits and why the hook is Node, not shell. Then register it together and restart sessions — the forgotten-restart is the "my hook never fires" stuck point.</a:t>
+              <a:t>WHAT THIS SLIDE TEACHES: the whole check is a few lines of plain Node — test the path, print the four-part message, exit 2. Nothing exotic.</a:t>
+            </a:r>
+          </a:p>
+          <a:p/>
+          <a:p>
+            <a:r>
+              <a:t>SAY THE ELISION FIRST: the slide shows only the CHECK — the stdin-parsing plumbing above it (reading the tool call's JSON into filePath) comes from the walkthrough / the skeleton, and you will type or paste the full file. The first comment line on the slide marks the seam.</a:t>
+            </a:r>
+          </a:p>
+          <a:p/>
+          <a:p>
+            <a:r>
+              <a:t>Type it live if the room is comfortable; paste if behind.</a:t>
+            </a:r>
+          </a:p>
+          <a:p/>
+          <a:p>
+            <a:r>
+              <a:t>Call back the commit-msg hook as you type: same read-input → test → refuse shape — the input is JSON on stdin instead of a message file, and the block is exit 2, because exit codes are the contract everywhere.</a:t>
+            </a:r>
+          </a:p>
+          <a:p/>
+          <a:p>
+            <a:r>
+              <a:t>Say the Windows path normalisation out loud — it is the bug every cohort hits and why the hook is Node, not shell.</a:t>
+            </a:r>
+          </a:p>
+          <a:p/>
+          <a:p>
+            <a:r>
+              <a:t>Then register it together and restart sessions — the forgotten restart is the "my hook never fires" stuck point.</a:t>
             </a:r>
           </a:p>
           <a:p/>
@@ -1209,19 +1370,43 @@
           <a:lstStyle/>
           <a:p>
             <a:r>
+              <a:t>WHAT THIS SLIDE TEACHES: a guardrail fails two ways (never blocks / blocks real work), so verification is two-sided — and the bypass is the rule's legal route, written down, never "disable the hook."</a:t>
+            </a:r>
+          </a:p>
+          <a:p/>
+          <a:p>
+            <a:r>
               <a:t>[CALIBRATED from review, 2026-08-19: expanded — the old cards were fragments that assumed the story]</a:t>
             </a:r>
           </a:p>
           <a:p/>
           <a:p>
             <a:r>
-              <a:t>SAY THE FRAME FIRST, pointing at the lede: two failure modes, so two tests — an unverified guardrail is a belief. STEP 6 IS THE TWO-MESSAGE BEAT (slide 14 row 6): first ask — the DENY answers, the generic wall; pull the two db.json deny entries, NEW session, ask again — the HOOK answers, BLOCKED/Why/Instead/Done, the signpost; restore the entries. The hook's text is the evidence they save into the PR — that is what "demonstrated in a live agent run" means. STEP 7 IS THE HALF EVERYONE SKIPS — say why: novices prove the guardrail blocks and stop, but the killer failure is the FALSE POSITIVE discovered on Friday — it blocks legitimate work, someone disables the hook, and the layer dies. Silence + a green suite is a real test result, not an absence of one; and re-verify BOTH directions after every narrowing, because fixing a false positive often reopens the hole.</a:t>
+              <a:t>SAY THE FRAME FIRST, pointing at the lede: two failure modes, so two tests — an unverified guardrail is a belief.</a:t>
             </a:r>
           </a:p>
           <a:p/>
           <a:p>
             <a:r>
-              <a:t>THE BYPASS CARD is not a third verification — it is writing down the LEGAL ROUTE for the thing the rule blocks: data changes happen by editing seed.json in a PR flagged to the instructor, then npm run reset-db. Callback to the git demo: every layer has an escape hatch (--no-verify there); an undocumented one is the real governance hole, so one line in CLAUDE.md next to the rule, with the approver named. If your own hook false-positives live, that is a gift — work it through on the shared screen.</a:t>
+              <a:t>STEP 6 IS THE TWO-MESSAGE BEAT (slide 14 row 6): first ask — the DENY answers, the generic wall; pull the two db.json deny entries, NEW session, ask again — the HOOK answers, BLOCKED/Why/Instead/Done, the signpost; restore the entries. The hook's text is the evidence they save into the PR — that is what "demonstrated in a live agent run" means.</a:t>
+            </a:r>
+          </a:p>
+          <a:p/>
+          <a:p>
+            <a:r>
+              <a:t>STEP 7 IS THE HALF EVERYONE SKIPS — say why: novices prove the guardrail blocks and stop, but the killer failure is the FALSE POSITIVE discovered on Friday — it blocks legitimate work, someone disables the hook, and the layer dies. Silence + a green suite is a real test result, not an absence of one. Re-verify BOTH directions after every narrowing, because fixing a false positive often reopens the hole.</a:t>
+            </a:r>
+          </a:p>
+          <a:p/>
+          <a:p>
+            <a:r>
+              <a:t>THE BYPASS CARD is not a third verification — it is writing down the LEGAL ROUTE for the thing the rule blocks: data changes happen by editing seed.json in a PR flagged to the instructor, then npm run reset-db. Callback to the git demo: every layer has an escape hatch (--no-verify there); an undocumented one is the real governance hole — so one line in CLAUDE.md next to the rule, with the approver named.</a:t>
+            </a:r>
+          </a:p>
+          <a:p/>
+          <a:p>
+            <a:r>
+              <a:t>If your own hook false-positives live, that is a gift — work it through on the shared screen.</a:t>
             </a:r>
           </a:p>
           <a:p/>
@@ -1297,13 +1482,31 @@
           <a:lstStyle/>
           <a:p>
             <a:r>
+              <a:t>WHAT THIS SLIDE TEACHES: verification is a gate — everyone proves BOTH directions in their own copy before the room advances, and the evidence is pasted, not claimed.</a:t>
+            </a:r>
+          </a:p>
+          <a:p/>
+          <a:p>
+            <a:r>
               <a:t>[CALIBRATED from Lab 1.b, 2026-08-12: agenda held · checkpoint gates worked · keep as built]</a:t>
             </a:r>
           </a:p>
           <a:p/>
           <a:p>
             <a:r>
-              <a:t>Chat is the room-walk: refusal texts land where you can read them, and silence from a name is your signal to check in (Slack, not the whole call — though a table often fixes its own straggler before you get there; give it a beat). Common failure: a path check that also catches db.json.example or a test fixture. Fast finishers: read protect-seed.js and diff the two hooks' messages.</a:t>
+              <a:t>Chat is the room-walk: refusal texts land where you can read them, and silence from a name is your signal to check in (Slack, not the whole call — though a table often fixes its own straggler before you get there; give it a beat).</a:t>
+            </a:r>
+          </a:p>
+          <a:p/>
+          <a:p>
+            <a:r>
+              <a:t>Common failure: a path check that also catches db.json.example or a test fixture.</a:t>
+            </a:r>
+          </a:p>
+          <a:p/>
+          <a:p>
+            <a:r>
+              <a:t>Fast finishers: read protect-seed.js and diff the two hooks' messages.</a:t>
             </a:r>
           </a:p>
           <a:p/>
@@ -1379,13 +1582,37 @@
           <a:lstStyle/>
           <a:p>
             <a:r>
+              <a:t>WHAT THIS SLIDE TEACHES: the exercise is choosing to enforce a rule that already exists — four real, unenforced rules from the repo's own docs, and any pick is right.</a:t>
+            </a:r>
+          </a:p>
+          <a:p/>
+          <a:p>
+            <a:r>
               <a:t>[CALIBRATED from review, 2026-08-19: exercise reworked — pick any written rule; no NFR assumed, no default named]</a:t>
             </a:r>
           </a:p>
           <a:p/>
           <a:p>
             <a:r>
-              <a:t>PURE CHOICE on purpose — read all four rows aloud, then give the tables a quiet minute to pick; choosing at the table together is fine, clustering on one rule is fine. Every row traces to a doc the recap named — say the callback: "these are the laws from slide 3; you are hiring the police." Rescue detail per rule is in the teachers guide, never on screen. If someone brings their own rule, one filter only: can a script detect it from a file path or file content? Then build it.</a:t>
+              <a:t>PURE CHOICE on purpose — read all four rows aloud, then give the tables a quiet minute to pick. Choosing at the table together is fine; clustering on one rule is fine.</a:t>
+            </a:r>
+          </a:p>
+          <a:p/>
+          <a:p>
+            <a:r>
+              <a:t>Every row traces to a doc the recap named — say the callback: "these are the laws from the recap slide; you are hiring the police."</a:t>
+            </a:r>
+          </a:p>
+          <a:p/>
+          <a:p>
+            <a:r>
+              <a:t>Rescue detail per rule is in the teachers guide, never on screen.</a:t>
+            </a:r>
+          </a:p>
+          <a:p/>
+          <a:p>
+            <a:r>
+              <a:t>If someone brings their own rule, one filter only: can a script detect it from a file path or file content? Then build it.</a:t>
             </a:r>
           </a:p>
           <a:p/>
@@ -1461,13 +1688,43 @@
           <a:lstStyle/>
           <a:p>
             <a:r>
+              <a:t>WHAT THIS SLIDE TEACHES: the shape of the two hours and the ground rules — table talk is standing permission, checkpoints are individual, evidence lives in chat.</a:t>
+            </a:r>
+          </a:p>
+          <a:p/>
+          <a:p>
+            <a:r>
               <a:t>[CALIBRATED from team-lead feedback, 2026-08-18: shorter demos · git hook as the vehicle for Claude hooks · table talk]</a:t>
             </a:r>
           </a:p>
           <a:p/>
           <a:p>
             <a:r>
-              <a:t>ANNOUNCE THE ADJUSTMENT as deliberate, not an apology: "we restructured this session from your feedback — shorter demos, the guardrails you already run, and time to talk at your tables." Then the standing permission: side discussion at the tables is encouraged all session — mute unless addressing the call; the only structured moments are the checkpoints, which stay individual (paste your own evidence in chat). The blocks sum to ~110 — the slack is deliberate; protect it for verification, which is the step people skip. Prereq check right now, in chat: "type HOOKS-DONE if you did the Hooks lesson" — anyone missing it follows along on the shared screen for the build sections and catches up async per the handout (Slack for 1:1 help; Meet chat has no DMs). Assessment disclosure: same rubric, and today's hook or gate is also the Framework Practitioner artifact; helping your table mates counts FOR you on the Independence dimension, not against.</a:t>
+              <a:t>ANNOUNCE THE ADJUSTMENT as deliberate, not an apology: "we restructured this session from your feedback — shorter demos, the guardrails you already run, and time to talk at your tables."</a:t>
+            </a:r>
+          </a:p>
+          <a:p/>
+          <a:p>
+            <a:r>
+              <a:t>Then the standing permission: side discussion at the tables is encouraged all session — mute unless addressing the call. The only structured moments are the checkpoints, which stay individual: everyone pastes their own evidence in chat.</a:t>
+            </a:r>
+          </a:p>
+          <a:p/>
+          <a:p>
+            <a:r>
+              <a:t>The blocks sum to ~107 — the slack is deliberate; protect it for verification, which is the step people skip.</a:t>
+            </a:r>
+          </a:p>
+          <a:p/>
+          <a:p>
+            <a:r>
+              <a:t>Prereq check right now, in chat: "type HOOKS-DONE if you did the Hooks lesson." Anyone missing it follows along on the shared screen for the build sections and catches up async per the handout (Slack for 1:1 help — Meet chat has no DMs).</a:t>
+            </a:r>
+          </a:p>
+          <a:p/>
+          <a:p>
+            <a:r>
+              <a:t>Assessment disclosure: same rubric, and today's hook or gate is also the Framework Practitioner artifact. Helping your table mates counts FOR you on the Independence dimension, not against.</a:t>
             </a:r>
           </a:p>
           <a:p/>
@@ -1543,13 +1800,37 @@
           <a:lstStyle/>
           <a:p>
             <a:r>
+              <a:t>WHAT THIS SLIDE TEACHES: the exercise itself — skeleton, register, new session, verify both directions. The plumbing is given; the rule is theirs.</a:t>
+            </a:r>
+          </a:p>
+          <a:p/>
+          <a:p>
+            <a:r>
               <a:t>[CALIBRATED from review, 2026-08-19: simplified — build the hook, verify it, done; no severity essays, no residue ceremony]</a:t>
             </a:r>
           </a:p>
           <a:p/>
           <a:p>
             <a:r>
-              <a:t>FRAME IT IN ONE BREATH: the rule is already written; you are adding the police. Table talk during the build is welcome — compare approaches, debug a neighbour — but the artifact is individual: your rule, your hook, your evidence. Remote circulation = one whole-call chat nudge at ~7 min ("what does your allow case replay?" — no answer means verification is about to be skipped) + Slack for 1:1s. Rescue detail per menu rule is in the teachers guide — Slack it one piece at a time, never on screen.</a:t>
+              <a:t>FRAME IT IN ONE BREATH: the rule is already written; you are adding the police.</a:t>
+            </a:r>
+          </a:p>
+          <a:p/>
+          <a:p>
+            <a:r>
+              <a:t>Table talk during the build is welcome — compare approaches, debug a neighbour — but the artifact is individual: your rule, your hook, your evidence.</a:t>
+            </a:r>
+          </a:p>
+          <a:p/>
+          <a:p>
+            <a:r>
+              <a:t>Remote circulation: one whole-call chat nudge at ~7 min — "what does your allow case replay?" No answer means verification is about to be skipped. Slack for 1:1s.</a:t>
+            </a:r>
+          </a:p>
+          <a:p/>
+          <a:p>
+            <a:r>
+              <a:t>Rescue detail per menu rule is in the teachers guide — Slack it one piece at a time, never on screen.</a:t>
             </a:r>
           </a:p>
           <a:p/>
@@ -1664,13 +1945,25 @@
           <a:lstStyle/>
           <a:p>
             <a:r>
+              <a:t>WHAT THIS SLIDE TEACHES: the same gate as Checkpoint 1, now on their own rule — fires on the violation, silent on legitimate work, evidence in the PR.</a:t>
+            </a:r>
+          </a:p>
+          <a:p/>
+          <a:p>
+            <a:r>
               <a:t>[CALIBRATED from Lab 1.b, 2026-08-12: agenda held · checkpoint gates worked · keep as built]</a:t>
             </a:r>
           </a:p>
           <a:p/>
           <a:p>
             <a:r>
-              <a:t>Gate hard here: the CI-gate step reuses the same detection, which this checkpoint proves works. Fast finishers: build a second rule from the menu, or offer an allow-case replay to whoever asks in Slack.</a:t>
+              <a:t>Gate hard here: the CI-gate step reuses the same detection, which this checkpoint proves works.</a:t>
+            </a:r>
+          </a:p>
+          <a:p/>
+          <a:p>
+            <a:r>
+              <a:t>Fast finishers: build a second rule from the menu, or offer an allow-case replay to whoever asks in Slack.</a:t>
             </a:r>
           </a:p>
           <a:p/>
@@ -1746,19 +2039,67 @@
           <a:lstStyle/>
           <a:p>
             <a:r>
-              <a:t>[CALIBRATED from team-lead feedback, 2026-08-18: shorter demos · git hook as the vehicle for Claude hooks · table talk]</a:t>
+              <a:t>WHAT THIS SLIDE TEACHES: the gate is a SECOND program enforcing the same rule — GitHub cannot run the Claude hook (no agent runs there), so the check is re-written as a grep that GitHub runs on every PR, binding everyone.</a:t>
             </a:r>
           </a:p>
           <a:p/>
           <a:p>
             <a:r>
-              <a:t>WHAT THIS SLIDE TEACHES — say it as one breath at the top: (1) layer 4 is not new, it already runs — lint, typecheck, tests ARE merge-time governance, so the gate you build next is one more check in an existing file, not a new platform; (2) merge time is the layer of last resort — --no-verify cannot skip it, a fresh clone cannot miss it, it holds against anyone merging, agent or human; (3) gap analysis, rehearsed live. Open the real file, one minute, then ask "what rule is written but never run?" and WAIT — someone will find format:check (a package.json script CI never calls); the skill being taught is the gap analysis, not prettier. Land the division of labour: the repo's review agent is explicitly told NOT to re-report what lint and typecheck already catch — non-AI guardrails are the floor; spend the AI layer on what only it can see. Connect to their world: their own Actions pipeline is this same layer, built in-house.</a:t>
+              <a:t>[CALIBRATED from review, 2026-08-19: rebuilt — "the same rule at merge time" let students believe their hook travels to GitHub; the second-program mechanism and the directed steps are now explicit]</a:t>
             </a:r>
           </a:p>
           <a:p/>
           <a:p>
             <a:r>
-              <a:t>~3 min.</a:t>
+              <a:t>SAY THE MECHANISM FIRST, in these words: "your hook is a program that Claude Code runs on your machine when the agent writes. GitHub has no Claude Code and no agent — nothing there can fire it. So we write the same CHECK a second time, as a grep inside a workflow file, and GitHub runs THAT on every pull request."</a:t>
+            </a:r>
+          </a:p>
+          <a:p/>
+          <a:p>
+            <a:r>
+              <a:t>The spoken contrast, if faces look puzzled — two programs, one rule: check-convention.js is executed by Claude Code on their machine, triggered by the agent's tool call, looking at the one file being written; governance.yml is executed by GitHub Actions on GitHub's servers, triggered by a PR opening or updating, looking at the PR's whole diff.</a:t>
+            </a:r>
+          </a:p>
+          <a:p/>
+          <a:p>
+            <a:r>
+              <a:t>Run the exercise against the rows — call row numbers, the house pattern. Say row 3 BEFORE they start: the gate runs on pull_request; a student who commits and waits will conclude it does not work.</a:t>
+            </a:r>
+          </a:p>
+          <a:p/>
+          <a:p>
+            <a:r>
+              <a:t>CONCRETE CORES for all four menu rules are in the teachers guide (rescue detail — Slack, never on screen). Each is a diff-scoped grep, so pre-existing code never trips it.</a:t>
+            </a:r>
+          </a:p>
+          <a:p/>
+          <a:p>
+            <a:r>
+              <a:t>MATURITY POINTER, only if asked how the two stay in sync: at scale you extract ONE rule module that both enforcers call — "one rule module, two enforcement points" (the takeaway card works it through). Today we write it twice because each check is three lines.</a:t>
+            </a:r>
+          </a:p>
+          <a:p/>
+          <a:p>
+            <a:r>
+              <a:t>If someone notices their gate fires on a docs-only PR: nice catch — a path filter is the one-line fix. Do not make it a required decision; keep the momentum on build-and-verify.</a:t>
+            </a:r>
+          </a:p>
+          <a:p/>
+          <a:p>
+            <a:r>
+              <a:t>DIVISION OF LABOUR aside, if it comes up: lint, typecheck, and tests already run on every PR here — deterministic guardrails have held this repo all along, and the repo's review agent is explicitly told NOT to re-report what they catch. Non-AI guardrails are the floor; the AI layer spends itself on what only it can see. Their own Actions pipeline is this same layer, built in-house.</a:t>
+            </a:r>
+          </a:p>
+          <a:p/>
+          <a:p>
+            <a:r>
+              <a:t>The written-but-never-run gap hunt (format:check) lives in the demo-4 walkthrough for self-guided replay — it is no longer a live beat.</a:t>
+            </a:r>
+          </a:p>
+          <a:p/>
+          <a:p>
+            <a:r>
+              <a:t>~10 min.</a:t>
             </a:r>
           </a:p>
         </p:txBody>
@@ -1828,25 +2169,37 @@
           <a:lstStyle/>
           <a:p>
             <a:r>
-              <a:t>[CALIBRATED from Lab 1.b, 2026-08-12: agenda held · checkpoint gates worked · keep as built]</a:t>
+              <a:t>WHAT THIS SLIDE TEACHES: merge-time evidence — the red-then-green run URL is this layer's version of the hook's pasted text.</a:t>
             </a:r>
           </a:p>
           <a:p/>
           <a:p>
             <a:r>
-              <a:t>THE GOTCHA that will eat this step remotely: the gate runs on pull_request — a student who commits to their branch and waits will conclude it does not work. Say it before they start: push, open a draft PR, watch the check.</a:t>
+              <a:t>[CALIBRATED from team-lead feedback, 2026-08-18: shorter demos · git hook as the vehicle for Claude hooks · table talk]</a:t>
             </a:r>
           </a:p>
           <a:p/>
           <a:p>
             <a:r>
-              <a:t>CONCRETE CORES for all four menu rules are in the teachers guide (rescue detail — Slack, never on screen); each is a diff-scoped grep, so pre-existing code never trips it. If someone notices their gate fires on a docs-only PR, nice catch — a path filter is the one-line fix; do not make it a required decision, keep the momentum on build-and-verify.</a:t>
+              <a:t>The usual stragglers: the draft-PR gotcha (a pushed branch alone runs nothing) and the shallow-clone diff failure (fetch-depth: 0).</a:t>
             </a:r>
           </a:p>
           <a:p/>
           <a:p>
             <a:r>
-              <a:t>~10 min.</a:t>
+              <a:t>CI runs take a minute or two — use the wait to skim the chat links as they land.</a:t>
+            </a:r>
+          </a:p>
+          <a:p/>
+          <a:p>
+            <a:r>
+              <a:t>Fast finishers: a second menu rule, or the telemetry stretch from the handout's Stretch list (count how often the gate fires vs is bypassed).</a:t>
+            </a:r>
+          </a:p>
+          <a:p/>
+          <a:p>
+            <a:r>
+              <a:t>~2 min.</a:t>
             </a:r>
           </a:p>
         </p:txBody>
@@ -1916,19 +2269,37 @@
           <a:lstStyle/>
           <a:p>
             <a:r>
-              <a:t>[CALIBRATED from team-lead feedback, 2026-08-18: shorter demos · git hook as the vehicle for Claude hooks · table talk]</a:t>
+              <a:t>WHAT THIS SLIDE TEACHES: cross-pollination — the room compares picks, false positives, and severity choices, and each person leaves naming a rule for their own repo.</a:t>
             </a:r>
           </a:p>
           <a:p/>
           <a:p>
             <a:r>
-              <a:t>The usual straggler is the draft-PR gotcha (a pushed branch alone runs nothing) and the shallow-clone diff failure (fetch-depth: 0). CI runs take a minute or two — use the wait to skim the chat links as they land. Fast finishers: a second menu rule, or the telemetry stretch.</a:t>
+              <a:t>[CALIBRATED from review, 2026-08-19: questions reworked for the pick-a-rule exercise]</a:t>
             </a:r>
           </a:p>
           <a:p/>
           <a:p>
             <a:r>
-              <a:t>~2 min.</a:t>
+              <a:t>Push hardest on the false-positive question — it reveals whether anyone actually ran the allow case.</a:t>
+            </a:r>
+          </a:p>
+          <a:p/>
+          <a:p>
+            <a:r>
+              <a:t>The last question bridges to the table-talk backlog from earlier — pull those chat lines back up if the room stalls.</a:t>
+            </a:r>
+          </a:p>
+          <a:p/>
+          <a:p>
+            <a:r>
+              <a:t>If a table had a good argument during the build, invite THAT to the mic — a disagreement about severity is better review material than a working demo.</a:t>
+            </a:r>
+          </a:p>
+          <a:p/>
+          <a:p>
+            <a:r>
+              <a:t>~10 min.</a:t>
             </a:r>
           </a:p>
         </p:txBody>
@@ -1998,19 +2369,37 @@
           <a:lstStyle/>
           <a:p>
             <a:r>
-              <a:t>[CALIBRATED from review, 2026-08-19: questions reworked for the pick-a-rule exercise]</a:t>
+              <a:t>WHAT THIS SLIDE TEACHES: one guardrail in one repo does not govern a team — how a standard reaches EVERY repo is itself an artifact, and the team (not the instructor) must choose its rung and its owner.</a:t>
             </a:r>
           </a:p>
           <a:p/>
           <a:p>
             <a:r>
-              <a:t>Push hardest on the false-positive question — it reveals whether anyone actually ran the allow case. The last question bridges to the table-talk backlog from slide 12 — pull those chat lines back up if the room stalls. If a table had a good argument during the build, invite THAT to the mic — a disagreement about severity is better review material than a working demo.</a:t>
+              <a:t>Three minutes; framing over content. The guide is written for a team new to governance — it opens with the four terms, Crawl is about thirty minutes of one person's time (matching the slide), and every tool option carries its trap named.</a:t>
             </a:r>
           </a:p>
           <a:p/>
           <a:p>
             <a:r>
-              <a:t>~10 min.</a:t>
+              <a:t>Callback: this handout reached you as one canonical repo plus a pointer — crawl — and giget if you ran it, most of walk.</a:t>
+            </a:r>
+          </a:p>
+          <a:p/>
+          <a:p>
+            <a:r>
+              <a:t>Done = the template filled: rung, FIRST MOVE, and an owner who is a person. The two fields people skip are Owner and Not-doing-yet, and they are the two that matter. "We will decide later" is the only answer that costs more than acting.</a:t>
+            </a:r>
+          </a:p>
+          <a:p/>
+          <a:p>
+            <a:r>
+              <a:t>IF AI MEMORY SERVICES COME UP (Mem0, Zep, OpenMemory — or Claude Code's own auto-memory): they are an emerging DISTRIBUTION channel, not an enforcement layer — a shared memory can make team conventions ambient across sessions and repos, which is attractive at the run rung, but recalled memory is layer 1: it informs, it never enforces, and it recalls probabilistically. Two honest caveats: provenance and currency are harder to audit than a pinned file (which copy is authoritative? when did it change?), so if the team adopts one, the standard's HOME stays the governance repo and memory is a projection of it; and the enforcing layers — hooks, gates — still need the deterministic files either way. Good fit: preferences and recurring context; wrong fit: the law.</a:t>
+            </a:r>
+          </a:p>
+          <a:p/>
+          <a:p>
+            <a:r>
+              <a:t>~3 min.</a:t>
             </a:r>
           </a:p>
         </p:txBody>
@@ -2080,101 +2469,43 @@
           <a:lstStyle/>
           <a:p>
             <a:r>
-              <a:t>Three minutes; framing over content. The guide is written for a team new to governance — it opens with the four terms, Crawl is one person's afternoon, and every tool option carries its trap named. Callback: this handout reached you as one canonical repo plus a pointer — crawl — and giget if you ran it, most of walk. Done = the template filled: rung, FIRST MOVE, and an owner who is a person. The two fields people skip are Owner and Not-doing-yet, and they are the two that matter. "We will decide later" is the only answer that costs more than acting.</a:t>
+              <a:t>WHAT THIS SLIDE TEACHES: what must be in each PR before leaving (the checklist and the reflection note), plus the retro — and the instructor's own capture duties.</a:t>
             </a:r>
           </a:p>
           <a:p/>
           <a:p>
             <a:r>
-              <a:t>IF AI MEMORY SERVICES COME UP (Mem0, Zep, OpenMemory — or Claude Code's own auto-memory): they are an emerging DISTRIBUTION channel, not an enforcement layer — a shared memory can make team conventions ambient across sessions and repos, which is attractive at the run rung, but recalled memory is layer 1: it informs, it never enforces, and it recalls probabilistically. Two honest caveats to give: provenance and currency are harder to audit than a pinned file (which copy is authoritative? when did it change?), so if the team adopts one, the standard's HOME stays the governance repo and memory is a projection of it; and the enforcing layers — hooks, gates — still need the deterministic files either way. Good fit: preferences and recurring context; wrong fit: the law.</a:t>
+              <a:t>[CALIBRATED from Lab 1.b, 2026-08-12: agenda held · checkpoint gates worked · keep as built]</a:t>
             </a:r>
           </a:p>
           <a:p/>
           <a:p>
             <a:r>
-              <a:t>~3 min.</a:t>
-            </a:r>
-          </a:p>
-        </p:txBody>
-      </p:sp>
-      <p:sp>
-        <p:nvSpPr>
-          <p:cNvPr id="4" name="Slide Number Placeholder 3"/>
-          <p:cNvSpPr>
-            <a:spLocks noGrp="1"/>
-          </p:cNvSpPr>
-          <p:nvPr>
-            <p:ph type="sldNum" idx="5" sz="quarter"/>
-          </p:nvPr>
-        </p:nvSpPr>
-        <p:spPr/>
-      </p:sp>
-    </p:spTree>
-  </p:cSld>
-  <p:clrMapOvr>
-    <a:masterClrMapping/>
-  </p:clrMapOvr>
-</p:notes>
-</file>
-
-<file path=ppt/notesSlides/notesSlide27.xml><?xml version="1.0" encoding="utf-8"?>
-<p:notes xmlns:a="http://schemas.openxmlformats.org/drawingml/2006/main" xmlns:p="http://schemas.openxmlformats.org/presentationml/2006/main" xmlns:r="http://schemas.openxmlformats.org/officeDocument/2006/relationships">
-  <p:cSld>
-    <p:spTree>
-      <p:nvGrpSpPr>
-        <p:cNvPr id="1" name=""/>
-        <p:cNvGrpSpPr/>
-        <p:nvPr/>
-      </p:nvGrpSpPr>
-      <p:grpSpPr>
-        <a:xfrm>
-          <a:off x="0" y="0"/>
-          <a:ext cx="0" cy="0"/>
-          <a:chOff x="0" y="0"/>
-          <a:chExt cx="0" cy="0"/>
-        </a:xfrm>
-      </p:grpSpPr>
-      <p:sp>
-        <p:nvSpPr>
-          <p:cNvPr id="2" name="Slide Image Placeholder 1"/>
-          <p:cNvSpPr>
-            <a:spLocks noGrp="1"/>
-          </p:cNvSpPr>
-          <p:nvPr>
-            <p:ph type="sldImg" idx="2"/>
-          </p:nvPr>
-        </p:nvSpPr>
-        <p:spPr/>
-      </p:sp>
-      <p:sp>
-        <p:nvSpPr>
-          <p:cNvPr id="3" name="Notes Placeholder 2"/>
-          <p:cNvSpPr>
-            <a:spLocks noGrp="1"/>
-          </p:cNvSpPr>
-          <p:nvPr>
-            <p:ph type="body" idx="3" sz="quarter"/>
-          </p:nvPr>
-        </p:nvSpPr>
-        <p:spPr/>
-        <p:txBody>
-          <a:bodyPr/>
-          <a:lstStyle/>
-          <a:p>
-            <a:r>
-              <a:t>[CALIBRATED from Lab 1.b, 2026-08-12: agenda held · checkpoint gates worked · keep as built]</a:t>
+              <a:t>Close on the allow/ask/deny list — the thing every person applies tomorrow regardless of how far they got.</a:t>
             </a:r>
           </a:p>
           <a:p/>
           <a:p>
             <a:r>
-              <a:t>Close on the deny/ask list — the thing every person applies tomorrow regardless of how far they got. Read the ship checklist as one list; it mirrors the handout exactly. Retro as a chat waterfall: type, hold, 3-2-1 send.</a:t>
+              <a:t>Read the ship checklist as one list; it mirrors the handout exactly.</a:t>
             </a:r>
           </a:p>
           <a:p/>
           <a:p>
             <a:r>
-              <a:t>COPY THE CHAT BEFORE ENDING THE CALL — Meet deletes it, and the refusal texts + gate run URLs + table-talk lines + retro lines feed the capture entry. INSTRUCTOR, within 24h: file the lab-capture entry (AI-Transformation-Playbook/04-labs/lab-capture-template.md) — outcomes, stuck points, timings, and the interactive-format observations (table talk, git-hook-first bridge): this session is the validation data point for that variant.</a:t>
+              <a:t>Retro as a chat waterfall: type, hold, 3-2-1 send.</a:t>
+            </a:r>
+          </a:p>
+          <a:p/>
+          <a:p>
+            <a:r>
+              <a:t>COPY THE CHAT BEFORE ENDING THE CALL — Meet deletes it, and the refusal texts + gate run URLs + table-talk lines + retro lines feed the capture entry.</a:t>
+            </a:r>
+          </a:p>
+          <a:p/>
+          <a:p>
+            <a:r>
+              <a:t>INSTRUCTOR, within 24h: file the lab-capture entry (AI-Transformation-Playbook/04-labs/lab-capture-template.md) — outcomes, stuck points, timings, and the interactive-format observations (table talk, git-hook-first bridge): this session is the validation data point for that variant.</a:t>
             </a:r>
           </a:p>
           <a:p/>
@@ -2250,13 +2581,25 @@
           <a:lstStyle/>
           <a:p>
             <a:r>
+              <a:t>WHAT THIS SLIDE TEACHES: this repo already has written rules and zero enforcement — the gap between written and enforced is the session's entire subject.</a:t>
+            </a:r>
+          </a:p>
+          <a:p/>
+          <a:p>
+            <a:r>
               <a:t>[CALIBRATED from review, 2026-08-19: reworked — no prior NFR assumed; the repo's own written rules are the stimulus]</a:t>
             </a:r>
           </a:p>
           <a:p/>
           <a:p>
             <a:r>
-              <a:t>Fast. The only new idea is the last bullet — the premise of the block. These three documents are also the MENU the exercise picks from later — say so: "remember these; you will choose one to enforce this afternoon."</a:t>
+              <a:t>Fast. The only new idea is the last bullet — the premise of the block.</a:t>
+            </a:r>
+          </a:p>
+          <a:p/>
+          <a:p>
+            <a:r>
+              <a:t>These three documents are also the MENU the exercise picks from later — say so: "remember these; you will choose one to enforce this afternoon."</a:t>
             </a:r>
           </a:p>
           <a:p/>
@@ -2332,7 +2675,25 @@
           <a:lstStyle/>
           <a:p>
             <a:r>
-              <a:t>Industry consensus, not our opinion — say so. Landing line (spoken): because the check does not depend on which model ran, it survives a model upgrade. The phrase: "model-independent governance." Connect to their own interview complaints about the agent being a yes-man and ignoring stated patterns — this is the failure mode it addresses.</a:t>
+              <a:t>WHAT THIS SLIDE TEACHES: why enforcement cannot live in the model — models are persuadable, so any rule that matters needs a deterministic check. Plus the session's three terms: guardrail, hook, policy.</a:t>
+            </a:r>
+          </a:p>
+          <a:p/>
+          <a:p>
+            <a:r>
+              <a:t>Industry consensus, not our opinion — say so.</a:t>
+            </a:r>
+          </a:p>
+          <a:p/>
+          <a:p>
+            <a:r>
+              <a:t>Landing line (spoken): because the check does not depend on which model ran, it survives a model upgrade. The phrase: "model-independent governance."</a:t>
+            </a:r>
+          </a:p>
+          <a:p/>
+          <a:p>
+            <a:r>
+              <a:t>Connect to the pain the team named in the interviews — the agent agreeing too easily, ignoring stated patterns. This is the failure mode it addresses.</a:t>
             </a:r>
           </a:p>
           <a:p/>
@@ -2408,13 +2769,25 @@
           <a:lstStyle/>
           <a:p>
             <a:r>
+              <a:t>WHAT THIS SLIDE TEACHES: the five enforcement layers, who each one holds against, and today's route through them as a timeline: authoring → commit → merge.</a:t>
+            </a:r>
+          </a:p>
+          <a:p/>
+          <a:p>
+            <a:r>
               <a:t>[CALIBRATED from team-lead feedback, 2026-08-18: shorter demos · git hook as the vehicle for Claude hooks · table talk]</a:t>
             </a:r>
           </a:p>
           <a:p/>
           <a:p>
             <a:r>
-              <a:t>The honesty about this repo matters — it models the behaviour we want. Note the build framing precisely: layers 1–2 plus one layer-4 gate; a governance doc that overstates its own coverage is the failure mode. Layer 5 is not a gap in the others — it is what makes them credible.</a:t>
+              <a:t>The honesty about this repo matters — it models the behaviour we want. Note the build framing precisely: layers 1–2 plus one layer-4 gate; a governance doc that overstates its own coverage is the failure mode.</a:t>
+            </a:r>
+          </a:p>
+          <a:p/>
+          <a:p>
+            <a:r>
+              <a:t>Layer 5 is not a gap in the others — it is what makes them credible.</a:t>
             </a:r>
           </a:p>
           <a:p/>
@@ -2496,13 +2869,37 @@
           <a:lstStyle/>
           <a:p>
             <a:r>
+              <a:t>WHAT THIS SLIDE TEACHES: starting with almost nothing is normal — guardrails accrete one earned rule at a time, and today's artifacts are the first steps on that road.</a:t>
+            </a:r>
+          </a:p>
+          <a:p/>
+          <a:p>
+            <a:r>
               <a:t>[CALIBRATED from review, 2026-08-19: re-toned twice — org-level now; the earlier framings read as a maturity gap aimed at the room]</a:t>
             </a:r>
           </a:p>
           <a:p/>
           <a:p>
             <a:r>
-              <a:t>The table describes ORGANIZATIONS in general, deliberately — if someone says "that starting column is us", the answer is "that's everyone; it's the normal starting point, and it's why this session exists." Sanitised exemplar — no client, product, or domain detail; if asked, "another engagement." TONE RULE: never "they have it, you don't" — aspiration, not gap. The proportion is still the insight: nine validators sounds heavy until you see the bypass is a single comment convention — governance is not volume, it accretes one earned rule at a time. If the room heads toward "we need an AI policy", the answer is you need an NFR, and you wrote one last week.</a:t>
+              <a:t>The table describes ORGANIZATIONS in general, deliberately. If someone says "that starting column is us", the answer is: "that's everyone — it's the normal starting point, and it's why this session exists."</a:t>
+            </a:r>
+          </a:p>
+          <a:p/>
+          <a:p>
+            <a:r>
+              <a:t>Sanitised exemplar — no client, product, or domain detail; if asked, "another engagement." TONE RULE: never "they have it, you don't" — aspiration, not gap.</a:t>
+            </a:r>
+          </a:p>
+          <a:p/>
+          <a:p>
+            <a:r>
+              <a:t>The proportion is still the insight: nine validators sounds heavy until you see the bypass is a single comment convention — governance is not volume, it accretes one earned rule at a time.</a:t>
+            </a:r>
+          </a:p>
+          <a:p/>
+          <a:p>
+            <a:r>
+              <a:t>If the room heads toward "we need an AI policy": you need an NFR — rules about AI are just rules.</a:t>
             </a:r>
           </a:p>
           <a:p/>
@@ -2578,7 +2975,37 @@
           <a:lstStyle/>
           <a:p>
             <a:r>
-              <a:t>Everyone, together, five minutes. This is the honest answer to "no restore points" and "it did something I did not expect" — the cheapest guardrail with the largest payoff, in every repo they own tomorrow. Teach ask-vs-deny while they type: deny the unrecoverable, ask the annoying — if everything asks, people stop reading, which is prompt fatigue and it kills the layer. The allow array is shown EMPTY on purpose: it is the third verdict's home — where you later promote the commands you never want to be asked about (npm test, npm run lint) — and empty is the right day-one default; earn entries into it. Remote verification: "paste the refusal line Claude gave you into chat" — and the paste-over-the-file failure shows up as "seed.json rule gone"; the handout has the before-state and names settings.local.json. This is config, not a hook — the hook arc starts on the next slide, at the layer they already know.</a:t>
+              <a:t>WHAT THIS SLIDE TEACHES: the cheapest guardrail that exists — three permission verdicts (allow / ask / deny) in settings.json. Config, not code, and usable in every repo they own tomorrow.</a:t>
+            </a:r>
+          </a:p>
+          <a:p/>
+          <a:p>
+            <a:r>
+              <a:t>Everyone, together, five minutes. This is the honest answer to "no restore points" and "it did something I did not expect."</a:t>
+            </a:r>
+          </a:p>
+          <a:p/>
+          <a:p>
+            <a:r>
+              <a:t>Teach ask-vs-deny while they type: deny the unrecoverable, ask the annoying. If everything asks, people stop reading — prompt fatigue kills the layer.</a:t>
+            </a:r>
+          </a:p>
+          <a:p/>
+          <a:p>
+            <a:r>
+              <a:t>The allow array is shown EMPTY on purpose: it is the third verdict's home, where you later promote the commands you never want to be asked about (npm test, npm run lint). Empty is the right day-one default — entries are earned.</a:t>
+            </a:r>
+          </a:p>
+          <a:p/>
+          <a:p>
+            <a:r>
+              <a:t>Remote verification: "paste the refusal line Claude gave you into chat." The paste-over-the-file failure shows up as "seed.json rule gone" — the handout has the before-state and names settings.local.json.</a:t>
+            </a:r>
+          </a:p>
+          <a:p/>
+          <a:p>
+            <a:r>
+              <a:t>This is config, not a hook — the hook arc starts on the next slide, at the layer they already know.</a:t>
             </a:r>
           </a:p>
           <a:p/>
@@ -2654,18 +3081,42 @@
           <a:lstStyle/>
           <a:p>
             <a:r>
+              <a:t>WHAT THIS SLIDE TEACHES: the hook anatomy, on the layer the room already runs — an event fires a script, and the exit code decides. Plus: every layer has a bypass, and hooks work identically on every OS.</a:t>
+            </a:r>
+          </a:p>
+          <a:p/>
+          <a:p>
+            <a:r>
               <a:t>[CALIBRATED from team-lead feedback, 2026-08-18: shorter demos · git hook as the vehicle for Claude hooks · table talk]</a:t>
             </a:r>
           </a:p>
           <a:p/>
           <a:p>
             <a:r>
-              <a:t>INSTRUCTOR-ONLY DEMO — the room watches; their replay is docs/labs/lab-2b-demo-2-git-hook-walkthrough.md and adding it to their copy is a stretch. Run it against this slide, call row numbers. Row 3 is the CROSS-PLATFORM BEAT (verified empirically 2026-08-19: the hook fires with the exec bit stripped): git runs husky's SHIM — core.hooksPath is .husky/_ — and the shim runs your file as an ARGUMENT to sh (sh -e), so the OS never executes the file: no chmod, no extension, no shebang, on any OS; on Windows, git ships its own sh plus grep and head. The anatomy to land, out loud, at row 4: AN EVENT FIRED A SCRIPT, AND THE EXIT CODE DECIDED — that sentence is the whole hook concept, and it repeats unchanged at authoring time and merge time. At row 6, the layer-5 teaching lands here now: there is always a bypass; undocumented bypasses are the real governance hole — not the missing gate, the escape hatch nobody wrote down; name the approver ("APPROVED-X: &lt;reason + who&gt;" beats a silent override); and count how often it fires — a bypass used weekly is a rule that is wrong, not a team that is lax.</a:t>
+              <a:t>INSTRUCTOR-ONLY DEMO — the room watches; their replay is docs/labs/lab-2b-demo-2-git-hook-walkthrough.md, and adding it to their copy is a stretch. Run it against this slide; call row numbers.</a:t>
             </a:r>
           </a:p>
           <a:p/>
           <a:p>
             <a:r>
+              <a:t>ROW 3 IS THE CROSS-PLATFORM BEAT (verified empirically 2026-08-19: the hook fires with the exec bit stripped). Git runs husky's SHIM — core.hooksPath is .husky/_ — and the shim runs your file as an ARGUMENT to sh (sh -e), so the OS never executes the file: no chmod, no extension, no shebang, on any OS. On Windows, git ships its own sh plus grep and head.</a:t>
+            </a:r>
+          </a:p>
+          <a:p/>
+          <a:p>
+            <a:r>
+              <a:t>ROW 4 IS THE ANATOMY — say it out loud, slowly: AN EVENT FIRED A SCRIPT, AND THE EXIT CODE DECIDED. That sentence is the whole hook concept, and it repeats unchanged at authoring time and merge time.</a:t>
+            </a:r>
+          </a:p>
+          <a:p/>
+          <a:p>
+            <a:r>
+              <a:t>ROW 6 IS THE LAYER-5 TEACHING: there is always a bypass; undocumented bypasses are the real governance hole — not the missing gate, the escape hatch nobody wrote down. Name the approver ("APPROVED-X: &lt;reason + who&gt;" beats a silent override), and count how often it fires — a bypass used weekly is a rule that is wrong, not a team that is lax.</a:t>
+            </a:r>
+          </a:p>
+          <a:p/>
+          <a:p>
+            <a:r>
               <a:t>COMMON QUESTIONS</a:t>
             </a:r>
           </a:p>
@@ -2677,7 +3128,7 @@
           </a:p>
           <a:p>
             <a:r>
-              <a:t>A: commitlint is the grown-up version — a dependency that parses properly and scales to rule sets; five lines of grep teach the anatomy, and you graduate when the rule set grows.</a:t>
+              <a:t>A: commitlint is the scaled version — a dependency that parses properly and handles rule sets; five lines of grep teach the anatomy, and you graduate when the rule set grows.</a:t>
             </a:r>
           </a:p>
           <a:p/>
@@ -2732,7 +3183,7 @@
           </a:p>
           <a:p>
             <a:r>
-              <a:t>A: not with husky — RAW git hooks (.git/hooks, no husky) are executed directly by git and there chmod +x IS required, and the bit travels to teammates via git update-index --chmod=+x; the walkthrough carries that nuance.</a:t>
+              <a:t>A: not with husky — RAW git hooks (.git/hooks, no husky) are executed directly by git; there chmod +x IS required, and the bit travels to teammates via git update-index --chmod=+x. The walkthrough carries that nuance.</a:t>
             </a:r>
           </a:p>
           <a:p/>
@@ -2830,13 +3281,37 @@
           <a:lstStyle/>
           <a:p>
             <a:r>
+              <a:t>WHAT THIS SLIDE TEACHES: git hook, Claude hook, and CI gate are ONE concept at three moments in time — this table is the session's whole mental model.</a:t>
+            </a:r>
+          </a:p>
+          <a:p/>
+          <a:p>
+            <a:r>
               <a:t>[CALIBRATED from team-lead feedback, 2026-08-18: shorter demos · git hook as the vehicle for Claude hooks · table talk]</a:t>
             </a:r>
           </a:p>
           <a:p/>
           <a:p>
             <a:r>
-              <a:t>THIS SLIDE IS THE VEHICLE — the git-hook demo exists so this table can make the Claude hook a variation on something the room already runs, not a new thing. Say the sentence: "everything you just watched is about to happen again — the event moves from your commit to the agent's tool call." Walk ONE column at a time, not one row: commit column is what they just saw; authoring column is the demo they are about to build; merge column is the gate they wire in the exercise. The protect-seed note is the callback: they were blocked by a Claude hook in Lab 1 without being told the word.</a:t>
+              <a:t>THIS SLIDE IS THE VEHICLE — the git-hook demo exists so this table can make the Claude hook a variation on something the room already runs, not a new thing.</a:t>
+            </a:r>
+          </a:p>
+          <a:p/>
+          <a:p>
+            <a:r>
+              <a:t>Say the sentence: "everything you just watched is about to happen again — the event moves from your commit to the agent's tool call."</a:t>
+            </a:r>
+          </a:p>
+          <a:p/>
+          <a:p>
+            <a:r>
+              <a:t>Walk ONE COLUMN at a time, not one row: the commit column is what they just saw; the authoring column is the demo they are about to build; the merge column is the gate they wire in the exercise.</a:t>
+            </a:r>
+          </a:p>
+          <a:p/>
+          <a:p>
+            <a:r>
+              <a:t>The protect-seed note is the callback: they were blocked by a Claude hook in Lab 1 without being told the word.</a:t>
             </a:r>
           </a:p>
           <a:p/>
@@ -11090,13 +11565,13 @@
               </a:spcAft>
             </a:pPr>
             <a:r>
-              <a:rPr sz="850" b="0">
+              <a:rPr sz="800" b="0">
                 <a:solidFill>
                   <a:srgbClr val="434343"/>
                 </a:solidFill>
                 <a:latin typeface="Consolas"/>
               </a:rPr>
-              <a:t>const path = filePath.replaceAll('\\', '/');</a:t>
+              <a:t>// after the skeleton's stdin plumbing has parsed filePath:</a:t>
             </a:r>
           </a:p>
           <a:p>
@@ -11109,13 +11584,13 @@
               </a:spcAft>
             </a:pPr>
             <a:r>
-              <a:rPr sz="850" b="0">
+              <a:rPr sz="800" b="0">
                 <a:solidFill>
                   <a:srgbClr val="434343"/>
                 </a:solidFill>
                 <a:latin typeface="Consolas"/>
               </a:rPr>
-              <a:t/>
+              <a:t>const path = filePath.replaceAll('\\', '/');</a:t>
             </a:r>
           </a:p>
           <a:p>
@@ -11128,13 +11603,13 @@
               </a:spcAft>
             </a:pPr>
             <a:r>
-              <a:rPr sz="850" b="0">
+              <a:rPr sz="800" b="0">
                 <a:solidFill>
                   <a:srgbClr val="434343"/>
                 </a:solidFill>
                 <a:latin typeface="Consolas"/>
               </a:rPr>
-              <a:t>if (path.endsWith('server/data/db.json')) {</a:t>
+              <a:t/>
             </a:r>
           </a:p>
           <a:p>
@@ -11147,13 +11622,13 @@
               </a:spcAft>
             </a:pPr>
             <a:r>
-              <a:rPr sz="850" b="0">
+              <a:rPr sz="800" b="0">
                 <a:solidFill>
                   <a:srgbClr val="434343"/>
                 </a:solidFill>
                 <a:latin typeface="Consolas"/>
               </a:rPr>
-              <a:t>  console.error([</a:t>
+              <a:t>if (path.endsWith('server/data/db.json')) {</a:t>
             </a:r>
           </a:p>
           <a:p>
@@ -11166,13 +11641,13 @@
               </a:spcAft>
             </a:pPr>
             <a:r>
-              <a:rPr sz="850" b="0">
+              <a:rPr sz="800" b="0">
                 <a:solidFill>
                   <a:srgbClr val="434343"/>
                 </a:solidFill>
                 <a:latin typeface="Consolas"/>
               </a:rPr>
-              <a:t>    'BLOCKED: db.json is generated, not edited.',</a:t>
+              <a:t>  console.error([</a:t>
             </a:r>
           </a:p>
           <a:p>
@@ -11185,13 +11660,13 @@
               </a:spcAft>
             </a:pPr>
             <a:r>
-              <a:rPr sz="850" b="0">
+              <a:rPr sz="800" b="0">
                 <a:solidFill>
                   <a:srgbClr val="434343"/>
                 </a:solidFill>
                 <a:latin typeface="Consolas"/>
               </a:rPr>
-              <a:t>    'Why: hand-edits are lost on the next reset and',</a:t>
+              <a:t>    'BLOCKED: db.json is generated, not edited.',</a:t>
             </a:r>
           </a:p>
           <a:p>
@@ -11204,13 +11679,13 @@
               </a:spcAft>
             </a:pPr>
             <a:r>
-              <a:rPr sz="850" b="0">
+              <a:rPr sz="800" b="0">
                 <a:solidFill>
                   <a:srgbClr val="434343"/>
                 </a:solidFill>
                 <a:latin typeface="Consolas"/>
               </a:rPr>
-              <a:t>    '  are invisible to everyone else.',</a:t>
+              <a:t>    'Why: hand-edits are lost on the next reset and',</a:t>
             </a:r>
           </a:p>
           <a:p>
@@ -11223,13 +11698,13 @@
               </a:spcAft>
             </a:pPr>
             <a:r>
-              <a:rPr sz="850" b="0">
+              <a:rPr sz="800" b="0">
                 <a:solidFill>
                   <a:srgbClr val="434343"/>
                 </a:solidFill>
                 <a:latin typeface="Consolas"/>
               </a:rPr>
-              <a:t>    'Instead: change data through the API, or edit',</a:t>
+              <a:t>    '  are invisible to everyone else.',</a:t>
             </a:r>
           </a:p>
           <a:p>
@@ -11242,13 +11717,13 @@
               </a:spcAft>
             </a:pPr>
             <a:r>
-              <a:rPr sz="850" b="0">
+              <a:rPr sz="800" b="0">
                 <a:solidFill>
                   <a:srgbClr val="434343"/>
                 </a:solidFill>
                 <a:latin typeface="Consolas"/>
               </a:rPr>
-              <a:t>    '  seed.json via PR and run npm run reset-db.',</a:t>
+              <a:t>    'Instead: change data through the API, or edit',</a:t>
             </a:r>
           </a:p>
           <a:p>
@@ -11261,13 +11736,13 @@
               </a:spcAft>
             </a:pPr>
             <a:r>
-              <a:rPr sz="850" b="0">
+              <a:rPr sz="800" b="0">
                 <a:solidFill>
                   <a:srgbClr val="434343"/>
                 </a:solidFill>
                 <a:latin typeface="Consolas"/>
               </a:rPr>
-              <a:t>    'Done means: your data change survives a reset.',</a:t>
+              <a:t>    '  seed.json via PR and run npm run reset-db.',</a:t>
             </a:r>
           </a:p>
           <a:p>
@@ -11280,13 +11755,13 @@
               </a:spcAft>
             </a:pPr>
             <a:r>
-              <a:rPr sz="850" b="0">
+              <a:rPr sz="800" b="0">
                 <a:solidFill>
                   <a:srgbClr val="434343"/>
                 </a:solidFill>
                 <a:latin typeface="Consolas"/>
               </a:rPr>
-              <a:t>  ].join('\n'));</a:t>
+              <a:t>    'Done means: your data change survives a reset.',</a:t>
             </a:r>
           </a:p>
           <a:p>
@@ -11299,13 +11774,13 @@
               </a:spcAft>
             </a:pPr>
             <a:r>
-              <a:rPr sz="850" b="0">
+              <a:rPr sz="800" b="0">
                 <a:solidFill>
                   <a:srgbClr val="434343"/>
                 </a:solidFill>
                 <a:latin typeface="Consolas"/>
               </a:rPr>
-              <a:t>  process.exit(2);   // PreToolUse -&gt; blocks</a:t>
+              <a:t>  ].join('\n'));</a:t>
             </a:r>
           </a:p>
           <a:p>
@@ -11318,13 +11793,13 @@
               </a:spcAft>
             </a:pPr>
             <a:r>
-              <a:rPr sz="850" b="0">
+              <a:rPr sz="800" b="0">
                 <a:solidFill>
                   <a:srgbClr val="434343"/>
                 </a:solidFill>
                 <a:latin typeface="Consolas"/>
               </a:rPr>
-              <a:t>}</a:t>
+              <a:t>  process.exit(2);   // PreToolUse -&gt; blocks</a:t>
             </a:r>
           </a:p>
           <a:p>
@@ -11337,7 +11812,26 @@
               </a:spcAft>
             </a:pPr>
             <a:r>
-              <a:rPr sz="850" b="0">
+              <a:rPr sz="800" b="0">
+                <a:solidFill>
+                  <a:srgbClr val="434343"/>
+                </a:solidFill>
+                <a:latin typeface="Consolas"/>
+              </a:rPr>
+              <a:t>}</a:t>
+            </a:r>
+          </a:p>
+          <a:p>
+            <a:pPr algn="l">
+              <a:lnSpc>
+                <a:spcPct val="114000"/>
+              </a:lnSpc>
+              <a:spcAft>
+                <a:spcPts val="0"/>
+              </a:spcAft>
+            </a:pPr>
+            <a:r>
+              <a:rPr sz="800" b="0">
                 <a:solidFill>
                   <a:srgbClr val="434343"/>
                 </a:solidFill>
@@ -15040,7 +15534,7 @@
                 </a:solidFill>
                 <a:latin typeface="Arial"/>
               </a:rPr>
-              <a:t>34 min</a:t>
+              <a:t>31 min</a:t>
             </a:r>
           </a:p>
         </p:txBody>
@@ -15285,7 +15779,7 @@
                 </a:solidFill>
                 <a:latin typeface="Arial"/>
               </a:rPr>
-              <a:t>False positives, bypasses, residue</a:t>
+              <a:t>Compare picks, false positives, severity calls</a:t>
             </a:r>
           </a:p>
         </p:txBody>
@@ -16536,7 +17030,7 @@
                 </a:solidFill>
                 <a:latin typeface="Arial"/>
               </a:rPr>
-              <a:t>LAYER 4 · ALREADY LIVE</a:t>
+              <a:t>YOUR RULE · MERGE TIME</a:t>
             </a:r>
           </a:p>
         </p:txBody>
@@ -16575,7 +17069,7 @@
                 </a:solidFill>
                 <a:latin typeface="Arial"/>
               </a:rPr>
-              <a:t>Layer 4 already runs — your gate just joins it</a:t>
+              <a:t>The same rule, written again — for GitHub</a:t>
             </a:r>
           </a:p>
         </p:txBody>
@@ -16617,7 +17111,7 @@
                 </a:solidFill>
                 <a:latin typeface="Arial"/>
               </a:rPr>
-              <a:t>Lint, typecheck, tests: merge-time guardrails have protected this repo all along. And merge time is the moment nothing dodges — no --no-verify, no missing hooks; it holds against anyone.</a:t>
+              <a:t>GitHub cannot run your Claude hook — no agent runs there. So you write the SAME check again, as a grep in a workflow GitHub runs on every pull request: everyone, every machine.</a:t>
             </a:r>
           </a:p>
         </p:txBody>
@@ -16669,8 +17163,169 @@
         </p:nvSpPr>
         <p:spPr>
           <a:xfrm>
-            <a:off x="548640" y="1965960"/>
-            <a:ext cx="8046720" cy="2203704"/>
+            <a:off x="548640" y="2011680"/>
+            <a:ext cx="8046720" cy="310896"/>
+          </a:xfrm>
+          <a:prstGeom prst="rect">
+            <a:avLst/>
+          </a:prstGeom>
+          <a:solidFill>
+            <a:srgbClr val="403FE8"/>
+          </a:solidFill>
+          <a:ln>
+            <a:noFill/>
+          </a:ln>
+          <a:effectLst/>
+        </p:spPr>
+        <p:style>
+          <a:lnRef idx="1">
+            <a:schemeClr val="accent1"/>
+          </a:lnRef>
+          <a:fillRef idx="3">
+            <a:schemeClr val="accent1"/>
+          </a:fillRef>
+          <a:effectRef idx="2">
+            <a:schemeClr val="accent1"/>
+          </a:effectRef>
+          <a:fontRef idx="minor">
+            <a:schemeClr val="lt1"/>
+          </a:fontRef>
+        </p:style>
+        <p:txBody>
+          <a:bodyPr rtlCol="0" anchor="ctr"/>
+          <a:lstStyle/>
+          <a:p>
+            <a:pPr algn="ctr"/>
+          </a:p>
+        </p:txBody>
+      </p:sp>
+      <p:sp>
+        <p:nvSpPr>
+          <p:cNvPr id="10" name="TextBox 9"/>
+          <p:cNvSpPr txBox="1"/>
+          <p:nvPr/>
+        </p:nvSpPr>
+        <p:spPr>
+          <a:xfrm>
+            <a:off x="640080" y="2089404"/>
+            <a:ext cx="274320" cy="219456"/>
+          </a:xfrm>
+          <a:prstGeom prst="rect">
+            <a:avLst/>
+          </a:prstGeom>
+          <a:noFill/>
+        </p:spPr>
+        <p:txBody>
+          <a:bodyPr wrap="square" anchor="t" lIns="0" rIns="0" tIns="0" bIns="0">
+            <a:spAutoFit/>
+          </a:bodyPr>
+          <a:lstStyle/>
+          <a:p>
+            <a:pPr algn="l">
+              <a:spcAft>
+                <a:spcPts val="400"/>
+              </a:spcAft>
+            </a:pPr>
+            <a:r>
+              <a:rPr sz="900" b="1">
+                <a:solidFill>
+                  <a:srgbClr val="FFFFFF"/>
+                </a:solidFill>
+                <a:latin typeface="Arial"/>
+              </a:rPr>
+              <a:t>#</a:t>
+            </a:r>
+          </a:p>
+        </p:txBody>
+      </p:sp>
+      <p:sp>
+        <p:nvSpPr>
+          <p:cNvPr id="11" name="TextBox 10"/>
+          <p:cNvSpPr txBox="1"/>
+          <p:nvPr/>
+        </p:nvSpPr>
+        <p:spPr>
+          <a:xfrm>
+            <a:off x="1097280" y="2089404"/>
+            <a:ext cx="3657600" cy="219456"/>
+          </a:xfrm>
+          <a:prstGeom prst="rect">
+            <a:avLst/>
+          </a:prstGeom>
+          <a:noFill/>
+        </p:spPr>
+        <p:txBody>
+          <a:bodyPr wrap="square" anchor="t" lIns="0" rIns="0" tIns="0" bIns="0">
+            <a:spAutoFit/>
+          </a:bodyPr>
+          <a:lstStyle/>
+          <a:p>
+            <a:pPr algn="l">
+              <a:spcAft>
+                <a:spcPts val="400"/>
+              </a:spcAft>
+            </a:pPr>
+            <a:r>
+              <a:rPr sz="900" b="1">
+                <a:solidFill>
+                  <a:srgbClr val="FFFFFF"/>
+                </a:solidFill>
+                <a:latin typeface="Arial"/>
+              </a:rPr>
+              <a:t>What you do</a:t>
+            </a:r>
+          </a:p>
+        </p:txBody>
+      </p:sp>
+      <p:sp>
+        <p:nvSpPr>
+          <p:cNvPr id="12" name="TextBox 11"/>
+          <p:cNvSpPr txBox="1"/>
+          <p:nvPr/>
+        </p:nvSpPr>
+        <p:spPr>
+          <a:xfrm>
+            <a:off x="4937760" y="2089404"/>
+            <a:ext cx="3566159" cy="219456"/>
+          </a:xfrm>
+          <a:prstGeom prst="rect">
+            <a:avLst/>
+          </a:prstGeom>
+          <a:noFill/>
+        </p:spPr>
+        <p:txBody>
+          <a:bodyPr wrap="square" anchor="t" lIns="0" rIns="0" tIns="0" bIns="0">
+            <a:spAutoFit/>
+          </a:bodyPr>
+          <a:lstStyle/>
+          <a:p>
+            <a:pPr algn="l">
+              <a:spcAft>
+                <a:spcPts val="400"/>
+              </a:spcAft>
+            </a:pPr>
+            <a:r>
+              <a:rPr sz="900" b="1">
+                <a:solidFill>
+                  <a:srgbClr val="FFFFFF"/>
+                </a:solidFill>
+                <a:latin typeface="Arial"/>
+              </a:rPr>
+              <a:t>What you should see</a:t>
+            </a:r>
+          </a:p>
+        </p:txBody>
+      </p:sp>
+      <p:sp>
+        <p:nvSpPr>
+          <p:cNvPr id="13" name="Rectangle 12"/>
+          <p:cNvSpPr/>
+          <p:nvPr/>
+        </p:nvSpPr>
+        <p:spPr>
+          <a:xfrm>
+            <a:off x="548640" y="2322576"/>
+            <a:ext cx="8046720" cy="384048"/>
           </a:xfrm>
           <a:prstGeom prst="rect">
             <a:avLst/>
@@ -16707,20 +17362,146 @@
       </p:sp>
       <p:sp>
         <p:nvSpPr>
-          <p:cNvPr id="10" name="Rectangle 9"/>
+          <p:cNvPr id="14" name="TextBox 13"/>
+          <p:cNvSpPr txBox="1"/>
+          <p:nvPr/>
+        </p:nvSpPr>
+        <p:spPr>
+          <a:xfrm>
+            <a:off x="640080" y="2377440"/>
+            <a:ext cx="274320" cy="292607"/>
+          </a:xfrm>
+          <a:prstGeom prst="rect">
+            <a:avLst/>
+          </a:prstGeom>
+          <a:noFill/>
+        </p:spPr>
+        <p:txBody>
+          <a:bodyPr wrap="square" anchor="t" lIns="0" rIns="0" tIns="0" bIns="0">
+            <a:spAutoFit/>
+          </a:bodyPr>
+          <a:lstStyle/>
+          <a:p>
+            <a:pPr algn="l">
+              <a:lnSpc>
+                <a:spcPct val="112000"/>
+              </a:lnSpc>
+              <a:spcAft>
+                <a:spcPts val="400"/>
+              </a:spcAft>
+            </a:pPr>
+            <a:r>
+              <a:rPr sz="900" b="1">
+                <a:solidFill>
+                  <a:srgbClr val="13135E"/>
+                </a:solidFill>
+                <a:latin typeface="Arial"/>
+              </a:rPr>
+              <a:t>1</a:t>
+            </a:r>
+          </a:p>
+        </p:txBody>
+      </p:sp>
+      <p:sp>
+        <p:nvSpPr>
+          <p:cNvPr id="15" name="TextBox 14"/>
+          <p:cNvSpPr txBox="1"/>
+          <p:nvPr/>
+        </p:nvSpPr>
+        <p:spPr>
+          <a:xfrm>
+            <a:off x="1097280" y="2377440"/>
+            <a:ext cx="3657600" cy="292607"/>
+          </a:xfrm>
+          <a:prstGeom prst="rect">
+            <a:avLst/>
+          </a:prstGeom>
+          <a:noFill/>
+        </p:spPr>
+        <p:txBody>
+          <a:bodyPr wrap="square" anchor="t" lIns="0" rIns="0" tIns="0" bIns="0">
+            <a:spAutoFit/>
+          </a:bodyPr>
+          <a:lstStyle/>
+          <a:p>
+            <a:pPr algn="l">
+              <a:lnSpc>
+                <a:spcPct val="112000"/>
+              </a:lnSpc>
+              <a:spcAft>
+                <a:spcPts val="400"/>
+              </a:spcAft>
+            </a:pPr>
+            <a:r>
+              <a:rPr sz="900" b="0">
+                <a:solidFill>
+                  <a:srgbClr val="434343"/>
+                </a:solidFill>
+                <a:latin typeface="Arial"/>
+              </a:rPr>
+              <a:t>Copy snippets/governance-gate.yml → .github/workflows/governance.yml</a:t>
+            </a:r>
+          </a:p>
+        </p:txBody>
+      </p:sp>
+      <p:sp>
+        <p:nvSpPr>
+          <p:cNvPr id="16" name="TextBox 15"/>
+          <p:cNvSpPr txBox="1"/>
+          <p:nvPr/>
+        </p:nvSpPr>
+        <p:spPr>
+          <a:xfrm>
+            <a:off x="4937760" y="2377440"/>
+            <a:ext cx="3566159" cy="292607"/>
+          </a:xfrm>
+          <a:prstGeom prst="rect">
+            <a:avLst/>
+          </a:prstGeom>
+          <a:noFill/>
+        </p:spPr>
+        <p:txBody>
+          <a:bodyPr wrap="square" anchor="t" lIns="0" rIns="0" tIns="0" bIns="0">
+            <a:spAutoFit/>
+          </a:bodyPr>
+          <a:lstStyle/>
+          <a:p>
+            <a:pPr algn="l">
+              <a:lnSpc>
+                <a:spcPct val="112000"/>
+              </a:lnSpc>
+              <a:spcAft>
+                <a:spcPts val="400"/>
+              </a:spcAft>
+            </a:pPr>
+            <a:r>
+              <a:rPr sz="900" b="0">
+                <a:solidFill>
+                  <a:srgbClr val="434343"/>
+                </a:solidFill>
+                <a:latin typeface="Arial"/>
+              </a:rPr>
+              <a:t>The skeleton: checkout, changed-files list, an example check</a:t>
+            </a:r>
+          </a:p>
+        </p:txBody>
+      </p:sp>
+      <p:sp>
+        <p:nvSpPr>
+          <p:cNvPr id="17" name="Rectangle 16"/>
           <p:cNvSpPr/>
           <p:nvPr/>
         </p:nvSpPr>
         <p:spPr>
           <a:xfrm>
-            <a:off x="548640" y="1965960"/>
-            <a:ext cx="41148" cy="2203704"/>
+            <a:off x="548640" y="2706624"/>
+            <a:ext cx="8046720" cy="384048"/>
           </a:xfrm>
           <a:prstGeom prst="rect">
             <a:avLst/>
           </a:prstGeom>
           <a:solidFill>
-            <a:srgbClr val="403FE8"/>
+            <a:srgbClr val="FFFFFF"/>
           </a:solidFill>
           <a:ln>
             <a:noFill/>
@@ -16751,14 +17532,14 @@
       </p:sp>
       <p:sp>
         <p:nvSpPr>
-          <p:cNvPr id="11" name="TextBox 10"/>
-          <p:cNvSpPr txBox="1"/>
-          <p:nvPr/>
-        </p:nvSpPr>
-        <p:spPr>
-          <a:xfrm>
-            <a:off x="777240" y="2103120"/>
-            <a:ext cx="7635240" cy="1947672"/>
+          <p:cNvPr id="18" name="TextBox 17"/>
+          <p:cNvSpPr txBox="1"/>
+          <p:nvPr/>
+        </p:nvSpPr>
+        <p:spPr>
+          <a:xfrm>
+            <a:off x="640080" y="2761488"/>
+            <a:ext cx="274320" cy="292607"/>
           </a:xfrm>
           <a:prstGeom prst="rect">
             <a:avLst/>
@@ -16773,186 +17554,628 @@
           <a:p>
             <a:pPr algn="l">
               <a:lnSpc>
-                <a:spcPct val="114000"/>
+                <a:spcPct val="112000"/>
               </a:lnSpc>
               <a:spcAft>
-                <a:spcPts val="0"/>
-              </a:spcAft>
-            </a:pPr>
-            <a:r>
-              <a:rPr sz="950" b="0">
+                <a:spcPts val="400"/>
+              </a:spcAft>
+            </a:pPr>
+            <a:r>
+              <a:rPr sz="900" b="1">
+                <a:solidFill>
+                  <a:srgbClr val="13135E"/>
+                </a:solidFill>
+                <a:latin typeface="Arial"/>
+              </a:rPr>
+              <a:t>2</a:t>
+            </a:r>
+          </a:p>
+        </p:txBody>
+      </p:sp>
+      <p:sp>
+        <p:nvSpPr>
+          <p:cNvPr id="19" name="TextBox 18"/>
+          <p:cNvSpPr txBox="1"/>
+          <p:nvPr/>
+        </p:nvSpPr>
+        <p:spPr>
+          <a:xfrm>
+            <a:off x="1097280" y="2761488"/>
+            <a:ext cx="3657600" cy="292607"/>
+          </a:xfrm>
+          <a:prstGeom prst="rect">
+            <a:avLst/>
+          </a:prstGeom>
+          <a:noFill/>
+        </p:spPr>
+        <p:txBody>
+          <a:bodyPr wrap="square" anchor="t" lIns="0" rIns="0" tIns="0" bIns="0">
+            <a:spAutoFit/>
+          </a:bodyPr>
+          <a:lstStyle/>
+          <a:p>
+            <a:pPr algn="l">
+              <a:lnSpc>
+                <a:spcPct val="112000"/>
+              </a:lnSpc>
+              <a:spcAft>
+                <a:spcPts val="400"/>
+              </a:spcAft>
+            </a:pPr>
+            <a:r>
+              <a:rPr sz="900" b="0">
                 <a:solidFill>
                   <a:srgbClr val="434343"/>
                 </a:solidFill>
-                <a:latin typeface="Consolas"/>
-              </a:rPr>
-              <a:t># .github/workflows/ci.yml — live in this repo, on every PR and push to main</a:t>
-            </a:r>
-          </a:p>
+                <a:latin typeface="Arial"/>
+              </a:rPr>
+              <a:t>Re-write your hook's check as the grep in the marked step</a:t>
+            </a:r>
+          </a:p>
+        </p:txBody>
+      </p:sp>
+      <p:sp>
+        <p:nvSpPr>
+          <p:cNvPr id="20" name="TextBox 19"/>
+          <p:cNvSpPr txBox="1"/>
+          <p:nvPr/>
+        </p:nvSpPr>
+        <p:spPr>
+          <a:xfrm>
+            <a:off x="4937760" y="2761488"/>
+            <a:ext cx="3566159" cy="292607"/>
+          </a:xfrm>
+          <a:prstGeom prst="rect">
+            <a:avLst/>
+          </a:prstGeom>
+          <a:noFill/>
+        </p:spPr>
+        <p:txBody>
+          <a:bodyPr wrap="square" anchor="t" lIns="0" rIns="0" tIns="0" bIns="0">
+            <a:spAutoFit/>
+          </a:bodyPr>
+          <a:lstStyle/>
           <a:p>
             <a:pPr algn="l">
               <a:lnSpc>
-                <a:spcPct val="114000"/>
+                <a:spcPct val="112000"/>
               </a:lnSpc>
               <a:spcAft>
-                <a:spcPts val="0"/>
-              </a:spcAft>
-            </a:pPr>
-            <a:r>
-              <a:rPr sz="950" b="0">
+                <a:spcPts val="400"/>
+              </a:spcAft>
+            </a:pPr>
+            <a:r>
+              <a:rPr sz="900" b="0">
                 <a:solidFill>
                   <a:srgbClr val="434343"/>
                 </a:solidFill>
-                <a:latin typeface="Consolas"/>
-              </a:rPr>
-              <a:t>steps:</a:t>
-            </a:r>
-          </a:p>
+                <a:latin typeface="Arial"/>
+              </a:rPr>
+              <a:t>Same rule as check-convention.js — a second program, in a second place</a:t>
+            </a:r>
+          </a:p>
+        </p:txBody>
+      </p:sp>
+      <p:sp>
+        <p:nvSpPr>
+          <p:cNvPr id="21" name="Rectangle 20"/>
+          <p:cNvSpPr/>
+          <p:nvPr/>
+        </p:nvSpPr>
+        <p:spPr>
+          <a:xfrm>
+            <a:off x="548640" y="3090672"/>
+            <a:ext cx="8046720" cy="384048"/>
+          </a:xfrm>
+          <a:prstGeom prst="rect">
+            <a:avLst/>
+          </a:prstGeom>
+          <a:solidFill>
+            <a:srgbClr val="F4F5FB"/>
+          </a:solidFill>
+          <a:ln>
+            <a:noFill/>
+          </a:ln>
+          <a:effectLst/>
+        </p:spPr>
+        <p:style>
+          <a:lnRef idx="1">
+            <a:schemeClr val="accent1"/>
+          </a:lnRef>
+          <a:fillRef idx="3">
+            <a:schemeClr val="accent1"/>
+          </a:fillRef>
+          <a:effectRef idx="2">
+            <a:schemeClr val="accent1"/>
+          </a:effectRef>
+          <a:fontRef idx="minor">
+            <a:schemeClr val="lt1"/>
+          </a:fontRef>
+        </p:style>
+        <p:txBody>
+          <a:bodyPr rtlCol="0" anchor="ctr"/>
+          <a:lstStyle/>
+          <a:p>
+            <a:pPr algn="ctr"/>
+          </a:p>
+        </p:txBody>
+      </p:sp>
+      <p:sp>
+        <p:nvSpPr>
+          <p:cNvPr id="22" name="TextBox 21"/>
+          <p:cNvSpPr txBox="1"/>
+          <p:nvPr/>
+        </p:nvSpPr>
+        <p:spPr>
+          <a:xfrm>
+            <a:off x="640080" y="3145536"/>
+            <a:ext cx="274320" cy="292607"/>
+          </a:xfrm>
+          <a:prstGeom prst="rect">
+            <a:avLst/>
+          </a:prstGeom>
+          <a:noFill/>
+        </p:spPr>
+        <p:txBody>
+          <a:bodyPr wrap="square" anchor="t" lIns="0" rIns="0" tIns="0" bIns="0">
+            <a:spAutoFit/>
+          </a:bodyPr>
+          <a:lstStyle/>
           <a:p>
             <a:pPr algn="l">
               <a:lnSpc>
-                <a:spcPct val="114000"/>
+                <a:spcPct val="112000"/>
               </a:lnSpc>
               <a:spcAft>
-                <a:spcPts val="0"/>
-              </a:spcAft>
-            </a:pPr>
-            <a:r>
-              <a:rPr sz="950" b="0">
+                <a:spcPts val="400"/>
+              </a:spcAft>
+            </a:pPr>
+            <a:r>
+              <a:rPr sz="900" b="1">
+                <a:solidFill>
+                  <a:srgbClr val="13135E"/>
+                </a:solidFill>
+                <a:latin typeface="Arial"/>
+              </a:rPr>
+              <a:t>3</a:t>
+            </a:r>
+          </a:p>
+        </p:txBody>
+      </p:sp>
+      <p:sp>
+        <p:nvSpPr>
+          <p:cNvPr id="23" name="TextBox 22"/>
+          <p:cNvSpPr txBox="1"/>
+          <p:nvPr/>
+        </p:nvSpPr>
+        <p:spPr>
+          <a:xfrm>
+            <a:off x="1097280" y="3145536"/>
+            <a:ext cx="3657600" cy="292607"/>
+          </a:xfrm>
+          <a:prstGeom prst="rect">
+            <a:avLst/>
+          </a:prstGeom>
+          <a:noFill/>
+        </p:spPr>
+        <p:txBody>
+          <a:bodyPr wrap="square" anchor="t" lIns="0" rIns="0" tIns="0" bIns="0">
+            <a:spAutoFit/>
+          </a:bodyPr>
+          <a:lstStyle/>
+          <a:p>
+            <a:pPr algn="l">
+              <a:lnSpc>
+                <a:spcPct val="112000"/>
+              </a:lnSpc>
+              <a:spcAft>
+                <a:spcPts val="400"/>
+              </a:spcAft>
+            </a:pPr>
+            <a:r>
+              <a:rPr sz="900" b="0">
                 <a:solidFill>
                   <a:srgbClr val="434343"/>
                 </a:solidFill>
-                <a:latin typeface="Consolas"/>
-              </a:rPr>
-              <a:t>  - npm ci</a:t>
-            </a:r>
-          </a:p>
+                <a:latin typeface="Arial"/>
+              </a:rPr>
+              <a:t>Commit, push — and open a DRAFT PR</a:t>
+            </a:r>
+          </a:p>
+        </p:txBody>
+      </p:sp>
+      <p:sp>
+        <p:nvSpPr>
+          <p:cNvPr id="24" name="TextBox 23"/>
+          <p:cNvSpPr txBox="1"/>
+          <p:nvPr/>
+        </p:nvSpPr>
+        <p:spPr>
+          <a:xfrm>
+            <a:off x="4937760" y="3145536"/>
+            <a:ext cx="3566159" cy="292607"/>
+          </a:xfrm>
+          <a:prstGeom prst="rect">
+            <a:avLst/>
+          </a:prstGeom>
+          <a:noFill/>
+        </p:spPr>
+        <p:txBody>
+          <a:bodyPr wrap="square" anchor="t" lIns="0" rIns="0" tIns="0" bIns="0">
+            <a:spAutoFit/>
+          </a:bodyPr>
+          <a:lstStyle/>
           <a:p>
             <a:pPr algn="l">
               <a:lnSpc>
-                <a:spcPct val="114000"/>
+                <a:spcPct val="112000"/>
               </a:lnSpc>
               <a:spcAft>
-                <a:spcPts val="0"/>
-              </a:spcAft>
-            </a:pPr>
-            <a:r>
-              <a:rPr sz="950" b="0">
+                <a:spcPts val="400"/>
+              </a:spcAft>
+            </a:pPr>
+            <a:r>
+              <a:rPr sz="900" b="0">
                 <a:solidFill>
                   <a:srgbClr val="434343"/>
                 </a:solidFill>
-                <a:latin typeface="Consolas"/>
-              </a:rPr>
-              <a:t>  - npm run lint        # the no-console rule fails HERE, for anyone</a:t>
-            </a:r>
-          </a:p>
+                <a:latin typeface="Arial"/>
+              </a:rPr>
+              <a:t>The gate runs ONLY when a PR exists; a pushed branch runs nothing</a:t>
+            </a:r>
+          </a:p>
+        </p:txBody>
+      </p:sp>
+      <p:sp>
+        <p:nvSpPr>
+          <p:cNvPr id="25" name="Rectangle 24"/>
+          <p:cNvSpPr/>
+          <p:nvPr/>
+        </p:nvSpPr>
+        <p:spPr>
+          <a:xfrm>
+            <a:off x="548640" y="3474720"/>
+            <a:ext cx="8046720" cy="384048"/>
+          </a:xfrm>
+          <a:prstGeom prst="rect">
+            <a:avLst/>
+          </a:prstGeom>
+          <a:solidFill>
+            <a:srgbClr val="FFFFFF"/>
+          </a:solidFill>
+          <a:ln>
+            <a:noFill/>
+          </a:ln>
+          <a:effectLst/>
+        </p:spPr>
+        <p:style>
+          <a:lnRef idx="1">
+            <a:schemeClr val="accent1"/>
+          </a:lnRef>
+          <a:fillRef idx="3">
+            <a:schemeClr val="accent1"/>
+          </a:fillRef>
+          <a:effectRef idx="2">
+            <a:schemeClr val="accent1"/>
+          </a:effectRef>
+          <a:fontRef idx="minor">
+            <a:schemeClr val="lt1"/>
+          </a:fontRef>
+        </p:style>
+        <p:txBody>
+          <a:bodyPr rtlCol="0" anchor="ctr"/>
+          <a:lstStyle/>
+          <a:p>
+            <a:pPr algn="ctr"/>
+          </a:p>
+        </p:txBody>
+      </p:sp>
+      <p:sp>
+        <p:nvSpPr>
+          <p:cNvPr id="26" name="TextBox 25"/>
+          <p:cNvSpPr txBox="1"/>
+          <p:nvPr/>
+        </p:nvSpPr>
+        <p:spPr>
+          <a:xfrm>
+            <a:off x="640080" y="3529584"/>
+            <a:ext cx="274320" cy="292607"/>
+          </a:xfrm>
+          <a:prstGeom prst="rect">
+            <a:avLst/>
+          </a:prstGeom>
+          <a:noFill/>
+        </p:spPr>
+        <p:txBody>
+          <a:bodyPr wrap="square" anchor="t" lIns="0" rIns="0" tIns="0" bIns="0">
+            <a:spAutoFit/>
+          </a:bodyPr>
+          <a:lstStyle/>
           <a:p>
             <a:pPr algn="l">
               <a:lnSpc>
-                <a:spcPct val="114000"/>
+                <a:spcPct val="112000"/>
               </a:lnSpc>
               <a:spcAft>
-                <a:spcPts val="0"/>
-              </a:spcAft>
-            </a:pPr>
-            <a:r>
-              <a:rPr sz="950" b="0">
+                <a:spcPts val="400"/>
+              </a:spcAft>
+            </a:pPr>
+            <a:r>
+              <a:rPr sz="900" b="1">
+                <a:solidFill>
+                  <a:srgbClr val="13135E"/>
+                </a:solidFill>
+                <a:latin typeface="Arial"/>
+              </a:rPr>
+              <a:t>4</a:t>
+            </a:r>
+          </a:p>
+        </p:txBody>
+      </p:sp>
+      <p:sp>
+        <p:nvSpPr>
+          <p:cNvPr id="27" name="TextBox 26"/>
+          <p:cNvSpPr txBox="1"/>
+          <p:nvPr/>
+        </p:nvSpPr>
+        <p:spPr>
+          <a:xfrm>
+            <a:off x="1097280" y="3529584"/>
+            <a:ext cx="3657600" cy="292607"/>
+          </a:xfrm>
+          <a:prstGeom prst="rect">
+            <a:avLst/>
+          </a:prstGeom>
+          <a:noFill/>
+        </p:spPr>
+        <p:txBody>
+          <a:bodyPr wrap="square" anchor="t" lIns="0" rIns="0" tIns="0" bIns="0">
+            <a:spAutoFit/>
+          </a:bodyPr>
+          <a:lstStyle/>
+          <a:p>
+            <a:pPr algn="l">
+              <a:lnSpc>
+                <a:spcPct val="112000"/>
+              </a:lnSpc>
+              <a:spcAft>
+                <a:spcPts val="400"/>
+              </a:spcAft>
+            </a:pPr>
+            <a:r>
+              <a:rPr sz="900" b="0">
                 <a:solidFill>
                   <a:srgbClr val="434343"/>
                 </a:solidFill>
-                <a:latin typeface="Consolas"/>
-              </a:rPr>
-              <a:t>  - npm run typecheck</a:t>
-            </a:r>
-          </a:p>
+                <a:latin typeface="Arial"/>
+              </a:rPr>
+              <a:t>Violate your rule in the PR</a:t>
+            </a:r>
+          </a:p>
+        </p:txBody>
+      </p:sp>
+      <p:sp>
+        <p:nvSpPr>
+          <p:cNvPr id="28" name="TextBox 27"/>
+          <p:cNvSpPr txBox="1"/>
+          <p:nvPr/>
+        </p:nvSpPr>
+        <p:spPr>
+          <a:xfrm>
+            <a:off x="4937760" y="3529584"/>
+            <a:ext cx="3566159" cy="292607"/>
+          </a:xfrm>
+          <a:prstGeom prst="rect">
+            <a:avLst/>
+          </a:prstGeom>
+          <a:noFill/>
+        </p:spPr>
+        <p:txBody>
+          <a:bodyPr wrap="square" anchor="t" lIns="0" rIns="0" tIns="0" bIns="0">
+            <a:spAutoFit/>
+          </a:bodyPr>
+          <a:lstStyle/>
           <a:p>
             <a:pPr algn="l">
               <a:lnSpc>
-                <a:spcPct val="114000"/>
+                <a:spcPct val="112000"/>
               </a:lnSpc>
               <a:spcAft>
-                <a:spcPts val="0"/>
-              </a:spcAft>
-            </a:pPr>
-            <a:r>
-              <a:rPr sz="950" b="0">
+                <a:spcPts val="400"/>
+              </a:spcAft>
+            </a:pPr>
+            <a:r>
+              <a:rPr sz="900" b="0">
                 <a:solidFill>
                   <a:srgbClr val="434343"/>
                 </a:solidFill>
-                <a:latin typeface="Consolas"/>
-              </a:rPr>
-              <a:t>  - npm test</a:t>
-            </a:r>
-          </a:p>
+                <a:latin typeface="Arial"/>
+              </a:rPr>
+              <a:t>RED — the merge is stopped, for anyone: agent or human</a:t>
+            </a:r>
+          </a:p>
+        </p:txBody>
+      </p:sp>
+      <p:sp>
+        <p:nvSpPr>
+          <p:cNvPr id="29" name="Rectangle 28"/>
+          <p:cNvSpPr/>
+          <p:nvPr/>
+        </p:nvSpPr>
+        <p:spPr>
+          <a:xfrm>
+            <a:off x="548640" y="3858768"/>
+            <a:ext cx="8046720" cy="384048"/>
+          </a:xfrm>
+          <a:prstGeom prst="rect">
+            <a:avLst/>
+          </a:prstGeom>
+          <a:solidFill>
+            <a:srgbClr val="F4F5FB"/>
+          </a:solidFill>
+          <a:ln>
+            <a:noFill/>
+          </a:ln>
+          <a:effectLst/>
+        </p:spPr>
+        <p:style>
+          <a:lnRef idx="1">
+            <a:schemeClr val="accent1"/>
+          </a:lnRef>
+          <a:fillRef idx="3">
+            <a:schemeClr val="accent1"/>
+          </a:fillRef>
+          <a:effectRef idx="2">
+            <a:schemeClr val="accent1"/>
+          </a:effectRef>
+          <a:fontRef idx="minor">
+            <a:schemeClr val="lt1"/>
+          </a:fontRef>
+        </p:style>
+        <p:txBody>
+          <a:bodyPr rtlCol="0" anchor="ctr"/>
+          <a:lstStyle/>
+          <a:p>
+            <a:pPr algn="ctr"/>
+          </a:p>
+        </p:txBody>
+      </p:sp>
+      <p:sp>
+        <p:nvSpPr>
+          <p:cNvPr id="30" name="TextBox 29"/>
+          <p:cNvSpPr txBox="1"/>
+          <p:nvPr/>
+        </p:nvSpPr>
+        <p:spPr>
+          <a:xfrm>
+            <a:off x="640080" y="3913631"/>
+            <a:ext cx="274320" cy="292607"/>
+          </a:xfrm>
+          <a:prstGeom prst="rect">
+            <a:avLst/>
+          </a:prstGeom>
+          <a:noFill/>
+        </p:spPr>
+        <p:txBody>
+          <a:bodyPr wrap="square" anchor="t" lIns="0" rIns="0" tIns="0" bIns="0">
+            <a:spAutoFit/>
+          </a:bodyPr>
+          <a:lstStyle/>
           <a:p>
             <a:pPr algn="l">
               <a:lnSpc>
-                <a:spcPct val="114000"/>
+                <a:spcPct val="112000"/>
               </a:lnSpc>
               <a:spcAft>
-                <a:spcPts val="0"/>
-              </a:spcAft>
-            </a:pPr>
-            <a:r>
-              <a:rPr sz="950" b="0">
+                <a:spcPts val="400"/>
+              </a:spcAft>
+            </a:pPr>
+            <a:r>
+              <a:rPr sz="900" b="1">
+                <a:solidFill>
+                  <a:srgbClr val="13135E"/>
+                </a:solidFill>
+                <a:latin typeface="Arial"/>
+              </a:rPr>
+              <a:t>5</a:t>
+            </a:r>
+          </a:p>
+        </p:txBody>
+      </p:sp>
+      <p:sp>
+        <p:nvSpPr>
+          <p:cNvPr id="31" name="TextBox 30"/>
+          <p:cNvSpPr txBox="1"/>
+          <p:nvPr/>
+        </p:nvSpPr>
+        <p:spPr>
+          <a:xfrm>
+            <a:off x="1097280" y="3913631"/>
+            <a:ext cx="3657600" cy="292607"/>
+          </a:xfrm>
+          <a:prstGeom prst="rect">
+            <a:avLst/>
+          </a:prstGeom>
+          <a:noFill/>
+        </p:spPr>
+        <p:txBody>
+          <a:bodyPr wrap="square" anchor="t" lIns="0" rIns="0" tIns="0" bIns="0">
+            <a:spAutoFit/>
+          </a:bodyPr>
+          <a:lstStyle/>
+          <a:p>
+            <a:pPr algn="l">
+              <a:lnSpc>
+                <a:spcPct val="112000"/>
+              </a:lnSpc>
+              <a:spcAft>
+                <a:spcPts val="400"/>
+              </a:spcAft>
+            </a:pPr>
+            <a:r>
+              <a:rPr sz="900" b="0">
                 <a:solidFill>
                   <a:srgbClr val="434343"/>
                 </a:solidFill>
-                <a:latin typeface="Consolas"/>
-              </a:rPr>
-              <a:t/>
-            </a:r>
-          </a:p>
+                <a:latin typeface="Arial"/>
+              </a:rPr>
+              <a:t>Fix it; push again</a:t>
+            </a:r>
+          </a:p>
+        </p:txBody>
+      </p:sp>
+      <p:sp>
+        <p:nvSpPr>
+          <p:cNvPr id="32" name="TextBox 31"/>
+          <p:cNvSpPr txBox="1"/>
+          <p:nvPr/>
+        </p:nvSpPr>
+        <p:spPr>
+          <a:xfrm>
+            <a:off x="4937760" y="3913631"/>
+            <a:ext cx="3566159" cy="292607"/>
+          </a:xfrm>
+          <a:prstGeom prst="rect">
+            <a:avLst/>
+          </a:prstGeom>
+          <a:noFill/>
+        </p:spPr>
+        <p:txBody>
+          <a:bodyPr wrap="square" anchor="t" lIns="0" rIns="0" tIns="0" bIns="0">
+            <a:spAutoFit/>
+          </a:bodyPr>
+          <a:lstStyle/>
           <a:p>
             <a:pPr algn="l">
               <a:lnSpc>
-                <a:spcPct val="114000"/>
+                <a:spcPct val="112000"/>
               </a:lnSpc>
               <a:spcAft>
-                <a:spcPts val="0"/>
-              </a:spcAft>
-            </a:pPr>
-            <a:r>
-              <a:rPr sz="950" b="0">
+                <a:spcPts val="400"/>
+              </a:spcAft>
+            </a:pPr>
+            <a:r>
+              <a:rPr sz="900" b="0">
                 <a:solidFill>
                   <a:srgbClr val="434343"/>
                 </a:solidFill>
-                <a:latin typeface="Consolas"/>
-              </a:rPr>
-              <a:t># in package.json, but called by nothing:</a:t>
-            </a:r>
-          </a:p>
-          <a:p>
-            <a:pPr algn="l">
-              <a:lnSpc>
-                <a:spcPct val="114000"/>
-              </a:lnSpc>
-              <a:spcAft>
-                <a:spcPts val="0"/>
-              </a:spcAft>
-            </a:pPr>
-            <a:r>
-              <a:rPr sz="950" b="0">
-                <a:solidFill>
-                  <a:srgbClr val="434343"/>
-                </a:solidFill>
-                <a:latin typeface="Consolas"/>
-              </a:rPr>
-              <a:t>"format:check": "prettier --check ."</a:t>
-            </a:r>
-          </a:p>
-        </p:txBody>
-      </p:sp>
-      <p:sp>
-        <p:nvSpPr>
-          <p:cNvPr id="12" name="TextBox 11"/>
-          <p:cNvSpPr txBox="1"/>
-          <p:nvPr/>
-        </p:nvSpPr>
-        <p:spPr>
-          <a:xfrm>
-            <a:off x="548640" y="4279392"/>
-            <a:ext cx="7863840" cy="420624"/>
+                <a:latin typeface="Arial"/>
+              </a:rPr>
+              <a:t>GREEN — red-then-green is your Checkpoint 3 evidence</a:t>
+            </a:r>
+          </a:p>
+        </p:txBody>
+      </p:sp>
+      <p:sp>
+        <p:nvSpPr>
+          <p:cNvPr id="33" name="TextBox 32"/>
+          <p:cNvSpPr txBox="1"/>
+          <p:nvPr/>
+        </p:nvSpPr>
+        <p:spPr>
+          <a:xfrm>
+            <a:off x="548640" y="4315968"/>
+            <a:ext cx="7863840" cy="402336"/>
           </a:xfrm>
           <a:prstGeom prst="rect">
             <a:avLst/>
@@ -16980,46 +18203,7 @@
                 </a:solidFill>
                 <a:latin typeface="Arial"/>
               </a:rPr>
-              <a:t>One rule here is written but never run — find it before you build. That hunt ("which of our rules are enforced, which are just written down?") is the skill to take home. Your governance.yml sits right next to this file, one more check beside lint.</a:t>
-            </a:r>
-          </a:p>
-        </p:txBody>
-      </p:sp>
-      <p:sp>
-        <p:nvSpPr>
-          <p:cNvPr id="13" name="TextBox 12"/>
-          <p:cNvSpPr txBox="1"/>
-          <p:nvPr/>
-        </p:nvSpPr>
-        <p:spPr>
-          <a:xfrm>
-            <a:off x="6675120" y="1728216"/>
-            <a:ext cx="1920240" cy="219456"/>
-          </a:xfrm>
-          <a:prstGeom prst="rect">
-            <a:avLst/>
-          </a:prstGeom>
-          <a:noFill/>
-        </p:spPr>
-        <p:txBody>
-          <a:bodyPr wrap="square" anchor="t" lIns="0" rIns="0" tIns="0" bIns="0">
-            <a:spAutoFit/>
-          </a:bodyPr>
-          <a:lstStyle/>
-          <a:p>
-            <a:pPr algn="r">
-              <a:spcAft>
-                <a:spcPts val="400"/>
-              </a:spcAft>
-            </a:pPr>
-            <a:r>
-              <a:rPr sz="850" b="0">
-                <a:solidFill>
-                  <a:srgbClr val="999999"/>
-                </a:solidFill>
-                <a:latin typeface="Arial"/>
-              </a:rPr>
-              <a:t>.github/workflows/ci.yml</a:t>
+              <a:t>Keep the skeleton's fetch-depth: 0 — the default shallow clone breaks the diff against the base branch with an unhelpful error.</a:t>
             </a:r>
           </a:p>
         </p:txBody>
@@ -17188,7 +18372,7 @@
                 </a:solidFill>
                 <a:latin typeface="Arial"/>
               </a:rPr>
-              <a:t>YOUR RULE · MERGE TIME</a:t>
+              <a:t>CHECKPOINT</a:t>
             </a:r>
           </a:p>
         </p:txBody>
@@ -17227,7 +18411,7 @@
                 </a:solidFill>
                 <a:latin typeface="Arial"/>
               </a:rPr>
-              <a:t>The same rule at merge time</a:t>
+              <a:t>Checkpoint 3</a:t>
             </a:r>
           </a:p>
         </p:txBody>
@@ -17235,48 +18419,6 @@
       <p:sp>
         <p:nvSpPr>
           <p:cNvPr id="7" name="TextBox 6"/>
-          <p:cNvSpPr txBox="1"/>
-          <p:nvPr/>
-        </p:nvSpPr>
-        <p:spPr>
-          <a:xfrm>
-            <a:off x="548640" y="1316736"/>
-            <a:ext cx="7863840" cy="566928"/>
-          </a:xfrm>
-          <a:prstGeom prst="rect">
-            <a:avLst/>
-          </a:prstGeom>
-          <a:noFill/>
-        </p:spPr>
-        <p:txBody>
-          <a:bodyPr wrap="square" anchor="t" lIns="0" rIns="0" tIns="0" bIns="0">
-            <a:spAutoFit/>
-          </a:bodyPr>
-          <a:lstStyle/>
-          <a:p>
-            <a:pPr algn="l">
-              <a:lnSpc>
-                <a:spcPct val="125000"/>
-              </a:lnSpc>
-              <a:spcAft>
-                <a:spcPts val="400"/>
-              </a:spcAft>
-            </a:pPr>
-            <a:r>
-              <a:rPr sz="1200" b="0">
-                <a:solidFill>
-                  <a:srgbClr val="434343"/>
-                </a:solidFill>
-                <a:latin typeface="Arial"/>
-              </a:rPr>
-              <a:t>Ten minutes. The same rule, at the moment --no-verify cannot reach — it joins lint, typecheck, and tests in the file you just read.</a:t>
-            </a:r>
-          </a:p>
-        </p:txBody>
-      </p:sp>
-      <p:sp>
-        <p:nvSpPr>
-          <p:cNvPr id="8" name="TextBox 7"/>
           <p:cNvSpPr txBox="1"/>
           <p:nvPr/>
         </p:nvSpPr>
@@ -17315,14 +18457,141 @@
       </p:sp>
       <p:sp>
         <p:nvSpPr>
-          <p:cNvPr id="9" name="TextBox 8"/>
-          <p:cNvSpPr txBox="1"/>
-          <p:nvPr/>
-        </p:nvSpPr>
-        <p:spPr>
-          <a:xfrm>
-            <a:off x="548640" y="1783080"/>
-            <a:ext cx="7863840" cy="2935224"/>
+          <p:cNvPr id="8" name="Rectangle 7"/>
+          <p:cNvSpPr/>
+          <p:nvPr/>
+        </p:nvSpPr>
+        <p:spPr>
+          <a:xfrm>
+            <a:off x="548640" y="1691640"/>
+            <a:ext cx="8046720" cy="1417320"/>
+          </a:xfrm>
+          <a:prstGeom prst="rect">
+            <a:avLst/>
+          </a:prstGeom>
+          <a:solidFill>
+            <a:srgbClr val="E2ECFF"/>
+          </a:solidFill>
+          <a:ln>
+            <a:noFill/>
+          </a:ln>
+          <a:effectLst/>
+        </p:spPr>
+        <p:style>
+          <a:lnRef idx="1">
+            <a:schemeClr val="accent1"/>
+          </a:lnRef>
+          <a:fillRef idx="3">
+            <a:schemeClr val="accent1"/>
+          </a:fillRef>
+          <a:effectRef idx="2">
+            <a:schemeClr val="accent1"/>
+          </a:effectRef>
+          <a:fontRef idx="minor">
+            <a:schemeClr val="lt1"/>
+          </a:fontRef>
+        </p:style>
+        <p:txBody>
+          <a:bodyPr rtlCol="0" anchor="ctr"/>
+          <a:lstStyle/>
+          <a:p>
+            <a:pPr algn="ctr"/>
+          </a:p>
+        </p:txBody>
+      </p:sp>
+      <p:sp>
+        <p:nvSpPr>
+          <p:cNvPr id="9" name="Rectangle 8"/>
+          <p:cNvSpPr/>
+          <p:nvPr/>
+        </p:nvSpPr>
+        <p:spPr>
+          <a:xfrm>
+            <a:off x="548640" y="1691640"/>
+            <a:ext cx="54864" cy="1417320"/>
+          </a:xfrm>
+          <a:prstGeom prst="rect">
+            <a:avLst/>
+          </a:prstGeom>
+          <a:solidFill>
+            <a:srgbClr val="1B7F4B"/>
+          </a:solidFill>
+          <a:ln>
+            <a:noFill/>
+          </a:ln>
+          <a:effectLst/>
+        </p:spPr>
+        <p:style>
+          <a:lnRef idx="1">
+            <a:schemeClr val="accent1"/>
+          </a:lnRef>
+          <a:fillRef idx="3">
+            <a:schemeClr val="accent1"/>
+          </a:fillRef>
+          <a:effectRef idx="2">
+            <a:schemeClr val="accent1"/>
+          </a:effectRef>
+          <a:fontRef idx="minor">
+            <a:schemeClr val="lt1"/>
+          </a:fontRef>
+        </p:style>
+        <p:txBody>
+          <a:bodyPr rtlCol="0" anchor="ctr"/>
+          <a:lstStyle/>
+          <a:p>
+            <a:pPr algn="ctr"/>
+          </a:p>
+        </p:txBody>
+      </p:sp>
+      <p:sp>
+        <p:nvSpPr>
+          <p:cNvPr id="10" name="TextBox 9"/>
+          <p:cNvSpPr txBox="1"/>
+          <p:nvPr/>
+        </p:nvSpPr>
+        <p:spPr>
+          <a:xfrm>
+            <a:off x="868680" y="1874519"/>
+            <a:ext cx="7498079" cy="310896"/>
+          </a:xfrm>
+          <a:prstGeom prst="rect">
+            <a:avLst/>
+          </a:prstGeom>
+          <a:noFill/>
+        </p:spPr>
+        <p:txBody>
+          <a:bodyPr wrap="square" anchor="t" lIns="0" rIns="0" tIns="0" bIns="0">
+            <a:spAutoFit/>
+          </a:bodyPr>
+          <a:lstStyle/>
+          <a:p>
+            <a:pPr algn="l">
+              <a:spcAft>
+                <a:spcPts val="400"/>
+              </a:spcAft>
+            </a:pPr>
+            <a:r>
+              <a:rPr sz="950" b="1">
+                <a:solidFill>
+                  <a:srgbClr val="1B7F4B"/>
+                </a:solidFill>
+                <a:latin typeface="Arial"/>
+              </a:rPr>
+              <a:t>NOBODY ADVANCES UNTIL THIS IS TRUE</a:t>
+            </a:r>
+          </a:p>
+        </p:txBody>
+      </p:sp>
+      <p:sp>
+        <p:nvSpPr>
+          <p:cNvPr id="11" name="TextBox 10"/>
+          <p:cNvSpPr txBox="1"/>
+          <p:nvPr/>
+        </p:nvSpPr>
+        <p:spPr>
+          <a:xfrm>
+            <a:off x="868680" y="2240280"/>
+            <a:ext cx="7498079" cy="777240"/>
           </a:xfrm>
           <a:prstGeom prst="rect">
             <a:avLst/>
@@ -17337,149 +18606,62 @@
           <a:p>
             <a:pPr algn="l">
               <a:lnSpc>
-                <a:spcPct val="122000"/>
+                <a:spcPct val="120000"/>
               </a:lnSpc>
               <a:spcAft>
-                <a:spcPts val="900"/>
-              </a:spcAft>
-            </a:pPr>
-            <a:r>
-              <a:rPr sz="1250" b="1">
-                <a:solidFill>
-                  <a:srgbClr val="403FE8"/>
-                </a:solidFill>
-                <a:latin typeface="Arial"/>
-              </a:rPr>
-              <a:t>•  </a:t>
-            </a:r>
-            <a:r>
-              <a:rPr sz="1250" b="1">
+                <a:spcPts val="400"/>
+              </a:spcAft>
+            </a:pPr>
+            <a:r>
+              <a:rPr sz="1400" b="1">
                 <a:solidFill>
                   <a:srgbClr val="13135E"/>
                 </a:solidFill>
                 <a:latin typeface="Arial"/>
               </a:rPr>
-              <a:t>The hook stops the agent. This stops anyone. </a:t>
-            </a:r>
-            <a:r>
-              <a:rPr sz="1250" b="0">
+              <a:t>Your gate fails a PR that violates your rule, and passes one that does not.</a:t>
+            </a:r>
+          </a:p>
+        </p:txBody>
+      </p:sp>
+      <p:sp>
+        <p:nvSpPr>
+          <p:cNvPr id="12" name="TextBox 11"/>
+          <p:cNvSpPr txBox="1"/>
+          <p:nvPr/>
+        </p:nvSpPr>
+        <p:spPr>
+          <a:xfrm>
+            <a:off x="548640" y="3337560"/>
+            <a:ext cx="7863840" cy="1005840"/>
+          </a:xfrm>
+          <a:prstGeom prst="rect">
+            <a:avLst/>
+          </a:prstGeom>
+          <a:noFill/>
+        </p:spPr>
+        <p:txBody>
+          <a:bodyPr wrap="square" anchor="t" lIns="0" rIns="0" tIns="0" bIns="0">
+            <a:spAutoFit/>
+          </a:bodyPr>
+          <a:lstStyle/>
+          <a:p>
+            <a:pPr algn="l">
+              <a:lnSpc>
+                <a:spcPct val="130000"/>
+              </a:lnSpc>
+              <a:spcAft>
+                <a:spcPts val="400"/>
+              </a:spcAft>
+            </a:pPr>
+            <a:r>
+              <a:rPr sz="1150" b="0">
                 <a:solidFill>
                   <a:srgbClr val="434343"/>
                 </a:solidFill>
                 <a:latin typeface="Arial"/>
               </a:rPr>
-              <a:t>Including a human who never opened Claude Code.</a:t>
-            </a:r>
-          </a:p>
-          <a:p>
-            <a:pPr algn="l">
-              <a:lnSpc>
-                <a:spcPct val="122000"/>
-              </a:lnSpc>
-              <a:spcAft>
-                <a:spcPts val="900"/>
-              </a:spcAft>
-            </a:pPr>
-            <a:r>
-              <a:rPr sz="1250" b="1">
-                <a:solidFill>
-                  <a:srgbClr val="403FE8"/>
-                </a:solidFill>
-                <a:latin typeface="Arial"/>
-              </a:rPr>
-              <a:t>•  </a:t>
-            </a:r>
-            <a:r>
-              <a:rPr sz="1250" b="1">
-                <a:solidFill>
-                  <a:srgbClr val="13135E"/>
-                </a:solidFill>
-                <a:latin typeface="Arial"/>
-              </a:rPr>
-              <a:t>Start from the gate skeleton. </a:t>
-            </a:r>
-            <a:r>
-              <a:rPr sz="1250" b="0">
-                <a:solidFill>
-                  <a:srgbClr val="434343"/>
-                </a:solidFill>
-                <a:latin typeface="Arial"/>
-              </a:rPr>
-              <a:t>`docs/labs/snippets/governance-gate.yml` → `.github/workflows/governance.yml`; encode your rule's check.</a:t>
-            </a:r>
-          </a:p>
-          <a:p>
-            <a:pPr algn="l">
-              <a:lnSpc>
-                <a:spcPct val="122000"/>
-              </a:lnSpc>
-              <a:spcAft>
-                <a:spcPts val="900"/>
-              </a:spcAft>
-            </a:pPr>
-            <a:r>
-              <a:rPr sz="1250" b="1">
-                <a:solidFill>
-                  <a:srgbClr val="403FE8"/>
-                </a:solidFill>
-                <a:latin typeface="Arial"/>
-              </a:rPr>
-              <a:t>•  </a:t>
-            </a:r>
-            <a:r>
-              <a:rPr sz="1250" b="1">
-                <a:solidFill>
-                  <a:srgbClr val="13135E"/>
-                </a:solidFill>
-                <a:latin typeface="Arial"/>
-              </a:rPr>
-              <a:t>`fetch-depth: 0` or it breaks. </a:t>
-            </a:r>
-            <a:r>
-              <a:rPr sz="1250" b="0">
-                <a:solidFill>
-                  <a:srgbClr val="434343"/>
-                </a:solidFill>
-                <a:latin typeface="Arial"/>
-              </a:rPr>
-              <a:t>The default shallow clone makes any diff against the base branch fail with an unhelpful error.</a:t>
-            </a:r>
-          </a:p>
-          <a:p>
-            <a:pPr algn="l">
-              <a:lnSpc>
-                <a:spcPct val="122000"/>
-              </a:lnSpc>
-              <a:spcAft>
-                <a:spcPts val="900"/>
-              </a:spcAft>
-            </a:pPr>
-            <a:r>
-              <a:rPr sz="1250" b="1">
-                <a:solidFill>
-                  <a:srgbClr val="403FE8"/>
-                </a:solidFill>
-                <a:latin typeface="Arial"/>
-              </a:rPr>
-              <a:t>•  </a:t>
-            </a:r>
-            <a:r>
-              <a:rPr sz="1250" b="1">
-                <a:solidFill>
-                  <a:srgbClr val="13135E"/>
-                </a:solidFill>
-                <a:latin typeface="Arial"/>
-              </a:rPr>
-              <a:t>Open a draft PR to see it fire. </a:t>
-            </a:r>
-            <a:r>
-              <a:rPr sz="1250" b="0">
-                <a:solidFill>
-                  <a:srgbClr val="434343"/>
-                </a:solidFill>
-                <a:latin typeface="Arial"/>
-              </a:rPr>
-              <a:t>`on: pull_request` — a pushed branch alone runs nothing, and your gate will look broken when it is merely unasked.</a:t>
+              <a:t>Paste your PR link in chat with the check visibly red then green. The run URL is this layer's evidence — the hook text's merge-time twin.</a:t>
             </a:r>
           </a:p>
         </p:txBody>
@@ -17648,7 +18830,7 @@
                 </a:solidFill>
                 <a:latin typeface="Arial"/>
               </a:rPr>
-              <a:t>CHECKPOINT</a:t>
+              <a:t>REVIEW</a:t>
             </a:r>
           </a:p>
         </p:txBody>
@@ -17687,7 +18869,7 @@
                 </a:solidFill>
                 <a:latin typeface="Arial"/>
               </a:rPr>
-              <a:t>Checkpoint 3</a:t>
+              <a:t>Let us compare</a:t>
             </a:r>
           </a:p>
         </p:txBody>
@@ -17695,6 +18877,48 @@
       <p:sp>
         <p:nvSpPr>
           <p:cNvPr id="7" name="TextBox 6"/>
+          <p:cNvSpPr txBox="1"/>
+          <p:nvPr/>
+        </p:nvSpPr>
+        <p:spPr>
+          <a:xfrm>
+            <a:off x="548640" y="1316736"/>
+            <a:ext cx="7863840" cy="566928"/>
+          </a:xfrm>
+          <a:prstGeom prst="rect">
+            <a:avLst/>
+          </a:prstGeom>
+          <a:noFill/>
+        </p:spPr>
+        <p:txBody>
+          <a:bodyPr wrap="square" anchor="t" lIns="0" rIns="0" tIns="0" bIns="0">
+            <a:spAutoFit/>
+          </a:bodyPr>
+          <a:lstStyle/>
+          <a:p>
+            <a:pPr algn="l">
+              <a:lnSpc>
+                <a:spcPct val="125000"/>
+              </a:lnSpc>
+              <a:spcAft>
+                <a:spcPts val="400"/>
+              </a:spcAft>
+            </a:pPr>
+            <a:r>
+              <a:rPr sz="1200" b="0">
+                <a:solidFill>
+                  <a:srgbClr val="434343"/>
+                </a:solidFill>
+                <a:latin typeface="Arial"/>
+              </a:rPr>
+              <a:t>Ten minutes. Two or three volunteers share their screen — not everyone.</a:t>
+            </a:r>
+          </a:p>
+        </p:txBody>
+      </p:sp>
+      <p:sp>
+        <p:nvSpPr>
+          <p:cNvPr id="8" name="TextBox 7"/>
           <p:cNvSpPr txBox="1"/>
           <p:nvPr/>
         </p:nvSpPr>
@@ -17733,141 +18957,14 @@
       </p:sp>
       <p:sp>
         <p:nvSpPr>
-          <p:cNvPr id="8" name="Rectangle 7"/>
-          <p:cNvSpPr/>
-          <p:nvPr/>
-        </p:nvSpPr>
-        <p:spPr>
-          <a:xfrm>
-            <a:off x="548640" y="1691640"/>
-            <a:ext cx="8046720" cy="1417320"/>
-          </a:xfrm>
-          <a:prstGeom prst="rect">
-            <a:avLst/>
-          </a:prstGeom>
-          <a:solidFill>
-            <a:srgbClr val="E2ECFF"/>
-          </a:solidFill>
-          <a:ln>
-            <a:noFill/>
-          </a:ln>
-          <a:effectLst/>
-        </p:spPr>
-        <p:style>
-          <a:lnRef idx="1">
-            <a:schemeClr val="accent1"/>
-          </a:lnRef>
-          <a:fillRef idx="3">
-            <a:schemeClr val="accent1"/>
-          </a:fillRef>
-          <a:effectRef idx="2">
-            <a:schemeClr val="accent1"/>
-          </a:effectRef>
-          <a:fontRef idx="minor">
-            <a:schemeClr val="lt1"/>
-          </a:fontRef>
-        </p:style>
-        <p:txBody>
-          <a:bodyPr rtlCol="0" anchor="ctr"/>
-          <a:lstStyle/>
-          <a:p>
-            <a:pPr algn="ctr"/>
-          </a:p>
-        </p:txBody>
-      </p:sp>
-      <p:sp>
-        <p:nvSpPr>
-          <p:cNvPr id="9" name="Rectangle 8"/>
-          <p:cNvSpPr/>
-          <p:nvPr/>
-        </p:nvSpPr>
-        <p:spPr>
-          <a:xfrm>
-            <a:off x="548640" y="1691640"/>
-            <a:ext cx="54864" cy="1417320"/>
-          </a:xfrm>
-          <a:prstGeom prst="rect">
-            <a:avLst/>
-          </a:prstGeom>
-          <a:solidFill>
-            <a:srgbClr val="1B7F4B"/>
-          </a:solidFill>
-          <a:ln>
-            <a:noFill/>
-          </a:ln>
-          <a:effectLst/>
-        </p:spPr>
-        <p:style>
-          <a:lnRef idx="1">
-            <a:schemeClr val="accent1"/>
-          </a:lnRef>
-          <a:fillRef idx="3">
-            <a:schemeClr val="accent1"/>
-          </a:fillRef>
-          <a:effectRef idx="2">
-            <a:schemeClr val="accent1"/>
-          </a:effectRef>
-          <a:fontRef idx="minor">
-            <a:schemeClr val="lt1"/>
-          </a:fontRef>
-        </p:style>
-        <p:txBody>
-          <a:bodyPr rtlCol="0" anchor="ctr"/>
-          <a:lstStyle/>
-          <a:p>
-            <a:pPr algn="ctr"/>
-          </a:p>
-        </p:txBody>
-      </p:sp>
-      <p:sp>
-        <p:nvSpPr>
-          <p:cNvPr id="10" name="TextBox 9"/>
-          <p:cNvSpPr txBox="1"/>
-          <p:nvPr/>
-        </p:nvSpPr>
-        <p:spPr>
-          <a:xfrm>
-            <a:off x="868680" y="1874519"/>
-            <a:ext cx="7498079" cy="310896"/>
-          </a:xfrm>
-          <a:prstGeom prst="rect">
-            <a:avLst/>
-          </a:prstGeom>
-          <a:noFill/>
-        </p:spPr>
-        <p:txBody>
-          <a:bodyPr wrap="square" anchor="t" lIns="0" rIns="0" tIns="0" bIns="0">
-            <a:spAutoFit/>
-          </a:bodyPr>
-          <a:lstStyle/>
-          <a:p>
-            <a:pPr algn="l">
-              <a:spcAft>
-                <a:spcPts val="400"/>
-              </a:spcAft>
-            </a:pPr>
-            <a:r>
-              <a:rPr sz="950" b="1">
-                <a:solidFill>
-                  <a:srgbClr val="1B7F4B"/>
-                </a:solidFill>
-                <a:latin typeface="Arial"/>
-              </a:rPr>
-              <a:t>NOBODY ADVANCES UNTIL THIS IS TRUE</a:t>
-            </a:r>
-          </a:p>
-        </p:txBody>
-      </p:sp>
-      <p:sp>
-        <p:nvSpPr>
-          <p:cNvPr id="11" name="TextBox 10"/>
-          <p:cNvSpPr txBox="1"/>
-          <p:nvPr/>
-        </p:nvSpPr>
-        <p:spPr>
-          <a:xfrm>
-            <a:off x="868680" y="2240280"/>
-            <a:ext cx="7498079" cy="777240"/>
+          <p:cNvPr id="9" name="TextBox 8"/>
+          <p:cNvSpPr txBox="1"/>
+          <p:nvPr/>
+        </p:nvSpPr>
+        <p:spPr>
+          <a:xfrm>
+            <a:off x="548640" y="1783080"/>
+            <a:ext cx="7863840" cy="2935224"/>
           </a:xfrm>
           <a:prstGeom prst="rect">
             <a:avLst/>
@@ -17882,62 +18979,141 @@
           <a:p>
             <a:pPr algn="l">
               <a:lnSpc>
-                <a:spcPct val="120000"/>
+                <a:spcPct val="122000"/>
               </a:lnSpc>
               <a:spcAft>
-                <a:spcPts val="400"/>
-              </a:spcAft>
-            </a:pPr>
-            <a:r>
-              <a:rPr sz="1400" b="1">
-                <a:solidFill>
-                  <a:srgbClr val="13135E"/>
-                </a:solidFill>
-                <a:latin typeface="Arial"/>
-              </a:rPr>
-              <a:t>Your gate fails a PR that violates your rule, and passes one that does not.</a:t>
-            </a:r>
-          </a:p>
-        </p:txBody>
-      </p:sp>
-      <p:sp>
-        <p:nvSpPr>
-          <p:cNvPr id="12" name="TextBox 11"/>
-          <p:cNvSpPr txBox="1"/>
-          <p:nvPr/>
-        </p:nvSpPr>
-        <p:spPr>
-          <a:xfrm>
-            <a:off x="548640" y="3337560"/>
-            <a:ext cx="7863840" cy="1005840"/>
-          </a:xfrm>
-          <a:prstGeom prst="rect">
-            <a:avLst/>
-          </a:prstGeom>
-          <a:noFill/>
-        </p:spPr>
-        <p:txBody>
-          <a:bodyPr wrap="square" anchor="t" lIns="0" rIns="0" tIns="0" bIns="0">
-            <a:spAutoFit/>
-          </a:bodyPr>
-          <a:lstStyle/>
+                <a:spcPts val="900"/>
+              </a:spcAft>
+            </a:pPr>
+            <a:r>
+              <a:rPr sz="1250" b="1">
+                <a:solidFill>
+                  <a:srgbClr val="403FE8"/>
+                </a:solidFill>
+                <a:latin typeface="Arial"/>
+              </a:rPr>
+              <a:t>•  </a:t>
+            </a:r>
+            <a:r>
+              <a:rPr sz="1250" b="0">
+                <a:solidFill>
+                  <a:srgbClr val="434343"/>
+                </a:solidFill>
+                <a:latin typeface="Arial"/>
+              </a:rPr>
+              <a:t>Which rule did you pick — and why that one?</a:t>
+            </a:r>
+          </a:p>
           <a:p>
             <a:pPr algn="l">
               <a:lnSpc>
-                <a:spcPct val="130000"/>
+                <a:spcPct val="122000"/>
               </a:lnSpc>
               <a:spcAft>
-                <a:spcPts val="400"/>
-              </a:spcAft>
-            </a:pPr>
-            <a:r>
-              <a:rPr sz="1150" b="0">
+                <a:spcPts val="900"/>
+              </a:spcAft>
+            </a:pPr>
+            <a:r>
+              <a:rPr sz="1250" b="1">
+                <a:solidFill>
+                  <a:srgbClr val="403FE8"/>
+                </a:solidFill>
+                <a:latin typeface="Arial"/>
+              </a:rPr>
+              <a:t>•  </a:t>
+            </a:r>
+            <a:r>
+              <a:rPr sz="1250" b="0">
                 <a:solidFill>
                   <a:srgbClr val="434343"/>
                 </a:solidFill>
                 <a:latin typeface="Arial"/>
               </a:rPr>
-              <a:t>Paste your PR link in chat with the check visibly red then green. The run URL is this layer's evidence — the hook text's merge-time twin.</a:t>
+              <a:t>Whose hook has a false positive — and how did you find out?</a:t>
+            </a:r>
+          </a:p>
+          <a:p>
+            <a:pPr algn="l">
+              <a:lnSpc>
+                <a:spcPct val="122000"/>
+              </a:lnSpc>
+              <a:spcAft>
+                <a:spcPts val="900"/>
+              </a:spcAft>
+            </a:pPr>
+            <a:r>
+              <a:rPr sz="1250" b="1">
+                <a:solidFill>
+                  <a:srgbClr val="403FE8"/>
+                </a:solidFill>
+                <a:latin typeface="Arial"/>
+              </a:rPr>
+              <a:t>•  </a:t>
+            </a:r>
+            <a:r>
+              <a:rPr sz="1250" b="0">
+                <a:solidFill>
+                  <a:srgbClr val="434343"/>
+                </a:solidFill>
+                <a:latin typeface="Arial"/>
+              </a:rPr>
+              <a:t>Who chose nudge over block, and what was the reasoning?</a:t>
+            </a:r>
+          </a:p>
+          <a:p>
+            <a:pPr algn="l">
+              <a:lnSpc>
+                <a:spcPct val="122000"/>
+              </a:lnSpc>
+              <a:spcAft>
+                <a:spcPts val="900"/>
+              </a:spcAft>
+            </a:pPr>
+            <a:r>
+              <a:rPr sz="1250" b="1">
+                <a:solidFill>
+                  <a:srgbClr val="403FE8"/>
+                </a:solidFill>
+                <a:latin typeface="Arial"/>
+              </a:rPr>
+              <a:t>•  </a:t>
+            </a:r>
+            <a:r>
+              <a:rPr sz="1250" b="0">
+                <a:solidFill>
+                  <a:srgbClr val="434343"/>
+                </a:solidFill>
+                <a:latin typeface="Arial"/>
+              </a:rPr>
+              <a:t>What does your gate do on a docs-only PR?</a:t>
+            </a:r>
+          </a:p>
+          <a:p>
+            <a:pPr algn="l">
+              <a:lnSpc>
+                <a:spcPct val="122000"/>
+              </a:lnSpc>
+              <a:spcAft>
+                <a:spcPts val="900"/>
+              </a:spcAft>
+            </a:pPr>
+            <a:r>
+              <a:rPr sz="1250" b="1">
+                <a:solidFill>
+                  <a:srgbClr val="403FE8"/>
+                </a:solidFill>
+                <a:latin typeface="Arial"/>
+              </a:rPr>
+              <a:t>•  </a:t>
+            </a:r>
+            <a:r>
+              <a:rPr sz="1250" b="0">
+                <a:solidFill>
+                  <a:srgbClr val="434343"/>
+                </a:solidFill>
+                <a:latin typeface="Arial"/>
+              </a:rPr>
+              <a:t>Which rule would you take to YOUR repo tomorrow?</a:t>
             </a:r>
           </a:p>
         </p:txBody>
@@ -18106,7 +19282,7 @@
                 </a:solidFill>
                 <a:latin typeface="Arial"/>
               </a:rPr>
-              <a:t>REVIEW</a:t>
+              <a:t>HAND-OFF</a:t>
             </a:r>
           </a:p>
         </p:txBody>
@@ -18145,7 +19321,7 @@
                 </a:solidFill>
                 <a:latin typeface="Arial"/>
               </a:rPr>
-              <a:t>Let us compare</a:t>
+              <a:t>The sixth artifact, and it is yours</a:t>
             </a:r>
           </a:p>
         </p:txBody>
@@ -18187,7 +19363,7 @@
                 </a:solidFill>
                 <a:latin typeface="Arial"/>
               </a:rPr>
-              <a:t>Ten minutes. Two or three volunteers share their screen — not everyone.</a:t>
+              <a:t>Five governance artifacts live inside a repo — CLAUDE.md, ADR, NFR, recipe, rules file. The sixth is the only Collective-layer one — how a standard reaches every repo — and we are deliberately not handing you the answer, because choosing the mechanism, the rung, and the owner IS the roll-up.</a:t>
             </a:r>
           </a:p>
         </p:txBody>
@@ -18239,8 +19415,47 @@
         </p:nvSpPr>
         <p:spPr>
           <a:xfrm>
-            <a:off x="548640" y="1783080"/>
-            <a:ext cx="7863840" cy="2935224"/>
+            <a:off x="548640" y="2011680"/>
+            <a:ext cx="3703320" cy="274320"/>
+          </a:xfrm>
+          <a:prstGeom prst="rect">
+            <a:avLst/>
+          </a:prstGeom>
+          <a:noFill/>
+        </p:spPr>
+        <p:txBody>
+          <a:bodyPr wrap="square" anchor="t" lIns="0" rIns="0" tIns="0" bIns="0">
+            <a:spAutoFit/>
+          </a:bodyPr>
+          <a:lstStyle/>
+          <a:p>
+            <a:pPr algn="l">
+              <a:spcAft>
+                <a:spcPts val="400"/>
+              </a:spcAft>
+            </a:pPr>
+            <a:r>
+              <a:rPr sz="950" b="1">
+                <a:solidFill>
+                  <a:srgbClr val="403FE8"/>
+                </a:solidFill>
+                <a:latin typeface="Arial"/>
+              </a:rPr>
+              <a:t>WHAT THE GUIDE GIVES YOU</a:t>
+            </a:r>
+          </a:p>
+        </p:txBody>
+      </p:sp>
+      <p:sp>
+        <p:nvSpPr>
+          <p:cNvPr id="10" name="TextBox 9"/>
+          <p:cNvSpPr txBox="1"/>
+          <p:nvPr/>
+        </p:nvSpPr>
+        <p:spPr>
+          <a:xfrm>
+            <a:off x="548640" y="2377440"/>
+            <a:ext cx="3703320" cy="2249424"/>
           </a:xfrm>
           <a:prstGeom prst="rect">
             <a:avLst/>
@@ -18255,141 +19470,557 @@
           <a:p>
             <a:pPr algn="l">
               <a:lnSpc>
-                <a:spcPct val="122000"/>
+                <a:spcPct val="120000"/>
               </a:lnSpc>
               <a:spcAft>
-                <a:spcPts val="900"/>
-              </a:spcAft>
-            </a:pPr>
-            <a:r>
-              <a:rPr sz="1250" b="1">
-                <a:solidFill>
-                  <a:srgbClr val="403FE8"/>
+                <a:spcPts val="800"/>
+              </a:spcAft>
+            </a:pPr>
+            <a:r>
+              <a:rPr sz="1100" b="1">
+                <a:solidFill>
+                  <a:srgbClr val="A9B7F7"/>
                 </a:solidFill>
                 <a:latin typeface="Arial"/>
               </a:rPr>
               <a:t>•  </a:t>
             </a:r>
             <a:r>
-              <a:rPr sz="1250" b="0">
+              <a:rPr sz="1100" b="0">
                 <a:solidFill>
                   <a:srgbClr val="434343"/>
                 </a:solidFill>
                 <a:latin typeface="Arial"/>
               </a:rPr>
-              <a:t>Which rule did you pick — and why that one?</a:t>
+              <a:t>Four words that carry it: standard, drift, pin, enforce.</a:t>
             </a:r>
           </a:p>
           <a:p>
             <a:pPr algn="l">
               <a:lnSpc>
-                <a:spcPct val="122000"/>
+                <a:spcPct val="120000"/>
               </a:lnSpc>
               <a:spcAft>
-                <a:spcPts val="900"/>
-              </a:spcAft>
-            </a:pPr>
-            <a:r>
-              <a:rPr sz="1250" b="1">
-                <a:solidFill>
-                  <a:srgbClr val="403FE8"/>
+                <a:spcPts val="800"/>
+              </a:spcAft>
+            </a:pPr>
+            <a:r>
+              <a:rPr sz="1100" b="1">
+                <a:solidFill>
+                  <a:srgbClr val="A9B7F7"/>
                 </a:solidFill>
                 <a:latin typeface="Arial"/>
               </a:rPr>
               <a:t>•  </a:t>
             </a:r>
             <a:r>
-              <a:rPr sz="1250" b="0">
+              <a:rPr sz="1100" b="0">
                 <a:solidFill>
                   <a:srgbClr val="434343"/>
                 </a:solidFill>
                 <a:latin typeface="Arial"/>
               </a:rPr>
-              <a:t>Whose hook has a false positive — and how did you find out?</a:t>
+              <a:t>CRAWL: one repo + two CLAUDE.md lines — a 4-step checklist, ~30 min.</a:t>
             </a:r>
           </a:p>
           <a:p>
             <a:pPr algn="l">
               <a:lnSpc>
-                <a:spcPct val="122000"/>
+                <a:spcPct val="120000"/>
               </a:lnSpc>
               <a:spcAft>
-                <a:spcPts val="900"/>
-              </a:spcAft>
-            </a:pPr>
-            <a:r>
-              <a:rPr sz="1250" b="1">
-                <a:solidFill>
-                  <a:srgbClr val="403FE8"/>
+                <a:spcPts val="800"/>
+              </a:spcAft>
+            </a:pPr>
+            <a:r>
+              <a:rPr sz="1100" b="1">
+                <a:solidFill>
+                  <a:srgbClr val="A9B7F7"/>
                 </a:solidFill>
                 <a:latin typeface="Arial"/>
               </a:rPr>
               <a:t>•  </a:t>
             </a:r>
             <a:r>
-              <a:rPr sz="1250" b="0">
+              <a:rPr sz="1100" b="0">
                 <a:solidFill>
                   <a:srgbClr val="434343"/>
                 </a:solidFill>
                 <a:latin typeface="Arial"/>
               </a:rPr>
-              <a:t>Who chose nudge over block, and what was the reasoning?</a:t>
+              <a:t>WALK: queryable (3 tool options, traps named) + pinned copies.</a:t>
             </a:r>
           </a:p>
           <a:p>
             <a:pPr algn="l">
               <a:lnSpc>
-                <a:spcPct val="122000"/>
+                <a:spcPct val="120000"/>
               </a:lnSpc>
               <a:spcAft>
-                <a:spcPts val="900"/>
-              </a:spcAft>
-            </a:pPr>
-            <a:r>
-              <a:rPr sz="1250" b="1">
-                <a:solidFill>
-                  <a:srgbClr val="403FE8"/>
+                <a:spcPts val="800"/>
+              </a:spcAft>
+            </a:pPr>
+            <a:r>
+              <a:rPr sz="1100" b="1">
+                <a:solidFill>
+                  <a:srgbClr val="A9B7F7"/>
                 </a:solidFill>
                 <a:latin typeface="Arial"/>
               </a:rPr>
               <a:t>•  </a:t>
             </a:r>
             <a:r>
-              <a:rPr sz="1250" b="0">
+              <a:rPr sz="1100" b="0">
                 <a:solidFill>
                   <a:srgbClr val="434343"/>
                 </a:solidFill>
                 <a:latin typeface="Arial"/>
               </a:rPr>
-              <a:t>What does your gate do on a docs-only PR?</a:t>
+              <a:t>RUN: gates, served docs, a versioned plugin — each needs an owner.</a:t>
             </a:r>
           </a:p>
           <a:p>
             <a:pPr algn="l">
               <a:lnSpc>
-                <a:spcPct val="122000"/>
+                <a:spcPct val="120000"/>
               </a:lnSpc>
               <a:spcAft>
-                <a:spcPts val="900"/>
-              </a:spcAft>
-            </a:pPr>
-            <a:r>
-              <a:rPr sz="1250" b="1">
-                <a:solidFill>
-                  <a:srgbClr val="403FE8"/>
+                <a:spcPts val="800"/>
+              </a:spcAft>
+            </a:pPr>
+            <a:r>
+              <a:rPr sz="1100" b="1">
+                <a:solidFill>
+                  <a:srgbClr val="A9B7F7"/>
                 </a:solidFill>
                 <a:latin typeface="Arial"/>
               </a:rPr>
               <a:t>•  </a:t>
             </a:r>
             <a:r>
-              <a:rPr sz="1250" b="0">
+              <a:rPr sz="1100" b="0">
                 <a:solidFill>
                   <a:srgbClr val="434343"/>
                 </a:solidFill>
                 <a:latin typeface="Arial"/>
               </a:rPr>
-              <a:t>Which rule would you take to YOUR repo tomorrow?</a:t>
+              <a:t>And a fill-in template for recording what you chose.</a:t>
+            </a:r>
+          </a:p>
+        </p:txBody>
+      </p:sp>
+      <p:sp>
+        <p:nvSpPr>
+          <p:cNvPr id="11" name="Rectangle 10"/>
+          <p:cNvSpPr/>
+          <p:nvPr/>
+        </p:nvSpPr>
+        <p:spPr>
+          <a:xfrm>
+            <a:off x="4572000" y="2011680"/>
+            <a:ext cx="4023360" cy="2706624"/>
+          </a:xfrm>
+          <a:prstGeom prst="rect">
+            <a:avLst/>
+          </a:prstGeom>
+          <a:solidFill>
+            <a:srgbClr val="F4F5FB"/>
+          </a:solidFill>
+          <a:ln>
+            <a:noFill/>
+          </a:ln>
+          <a:effectLst/>
+        </p:spPr>
+        <p:style>
+          <a:lnRef idx="1">
+            <a:schemeClr val="accent1"/>
+          </a:lnRef>
+          <a:fillRef idx="3">
+            <a:schemeClr val="accent1"/>
+          </a:fillRef>
+          <a:effectRef idx="2">
+            <a:schemeClr val="accent1"/>
+          </a:effectRef>
+          <a:fontRef idx="minor">
+            <a:schemeClr val="lt1"/>
+          </a:fontRef>
+        </p:style>
+        <p:txBody>
+          <a:bodyPr rtlCol="0" anchor="ctr"/>
+          <a:lstStyle/>
+          <a:p>
+            <a:pPr algn="ctr"/>
+          </a:p>
+        </p:txBody>
+      </p:sp>
+      <p:sp>
+        <p:nvSpPr>
+          <p:cNvPr id="12" name="Rectangle 11"/>
+          <p:cNvSpPr/>
+          <p:nvPr/>
+        </p:nvSpPr>
+        <p:spPr>
+          <a:xfrm>
+            <a:off x="4572000" y="2011680"/>
+            <a:ext cx="41148" cy="2706624"/>
+          </a:xfrm>
+          <a:prstGeom prst="rect">
+            <a:avLst/>
+          </a:prstGeom>
+          <a:solidFill>
+            <a:srgbClr val="403FE8"/>
+          </a:solidFill>
+          <a:ln>
+            <a:noFill/>
+          </a:ln>
+          <a:effectLst/>
+        </p:spPr>
+        <p:style>
+          <a:lnRef idx="1">
+            <a:schemeClr val="accent1"/>
+          </a:lnRef>
+          <a:fillRef idx="3">
+            <a:schemeClr val="accent1"/>
+          </a:fillRef>
+          <a:effectRef idx="2">
+            <a:schemeClr val="accent1"/>
+          </a:effectRef>
+          <a:fontRef idx="minor">
+            <a:schemeClr val="lt1"/>
+          </a:fontRef>
+        </p:style>
+        <p:txBody>
+          <a:bodyPr rtlCol="0" anchor="ctr"/>
+          <a:lstStyle/>
+          <a:p>
+            <a:pPr algn="ctr"/>
+          </a:p>
+        </p:txBody>
+      </p:sp>
+      <p:sp>
+        <p:nvSpPr>
+          <p:cNvPr id="13" name="TextBox 12"/>
+          <p:cNvSpPr txBox="1"/>
+          <p:nvPr/>
+        </p:nvSpPr>
+        <p:spPr>
+          <a:xfrm>
+            <a:off x="4773168" y="2139696"/>
+            <a:ext cx="3657600" cy="219456"/>
+          </a:xfrm>
+          <a:prstGeom prst="rect">
+            <a:avLst/>
+          </a:prstGeom>
+          <a:noFill/>
+        </p:spPr>
+        <p:txBody>
+          <a:bodyPr wrap="square" anchor="t" lIns="0" rIns="0" tIns="0" bIns="0">
+            <a:spAutoFit/>
+          </a:bodyPr>
+          <a:lstStyle/>
+          <a:p>
+            <a:pPr algn="l">
+              <a:spcAft>
+                <a:spcPts val="400"/>
+              </a:spcAft>
+            </a:pPr>
+            <a:r>
+              <a:rPr sz="850" b="1">
+                <a:solidFill>
+                  <a:srgbClr val="999999"/>
+                </a:solidFill>
+                <a:latin typeface="Arial"/>
+              </a:rPr>
+              <a:t>THE DECISION TEMPLATE</a:t>
+            </a:r>
+          </a:p>
+        </p:txBody>
+      </p:sp>
+      <p:sp>
+        <p:nvSpPr>
+          <p:cNvPr id="14" name="TextBox 13"/>
+          <p:cNvSpPr txBox="1"/>
+          <p:nvPr/>
+        </p:nvSpPr>
+        <p:spPr>
+          <a:xfrm>
+            <a:off x="4773168" y="2414016"/>
+            <a:ext cx="3657600" cy="2212848"/>
+          </a:xfrm>
+          <a:prstGeom prst="rect">
+            <a:avLst/>
+          </a:prstGeom>
+          <a:noFill/>
+        </p:spPr>
+        <p:txBody>
+          <a:bodyPr wrap="square" anchor="t" lIns="0" rIns="0" tIns="0" bIns="0">
+            <a:spAutoFit/>
+          </a:bodyPr>
+          <a:lstStyle/>
+          <a:p>
+            <a:pPr algn="l">
+              <a:lnSpc>
+                <a:spcPct val="114000"/>
+              </a:lnSpc>
+              <a:spcAft>
+                <a:spcPts val="0"/>
+              </a:spcAft>
+            </a:pPr>
+            <a:r>
+              <a:rPr sz="850" b="0">
+                <a:solidFill>
+                  <a:srgbClr val="434343"/>
+                </a:solidFill>
+                <a:latin typeface="Consolas"/>
+              </a:rPr>
+              <a:t># docs/best-practices/</a:t>
+            </a:r>
+          </a:p>
+          <a:p>
+            <a:pPr algn="l">
+              <a:lnSpc>
+                <a:spcPct val="114000"/>
+              </a:lnSpc>
+              <a:spcAft>
+                <a:spcPts val="0"/>
+              </a:spcAft>
+            </a:pPr>
+            <a:r>
+              <a:rPr sz="850" b="0">
+                <a:solidFill>
+                  <a:srgbClr val="434343"/>
+                </a:solidFill>
+                <a:latin typeface="Consolas"/>
+              </a:rPr>
+              <a:t>#   distributing-standards.md</a:t>
+            </a:r>
+          </a:p>
+          <a:p>
+            <a:pPr algn="l">
+              <a:lnSpc>
+                <a:spcPct val="114000"/>
+              </a:lnSpc>
+              <a:spcAft>
+                <a:spcPts val="0"/>
+              </a:spcAft>
+            </a:pPr>
+            <a:r>
+              <a:rPr sz="850" b="0">
+                <a:solidFill>
+                  <a:srgbClr val="434343"/>
+                </a:solidFill>
+                <a:latin typeface="Consolas"/>
+              </a:rPr>
+              <a:t/>
+            </a:r>
+          </a:p>
+          <a:p>
+            <a:pPr algn="l">
+              <a:lnSpc>
+                <a:spcPct val="114000"/>
+              </a:lnSpc>
+              <a:spcAft>
+                <a:spcPts val="0"/>
+              </a:spcAft>
+            </a:pPr>
+            <a:r>
+              <a:rPr sz="850" b="0">
+                <a:solidFill>
+                  <a:srgbClr val="434343"/>
+                </a:solidFill>
+                <a:latin typeface="Consolas"/>
+              </a:rPr>
+              <a:t># what "done" looks like:</a:t>
+            </a:r>
+          </a:p>
+          <a:p>
+            <a:pPr algn="l">
+              <a:lnSpc>
+                <a:spcPct val="114000"/>
+              </a:lnSpc>
+              <a:spcAft>
+                <a:spcPts val="0"/>
+              </a:spcAft>
+            </a:pPr>
+            <a:r>
+              <a:rPr sz="850" b="0">
+                <a:solidFill>
+                  <a:srgbClr val="434343"/>
+                </a:solidFill>
+                <a:latin typeface="Consolas"/>
+              </a:rPr>
+              <a:t>Owner:      &lt;a person, not a team&gt;</a:t>
+            </a:r>
+          </a:p>
+          <a:p>
+            <a:pPr algn="l">
+              <a:lnSpc>
+                <a:spcPct val="114000"/>
+              </a:lnSpc>
+              <a:spcAft>
+                <a:spcPts val="0"/>
+              </a:spcAft>
+            </a:pPr>
+            <a:r>
+              <a:rPr sz="850" b="0">
+                <a:solidFill>
+                  <a:srgbClr val="434343"/>
+                </a:solidFill>
+                <a:latin typeface="Consolas"/>
+              </a:rPr>
+              <a:t>Rung:       crawl | walk | run</a:t>
+            </a:r>
+          </a:p>
+          <a:p>
+            <a:pPr algn="l">
+              <a:lnSpc>
+                <a:spcPct val="114000"/>
+              </a:lnSpc>
+              <a:spcAft>
+                <a:spcPts val="0"/>
+              </a:spcAft>
+            </a:pPr>
+            <a:r>
+              <a:rPr sz="850" b="0">
+                <a:solidFill>
+                  <a:srgbClr val="434343"/>
+                </a:solidFill>
+                <a:latin typeface="Consolas"/>
+              </a:rPr>
+              <a:t>First move: &lt;the ~30-min step&gt;</a:t>
+            </a:r>
+          </a:p>
+          <a:p>
+            <a:pPr algn="l">
+              <a:lnSpc>
+                <a:spcPct val="114000"/>
+              </a:lnSpc>
+              <a:spcAft>
+                <a:spcPts val="0"/>
+              </a:spcAft>
+            </a:pPr>
+            <a:r>
+              <a:rPr sz="850" b="0">
+                <a:solidFill>
+                  <a:srgbClr val="434343"/>
+                </a:solidFill>
+                <a:latin typeface="Consolas"/>
+              </a:rPr>
+              <a:t>Decided:    YYYY-MM-DD</a:t>
+            </a:r>
+          </a:p>
+          <a:p>
+            <a:pPr algn="l">
+              <a:lnSpc>
+                <a:spcPct val="114000"/>
+              </a:lnSpc>
+              <a:spcAft>
+                <a:spcPts val="0"/>
+              </a:spcAft>
+            </a:pPr>
+            <a:r>
+              <a:rPr sz="850" b="0">
+                <a:solidFill>
+                  <a:srgbClr val="434343"/>
+                </a:solidFill>
+                <a:latin typeface="Consolas"/>
+              </a:rPr>
+              <a:t>Next review: YYYY-MM-DD</a:t>
+            </a:r>
+          </a:p>
+          <a:p>
+            <a:pPr algn="l">
+              <a:lnSpc>
+                <a:spcPct val="114000"/>
+              </a:lnSpc>
+              <a:spcAft>
+                <a:spcPts val="0"/>
+              </a:spcAft>
+            </a:pPr>
+            <a:r>
+              <a:rPr sz="850" b="0">
+                <a:solidFill>
+                  <a:srgbClr val="434343"/>
+                </a:solidFill>
+                <a:latin typeface="Consolas"/>
+              </a:rPr>
+              <a:t/>
+            </a:r>
+          </a:p>
+          <a:p>
+            <a:pPr algn="l">
+              <a:lnSpc>
+                <a:spcPct val="114000"/>
+              </a:lnSpc>
+              <a:spcAft>
+                <a:spcPts val="0"/>
+              </a:spcAft>
+            </a:pPr>
+            <a:r>
+              <a:rPr sz="850" b="0">
+                <a:solidFill>
+                  <a:srgbClr val="434343"/>
+                </a:solidFill>
+                <a:latin typeface="Consolas"/>
+              </a:rPr>
+              <a:t># ...plus: where standards live,</a:t>
+            </a:r>
+          </a:p>
+          <a:p>
+            <a:pPr algn="l">
+              <a:lnSpc>
+                <a:spcPct val="114000"/>
+              </a:lnSpc>
+              <a:spcAft>
+                <a:spcPts val="0"/>
+              </a:spcAft>
+            </a:pPr>
+            <a:r>
+              <a:rPr sz="850" b="0">
+                <a:solidFill>
+                  <a:srgbClr val="434343"/>
+                </a:solidFill>
+                <a:latin typeface="Consolas"/>
+              </a:rPr>
+              <a:t># how a project gets them, current-</a:t>
+            </a:r>
+          </a:p>
+          <a:p>
+            <a:pPr algn="l">
+              <a:lnSpc>
+                <a:spcPct val="114000"/>
+              </a:lnSpc>
+              <a:spcAft>
+                <a:spcPts val="0"/>
+              </a:spcAft>
+            </a:pPr>
+            <a:r>
+              <a:rPr sz="850" b="0">
+                <a:solidFill>
+                  <a:srgbClr val="434343"/>
+                </a:solidFill>
+                <a:latin typeface="Consolas"/>
+              </a:rPr>
+              <a:t># ness, enforced vs advisory,</a:t>
+            </a:r>
+          </a:p>
+          <a:p>
+            <a:pPr algn="l">
+              <a:lnSpc>
+                <a:spcPct val="114000"/>
+              </a:lnSpc>
+              <a:spcAft>
+                <a:spcPts val="0"/>
+              </a:spcAft>
+            </a:pPr>
+            <a:r>
+              <a:rPr sz="850" b="0">
+                <a:solidFill>
+                  <a:srgbClr val="434343"/>
+                </a:solidFill>
+                <a:latin typeface="Consolas"/>
+              </a:rPr>
+              <a:t># bypass, NOT-doing-yet</a:t>
             </a:r>
           </a:p>
         </p:txBody>
@@ -18403,913 +20034,6 @@
 </file>
 
 <file path=ppt/slides/slide26.xml><?xml version="1.0" encoding="utf-8"?>
-<p:sld xmlns:a="http://schemas.openxmlformats.org/drawingml/2006/main" xmlns:p="http://schemas.openxmlformats.org/presentationml/2006/main" xmlns:r="http://schemas.openxmlformats.org/officeDocument/2006/relationships">
-  <p:cSld>
-    <p:spTree>
-      <p:nvGrpSpPr>
-        <p:cNvPr id="1" name=""/>
-        <p:cNvGrpSpPr/>
-        <p:nvPr/>
-      </p:nvGrpSpPr>
-      <p:grpSpPr/>
-      <p:sp>
-        <p:nvSpPr>
-          <p:cNvPr id="2" name="Rectangle 1"/>
-          <p:cNvSpPr/>
-          <p:nvPr/>
-        </p:nvSpPr>
-        <p:spPr>
-          <a:xfrm>
-            <a:off x="0" y="0"/>
-            <a:ext cx="9144000" cy="5143500"/>
-          </a:xfrm>
-          <a:prstGeom prst="rect">
-            <a:avLst/>
-          </a:prstGeom>
-          <a:solidFill>
-            <a:srgbClr val="FFFFFF"/>
-          </a:solidFill>
-          <a:ln>
-            <a:noFill/>
-          </a:ln>
-          <a:effectLst/>
-        </p:spPr>
-        <p:style>
-          <a:lnRef idx="1">
-            <a:schemeClr val="accent1"/>
-          </a:lnRef>
-          <a:fillRef idx="3">
-            <a:schemeClr val="accent1"/>
-          </a:fillRef>
-          <a:effectRef idx="2">
-            <a:schemeClr val="accent1"/>
-          </a:effectRef>
-          <a:fontRef idx="minor">
-            <a:schemeClr val="lt1"/>
-          </a:fontRef>
-        </p:style>
-        <p:txBody>
-          <a:bodyPr rtlCol="0" anchor="ctr"/>
-          <a:lstStyle/>
-          <a:p>
-            <a:pPr algn="ctr"/>
-          </a:p>
-        </p:txBody>
-      </p:sp>
-      <p:pic>
-        <p:nvPicPr>
-          <p:cNvPr id="3" name="Picture 2" descr="image3.png"/>
-          <p:cNvPicPr>
-            <a:picLocks noChangeAspect="1"/>
-          </p:cNvPicPr>
-          <p:nvPr/>
-        </p:nvPicPr>
-        <p:blipFill>
-          <a:blip r:embed="rId2"/>
-          <a:stretch>
-            <a:fillRect/>
-          </a:stretch>
-        </p:blipFill>
-        <p:spPr>
-          <a:xfrm>
-            <a:off x="8229600" y="411480"/>
-            <a:ext cx="713232" cy="384048"/>
-          </a:xfrm>
-          <a:prstGeom prst="rect">
-            <a:avLst/>
-          </a:prstGeom>
-        </p:spPr>
-      </p:pic>
-      <p:sp>
-        <p:nvSpPr>
-          <p:cNvPr id="4" name="Rectangle 3"/>
-          <p:cNvSpPr/>
-          <p:nvPr/>
-        </p:nvSpPr>
-        <p:spPr>
-          <a:xfrm>
-            <a:off x="548640" y="457200"/>
-            <a:ext cx="237744" cy="54864"/>
-          </a:xfrm>
-          <a:prstGeom prst="rect">
-            <a:avLst/>
-          </a:prstGeom>
-          <a:solidFill>
-            <a:srgbClr val="403FE8"/>
-          </a:solidFill>
-          <a:ln>
-            <a:noFill/>
-          </a:ln>
-          <a:effectLst/>
-        </p:spPr>
-        <p:style>
-          <a:lnRef idx="1">
-            <a:schemeClr val="accent1"/>
-          </a:lnRef>
-          <a:fillRef idx="3">
-            <a:schemeClr val="accent1"/>
-          </a:fillRef>
-          <a:effectRef idx="2">
-            <a:schemeClr val="accent1"/>
-          </a:effectRef>
-          <a:fontRef idx="minor">
-            <a:schemeClr val="lt1"/>
-          </a:fontRef>
-        </p:style>
-        <p:txBody>
-          <a:bodyPr rtlCol="0" anchor="ctr"/>
-          <a:lstStyle/>
-          <a:p>
-            <a:pPr algn="ctr"/>
-          </a:p>
-        </p:txBody>
-      </p:sp>
-      <p:sp>
-        <p:nvSpPr>
-          <p:cNvPr id="5" name="TextBox 4"/>
-          <p:cNvSpPr txBox="1"/>
-          <p:nvPr/>
-        </p:nvSpPr>
-        <p:spPr>
-          <a:xfrm>
-            <a:off x="868680" y="402336"/>
-            <a:ext cx="7132320" cy="274320"/>
-          </a:xfrm>
-          <a:prstGeom prst="rect">
-            <a:avLst/>
-          </a:prstGeom>
-          <a:noFill/>
-        </p:spPr>
-        <p:txBody>
-          <a:bodyPr wrap="square" anchor="t" lIns="0" rIns="0" tIns="0" bIns="0">
-            <a:spAutoFit/>
-          </a:bodyPr>
-          <a:lstStyle/>
-          <a:p>
-            <a:pPr algn="l">
-              <a:spcAft>
-                <a:spcPts val="400"/>
-              </a:spcAft>
-            </a:pPr>
-            <a:r>
-              <a:rPr sz="950" b="1">
-                <a:solidFill>
-                  <a:srgbClr val="403FE8"/>
-                </a:solidFill>
-                <a:latin typeface="Arial"/>
-              </a:rPr>
-              <a:t>HAND-OFF</a:t>
-            </a:r>
-          </a:p>
-        </p:txBody>
-      </p:sp>
-      <p:sp>
-        <p:nvSpPr>
-          <p:cNvPr id="6" name="TextBox 5"/>
-          <p:cNvSpPr txBox="1"/>
-          <p:nvPr/>
-        </p:nvSpPr>
-        <p:spPr>
-          <a:xfrm>
-            <a:off x="548640" y="658368"/>
-            <a:ext cx="7589520" cy="566928"/>
-          </a:xfrm>
-          <a:prstGeom prst="rect">
-            <a:avLst/>
-          </a:prstGeom>
-          <a:noFill/>
-        </p:spPr>
-        <p:txBody>
-          <a:bodyPr wrap="square" anchor="t" lIns="0" rIns="0" tIns="0" bIns="0">
-            <a:spAutoFit/>
-          </a:bodyPr>
-          <a:lstStyle/>
-          <a:p>
-            <a:pPr algn="l">
-              <a:spcAft>
-                <a:spcPts val="400"/>
-              </a:spcAft>
-            </a:pPr>
-            <a:r>
-              <a:rPr sz="2500" b="1">
-                <a:solidFill>
-                  <a:srgbClr val="13135E"/>
-                </a:solidFill>
-                <a:latin typeface="Arial"/>
-              </a:rPr>
-              <a:t>The sixth artifact, and it is yours</a:t>
-            </a:r>
-          </a:p>
-        </p:txBody>
-      </p:sp>
-      <p:sp>
-        <p:nvSpPr>
-          <p:cNvPr id="7" name="TextBox 6"/>
-          <p:cNvSpPr txBox="1"/>
-          <p:nvPr/>
-        </p:nvSpPr>
-        <p:spPr>
-          <a:xfrm>
-            <a:off x="548640" y="1316736"/>
-            <a:ext cx="7863840" cy="566928"/>
-          </a:xfrm>
-          <a:prstGeom prst="rect">
-            <a:avLst/>
-          </a:prstGeom>
-          <a:noFill/>
-        </p:spPr>
-        <p:txBody>
-          <a:bodyPr wrap="square" anchor="t" lIns="0" rIns="0" tIns="0" bIns="0">
-            <a:spAutoFit/>
-          </a:bodyPr>
-          <a:lstStyle/>
-          <a:p>
-            <a:pPr algn="l">
-              <a:lnSpc>
-                <a:spcPct val="125000"/>
-              </a:lnSpc>
-              <a:spcAft>
-                <a:spcPts val="400"/>
-              </a:spcAft>
-            </a:pPr>
-            <a:r>
-              <a:rPr sz="1200" b="0">
-                <a:solidFill>
-                  <a:srgbClr val="434343"/>
-                </a:solidFill>
-                <a:latin typeface="Arial"/>
-              </a:rPr>
-              <a:t>Five governance artifacts live inside a repo — CLAUDE.md, ADR, NFR, recipe, rules file. The sixth is the only Collective-layer one — how a standard reaches every repo — and we are deliberately not handing you the answer, because choosing the mechanism, the rung, and the owner IS the roll-up.</a:t>
-            </a:r>
-          </a:p>
-        </p:txBody>
-      </p:sp>
-      <p:sp>
-        <p:nvSpPr>
-          <p:cNvPr id="8" name="TextBox 7"/>
-          <p:cNvSpPr txBox="1"/>
-          <p:nvPr/>
-        </p:nvSpPr>
-        <p:spPr>
-          <a:xfrm>
-            <a:off x="548640" y="4846320"/>
-            <a:ext cx="7315200" cy="219456"/>
-          </a:xfrm>
-          <a:prstGeom prst="rect">
-            <a:avLst/>
-          </a:prstGeom>
-          <a:noFill/>
-        </p:spPr>
-        <p:txBody>
-          <a:bodyPr wrap="square" anchor="t" lIns="0" rIns="0" tIns="0" bIns="0">
-            <a:spAutoFit/>
-          </a:bodyPr>
-          <a:lstStyle/>
-          <a:p>
-            <a:pPr algn="l">
-              <a:spcAft>
-                <a:spcPts val="400"/>
-              </a:spcAft>
-            </a:pPr>
-            <a:r>
-              <a:rPr sz="800" b="0">
-                <a:solidFill>
-                  <a:srgbClr val="999999"/>
-                </a:solidFill>
-                <a:latin typeface="Arial"/>
-              </a:rPr>
-              <a:t>FSL AI Training · Lab 2.b — Guardrails, and Making Standards Travel</a:t>
-            </a:r>
-          </a:p>
-        </p:txBody>
-      </p:sp>
-      <p:sp>
-        <p:nvSpPr>
-          <p:cNvPr id="9" name="TextBox 8"/>
-          <p:cNvSpPr txBox="1"/>
-          <p:nvPr/>
-        </p:nvSpPr>
-        <p:spPr>
-          <a:xfrm>
-            <a:off x="548640" y="2011680"/>
-            <a:ext cx="3703320" cy="274320"/>
-          </a:xfrm>
-          <a:prstGeom prst="rect">
-            <a:avLst/>
-          </a:prstGeom>
-          <a:noFill/>
-        </p:spPr>
-        <p:txBody>
-          <a:bodyPr wrap="square" anchor="t" lIns="0" rIns="0" tIns="0" bIns="0">
-            <a:spAutoFit/>
-          </a:bodyPr>
-          <a:lstStyle/>
-          <a:p>
-            <a:pPr algn="l">
-              <a:spcAft>
-                <a:spcPts val="400"/>
-              </a:spcAft>
-            </a:pPr>
-            <a:r>
-              <a:rPr sz="950" b="1">
-                <a:solidFill>
-                  <a:srgbClr val="403FE8"/>
-                </a:solidFill>
-                <a:latin typeface="Arial"/>
-              </a:rPr>
-              <a:t>WHAT THE GUIDE GIVES YOU</a:t>
-            </a:r>
-          </a:p>
-        </p:txBody>
-      </p:sp>
-      <p:sp>
-        <p:nvSpPr>
-          <p:cNvPr id="10" name="TextBox 9"/>
-          <p:cNvSpPr txBox="1"/>
-          <p:nvPr/>
-        </p:nvSpPr>
-        <p:spPr>
-          <a:xfrm>
-            <a:off x="548640" y="2377440"/>
-            <a:ext cx="3703320" cy="2249424"/>
-          </a:xfrm>
-          <a:prstGeom prst="rect">
-            <a:avLst/>
-          </a:prstGeom>
-          <a:noFill/>
-        </p:spPr>
-        <p:txBody>
-          <a:bodyPr wrap="square" anchor="t" lIns="0" rIns="0" tIns="0" bIns="0">
-            <a:spAutoFit/>
-          </a:bodyPr>
-          <a:lstStyle/>
-          <a:p>
-            <a:pPr algn="l">
-              <a:lnSpc>
-                <a:spcPct val="120000"/>
-              </a:lnSpc>
-              <a:spcAft>
-                <a:spcPts val="800"/>
-              </a:spcAft>
-            </a:pPr>
-            <a:r>
-              <a:rPr sz="1100" b="1">
-                <a:solidFill>
-                  <a:srgbClr val="A9B7F7"/>
-                </a:solidFill>
-                <a:latin typeface="Arial"/>
-              </a:rPr>
-              <a:t>•  </a:t>
-            </a:r>
-            <a:r>
-              <a:rPr sz="1100" b="0">
-                <a:solidFill>
-                  <a:srgbClr val="434343"/>
-                </a:solidFill>
-                <a:latin typeface="Arial"/>
-              </a:rPr>
-              <a:t>Four words that carry it: standard, drift, pin, enforce.</a:t>
-            </a:r>
-          </a:p>
-          <a:p>
-            <a:pPr algn="l">
-              <a:lnSpc>
-                <a:spcPct val="120000"/>
-              </a:lnSpc>
-              <a:spcAft>
-                <a:spcPts val="800"/>
-              </a:spcAft>
-            </a:pPr>
-            <a:r>
-              <a:rPr sz="1100" b="1">
-                <a:solidFill>
-                  <a:srgbClr val="A9B7F7"/>
-                </a:solidFill>
-                <a:latin typeface="Arial"/>
-              </a:rPr>
-              <a:t>•  </a:t>
-            </a:r>
-            <a:r>
-              <a:rPr sz="1100" b="0">
-                <a:solidFill>
-                  <a:srgbClr val="434343"/>
-                </a:solidFill>
-                <a:latin typeface="Arial"/>
-              </a:rPr>
-              <a:t>CRAWL: one repo + two CLAUDE.md lines — a 4-step checklist, ~30 min.</a:t>
-            </a:r>
-          </a:p>
-          <a:p>
-            <a:pPr algn="l">
-              <a:lnSpc>
-                <a:spcPct val="120000"/>
-              </a:lnSpc>
-              <a:spcAft>
-                <a:spcPts val="800"/>
-              </a:spcAft>
-            </a:pPr>
-            <a:r>
-              <a:rPr sz="1100" b="1">
-                <a:solidFill>
-                  <a:srgbClr val="A9B7F7"/>
-                </a:solidFill>
-                <a:latin typeface="Arial"/>
-              </a:rPr>
-              <a:t>•  </a:t>
-            </a:r>
-            <a:r>
-              <a:rPr sz="1100" b="0">
-                <a:solidFill>
-                  <a:srgbClr val="434343"/>
-                </a:solidFill>
-                <a:latin typeface="Arial"/>
-              </a:rPr>
-              <a:t>WALK: queryable (3 tool options, traps named) + pinned copies.</a:t>
-            </a:r>
-          </a:p>
-          <a:p>
-            <a:pPr algn="l">
-              <a:lnSpc>
-                <a:spcPct val="120000"/>
-              </a:lnSpc>
-              <a:spcAft>
-                <a:spcPts val="800"/>
-              </a:spcAft>
-            </a:pPr>
-            <a:r>
-              <a:rPr sz="1100" b="1">
-                <a:solidFill>
-                  <a:srgbClr val="A9B7F7"/>
-                </a:solidFill>
-                <a:latin typeface="Arial"/>
-              </a:rPr>
-              <a:t>•  </a:t>
-            </a:r>
-            <a:r>
-              <a:rPr sz="1100" b="0">
-                <a:solidFill>
-                  <a:srgbClr val="434343"/>
-                </a:solidFill>
-                <a:latin typeface="Arial"/>
-              </a:rPr>
-              <a:t>RUN: gates, served docs, a versioned plugin — each needs an owner.</a:t>
-            </a:r>
-          </a:p>
-          <a:p>
-            <a:pPr algn="l">
-              <a:lnSpc>
-                <a:spcPct val="120000"/>
-              </a:lnSpc>
-              <a:spcAft>
-                <a:spcPts val="800"/>
-              </a:spcAft>
-            </a:pPr>
-            <a:r>
-              <a:rPr sz="1100" b="1">
-                <a:solidFill>
-                  <a:srgbClr val="A9B7F7"/>
-                </a:solidFill>
-                <a:latin typeface="Arial"/>
-              </a:rPr>
-              <a:t>•  </a:t>
-            </a:r>
-            <a:r>
-              <a:rPr sz="1100" b="0">
-                <a:solidFill>
-                  <a:srgbClr val="434343"/>
-                </a:solidFill>
-                <a:latin typeface="Arial"/>
-              </a:rPr>
-              <a:t>And a fill-in template for recording what you chose.</a:t>
-            </a:r>
-          </a:p>
-        </p:txBody>
-      </p:sp>
-      <p:sp>
-        <p:nvSpPr>
-          <p:cNvPr id="11" name="Rectangle 10"/>
-          <p:cNvSpPr/>
-          <p:nvPr/>
-        </p:nvSpPr>
-        <p:spPr>
-          <a:xfrm>
-            <a:off x="4572000" y="2011680"/>
-            <a:ext cx="4023360" cy="2706624"/>
-          </a:xfrm>
-          <a:prstGeom prst="rect">
-            <a:avLst/>
-          </a:prstGeom>
-          <a:solidFill>
-            <a:srgbClr val="F4F5FB"/>
-          </a:solidFill>
-          <a:ln>
-            <a:noFill/>
-          </a:ln>
-          <a:effectLst/>
-        </p:spPr>
-        <p:style>
-          <a:lnRef idx="1">
-            <a:schemeClr val="accent1"/>
-          </a:lnRef>
-          <a:fillRef idx="3">
-            <a:schemeClr val="accent1"/>
-          </a:fillRef>
-          <a:effectRef idx="2">
-            <a:schemeClr val="accent1"/>
-          </a:effectRef>
-          <a:fontRef idx="minor">
-            <a:schemeClr val="lt1"/>
-          </a:fontRef>
-        </p:style>
-        <p:txBody>
-          <a:bodyPr rtlCol="0" anchor="ctr"/>
-          <a:lstStyle/>
-          <a:p>
-            <a:pPr algn="ctr"/>
-          </a:p>
-        </p:txBody>
-      </p:sp>
-      <p:sp>
-        <p:nvSpPr>
-          <p:cNvPr id="12" name="Rectangle 11"/>
-          <p:cNvSpPr/>
-          <p:nvPr/>
-        </p:nvSpPr>
-        <p:spPr>
-          <a:xfrm>
-            <a:off x="4572000" y="2011680"/>
-            <a:ext cx="41148" cy="2706624"/>
-          </a:xfrm>
-          <a:prstGeom prst="rect">
-            <a:avLst/>
-          </a:prstGeom>
-          <a:solidFill>
-            <a:srgbClr val="403FE8"/>
-          </a:solidFill>
-          <a:ln>
-            <a:noFill/>
-          </a:ln>
-          <a:effectLst/>
-        </p:spPr>
-        <p:style>
-          <a:lnRef idx="1">
-            <a:schemeClr val="accent1"/>
-          </a:lnRef>
-          <a:fillRef idx="3">
-            <a:schemeClr val="accent1"/>
-          </a:fillRef>
-          <a:effectRef idx="2">
-            <a:schemeClr val="accent1"/>
-          </a:effectRef>
-          <a:fontRef idx="minor">
-            <a:schemeClr val="lt1"/>
-          </a:fontRef>
-        </p:style>
-        <p:txBody>
-          <a:bodyPr rtlCol="0" anchor="ctr"/>
-          <a:lstStyle/>
-          <a:p>
-            <a:pPr algn="ctr"/>
-          </a:p>
-        </p:txBody>
-      </p:sp>
-      <p:sp>
-        <p:nvSpPr>
-          <p:cNvPr id="13" name="TextBox 12"/>
-          <p:cNvSpPr txBox="1"/>
-          <p:nvPr/>
-        </p:nvSpPr>
-        <p:spPr>
-          <a:xfrm>
-            <a:off x="4773168" y="2139696"/>
-            <a:ext cx="3657600" cy="219456"/>
-          </a:xfrm>
-          <a:prstGeom prst="rect">
-            <a:avLst/>
-          </a:prstGeom>
-          <a:noFill/>
-        </p:spPr>
-        <p:txBody>
-          <a:bodyPr wrap="square" anchor="t" lIns="0" rIns="0" tIns="0" bIns="0">
-            <a:spAutoFit/>
-          </a:bodyPr>
-          <a:lstStyle/>
-          <a:p>
-            <a:pPr algn="l">
-              <a:spcAft>
-                <a:spcPts val="400"/>
-              </a:spcAft>
-            </a:pPr>
-            <a:r>
-              <a:rPr sz="850" b="1">
-                <a:solidFill>
-                  <a:srgbClr val="999999"/>
-                </a:solidFill>
-                <a:latin typeface="Arial"/>
-              </a:rPr>
-              <a:t>THE DECISION TEMPLATE</a:t>
-            </a:r>
-          </a:p>
-        </p:txBody>
-      </p:sp>
-      <p:sp>
-        <p:nvSpPr>
-          <p:cNvPr id="14" name="TextBox 13"/>
-          <p:cNvSpPr txBox="1"/>
-          <p:nvPr/>
-        </p:nvSpPr>
-        <p:spPr>
-          <a:xfrm>
-            <a:off x="4773168" y="2414016"/>
-            <a:ext cx="3657600" cy="2212848"/>
-          </a:xfrm>
-          <a:prstGeom prst="rect">
-            <a:avLst/>
-          </a:prstGeom>
-          <a:noFill/>
-        </p:spPr>
-        <p:txBody>
-          <a:bodyPr wrap="square" anchor="t" lIns="0" rIns="0" tIns="0" bIns="0">
-            <a:spAutoFit/>
-          </a:bodyPr>
-          <a:lstStyle/>
-          <a:p>
-            <a:pPr algn="l">
-              <a:lnSpc>
-                <a:spcPct val="114000"/>
-              </a:lnSpc>
-              <a:spcAft>
-                <a:spcPts val="0"/>
-              </a:spcAft>
-            </a:pPr>
-            <a:r>
-              <a:rPr sz="850" b="0">
-                <a:solidFill>
-                  <a:srgbClr val="434343"/>
-                </a:solidFill>
-                <a:latin typeface="Consolas"/>
-              </a:rPr>
-              <a:t># docs/best-practices/</a:t>
-            </a:r>
-          </a:p>
-          <a:p>
-            <a:pPr algn="l">
-              <a:lnSpc>
-                <a:spcPct val="114000"/>
-              </a:lnSpc>
-              <a:spcAft>
-                <a:spcPts val="0"/>
-              </a:spcAft>
-            </a:pPr>
-            <a:r>
-              <a:rPr sz="850" b="0">
-                <a:solidFill>
-                  <a:srgbClr val="434343"/>
-                </a:solidFill>
-                <a:latin typeface="Consolas"/>
-              </a:rPr>
-              <a:t>#   distributing-standards.md</a:t>
-            </a:r>
-          </a:p>
-          <a:p>
-            <a:pPr algn="l">
-              <a:lnSpc>
-                <a:spcPct val="114000"/>
-              </a:lnSpc>
-              <a:spcAft>
-                <a:spcPts val="0"/>
-              </a:spcAft>
-            </a:pPr>
-            <a:r>
-              <a:rPr sz="850" b="0">
-                <a:solidFill>
-                  <a:srgbClr val="434343"/>
-                </a:solidFill>
-                <a:latin typeface="Consolas"/>
-              </a:rPr>
-              <a:t/>
-            </a:r>
-          </a:p>
-          <a:p>
-            <a:pPr algn="l">
-              <a:lnSpc>
-                <a:spcPct val="114000"/>
-              </a:lnSpc>
-              <a:spcAft>
-                <a:spcPts val="0"/>
-              </a:spcAft>
-            </a:pPr>
-            <a:r>
-              <a:rPr sz="850" b="0">
-                <a:solidFill>
-                  <a:srgbClr val="434343"/>
-                </a:solidFill>
-                <a:latin typeface="Consolas"/>
-              </a:rPr>
-              <a:t># what "done" looks like:</a:t>
-            </a:r>
-          </a:p>
-          <a:p>
-            <a:pPr algn="l">
-              <a:lnSpc>
-                <a:spcPct val="114000"/>
-              </a:lnSpc>
-              <a:spcAft>
-                <a:spcPts val="0"/>
-              </a:spcAft>
-            </a:pPr>
-            <a:r>
-              <a:rPr sz="850" b="0">
-                <a:solidFill>
-                  <a:srgbClr val="434343"/>
-                </a:solidFill>
-                <a:latin typeface="Consolas"/>
-              </a:rPr>
-              <a:t>Owner:      &lt;a person, not a team&gt;</a:t>
-            </a:r>
-          </a:p>
-          <a:p>
-            <a:pPr algn="l">
-              <a:lnSpc>
-                <a:spcPct val="114000"/>
-              </a:lnSpc>
-              <a:spcAft>
-                <a:spcPts val="0"/>
-              </a:spcAft>
-            </a:pPr>
-            <a:r>
-              <a:rPr sz="850" b="0">
-                <a:solidFill>
-                  <a:srgbClr val="434343"/>
-                </a:solidFill>
-                <a:latin typeface="Consolas"/>
-              </a:rPr>
-              <a:t>Rung:       crawl | walk | run</a:t>
-            </a:r>
-          </a:p>
-          <a:p>
-            <a:pPr algn="l">
-              <a:lnSpc>
-                <a:spcPct val="114000"/>
-              </a:lnSpc>
-              <a:spcAft>
-                <a:spcPts val="0"/>
-              </a:spcAft>
-            </a:pPr>
-            <a:r>
-              <a:rPr sz="850" b="0">
-                <a:solidFill>
-                  <a:srgbClr val="434343"/>
-                </a:solidFill>
-                <a:latin typeface="Consolas"/>
-              </a:rPr>
-              <a:t>First move: &lt;the ~30-min step&gt;</a:t>
-            </a:r>
-          </a:p>
-          <a:p>
-            <a:pPr algn="l">
-              <a:lnSpc>
-                <a:spcPct val="114000"/>
-              </a:lnSpc>
-              <a:spcAft>
-                <a:spcPts val="0"/>
-              </a:spcAft>
-            </a:pPr>
-            <a:r>
-              <a:rPr sz="850" b="0">
-                <a:solidFill>
-                  <a:srgbClr val="434343"/>
-                </a:solidFill>
-                <a:latin typeface="Consolas"/>
-              </a:rPr>
-              <a:t>Decided:    YYYY-MM-DD</a:t>
-            </a:r>
-          </a:p>
-          <a:p>
-            <a:pPr algn="l">
-              <a:lnSpc>
-                <a:spcPct val="114000"/>
-              </a:lnSpc>
-              <a:spcAft>
-                <a:spcPts val="0"/>
-              </a:spcAft>
-            </a:pPr>
-            <a:r>
-              <a:rPr sz="850" b="0">
-                <a:solidFill>
-                  <a:srgbClr val="434343"/>
-                </a:solidFill>
-                <a:latin typeface="Consolas"/>
-              </a:rPr>
-              <a:t>Next review: YYYY-MM-DD</a:t>
-            </a:r>
-          </a:p>
-          <a:p>
-            <a:pPr algn="l">
-              <a:lnSpc>
-                <a:spcPct val="114000"/>
-              </a:lnSpc>
-              <a:spcAft>
-                <a:spcPts val="0"/>
-              </a:spcAft>
-            </a:pPr>
-            <a:r>
-              <a:rPr sz="850" b="0">
-                <a:solidFill>
-                  <a:srgbClr val="434343"/>
-                </a:solidFill>
-                <a:latin typeface="Consolas"/>
-              </a:rPr>
-              <a:t/>
-            </a:r>
-          </a:p>
-          <a:p>
-            <a:pPr algn="l">
-              <a:lnSpc>
-                <a:spcPct val="114000"/>
-              </a:lnSpc>
-              <a:spcAft>
-                <a:spcPts val="0"/>
-              </a:spcAft>
-            </a:pPr>
-            <a:r>
-              <a:rPr sz="850" b="0">
-                <a:solidFill>
-                  <a:srgbClr val="434343"/>
-                </a:solidFill>
-                <a:latin typeface="Consolas"/>
-              </a:rPr>
-              <a:t># ...plus: where standards live,</a:t>
-            </a:r>
-          </a:p>
-          <a:p>
-            <a:pPr algn="l">
-              <a:lnSpc>
-                <a:spcPct val="114000"/>
-              </a:lnSpc>
-              <a:spcAft>
-                <a:spcPts val="0"/>
-              </a:spcAft>
-            </a:pPr>
-            <a:r>
-              <a:rPr sz="850" b="0">
-                <a:solidFill>
-                  <a:srgbClr val="434343"/>
-                </a:solidFill>
-                <a:latin typeface="Consolas"/>
-              </a:rPr>
-              <a:t># how a project gets them, current-</a:t>
-            </a:r>
-          </a:p>
-          <a:p>
-            <a:pPr algn="l">
-              <a:lnSpc>
-                <a:spcPct val="114000"/>
-              </a:lnSpc>
-              <a:spcAft>
-                <a:spcPts val="0"/>
-              </a:spcAft>
-            </a:pPr>
-            <a:r>
-              <a:rPr sz="850" b="0">
-                <a:solidFill>
-                  <a:srgbClr val="434343"/>
-                </a:solidFill>
-                <a:latin typeface="Consolas"/>
-              </a:rPr>
-              <a:t># ness, enforced vs advisory,</a:t>
-            </a:r>
-          </a:p>
-          <a:p>
-            <a:pPr algn="l">
-              <a:lnSpc>
-                <a:spcPct val="114000"/>
-              </a:lnSpc>
-              <a:spcAft>
-                <a:spcPts val="0"/>
-              </a:spcAft>
-            </a:pPr>
-            <a:r>
-              <a:rPr sz="850" b="0">
-                <a:solidFill>
-                  <a:srgbClr val="434343"/>
-                </a:solidFill>
-                <a:latin typeface="Consolas"/>
-              </a:rPr>
-              <a:t># bypass, NOT-doing-yet</a:t>
-            </a:r>
-          </a:p>
-        </p:txBody>
-      </p:sp>
-    </p:spTree>
-  </p:cSld>
-  <p:clrMapOvr>
-    <a:masterClrMapping/>
-  </p:clrMapOvr>
-</p:sld>
-</file>
-
-<file path=ppt/slides/slide27.xml><?xml version="1.0" encoding="utf-8"?>
 <p:sld xmlns:a="http://schemas.openxmlformats.org/drawingml/2006/main" xmlns:p="http://schemas.openxmlformats.org/presentationml/2006/main" xmlns:r="http://schemas.openxmlformats.org/officeDocument/2006/relationships">
   <p:cSld>
     <p:spTree>
